--- a/docs/Review_2_Presentation.pptx
+++ b/docs/Review_2_Presentation.pptx
@@ -127,7 +127,7 @@
   <p:extLst>
     <p:ext uri="{521415D9-36F7-43E2-AB2F-B90AF26B5E84}">
       <p14:sectionLst xmlns:p14="http://schemas.microsoft.com/office/powerpoint/2010/main">
-        <p14:section name="Aditya: introduction and Stage 1" id="{2b038608-898f-f992-3845-1275a4e7c9e5}">
+        <p14:section name="Aditya: introduction and Stage 1" id="{2f6c343a-553e-e520-631c-906ed09bb9dd}">
           <p14:sldIdLst>
             <p14:sldId id="256"/>
             <p14:sldId id="257"/>
@@ -136,28 +136,28 @@
             <p14:sldId id="260"/>
           </p14:sldIdLst>
         </p14:section>
-        <p14:section name="Saketh: text mining" id="{0e6bfca8-b559-9ae9-ad36-a21ca61c6137}">
+        <p14:section name="Saketh: text mining" id="{0cfe82dc-9696-f5a2-ef2d-1d06f4d0cb3f}">
           <p14:sldIdLst>
             <p14:sldId id="261"/>
             <p14:sldId id="262"/>
             <p14:sldId id="263"/>
           </p14:sldIdLst>
         </p14:section>
-        <p14:section name="Akshay: forecasting" id="{23000d6f-ba45-27fd-8527-f63cb305baaa}">
+        <p14:section name="Akshay: forecasting" id="{6425d9fa-a9cc-1bcc-0966-4fe8f7f86f03}">
           <p14:sldIdLst>
             <p14:sldId id="264"/>
             <p14:sldId id="265"/>
             <p14:sldId id="266"/>
           </p14:sldIdLst>
         </p14:section>
-        <p14:section name="Harshini: forecast evaluation" id="{e811d453-b031-39e6-a42c-b34b680e5015}">
+        <p14:section name="Harshini: forecast evaluation" id="{b6c0fffa-366f-f963-ad9a-b6d8a9fd929f}">
           <p14:sldIdLst>
             <p14:sldId id="267"/>
             <p14:sldId id="268"/>
             <p14:sldId id="269"/>
           </p14:sldIdLst>
         </p14:section>
-        <p14:section name="Kanishka: update impact and insights" id="{9bf2bed5-18a2-58e7-deec-4ecbcd882253}">
+        <p14:section name="Kanishka: update impact and insights" id="{b700684d-cf0e-5fd8-2b5d-2f65cf772a70}">
           <p14:sldIdLst>
             <p14:sldId id="270"/>
             <p14:sldId id="271"/>
@@ -166,7 +166,7 @@
             <p14:sldId id="274"/>
           </p14:sldIdLst>
         </p14:section>
-        <p14:section name="Aditya: tracking and close" id="{affec2aa-8d31-4094-d2b7-62361fc29d56}">
+        <p14:section name="Aditya: tracking and close" id="{de321740-0017-b109-c642-a6b4d88e4895}">
           <p14:sldIdLst>
             <p14:sldId id="275"/>
             <p14:sldId id="276"/>
@@ -2293,7 +2293,7 @@
           <a:p>
             <a:r>
               <a:rPr lang="en-US" dirty="0"/>
-              <a:t>[Harshini, about 40 s] A day is flagged as unusual when its count falls outside the 95 percent interval. Because the backtest windows overlap, the 201 flagged forecasts are 83 distinct days, most of them above the forecast. The largest was Swiggy on 24 July: 469 complaints against 157 expected. Flipkart has the most alerts. An alert means an unexpected count, not a proven cause. The food apps are the most predictable because of their weekly rhythm. Shopping apps with level shifts are the hardest, and Google Pay and Paytm should be used with care. Next is the check-a-review page I built.</a:t>
+              <a:t>[Harshini, about 40 s] A day is flagged as unusual when its count falls outside the 95 percent interval. Because the backtest windows overlap, the 201 flagged forecasts are 83 distinct days, most of them above the forecast. The largest was Swiggy on 24 July: 469 complaints against 157 expected. Flipkart has the most alerts. An alert means an unexpected count, not a proven cause. Food apps with a steady weekly rhythm, like Zomato and Blinkit, are the most predictable. Shopping apps with level shifts are the hardest, and Google Pay and Paytm should be used with care. Next is the check-a-review page I built.</a:t>
             </a:r>
             <a:endParaRPr lang="en-US" dirty="0"/>
           </a:p>

--- a/docs/Review_2_Presentation.pptx
+++ b/docs/Review_2_Presentation.pptx
@@ -26,9 +26,10 @@
     <p:sldId id="274" r:id="rId20"/>
     <p:sldId id="275" r:id="rId21"/>
     <p:sldId id="276" r:id="rId22"/>
+    <p:sldId id="277" r:id="rId23"/>
   </p:sldIdLst>
   <p:notesMasterIdLst>
-    <p:notesMasterId r:id="rId23"/>
+    <p:notesMasterId r:id="rId24"/>
   </p:notesMasterIdLst>
   <p:sldSz cx="12192000" cy="6858000"/>
   <p:notesSz cx="6858000" cy="12192000"/>
@@ -127,7 +128,7 @@
   <p:extLst>
     <p:ext uri="{521415D9-36F7-43E2-AB2F-B90AF26B5E84}">
       <p14:sectionLst xmlns:p14="http://schemas.microsoft.com/office/powerpoint/2010/main">
-        <p14:section name="Aditya: introduction and Stage 1" id="{2f6c343a-553e-e520-631c-906ed09bb9dd}">
+        <p14:section name="Aditya: introduction and Stage 1" id="{a006aa79-b06c-894f-e076-3125ab3e5882}">
           <p14:sldIdLst>
             <p14:sldId id="256"/>
             <p14:sldId id="257"/>
@@ -136,28 +137,28 @@
             <p14:sldId id="260"/>
           </p14:sldIdLst>
         </p14:section>
-        <p14:section name="Saketh: text mining" id="{0cfe82dc-9696-f5a2-ef2d-1d06f4d0cb3f}">
+        <p14:section name="Saketh: text mining" id="{2c6b6956-a680-865f-cd9d-3142dccbde35}">
           <p14:sldIdLst>
             <p14:sldId id="261"/>
             <p14:sldId id="262"/>
             <p14:sldId id="263"/>
           </p14:sldIdLst>
         </p14:section>
-        <p14:section name="Akshay: forecasting" id="{6425d9fa-a9cc-1bcc-0966-4fe8f7f86f03}">
+        <p14:section name="Akshay: forecasting" id="{5a5bacf6-cc13-34c0-5369-e14f578ed9ec}">
           <p14:sldIdLst>
             <p14:sldId id="264"/>
             <p14:sldId id="265"/>
             <p14:sldId id="266"/>
           </p14:sldIdLst>
         </p14:section>
-        <p14:section name="Harshini: forecast evaluation" id="{b6c0fffa-366f-f963-ad9a-b6d8a9fd929f}">
+        <p14:section name="Harshini: forecast evaluation" id="{0ac7f2f6-66ea-1075-6789-4d44c2ed0300}">
           <p14:sldIdLst>
             <p14:sldId id="267"/>
             <p14:sldId id="268"/>
             <p14:sldId id="269"/>
           </p14:sldIdLst>
         </p14:section>
-        <p14:section name="Kanishka: update impact and insights" id="{b700684d-cf0e-5fd8-2b5d-2f65cf772a70}">
+        <p14:section name="Kanishka: update impact and insights" id="{f3750ee9-13b0-0d52-a5e2-e3f43a19ff6a}">
           <p14:sldIdLst>
             <p14:sldId id="270"/>
             <p14:sldId id="271"/>
@@ -166,10 +167,11 @@
             <p14:sldId id="274"/>
           </p14:sldIdLst>
         </p14:section>
-        <p14:section name="Aditya: tracking and close" id="{de321740-0017-b109-c642-a6b4d88e4895}">
+        <p14:section name="Aditya: tracking and close" id="{707a2d00-7ee6-ee43-2b52-d2d6e1bea4a3}">
           <p14:sldIdLst>
             <p14:sldId id="275"/>
             <p14:sldId id="276"/>
+            <p14:sldId id="277"/>
           </p14:sldIdLst>
         </p14:section>
       </p14:sectionLst>
@@ -2997,7 +2999,7 @@
           <a:p>
             <a:r>
               <a:rPr lang="en-US" dirty="0"/>
-              <a:t>[Aditya, about 30 s] We tracked the work on our GitHub Projects board with the five required stages. Review 2 had 14 tasks, each assigned to one member with a due date, and all 14 are completed. Every task is linked to a merged pull request, and the stages were merged one after another between 8 and 11 October. The table shows what each member owned and where the evidence is. After Stage 5 I built this deck, the final report and the contribution summary.</a:t>
+              <a:t>[Aditya, about 20 s] We tracked the work on our GitHub Projects board with the five required stages. This is the board for Review 2: 14 tasks, each assigned to one member with a due date of 11 October, each linked to its merged pull request, and all 14 are completed.</a:t>
             </a:r>
             <a:endParaRPr lang="en-US" dirty="0"/>
           </a:p>
@@ -3085,7 +3087,7 @@
           <a:p>
             <a:r>
               <a:rPr lang="en-US" dirty="0"/>
-              <a:t>[Aditya, about 40 s] To conclude: users complain about service more than about the apps themselves, and the topic models cover the 43 percent of complaints that keyword rules missed. ARIMA forecasts complaints better than the baseline for 10 of 11 apps, most releases change nothing, and Paytm 10.84.5 clearly made things worse. The apps to fix first are Swiggy, Flipkart, Amazon and Paytm. The main limits are the short six-month window and that a low rating is a user's judgement, not a confirmed defect. All our links are on this slide. Thank you; we are happy to take questions.</a:t>
+              <a:t>[Aditya, about 25 s] This table shows what each member owned and where the evidence is. The stages were merged one after another between 8 and 11 October, and every member wrote code and a dashboard part. After Stage 5 I built this deck, the final report and the contribution summary.</a:t>
             </a:r>
             <a:endParaRPr lang="en-US" dirty="0"/>
           </a:p>
@@ -3109,6 +3111,94 @@
             <a:fld id="{F7021451-1387-4CA6-816F-3879F97B5CBC}" type="slidenum">
               <a:rPr lang="en-US"/>
               <a:t>21</a:t>
+            </a:fld>
+            <a:endParaRPr lang="en-US"/>
+          </a:p>
+        </p:txBody>
+      </p:sp>
+    </p:spTree>
+    <p:extLst>
+      <p:ext uri="{BB962C8B-B14F-4D97-AF65-F5344CB8AC3E}">
+        <p14:creationId xmlns:p14="http://schemas.microsoft.com/office/powerpoint/2010/main" val="1024086991"/>
+      </p:ext>
+    </p:extLst>
+  </p:cSld>
+  <p:clrMapOvr>
+    <a:masterClrMapping/>
+  </p:clrMapOvr>
+</p:notes>
+</file>
+
+<file path=ppt/notesSlides/notesSlide22.xml><?xml version="1.0" encoding="utf-8"?>
+<p:notes xmlns:a="http://schemas.openxmlformats.org/drawingml/2006/main" xmlns:r="http://schemas.openxmlformats.org/officeDocument/2006/relationships" xmlns:p="http://schemas.openxmlformats.org/presentationml/2006/main">
+  <p:cSld>
+    <p:spTree>
+      <p:nvGrpSpPr>
+        <p:cNvPr id="1" name=""/>
+        <p:cNvGrpSpPr/>
+        <p:nvPr/>
+      </p:nvGrpSpPr>
+      <p:grpSpPr>
+        <a:xfrm>
+          <a:off x="0" y="0"/>
+          <a:ext cx="0" cy="0"/>
+          <a:chOff x="0" y="0"/>
+          <a:chExt cx="0" cy="0"/>
+        </a:xfrm>
+      </p:grpSpPr>
+      <p:sp>
+        <p:nvSpPr>
+          <p:cNvPr id="2" name="Slide Image Placeholder 1"/>
+          <p:cNvSpPr>
+            <a:spLocks noGrp="1" noRot="1" noChangeAspect="1"/>
+          </p:cNvSpPr>
+          <p:nvPr>
+            <p:ph type="sldImg"/>
+          </p:nvPr>
+        </p:nvSpPr>
+        <p:spPr/>
+      </p:sp>
+      <p:sp>
+        <p:nvSpPr>
+          <p:cNvPr id="3" name="Notes Placeholder 2"/>
+          <p:cNvSpPr>
+            <a:spLocks noGrp="1"/>
+          </p:cNvSpPr>
+          <p:nvPr>
+            <p:ph type="body" idx="1"/>
+          </p:nvPr>
+        </p:nvSpPr>
+        <p:spPr/>
+        <p:txBody>
+          <a:bodyPr/>
+          <a:lstStyle/>
+          <a:p>
+            <a:r>
+              <a:rPr lang="en-US" dirty="0"/>
+              <a:t>[Aditya, about 40 s] To conclude: users complain about service more than about the apps themselves, and the topic models cover the 43 percent of complaints that keyword rules missed. ARIMA forecasts complaints better than the baseline for 10 of 11 apps, most releases change nothing, and Paytm 10.84.5 clearly made things worse. The apps to fix first are Swiggy, Flipkart, Amazon and Paytm. The main limits are the short six-month window and that a low rating is a user's judgement, not a confirmed defect. All our links are on this slide. Thank you; we are happy to take questions.</a:t>
+            </a:r>
+            <a:endParaRPr lang="en-US" dirty="0"/>
+          </a:p>
+        </p:txBody>
+      </p:sp>
+      <p:sp>
+        <p:nvSpPr>
+          <p:cNvPr id="4" name="Slide Number Placeholder 3"/>
+          <p:cNvSpPr>
+            <a:spLocks noGrp="1"/>
+          </p:cNvSpPr>
+          <p:nvPr>
+            <p:ph type="sldNum" sz="quarter" idx="10"/>
+          </p:nvPr>
+        </p:nvSpPr>
+        <p:spPr/>
+        <p:txBody>
+          <a:bodyPr/>
+          <a:lstStyle/>
+          <a:p>
+            <a:fld id="{F7021451-1387-4CA6-816F-3879F97B5CBC}" type="slidenum">
+              <a:rPr lang="en-US"/>
+              <a:t>22</a:t>
             </a:fld>
             <a:endParaRPr lang="en-US"/>
           </a:p>
@@ -22485,7 +22575,7 @@
                   <a:schemeClr val="accent6"/>
                 </a:solidFill>
               </a:rPr>
-              <a:t>13  |  PROJECT TRACKING AND INDIVIDUAL CONTRIBUTIONS</a:t>
+              <a:t>13  |  PROJECT TRACKING AND PROGRESS</a:t>
             </a:r>
             <a:endParaRPr lang="en-US" sz="1100" dirty="0"/>
           </a:p>
@@ -22526,7 +22616,7 @@
                 <a:ea typeface="Cambria" pitchFamily="34" charset="-122"/>
                 <a:cs typeface="Cambria" pitchFamily="34" charset="-120"/>
               </a:rPr>
-              <a:t>Project Tracking and Individual Contributions</a:t>
+              <a:t>Project Tracking and Progress</a:t>
             </a:r>
             <a:endParaRPr lang="en-US" sz="2800" dirty="0"/>
           </a:p>
@@ -22562,7 +22652,7 @@
                   <a:schemeClr val="tx1"/>
                 </a:solidFill>
               </a:rPr>
-              <a:t>Board: </a:t>
+              <a:t>Tool and board link: </a:t>
             </a:r>
             <a:pPr indent="0" marL="0">
               <a:buNone/>
@@ -22580,7 +22670,7 @@
                   </a:extLst>
                 </a:hlinkClick>
               </a:rPr>
-              <a:t>github.com/users/Adithya-Monish-Kumar-K/projects/4</a:t>
+              <a:t>GitHub Projects, github.com/users/Adithya-Monish-Kumar-K/projects/4</a:t>
             </a:r>
             <a:pPr indent="0" marL="0">
               <a:buNone/>
@@ -22924,2107 +23014,22 @@
                   <a:srgbClr val="FFFFFF"/>
                 </a:solidFill>
               </a:rPr>
-              <a:t>Completed: 14 of 14 tasks</a:t>
+              <a:t>Completed</a:t>
             </a:r>
             <a:endParaRPr lang="en-US" sz="1150" dirty="0"/>
           </a:p>
         </p:txBody>
       </p:sp>
-      <p:graphicFrame>
-        <p:nvGraphicFramePr>
-          <p:cNvPr id="21" name="Table 0"/>
-          <p:cNvGraphicFramePr>
-            <a:graphicFrameLocks noGrp="1"/>
-          </p:cNvGraphicFramePr>
-          <p:nvPr>
-            <p:extLst>
-              <p:ext uri="{D42A27DB-BD31-4B8C-83A1-F6EECF244321}">
-                <p14:modId xmlns:p14="http://schemas.microsoft.com/office/powerpoint/2010/main" val="1579011935"/>
-              </p:ext>
-            </p:extLst>
-          </p:nvPr>
-        </p:nvGraphicFramePr>
-        <p:xfrm>
-          <a:off x="640080" y="2240280"/>
-          <a:ext cx="10911535" cy="914400"/>
-        </p:xfrm>
-        <a:graphic>
-          <a:graphicData uri="http://schemas.openxmlformats.org/drawingml/2006/table">
-            <a:tbl>
-              <a:tblPr/>
-              <a:tblGrid>
-                <a:gridCol w="2011680"/>
-                <a:gridCol w="548640"/>
-                <a:gridCol w="4069080"/>
-                <a:gridCol w="1600200"/>
-                <a:gridCol w="2681935"/>
-              </a:tblGrid>
-              <a:tr h="329184">
-                <a:tc>
-                  <a:txBody>
-                    <a:bodyPr/>
-                    <a:lstStyle/>
-                    <a:p>
-                      <a:pPr algn="l" indent="0" marL="0">
-                        <a:buNone/>
-                      </a:pPr>
-                      <a:r>
-                        <a:rPr lang="en-US" sz="1100" b="1" dirty="0">
-                          <a:solidFill>
-                            <a:srgbClr val="FFFFFF"/>
-                          </a:solidFill>
-                          <a:latin typeface="Calibri" pitchFamily="34" charset="0"/>
-                          <a:ea typeface="Calibri" pitchFamily="34" charset="-122"/>
-                          <a:cs typeface="Calibri" pitchFamily="34" charset="-120"/>
-                        </a:rPr>
-                        <a:t>Member</a:t>
-                      </a:r>
-                      <a:endParaRPr lang="en-US" sz="1100" dirty="0">
-                        <a:latin typeface="Calibri" charset="0"/>
-                        <a:ea typeface="Calibri" charset="0"/>
-                        <a:cs typeface="Calibri" charset="0"/>
-                      </a:endParaRPr>
-                    </a:p>
-                  </a:txBody>
-                  <a:tcPr marL="63500" marR="63500" marT="25400" marB="25400" anchor="ctr">
-                    <a:lnL w="9525" cap="flat" cmpd="sng" algn="ctr">
-                      <a:solidFill>
-                        <a:srgbClr val="E3E8EF"/>
-                      </a:solidFill>
-                      <a:prstDash val="solid"/>
-                      <a:round/>
-                      <a:headEnd type="none" w="med" len="med"/>
-                      <a:tailEnd type="none" w="med" len="med"/>
-                    </a:lnL>
-                    <a:lnR w="9525" cap="flat" cmpd="sng" algn="ctr">
-                      <a:solidFill>
-                        <a:srgbClr val="E3E8EF"/>
-                      </a:solidFill>
-                      <a:prstDash val="solid"/>
-                      <a:round/>
-                      <a:headEnd type="none" w="med" len="med"/>
-                      <a:tailEnd type="none" w="med" len="med"/>
-                    </a:lnR>
-                    <a:lnT w="9525" cap="flat" cmpd="sng" algn="ctr">
-                      <a:solidFill>
-                        <a:srgbClr val="E3E8EF"/>
-                      </a:solidFill>
-                      <a:prstDash val="solid"/>
-                      <a:round/>
-                      <a:headEnd type="none" w="med" len="med"/>
-                      <a:tailEnd type="none" w="med" len="med"/>
-                    </a:lnT>
-                    <a:lnB w="9525" cap="flat" cmpd="sng" algn="ctr">
-                      <a:solidFill>
-                        <a:srgbClr val="E3E8EF"/>
-                      </a:solidFill>
-                      <a:prstDash val="solid"/>
-                      <a:round/>
-                      <a:headEnd type="none" w="med" len="med"/>
-                      <a:tailEnd type="none" w="med" len="med"/>
-                    </a:lnB>
-                    <a:solidFill>
-                      <a:srgbClr val="132C43"/>
-                    </a:solidFill>
-                  </a:tcPr>
-                </a:tc>
-                <a:tc>
-                  <a:txBody>
-                    <a:bodyPr/>
-                    <a:lstStyle/>
-                    <a:p>
-                      <a:pPr algn="ctr" indent="0" marL="0">
-                        <a:buNone/>
-                      </a:pPr>
-                      <a:r>
-                        <a:rPr lang="en-US" sz="1100" b="1" dirty="0">
-                          <a:solidFill>
-                            <a:srgbClr val="FFFFFF"/>
-                          </a:solidFill>
-                          <a:latin typeface="Calibri" pitchFamily="34" charset="0"/>
-                          <a:ea typeface="Calibri" pitchFamily="34" charset="-122"/>
-                          <a:cs typeface="Calibri" pitchFamily="34" charset="-120"/>
-                        </a:rPr>
-                        <a:t>Stage</a:t>
-                      </a:r>
-                      <a:endParaRPr lang="en-US" sz="1100" dirty="0">
-                        <a:latin typeface="Calibri" charset="0"/>
-                        <a:ea typeface="Calibri" charset="0"/>
-                        <a:cs typeface="Calibri" charset="0"/>
-                      </a:endParaRPr>
-                    </a:p>
-                  </a:txBody>
-                  <a:tcPr marL="63500" marR="63500" marT="25400" marB="25400" anchor="ctr">
-                    <a:lnL w="9525" cap="flat" cmpd="sng" algn="ctr">
-                      <a:solidFill>
-                        <a:srgbClr val="E3E8EF"/>
-                      </a:solidFill>
-                      <a:prstDash val="solid"/>
-                      <a:round/>
-                      <a:headEnd type="none" w="med" len="med"/>
-                      <a:tailEnd type="none" w="med" len="med"/>
-                    </a:lnL>
-                    <a:lnR w="9525" cap="flat" cmpd="sng" algn="ctr">
-                      <a:solidFill>
-                        <a:srgbClr val="E3E8EF"/>
-                      </a:solidFill>
-                      <a:prstDash val="solid"/>
-                      <a:round/>
-                      <a:headEnd type="none" w="med" len="med"/>
-                      <a:tailEnd type="none" w="med" len="med"/>
-                    </a:lnR>
-                    <a:lnT w="9525" cap="flat" cmpd="sng" algn="ctr">
-                      <a:solidFill>
-                        <a:srgbClr val="E3E8EF"/>
-                      </a:solidFill>
-                      <a:prstDash val="solid"/>
-                      <a:round/>
-                      <a:headEnd type="none" w="med" len="med"/>
-                      <a:tailEnd type="none" w="med" len="med"/>
-                    </a:lnT>
-                    <a:lnB w="9525" cap="flat" cmpd="sng" algn="ctr">
-                      <a:solidFill>
-                        <a:srgbClr val="E3E8EF"/>
-                      </a:solidFill>
-                      <a:prstDash val="solid"/>
-                      <a:round/>
-                      <a:headEnd type="none" w="med" len="med"/>
-                      <a:tailEnd type="none" w="med" len="med"/>
-                    </a:lnB>
-                    <a:solidFill>
-                      <a:srgbClr val="132C43"/>
-                    </a:solidFill>
-                  </a:tcPr>
-                </a:tc>
-                <a:tc>
-                  <a:txBody>
-                    <a:bodyPr/>
-                    <a:lstStyle/>
-                    <a:p>
-                      <a:pPr algn="l" indent="0" marL="0">
-                        <a:buNone/>
-                      </a:pPr>
-                      <a:r>
-                        <a:rPr lang="en-US" sz="1100" b="1" dirty="0">
-                          <a:solidFill>
-                            <a:srgbClr val="FFFFFF"/>
-                          </a:solidFill>
-                          <a:latin typeface="Calibri" pitchFamily="34" charset="0"/>
-                          <a:ea typeface="Calibri" pitchFamily="34" charset="-122"/>
-                          <a:cs typeface="Calibri" pitchFamily="34" charset="-120"/>
-                        </a:rPr>
-                        <a:t>Board tasks (all due 11 Oct, all Completed)</a:t>
-                      </a:r>
-                      <a:endParaRPr lang="en-US" sz="1100" dirty="0">
-                        <a:latin typeface="Calibri" charset="0"/>
-                        <a:ea typeface="Calibri" charset="0"/>
-                        <a:cs typeface="Calibri" charset="0"/>
-                      </a:endParaRPr>
-                    </a:p>
-                  </a:txBody>
-                  <a:tcPr marL="63500" marR="63500" marT="25400" marB="25400" anchor="ctr">
-                    <a:lnL w="9525" cap="flat" cmpd="sng" algn="ctr">
-                      <a:solidFill>
-                        <a:srgbClr val="E3E8EF"/>
-                      </a:solidFill>
-                      <a:prstDash val="solid"/>
-                      <a:round/>
-                      <a:headEnd type="none" w="med" len="med"/>
-                      <a:tailEnd type="none" w="med" len="med"/>
-                    </a:lnL>
-                    <a:lnR w="9525" cap="flat" cmpd="sng" algn="ctr">
-                      <a:solidFill>
-                        <a:srgbClr val="E3E8EF"/>
-                      </a:solidFill>
-                      <a:prstDash val="solid"/>
-                      <a:round/>
-                      <a:headEnd type="none" w="med" len="med"/>
-                      <a:tailEnd type="none" w="med" len="med"/>
-                    </a:lnR>
-                    <a:lnT w="9525" cap="flat" cmpd="sng" algn="ctr">
-                      <a:solidFill>
-                        <a:srgbClr val="E3E8EF"/>
-                      </a:solidFill>
-                      <a:prstDash val="solid"/>
-                      <a:round/>
-                      <a:headEnd type="none" w="med" len="med"/>
-                      <a:tailEnd type="none" w="med" len="med"/>
-                    </a:lnT>
-                    <a:lnB w="9525" cap="flat" cmpd="sng" algn="ctr">
-                      <a:solidFill>
-                        <a:srgbClr val="E3E8EF"/>
-                      </a:solidFill>
-                      <a:prstDash val="solid"/>
-                      <a:round/>
-                      <a:headEnd type="none" w="med" len="med"/>
-                      <a:tailEnd type="none" w="med" len="med"/>
-                    </a:lnB>
-                    <a:solidFill>
-                      <a:srgbClr val="132C43"/>
-                    </a:solidFill>
-                  </a:tcPr>
-                </a:tc>
-                <a:tc>
-                  <a:txBody>
-                    <a:bodyPr/>
-                    <a:lstStyle/>
-                    <a:p>
-                      <a:pPr algn="l" indent="0" marL="0">
-                        <a:buNone/>
-                      </a:pPr>
-                      <a:r>
-                        <a:rPr lang="en-US" sz="1100" b="1" dirty="0">
-                          <a:solidFill>
-                            <a:srgbClr val="FFFFFF"/>
-                          </a:solidFill>
-                          <a:latin typeface="Calibri" pitchFamily="34" charset="0"/>
-                          <a:ea typeface="Calibri" pitchFamily="34" charset="-122"/>
-                          <a:cs typeface="Calibri" pitchFamily="34" charset="-120"/>
-                        </a:rPr>
-                        <a:t>Pull requests (merged)</a:t>
-                      </a:r>
-                      <a:endParaRPr lang="en-US" sz="1100" dirty="0">
-                        <a:latin typeface="Calibri" charset="0"/>
-                        <a:ea typeface="Calibri" charset="0"/>
-                        <a:cs typeface="Calibri" charset="0"/>
-                      </a:endParaRPr>
-                    </a:p>
-                  </a:txBody>
-                  <a:tcPr marL="63500" marR="63500" marT="25400" marB="25400" anchor="ctr">
-                    <a:lnL w="9525" cap="flat" cmpd="sng" algn="ctr">
-                      <a:solidFill>
-                        <a:srgbClr val="E3E8EF"/>
-                      </a:solidFill>
-                      <a:prstDash val="solid"/>
-                      <a:round/>
-                      <a:headEnd type="none" w="med" len="med"/>
-                      <a:tailEnd type="none" w="med" len="med"/>
-                    </a:lnL>
-                    <a:lnR w="9525" cap="flat" cmpd="sng" algn="ctr">
-                      <a:solidFill>
-                        <a:srgbClr val="E3E8EF"/>
-                      </a:solidFill>
-                      <a:prstDash val="solid"/>
-                      <a:round/>
-                      <a:headEnd type="none" w="med" len="med"/>
-                      <a:tailEnd type="none" w="med" len="med"/>
-                    </a:lnR>
-                    <a:lnT w="9525" cap="flat" cmpd="sng" algn="ctr">
-                      <a:solidFill>
-                        <a:srgbClr val="E3E8EF"/>
-                      </a:solidFill>
-                      <a:prstDash val="solid"/>
-                      <a:round/>
-                      <a:headEnd type="none" w="med" len="med"/>
-                      <a:tailEnd type="none" w="med" len="med"/>
-                    </a:lnT>
-                    <a:lnB w="9525" cap="flat" cmpd="sng" algn="ctr">
-                      <a:solidFill>
-                        <a:srgbClr val="E3E8EF"/>
-                      </a:solidFill>
-                      <a:prstDash val="solid"/>
-                      <a:round/>
-                      <a:headEnd type="none" w="med" len="med"/>
-                      <a:tailEnd type="none" w="med" len="med"/>
-                    </a:lnB>
-                    <a:solidFill>
-                      <a:srgbClr val="132C43"/>
-                    </a:solidFill>
-                  </a:tcPr>
-                </a:tc>
-                <a:tc>
-                  <a:txBody>
-                    <a:bodyPr/>
-                    <a:lstStyle/>
-                    <a:p>
-                      <a:pPr algn="l" indent="0" marL="0">
-                        <a:buNone/>
-                      </a:pPr>
-                      <a:r>
-                        <a:rPr lang="en-US" sz="1100" b="1" dirty="0">
-                          <a:solidFill>
-                            <a:srgbClr val="FFFFFF"/>
-                          </a:solidFill>
-                          <a:latin typeface="Calibri" pitchFamily="34" charset="0"/>
-                          <a:ea typeface="Calibri" pitchFamily="34" charset="-122"/>
-                          <a:cs typeface="Calibri" pitchFamily="34" charset="-120"/>
-                        </a:rPr>
-                        <a:t>Evidence</a:t>
-                      </a:r>
-                      <a:endParaRPr lang="en-US" sz="1100" dirty="0">
-                        <a:latin typeface="Calibri" charset="0"/>
-                        <a:ea typeface="Calibri" charset="0"/>
-                        <a:cs typeface="Calibri" charset="0"/>
-                      </a:endParaRPr>
-                    </a:p>
-                  </a:txBody>
-                  <a:tcPr marL="63500" marR="63500" marT="25400" marB="25400" anchor="ctr">
-                    <a:lnL w="9525" cap="flat" cmpd="sng" algn="ctr">
-                      <a:solidFill>
-                        <a:srgbClr val="E3E8EF"/>
-                      </a:solidFill>
-                      <a:prstDash val="solid"/>
-                      <a:round/>
-                      <a:headEnd type="none" w="med" len="med"/>
-                      <a:tailEnd type="none" w="med" len="med"/>
-                    </a:lnL>
-                    <a:lnR w="9525" cap="flat" cmpd="sng" algn="ctr">
-                      <a:solidFill>
-                        <a:srgbClr val="E3E8EF"/>
-                      </a:solidFill>
-                      <a:prstDash val="solid"/>
-                      <a:round/>
-                      <a:headEnd type="none" w="med" len="med"/>
-                      <a:tailEnd type="none" w="med" len="med"/>
-                    </a:lnR>
-                    <a:lnT w="9525" cap="flat" cmpd="sng" algn="ctr">
-                      <a:solidFill>
-                        <a:srgbClr val="E3E8EF"/>
-                      </a:solidFill>
-                      <a:prstDash val="solid"/>
-                      <a:round/>
-                      <a:headEnd type="none" w="med" len="med"/>
-                      <a:tailEnd type="none" w="med" len="med"/>
-                    </a:lnT>
-                    <a:lnB w="9525" cap="flat" cmpd="sng" algn="ctr">
-                      <a:solidFill>
-                        <a:srgbClr val="E3E8EF"/>
-                      </a:solidFill>
-                      <a:prstDash val="solid"/>
-                      <a:round/>
-                      <a:headEnd type="none" w="med" len="med"/>
-                      <a:tailEnd type="none" w="med" len="med"/>
-                    </a:lnB>
-                    <a:solidFill>
-                      <a:srgbClr val="132C43"/>
-                    </a:solidFill>
-                  </a:tcPr>
-                </a:tc>
-              </a:tr>
-              <a:tr h="621792">
-                <a:tc>
-                  <a:txBody>
-                    <a:bodyPr/>
-                    <a:lstStyle/>
-                    <a:p>
-                      <a:pPr algn="l" indent="0" marL="0">
-                        <a:buNone/>
-                      </a:pPr>
-                      <a:r>
-                        <a:rPr lang="en-US" sz="1100" b="1" dirty="0">
-                          <a:solidFill>
-                            <a:srgbClr val="1F2D3D"/>
-                          </a:solidFill>
-                          <a:latin typeface="Calibri" pitchFamily="34" charset="0"/>
-                          <a:ea typeface="Calibri" pitchFamily="34" charset="-122"/>
-                          <a:cs typeface="Calibri" pitchFamily="34" charset="-120"/>
-                        </a:rPr>
-                        <a:t>Aditya Monish Kumar K - CB.SC.U4CSE23103</a:t>
-                      </a:r>
-                      <a:endParaRPr lang="en-US" sz="1100" dirty="0">
-                        <a:latin typeface="Calibri" charset="0"/>
-                        <a:ea typeface="Calibri" charset="0"/>
-                        <a:cs typeface="Calibri" charset="0"/>
-                      </a:endParaRPr>
-                    </a:p>
-                  </a:txBody>
-                  <a:tcPr marL="63500" marR="63500" marT="25400" marB="25400" anchor="ctr">
-                    <a:lnL w="9525" cap="flat" cmpd="sng" algn="ctr">
-                      <a:solidFill>
-                        <a:srgbClr val="E3E8EF"/>
-                      </a:solidFill>
-                      <a:prstDash val="solid"/>
-                      <a:round/>
-                      <a:headEnd type="none" w="med" len="med"/>
-                      <a:tailEnd type="none" w="med" len="med"/>
-                    </a:lnL>
-                    <a:lnR w="9525" cap="flat" cmpd="sng" algn="ctr">
-                      <a:solidFill>
-                        <a:srgbClr val="E3E8EF"/>
-                      </a:solidFill>
-                      <a:prstDash val="solid"/>
-                      <a:round/>
-                      <a:headEnd type="none" w="med" len="med"/>
-                      <a:tailEnd type="none" w="med" len="med"/>
-                    </a:lnR>
-                    <a:lnT w="9525" cap="flat" cmpd="sng" algn="ctr">
-                      <a:solidFill>
-                        <a:srgbClr val="E3E8EF"/>
-                      </a:solidFill>
-                      <a:prstDash val="solid"/>
-                      <a:round/>
-                      <a:headEnd type="none" w="med" len="med"/>
-                      <a:tailEnd type="none" w="med" len="med"/>
-                    </a:lnT>
-                    <a:lnB w="9525" cap="flat" cmpd="sng" algn="ctr">
-                      <a:solidFill>
-                        <a:srgbClr val="E3E8EF"/>
-                      </a:solidFill>
-                      <a:prstDash val="solid"/>
-                      <a:round/>
-                      <a:headEnd type="none" w="med" len="med"/>
-                      <a:tailEnd type="none" w="med" len="med"/>
-                    </a:lnB>
-                    <a:solidFill>
-                      <a:srgbClr val="FFFFFF"/>
-                    </a:solidFill>
-                  </a:tcPr>
-                </a:tc>
-                <a:tc>
-                  <a:txBody>
-                    <a:bodyPr/>
-                    <a:lstStyle/>
-                    <a:p>
-                      <a:pPr algn="ctr" indent="0" marL="0">
-                        <a:buNone/>
-                      </a:pPr>
-                      <a:r>
-                        <a:rPr lang="en-US" sz="1100" dirty="0">
-                          <a:solidFill>
-                            <a:srgbClr val="1F2D3D"/>
-                          </a:solidFill>
-                          <a:latin typeface="Calibri" pitchFamily="34" charset="0"/>
-                          <a:ea typeface="Calibri" pitchFamily="34" charset="-122"/>
-                          <a:cs typeface="Calibri" pitchFamily="34" charset="-120"/>
-                        </a:rPr>
-                        <a:t>1 and 6</a:t>
-                      </a:r>
-                      <a:endParaRPr lang="en-US" sz="1100" dirty="0">
-                        <a:latin typeface="Calibri" charset="0"/>
-                        <a:ea typeface="Calibri" charset="0"/>
-                        <a:cs typeface="Calibri" charset="0"/>
-                      </a:endParaRPr>
-                    </a:p>
-                  </a:txBody>
-                  <a:tcPr marL="63500" marR="63500" marT="25400" marB="25400" anchor="ctr">
-                    <a:lnL w="9525" cap="flat" cmpd="sng" algn="ctr">
-                      <a:solidFill>
-                        <a:srgbClr val="E3E8EF"/>
-                      </a:solidFill>
-                      <a:prstDash val="solid"/>
-                      <a:round/>
-                      <a:headEnd type="none" w="med" len="med"/>
-                      <a:tailEnd type="none" w="med" len="med"/>
-                    </a:lnL>
-                    <a:lnR w="9525" cap="flat" cmpd="sng" algn="ctr">
-                      <a:solidFill>
-                        <a:srgbClr val="E3E8EF"/>
-                      </a:solidFill>
-                      <a:prstDash val="solid"/>
-                      <a:round/>
-                      <a:headEnd type="none" w="med" len="med"/>
-                      <a:tailEnd type="none" w="med" len="med"/>
-                    </a:lnR>
-                    <a:lnT w="9525" cap="flat" cmpd="sng" algn="ctr">
-                      <a:solidFill>
-                        <a:srgbClr val="E3E8EF"/>
-                      </a:solidFill>
-                      <a:prstDash val="solid"/>
-                      <a:round/>
-                      <a:headEnd type="none" w="med" len="med"/>
-                      <a:tailEnd type="none" w="med" len="med"/>
-                    </a:lnT>
-                    <a:lnB w="9525" cap="flat" cmpd="sng" algn="ctr">
-                      <a:solidFill>
-                        <a:srgbClr val="E3E8EF"/>
-                      </a:solidFill>
-                      <a:prstDash val="solid"/>
-                      <a:round/>
-                      <a:headEnd type="none" w="med" len="med"/>
-                      <a:tailEnd type="none" w="med" len="med"/>
-                    </a:lnB>
-                    <a:solidFill>
-                      <a:srgbClr val="FFFFFF"/>
-                    </a:solidFill>
-                  </a:tcPr>
-                </a:tc>
-                <a:tc>
-                  <a:txBody>
-                    <a:bodyPr/>
-                    <a:lstStyle/>
-                    <a:p>
-                      <a:pPr algn="l" indent="0" marL="0">
-                        <a:buNone/>
-                      </a:pPr>
-                      <a:r>
-                        <a:rPr lang="en-US" sz="1100" dirty="0">
-                          <a:solidFill>
-                            <a:srgbClr val="1F2D3D"/>
-                          </a:solidFill>
-                          <a:latin typeface="Calibri" pitchFamily="34" charset="0"/>
-                          <a:ea typeface="Calibri" pitchFamily="34" charset="-122"/>
-                          <a:cs typeface="Calibri" pitchFamily="34" charset="-120"/>
-                        </a:rPr>
-                        <a:t>#131 time series and patterns, #132 text preprocessing, #133 dashboard skeleton and overview; Stage 6: deck, final report, contribution summary</a:t>
-                      </a:r>
-                      <a:endParaRPr lang="en-US" sz="1100" dirty="0">
-                        <a:latin typeface="Calibri" charset="0"/>
-                        <a:ea typeface="Calibri" charset="0"/>
-                        <a:cs typeface="Calibri" charset="0"/>
-                      </a:endParaRPr>
-                    </a:p>
-                  </a:txBody>
-                  <a:tcPr marL="63500" marR="63500" marT="25400" marB="25400" anchor="ctr">
-                    <a:lnL w="9525" cap="flat" cmpd="sng" algn="ctr">
-                      <a:solidFill>
-                        <a:srgbClr val="E3E8EF"/>
-                      </a:solidFill>
-                      <a:prstDash val="solid"/>
-                      <a:round/>
-                      <a:headEnd type="none" w="med" len="med"/>
-                      <a:tailEnd type="none" w="med" len="med"/>
-                    </a:lnL>
-                    <a:lnR w="9525" cap="flat" cmpd="sng" algn="ctr">
-                      <a:solidFill>
-                        <a:srgbClr val="E3E8EF"/>
-                      </a:solidFill>
-                      <a:prstDash val="solid"/>
-                      <a:round/>
-                      <a:headEnd type="none" w="med" len="med"/>
-                      <a:tailEnd type="none" w="med" len="med"/>
-                    </a:lnR>
-                    <a:lnT w="9525" cap="flat" cmpd="sng" algn="ctr">
-                      <a:solidFill>
-                        <a:srgbClr val="E3E8EF"/>
-                      </a:solidFill>
-                      <a:prstDash val="solid"/>
-                      <a:round/>
-                      <a:headEnd type="none" w="med" len="med"/>
-                      <a:tailEnd type="none" w="med" len="med"/>
-                    </a:lnT>
-                    <a:lnB w="9525" cap="flat" cmpd="sng" algn="ctr">
-                      <a:solidFill>
-                        <a:srgbClr val="E3E8EF"/>
-                      </a:solidFill>
-                      <a:prstDash val="solid"/>
-                      <a:round/>
-                      <a:headEnd type="none" w="med" len="med"/>
-                      <a:tailEnd type="none" w="med" len="med"/>
-                    </a:lnB>
-                    <a:solidFill>
-                      <a:srgbClr val="FFFFFF"/>
-                    </a:solidFill>
-                  </a:tcPr>
-                </a:tc>
-                <a:tc>
-                  <a:txBody>
-                    <a:bodyPr/>
-                    <a:lstStyle/>
-                    <a:p>
-                      <a:pPr algn="l" indent="0" marL="0">
-                        <a:buNone/>
-                      </a:pPr>
-                      <a:r>
-                        <a:rPr lang="en-US" sz="1100" dirty="0">
-                          <a:solidFill>
-                            <a:srgbClr val="1F2D3D"/>
-                          </a:solidFill>
-                          <a:latin typeface="Calibri" pitchFamily="34" charset="0"/>
-                          <a:ea typeface="Calibri" pitchFamily="34" charset="-122"/>
-                          <a:cs typeface="Calibri" pitchFamily="34" charset="-120"/>
-                        </a:rPr>
-                        <a:t>#147, #148, #149 (8 Oct)</a:t>
-                      </a:r>
-                      <a:endParaRPr lang="en-US" sz="1100" dirty="0">
-                        <a:latin typeface="Calibri" charset="0"/>
-                        <a:ea typeface="Calibri" charset="0"/>
-                        <a:cs typeface="Calibri" charset="0"/>
-                      </a:endParaRPr>
-                    </a:p>
-                  </a:txBody>
-                  <a:tcPr marL="63500" marR="63500" marT="25400" marB="25400" anchor="ctr">
-                    <a:lnL w="9525" cap="flat" cmpd="sng" algn="ctr">
-                      <a:solidFill>
-                        <a:srgbClr val="E3E8EF"/>
-                      </a:solidFill>
-                      <a:prstDash val="solid"/>
-                      <a:round/>
-                      <a:headEnd type="none" w="med" len="med"/>
-                      <a:tailEnd type="none" w="med" len="med"/>
-                    </a:lnL>
-                    <a:lnR w="9525" cap="flat" cmpd="sng" algn="ctr">
-                      <a:solidFill>
-                        <a:srgbClr val="E3E8EF"/>
-                      </a:solidFill>
-                      <a:prstDash val="solid"/>
-                      <a:round/>
-                      <a:headEnd type="none" w="med" len="med"/>
-                      <a:tailEnd type="none" w="med" len="med"/>
-                    </a:lnR>
-                    <a:lnT w="9525" cap="flat" cmpd="sng" algn="ctr">
-                      <a:solidFill>
-                        <a:srgbClr val="E3E8EF"/>
-                      </a:solidFill>
-                      <a:prstDash val="solid"/>
-                      <a:round/>
-                      <a:headEnd type="none" w="med" len="med"/>
-                      <a:tailEnd type="none" w="med" len="med"/>
-                    </a:lnT>
-                    <a:lnB w="9525" cap="flat" cmpd="sng" algn="ctr">
-                      <a:solidFill>
-                        <a:srgbClr val="E3E8EF"/>
-                      </a:solidFill>
-                      <a:prstDash val="solid"/>
-                      <a:round/>
-                      <a:headEnd type="none" w="med" len="med"/>
-                      <a:tailEnd type="none" w="med" len="med"/>
-                    </a:lnB>
-                    <a:solidFill>
-                      <a:srgbClr val="FFFFFF"/>
-                    </a:solidFill>
-                  </a:tcPr>
-                </a:tc>
-                <a:tc>
-                  <a:txBody>
-                    <a:bodyPr/>
-                    <a:lstStyle/>
-                    <a:p>
-                      <a:pPr algn="l" indent="0" marL="0">
-                        <a:buNone/>
-                      </a:pPr>
-                      <a:r>
-                        <a:rPr lang="en-US" sz="1100" dirty="0">
-                          <a:solidFill>
-                            <a:srgbClr val="1F2D3D"/>
-                          </a:solidFill>
-                          <a:latin typeface="Calibri" pitchFamily="34" charset="0"/>
-                          <a:ea typeface="Calibri" pitchFamily="34" charset="-122"/>
-                          <a:cs typeface="Calibri" pitchFamily="34" charset="-120"/>
-                        </a:rPr>
-                        <a:t>scripts 15–16, dashboard/, FINAL_REPORT.md</a:t>
-                      </a:r>
-                      <a:endParaRPr lang="en-US" sz="1100" dirty="0">
-                        <a:latin typeface="Calibri" charset="0"/>
-                        <a:ea typeface="Calibri" charset="0"/>
-                        <a:cs typeface="Calibri" charset="0"/>
-                      </a:endParaRPr>
-                    </a:p>
-                  </a:txBody>
-                  <a:tcPr marL="63500" marR="63500" marT="25400" marB="25400" anchor="ctr">
-                    <a:lnL w="9525" cap="flat" cmpd="sng" algn="ctr">
-                      <a:solidFill>
-                        <a:srgbClr val="E3E8EF"/>
-                      </a:solidFill>
-                      <a:prstDash val="solid"/>
-                      <a:round/>
-                      <a:headEnd type="none" w="med" len="med"/>
-                      <a:tailEnd type="none" w="med" len="med"/>
-                    </a:lnL>
-                    <a:lnR w="9525" cap="flat" cmpd="sng" algn="ctr">
-                      <a:solidFill>
-                        <a:srgbClr val="E3E8EF"/>
-                      </a:solidFill>
-                      <a:prstDash val="solid"/>
-                      <a:round/>
-                      <a:headEnd type="none" w="med" len="med"/>
-                      <a:tailEnd type="none" w="med" len="med"/>
-                    </a:lnR>
-                    <a:lnT w="9525" cap="flat" cmpd="sng" algn="ctr">
-                      <a:solidFill>
-                        <a:srgbClr val="E3E8EF"/>
-                      </a:solidFill>
-                      <a:prstDash val="solid"/>
-                      <a:round/>
-                      <a:headEnd type="none" w="med" len="med"/>
-                      <a:tailEnd type="none" w="med" len="med"/>
-                    </a:lnT>
-                    <a:lnB w="9525" cap="flat" cmpd="sng" algn="ctr">
-                      <a:solidFill>
-                        <a:srgbClr val="E3E8EF"/>
-                      </a:solidFill>
-                      <a:prstDash val="solid"/>
-                      <a:round/>
-                      <a:headEnd type="none" w="med" len="med"/>
-                      <a:tailEnd type="none" w="med" len="med"/>
-                    </a:lnB>
-                    <a:solidFill>
-                      <a:srgbClr val="FFFFFF"/>
-                    </a:solidFill>
-                  </a:tcPr>
-                </a:tc>
-              </a:tr>
-              <a:tr h="548640">
-                <a:tc>
-                  <a:txBody>
-                    <a:bodyPr/>
-                    <a:lstStyle/>
-                    <a:p>
-                      <a:pPr algn="l" indent="0" marL="0">
-                        <a:buNone/>
-                      </a:pPr>
-                      <a:r>
-                        <a:rPr lang="en-US" sz="1100" b="1" dirty="0">
-                          <a:solidFill>
-                            <a:srgbClr val="1F2D3D"/>
-                          </a:solidFill>
-                          <a:latin typeface="Calibri" pitchFamily="34" charset="0"/>
-                          <a:ea typeface="Calibri" pitchFamily="34" charset="-122"/>
-                          <a:cs typeface="Calibri" pitchFamily="34" charset="-120"/>
-                        </a:rPr>
-                        <a:t>Regella Krishna Saketh - CB.SC.U4CSE23649</a:t>
-                      </a:r>
-                      <a:endParaRPr lang="en-US" sz="1100" dirty="0">
-                        <a:latin typeface="Calibri" charset="0"/>
-                        <a:ea typeface="Calibri" charset="0"/>
-                        <a:cs typeface="Calibri" charset="0"/>
-                      </a:endParaRPr>
-                    </a:p>
-                  </a:txBody>
-                  <a:tcPr marL="63500" marR="63500" marT="25400" marB="25400" anchor="ctr">
-                    <a:lnL w="9525" cap="flat" cmpd="sng" algn="ctr">
-                      <a:solidFill>
-                        <a:srgbClr val="E3E8EF"/>
-                      </a:solidFill>
-                      <a:prstDash val="solid"/>
-                      <a:round/>
-                      <a:headEnd type="none" w="med" len="med"/>
-                      <a:tailEnd type="none" w="med" len="med"/>
-                    </a:lnL>
-                    <a:lnR w="9525" cap="flat" cmpd="sng" algn="ctr">
-                      <a:solidFill>
-                        <a:srgbClr val="E3E8EF"/>
-                      </a:solidFill>
-                      <a:prstDash val="solid"/>
-                      <a:round/>
-                      <a:headEnd type="none" w="med" len="med"/>
-                      <a:tailEnd type="none" w="med" len="med"/>
-                    </a:lnR>
-                    <a:lnT w="9525" cap="flat" cmpd="sng" algn="ctr">
-                      <a:solidFill>
-                        <a:srgbClr val="E3E8EF"/>
-                      </a:solidFill>
-                      <a:prstDash val="solid"/>
-                      <a:round/>
-                      <a:headEnd type="none" w="med" len="med"/>
-                      <a:tailEnd type="none" w="med" len="med"/>
-                    </a:lnT>
-                    <a:lnB w="9525" cap="flat" cmpd="sng" algn="ctr">
-                      <a:solidFill>
-                        <a:srgbClr val="E3E8EF"/>
-                      </a:solidFill>
-                      <a:prstDash val="solid"/>
-                      <a:round/>
-                      <a:headEnd type="none" w="med" len="med"/>
-                      <a:tailEnd type="none" w="med" len="med"/>
-                    </a:lnB>
-                    <a:solidFill>
-                      <a:srgbClr val="FBFCFE"/>
-                    </a:solidFill>
-                  </a:tcPr>
-                </a:tc>
-                <a:tc>
-                  <a:txBody>
-                    <a:bodyPr/>
-                    <a:lstStyle/>
-                    <a:p>
-                      <a:pPr algn="ctr" indent="0" marL="0">
-                        <a:buNone/>
-                      </a:pPr>
-                      <a:r>
-                        <a:rPr lang="en-US" sz="1100" dirty="0">
-                          <a:solidFill>
-                            <a:srgbClr val="1F2D3D"/>
-                          </a:solidFill>
-                          <a:latin typeface="Calibri" pitchFamily="34" charset="0"/>
-                          <a:ea typeface="Calibri" pitchFamily="34" charset="-122"/>
-                          <a:cs typeface="Calibri" pitchFamily="34" charset="-120"/>
-                        </a:rPr>
-                        <a:t>2</a:t>
-                      </a:r>
-                      <a:endParaRPr lang="en-US" sz="1100" dirty="0">
-                        <a:latin typeface="Calibri" charset="0"/>
-                        <a:ea typeface="Calibri" charset="0"/>
-                        <a:cs typeface="Calibri" charset="0"/>
-                      </a:endParaRPr>
-                    </a:p>
-                  </a:txBody>
-                  <a:tcPr marL="63500" marR="63500" marT="25400" marB="25400" anchor="ctr">
-                    <a:lnL w="9525" cap="flat" cmpd="sng" algn="ctr">
-                      <a:solidFill>
-                        <a:srgbClr val="E3E8EF"/>
-                      </a:solidFill>
-                      <a:prstDash val="solid"/>
-                      <a:round/>
-                      <a:headEnd type="none" w="med" len="med"/>
-                      <a:tailEnd type="none" w="med" len="med"/>
-                    </a:lnL>
-                    <a:lnR w="9525" cap="flat" cmpd="sng" algn="ctr">
-                      <a:solidFill>
-                        <a:srgbClr val="E3E8EF"/>
-                      </a:solidFill>
-                      <a:prstDash val="solid"/>
-                      <a:round/>
-                      <a:headEnd type="none" w="med" len="med"/>
-                      <a:tailEnd type="none" w="med" len="med"/>
-                    </a:lnR>
-                    <a:lnT w="9525" cap="flat" cmpd="sng" algn="ctr">
-                      <a:solidFill>
-                        <a:srgbClr val="E3E8EF"/>
-                      </a:solidFill>
-                      <a:prstDash val="solid"/>
-                      <a:round/>
-                      <a:headEnd type="none" w="med" len="med"/>
-                      <a:tailEnd type="none" w="med" len="med"/>
-                    </a:lnT>
-                    <a:lnB w="9525" cap="flat" cmpd="sng" algn="ctr">
-                      <a:solidFill>
-                        <a:srgbClr val="E3E8EF"/>
-                      </a:solidFill>
-                      <a:prstDash val="solid"/>
-                      <a:round/>
-                      <a:headEnd type="none" w="med" len="med"/>
-                      <a:tailEnd type="none" w="med" len="med"/>
-                    </a:lnB>
-                    <a:solidFill>
-                      <a:srgbClr val="FBFCFE"/>
-                    </a:solidFill>
-                  </a:tcPr>
-                </a:tc>
-                <a:tc>
-                  <a:txBody>
-                    <a:bodyPr/>
-                    <a:lstStyle/>
-                    <a:p>
-                      <a:pPr algn="l" indent="0" marL="0">
-                        <a:buNone/>
-                      </a:pPr>
-                      <a:r>
-                        <a:rPr lang="en-US" sz="1100" dirty="0">
-                          <a:solidFill>
-                            <a:srgbClr val="1F2D3D"/>
-                          </a:solidFill>
-                          <a:latin typeface="Calibri" pitchFamily="34" charset="0"/>
-                          <a:ea typeface="Calibri" pitchFamily="34" charset="-122"/>
-                          <a:cs typeface="Calibri" pitchFamily="34" charset="-120"/>
-                        </a:rPr>
-                        <a:t>#134 topic modelling and distinctive terms, #136 topic evaluation and interpretation</a:t>
-                      </a:r>
-                      <a:endParaRPr lang="en-US" sz="1100" dirty="0">
-                        <a:latin typeface="Calibri" charset="0"/>
-                        <a:ea typeface="Calibri" charset="0"/>
-                        <a:cs typeface="Calibri" charset="0"/>
-                      </a:endParaRPr>
-                    </a:p>
-                  </a:txBody>
-                  <a:tcPr marL="63500" marR="63500" marT="25400" marB="25400" anchor="ctr">
-                    <a:lnL w="9525" cap="flat" cmpd="sng" algn="ctr">
-                      <a:solidFill>
-                        <a:srgbClr val="E3E8EF"/>
-                      </a:solidFill>
-                      <a:prstDash val="solid"/>
-                      <a:round/>
-                      <a:headEnd type="none" w="med" len="med"/>
-                      <a:tailEnd type="none" w="med" len="med"/>
-                    </a:lnL>
-                    <a:lnR w="9525" cap="flat" cmpd="sng" algn="ctr">
-                      <a:solidFill>
-                        <a:srgbClr val="E3E8EF"/>
-                      </a:solidFill>
-                      <a:prstDash val="solid"/>
-                      <a:round/>
-                      <a:headEnd type="none" w="med" len="med"/>
-                      <a:tailEnd type="none" w="med" len="med"/>
-                    </a:lnR>
-                    <a:lnT w="9525" cap="flat" cmpd="sng" algn="ctr">
-                      <a:solidFill>
-                        <a:srgbClr val="E3E8EF"/>
-                      </a:solidFill>
-                      <a:prstDash val="solid"/>
-                      <a:round/>
-                      <a:headEnd type="none" w="med" len="med"/>
-                      <a:tailEnd type="none" w="med" len="med"/>
-                    </a:lnT>
-                    <a:lnB w="9525" cap="flat" cmpd="sng" algn="ctr">
-                      <a:solidFill>
-                        <a:srgbClr val="E3E8EF"/>
-                      </a:solidFill>
-                      <a:prstDash val="solid"/>
-                      <a:round/>
-                      <a:headEnd type="none" w="med" len="med"/>
-                      <a:tailEnd type="none" w="med" len="med"/>
-                    </a:lnB>
-                    <a:solidFill>
-                      <a:srgbClr val="FBFCFE"/>
-                    </a:solidFill>
-                  </a:tcPr>
-                </a:tc>
-                <a:tc>
-                  <a:txBody>
-                    <a:bodyPr/>
-                    <a:lstStyle/>
-                    <a:p>
-                      <a:pPr algn="l" indent="0" marL="0">
-                        <a:buNone/>
-                      </a:pPr>
-                      <a:r>
-                        <a:rPr lang="en-US" sz="1100" dirty="0">
-                          <a:solidFill>
-                            <a:srgbClr val="1F2D3D"/>
-                          </a:solidFill>
-                          <a:latin typeface="Calibri" pitchFamily="34" charset="0"/>
-                          <a:ea typeface="Calibri" pitchFamily="34" charset="-122"/>
-                          <a:cs typeface="Calibri" pitchFamily="34" charset="-120"/>
-                        </a:rPr>
-                        <a:t>#150, #151 (8 Oct)</a:t>
-                      </a:r>
-                      <a:endParaRPr lang="en-US" sz="1100" dirty="0">
-                        <a:latin typeface="Calibri" charset="0"/>
-                        <a:ea typeface="Calibri" charset="0"/>
-                        <a:cs typeface="Calibri" charset="0"/>
-                      </a:endParaRPr>
-                    </a:p>
-                  </a:txBody>
-                  <a:tcPr marL="63500" marR="63500" marT="25400" marB="25400" anchor="ctr">
-                    <a:lnL w="9525" cap="flat" cmpd="sng" algn="ctr">
-                      <a:solidFill>
-                        <a:srgbClr val="E3E8EF"/>
-                      </a:solidFill>
-                      <a:prstDash val="solid"/>
-                      <a:round/>
-                      <a:headEnd type="none" w="med" len="med"/>
-                      <a:tailEnd type="none" w="med" len="med"/>
-                    </a:lnL>
-                    <a:lnR w="9525" cap="flat" cmpd="sng" algn="ctr">
-                      <a:solidFill>
-                        <a:srgbClr val="E3E8EF"/>
-                      </a:solidFill>
-                      <a:prstDash val="solid"/>
-                      <a:round/>
-                      <a:headEnd type="none" w="med" len="med"/>
-                      <a:tailEnd type="none" w="med" len="med"/>
-                    </a:lnR>
-                    <a:lnT w="9525" cap="flat" cmpd="sng" algn="ctr">
-                      <a:solidFill>
-                        <a:srgbClr val="E3E8EF"/>
-                      </a:solidFill>
-                      <a:prstDash val="solid"/>
-                      <a:round/>
-                      <a:headEnd type="none" w="med" len="med"/>
-                      <a:tailEnd type="none" w="med" len="med"/>
-                    </a:lnT>
-                    <a:lnB w="9525" cap="flat" cmpd="sng" algn="ctr">
-                      <a:solidFill>
-                        <a:srgbClr val="E3E8EF"/>
-                      </a:solidFill>
-                      <a:prstDash val="solid"/>
-                      <a:round/>
-                      <a:headEnd type="none" w="med" len="med"/>
-                      <a:tailEnd type="none" w="med" len="med"/>
-                    </a:lnB>
-                    <a:solidFill>
-                      <a:srgbClr val="FBFCFE"/>
-                    </a:solidFill>
-                  </a:tcPr>
-                </a:tc>
-                <a:tc>
-                  <a:txBody>
-                    <a:bodyPr/>
-                    <a:lstStyle/>
-                    <a:p>
-                      <a:pPr algn="l" indent="0" marL="0">
-                        <a:buNone/>
-                      </a:pPr>
-                      <a:r>
-                        <a:rPr lang="en-US" sz="1100" dirty="0">
-                          <a:solidFill>
-                            <a:srgbClr val="1F2D3D"/>
-                          </a:solidFill>
-                          <a:latin typeface="Calibri" pitchFamily="34" charset="0"/>
-                          <a:ea typeface="Calibri" pitchFamily="34" charset="-122"/>
-                          <a:cs typeface="Calibri" pitchFamily="34" charset="-120"/>
-                        </a:rPr>
-                        <a:t>scripts 17–18, models/textmining/, TEXT_MINING.md §2–3</a:t>
-                      </a:r>
-                      <a:endParaRPr lang="en-US" sz="1100" dirty="0">
-                        <a:latin typeface="Calibri" charset="0"/>
-                        <a:ea typeface="Calibri" charset="0"/>
-                        <a:cs typeface="Calibri" charset="0"/>
-                      </a:endParaRPr>
-                    </a:p>
-                  </a:txBody>
-                  <a:tcPr marL="63500" marR="63500" marT="25400" marB="25400" anchor="ctr">
-                    <a:lnL w="9525" cap="flat" cmpd="sng" algn="ctr">
-                      <a:solidFill>
-                        <a:srgbClr val="E3E8EF"/>
-                      </a:solidFill>
-                      <a:prstDash val="solid"/>
-                      <a:round/>
-                      <a:headEnd type="none" w="med" len="med"/>
-                      <a:tailEnd type="none" w="med" len="med"/>
-                    </a:lnL>
-                    <a:lnR w="9525" cap="flat" cmpd="sng" algn="ctr">
-                      <a:solidFill>
-                        <a:srgbClr val="E3E8EF"/>
-                      </a:solidFill>
-                      <a:prstDash val="solid"/>
-                      <a:round/>
-                      <a:headEnd type="none" w="med" len="med"/>
-                      <a:tailEnd type="none" w="med" len="med"/>
-                    </a:lnR>
-                    <a:lnT w="9525" cap="flat" cmpd="sng" algn="ctr">
-                      <a:solidFill>
-                        <a:srgbClr val="E3E8EF"/>
-                      </a:solidFill>
-                      <a:prstDash val="solid"/>
-                      <a:round/>
-                      <a:headEnd type="none" w="med" len="med"/>
-                      <a:tailEnd type="none" w="med" len="med"/>
-                    </a:lnT>
-                    <a:lnB w="9525" cap="flat" cmpd="sng" algn="ctr">
-                      <a:solidFill>
-                        <a:srgbClr val="E3E8EF"/>
-                      </a:solidFill>
-                      <a:prstDash val="solid"/>
-                      <a:round/>
-                      <a:headEnd type="none" w="med" len="med"/>
-                      <a:tailEnd type="none" w="med" len="med"/>
-                    </a:lnB>
-                    <a:solidFill>
-                      <a:srgbClr val="FBFCFE"/>
-                    </a:solidFill>
-                  </a:tcPr>
-                </a:tc>
-              </a:tr>
-              <a:tr h="621792">
-                <a:tc>
-                  <a:txBody>
-                    <a:bodyPr/>
-                    <a:lstStyle/>
-                    <a:p>
-                      <a:pPr algn="l" indent="0" marL="0">
-                        <a:buNone/>
-                      </a:pPr>
-                      <a:r>
-                        <a:rPr lang="en-US" sz="1100" b="1" dirty="0">
-                          <a:solidFill>
-                            <a:srgbClr val="1F2D3D"/>
-                          </a:solidFill>
-                          <a:latin typeface="Calibri" pitchFamily="34" charset="0"/>
-                          <a:ea typeface="Calibri" pitchFamily="34" charset="-122"/>
-                          <a:cs typeface="Calibri" pitchFamily="34" charset="-120"/>
-                        </a:rPr>
-                        <a:t>Akshay KS - CB.SC.U4CSE23104</a:t>
-                      </a:r>
-                      <a:endParaRPr lang="en-US" sz="1100" dirty="0">
-                        <a:latin typeface="Calibri" charset="0"/>
-                        <a:ea typeface="Calibri" charset="0"/>
-                        <a:cs typeface="Calibri" charset="0"/>
-                      </a:endParaRPr>
-                    </a:p>
-                  </a:txBody>
-                  <a:tcPr marL="63500" marR="63500" marT="25400" marB="25400" anchor="ctr">
-                    <a:lnL w="9525" cap="flat" cmpd="sng" algn="ctr">
-                      <a:solidFill>
-                        <a:srgbClr val="E3E8EF"/>
-                      </a:solidFill>
-                      <a:prstDash val="solid"/>
-                      <a:round/>
-                      <a:headEnd type="none" w="med" len="med"/>
-                      <a:tailEnd type="none" w="med" len="med"/>
-                    </a:lnL>
-                    <a:lnR w="9525" cap="flat" cmpd="sng" algn="ctr">
-                      <a:solidFill>
-                        <a:srgbClr val="E3E8EF"/>
-                      </a:solidFill>
-                      <a:prstDash val="solid"/>
-                      <a:round/>
-                      <a:headEnd type="none" w="med" len="med"/>
-                      <a:tailEnd type="none" w="med" len="med"/>
-                    </a:lnR>
-                    <a:lnT w="9525" cap="flat" cmpd="sng" algn="ctr">
-                      <a:solidFill>
-                        <a:srgbClr val="E3E8EF"/>
-                      </a:solidFill>
-                      <a:prstDash val="solid"/>
-                      <a:round/>
-                      <a:headEnd type="none" w="med" len="med"/>
-                      <a:tailEnd type="none" w="med" len="med"/>
-                    </a:lnT>
-                    <a:lnB w="9525" cap="flat" cmpd="sng" algn="ctr">
-                      <a:solidFill>
-                        <a:srgbClr val="E3E8EF"/>
-                      </a:solidFill>
-                      <a:prstDash val="solid"/>
-                      <a:round/>
-                      <a:headEnd type="none" w="med" len="med"/>
-                      <a:tailEnd type="none" w="med" len="med"/>
-                    </a:lnB>
-                    <a:solidFill>
-                      <a:srgbClr val="FFFFFF"/>
-                    </a:solidFill>
-                  </a:tcPr>
-                </a:tc>
-                <a:tc>
-                  <a:txBody>
-                    <a:bodyPr/>
-                    <a:lstStyle/>
-                    <a:p>
-                      <a:pPr algn="ctr" indent="0" marL="0">
-                        <a:buNone/>
-                      </a:pPr>
-                      <a:r>
-                        <a:rPr lang="en-US" sz="1100" dirty="0">
-                          <a:solidFill>
-                            <a:srgbClr val="1F2D3D"/>
-                          </a:solidFill>
-                          <a:latin typeface="Calibri" pitchFamily="34" charset="0"/>
-                          <a:ea typeface="Calibri" pitchFamily="34" charset="-122"/>
-                          <a:cs typeface="Calibri" pitchFamily="34" charset="-120"/>
-                        </a:rPr>
-                        <a:t>3</a:t>
-                      </a:r>
-                      <a:endParaRPr lang="en-US" sz="1100" dirty="0">
-                        <a:latin typeface="Calibri" charset="0"/>
-                        <a:ea typeface="Calibri" charset="0"/>
-                        <a:cs typeface="Calibri" charset="0"/>
-                      </a:endParaRPr>
-                    </a:p>
-                  </a:txBody>
-                  <a:tcPr marL="63500" marR="63500" marT="25400" marB="25400" anchor="ctr">
-                    <a:lnL w="9525" cap="flat" cmpd="sng" algn="ctr">
-                      <a:solidFill>
-                        <a:srgbClr val="E3E8EF"/>
-                      </a:solidFill>
-                      <a:prstDash val="solid"/>
-                      <a:round/>
-                      <a:headEnd type="none" w="med" len="med"/>
-                      <a:tailEnd type="none" w="med" len="med"/>
-                    </a:lnL>
-                    <a:lnR w="9525" cap="flat" cmpd="sng" algn="ctr">
-                      <a:solidFill>
-                        <a:srgbClr val="E3E8EF"/>
-                      </a:solidFill>
-                      <a:prstDash val="solid"/>
-                      <a:round/>
-                      <a:headEnd type="none" w="med" len="med"/>
-                      <a:tailEnd type="none" w="med" len="med"/>
-                    </a:lnR>
-                    <a:lnT w="9525" cap="flat" cmpd="sng" algn="ctr">
-                      <a:solidFill>
-                        <a:srgbClr val="E3E8EF"/>
-                      </a:solidFill>
-                      <a:prstDash val="solid"/>
-                      <a:round/>
-                      <a:headEnd type="none" w="med" len="med"/>
-                      <a:tailEnd type="none" w="med" len="med"/>
-                    </a:lnT>
-                    <a:lnB w="9525" cap="flat" cmpd="sng" algn="ctr">
-                      <a:solidFill>
-                        <a:srgbClr val="E3E8EF"/>
-                      </a:solidFill>
-                      <a:prstDash val="solid"/>
-                      <a:round/>
-                      <a:headEnd type="none" w="med" len="med"/>
-                      <a:tailEnd type="none" w="med" len="med"/>
-                    </a:lnB>
-                    <a:solidFill>
-                      <a:srgbClr val="FFFFFF"/>
-                    </a:solidFill>
-                  </a:tcPr>
-                </a:tc>
-                <a:tc>
-                  <a:txBody>
-                    <a:bodyPr/>
-                    <a:lstStyle/>
-                    <a:p>
-                      <a:pPr algn="l" indent="0" marL="0">
-                        <a:buNone/>
-                      </a:pPr>
-                      <a:r>
-                        <a:rPr lang="en-US" sz="1100" dirty="0">
-                          <a:solidFill>
-                            <a:srgbClr val="1F2D3D"/>
-                          </a:solidFill>
-                          <a:latin typeface="Calibri" pitchFamily="34" charset="0"/>
-                          <a:ea typeface="Calibri" pitchFamily="34" charset="-122"/>
-                          <a:cs typeface="Calibri" pitchFamily="34" charset="-120"/>
-                        </a:rPr>
-                        <a:t>#135 ARIMA forecasting with rolling backtest, #139 text-mining dashboard page</a:t>
-                      </a:r>
-                      <a:endParaRPr lang="en-US" sz="1100" dirty="0">
-                        <a:latin typeface="Calibri" charset="0"/>
-                        <a:ea typeface="Calibri" charset="0"/>
-                        <a:cs typeface="Calibri" charset="0"/>
-                      </a:endParaRPr>
-                    </a:p>
-                  </a:txBody>
-                  <a:tcPr marL="63500" marR="63500" marT="25400" marB="25400" anchor="ctr">
-                    <a:lnL w="9525" cap="flat" cmpd="sng" algn="ctr">
-                      <a:solidFill>
-                        <a:srgbClr val="E3E8EF"/>
-                      </a:solidFill>
-                      <a:prstDash val="solid"/>
-                      <a:round/>
-                      <a:headEnd type="none" w="med" len="med"/>
-                      <a:tailEnd type="none" w="med" len="med"/>
-                    </a:lnL>
-                    <a:lnR w="9525" cap="flat" cmpd="sng" algn="ctr">
-                      <a:solidFill>
-                        <a:srgbClr val="E3E8EF"/>
-                      </a:solidFill>
-                      <a:prstDash val="solid"/>
-                      <a:round/>
-                      <a:headEnd type="none" w="med" len="med"/>
-                      <a:tailEnd type="none" w="med" len="med"/>
-                    </a:lnR>
-                    <a:lnT w="9525" cap="flat" cmpd="sng" algn="ctr">
-                      <a:solidFill>
-                        <a:srgbClr val="E3E8EF"/>
-                      </a:solidFill>
-                      <a:prstDash val="solid"/>
-                      <a:round/>
-                      <a:headEnd type="none" w="med" len="med"/>
-                      <a:tailEnd type="none" w="med" len="med"/>
-                    </a:lnT>
-                    <a:lnB w="9525" cap="flat" cmpd="sng" algn="ctr">
-                      <a:solidFill>
-                        <a:srgbClr val="E3E8EF"/>
-                      </a:solidFill>
-                      <a:prstDash val="solid"/>
-                      <a:round/>
-                      <a:headEnd type="none" w="med" len="med"/>
-                      <a:tailEnd type="none" w="med" len="med"/>
-                    </a:lnB>
-                    <a:solidFill>
-                      <a:srgbClr val="FFFFFF"/>
-                    </a:solidFill>
-                  </a:tcPr>
-                </a:tc>
-                <a:tc>
-                  <a:txBody>
-                    <a:bodyPr/>
-                    <a:lstStyle/>
-                    <a:p>
-                      <a:pPr algn="l" indent="0" marL="0">
-                        <a:buNone/>
-                      </a:pPr>
-                      <a:r>
-                        <a:rPr lang="en-US" sz="1100" dirty="0">
-                          <a:solidFill>
-                            <a:srgbClr val="1F2D3D"/>
-                          </a:solidFill>
-                          <a:latin typeface="Calibri" pitchFamily="34" charset="0"/>
-                          <a:ea typeface="Calibri" pitchFamily="34" charset="-122"/>
-                          <a:cs typeface="Calibri" pitchFamily="34" charset="-120"/>
-                        </a:rPr>
-                        <a:t>#152, #153 (9 Oct)</a:t>
-                      </a:r>
-                      <a:endParaRPr lang="en-US" sz="1100" dirty="0">
-                        <a:latin typeface="Calibri" charset="0"/>
-                        <a:ea typeface="Calibri" charset="0"/>
-                        <a:cs typeface="Calibri" charset="0"/>
-                      </a:endParaRPr>
-                    </a:p>
-                  </a:txBody>
-                  <a:tcPr marL="63500" marR="63500" marT="25400" marB="25400" anchor="ctr">
-                    <a:lnL w="9525" cap="flat" cmpd="sng" algn="ctr">
-                      <a:solidFill>
-                        <a:srgbClr val="E3E8EF"/>
-                      </a:solidFill>
-                      <a:prstDash val="solid"/>
-                      <a:round/>
-                      <a:headEnd type="none" w="med" len="med"/>
-                      <a:tailEnd type="none" w="med" len="med"/>
-                    </a:lnL>
-                    <a:lnR w="9525" cap="flat" cmpd="sng" algn="ctr">
-                      <a:solidFill>
-                        <a:srgbClr val="E3E8EF"/>
-                      </a:solidFill>
-                      <a:prstDash val="solid"/>
-                      <a:round/>
-                      <a:headEnd type="none" w="med" len="med"/>
-                      <a:tailEnd type="none" w="med" len="med"/>
-                    </a:lnR>
-                    <a:lnT w="9525" cap="flat" cmpd="sng" algn="ctr">
-                      <a:solidFill>
-                        <a:srgbClr val="E3E8EF"/>
-                      </a:solidFill>
-                      <a:prstDash val="solid"/>
-                      <a:round/>
-                      <a:headEnd type="none" w="med" len="med"/>
-                      <a:tailEnd type="none" w="med" len="med"/>
-                    </a:lnT>
-                    <a:lnB w="9525" cap="flat" cmpd="sng" algn="ctr">
-                      <a:solidFill>
-                        <a:srgbClr val="E3E8EF"/>
-                      </a:solidFill>
-                      <a:prstDash val="solid"/>
-                      <a:round/>
-                      <a:headEnd type="none" w="med" len="med"/>
-                      <a:tailEnd type="none" w="med" len="med"/>
-                    </a:lnB>
-                    <a:solidFill>
-                      <a:srgbClr val="FFFFFF"/>
-                    </a:solidFill>
-                  </a:tcPr>
-                </a:tc>
-                <a:tc>
-                  <a:txBody>
-                    <a:bodyPr/>
-                    <a:lstStyle/>
-                    <a:p>
-                      <a:pPr algn="l" indent="0" marL="0">
-                        <a:buNone/>
-                      </a:pPr>
-                      <a:r>
-                        <a:rPr lang="en-US" sz="1100" dirty="0">
-                          <a:solidFill>
-                            <a:srgbClr val="1F2D3D"/>
-                          </a:solidFill>
-                          <a:latin typeface="Calibri" pitchFamily="34" charset="0"/>
-                          <a:ea typeface="Calibri" pitchFamily="34" charset="-122"/>
-                          <a:cs typeface="Calibri" pitchFamily="34" charset="-120"/>
-                        </a:rPr>
-                        <a:t>scripts/19_forecasting.py, 20_topic_examples.py, TIME_SERIES.md §2, text_mining.py</a:t>
-                      </a:r>
-                      <a:endParaRPr lang="en-US" sz="1100" dirty="0">
-                        <a:latin typeface="Calibri" charset="0"/>
-                        <a:ea typeface="Calibri" charset="0"/>
-                        <a:cs typeface="Calibri" charset="0"/>
-                      </a:endParaRPr>
-                    </a:p>
-                  </a:txBody>
-                  <a:tcPr marL="63500" marR="63500" marT="25400" marB="25400" anchor="ctr">
-                    <a:lnL w="9525" cap="flat" cmpd="sng" algn="ctr">
-                      <a:solidFill>
-                        <a:srgbClr val="E3E8EF"/>
-                      </a:solidFill>
-                      <a:prstDash val="solid"/>
-                      <a:round/>
-                      <a:headEnd type="none" w="med" len="med"/>
-                      <a:tailEnd type="none" w="med" len="med"/>
-                    </a:lnL>
-                    <a:lnR w="9525" cap="flat" cmpd="sng" algn="ctr">
-                      <a:solidFill>
-                        <a:srgbClr val="E3E8EF"/>
-                      </a:solidFill>
-                      <a:prstDash val="solid"/>
-                      <a:round/>
-                      <a:headEnd type="none" w="med" len="med"/>
-                      <a:tailEnd type="none" w="med" len="med"/>
-                    </a:lnR>
-                    <a:lnT w="9525" cap="flat" cmpd="sng" algn="ctr">
-                      <a:solidFill>
-                        <a:srgbClr val="E3E8EF"/>
-                      </a:solidFill>
-                      <a:prstDash val="solid"/>
-                      <a:round/>
-                      <a:headEnd type="none" w="med" len="med"/>
-                      <a:tailEnd type="none" w="med" len="med"/>
-                    </a:lnT>
-                    <a:lnB w="9525" cap="flat" cmpd="sng" algn="ctr">
-                      <a:solidFill>
-                        <a:srgbClr val="E3E8EF"/>
-                      </a:solidFill>
-                      <a:prstDash val="solid"/>
-                      <a:round/>
-                      <a:headEnd type="none" w="med" len="med"/>
-                      <a:tailEnd type="none" w="med" len="med"/>
-                    </a:lnB>
-                    <a:solidFill>
-                      <a:srgbClr val="FFFFFF"/>
-                    </a:solidFill>
-                  </a:tcPr>
-                </a:tc>
-              </a:tr>
-              <a:tr h="548640">
-                <a:tc>
-                  <a:txBody>
-                    <a:bodyPr/>
-                    <a:lstStyle/>
-                    <a:p>
-                      <a:pPr algn="l" indent="0" marL="0">
-                        <a:buNone/>
-                      </a:pPr>
-                      <a:r>
-                        <a:rPr lang="en-US" sz="1100" b="1" dirty="0">
-                          <a:solidFill>
-                            <a:srgbClr val="1F2D3D"/>
-                          </a:solidFill>
-                          <a:latin typeface="Calibri" pitchFamily="34" charset="0"/>
-                          <a:ea typeface="Calibri" pitchFamily="34" charset="-122"/>
-                          <a:cs typeface="Calibri" pitchFamily="34" charset="-120"/>
-                        </a:rPr>
-                        <a:t>Harshini Vennela - CB.SC.U4CSE23455</a:t>
-                      </a:r>
-                      <a:endParaRPr lang="en-US" sz="1100" dirty="0">
-                        <a:latin typeface="Calibri" charset="0"/>
-                        <a:ea typeface="Calibri" charset="0"/>
-                        <a:cs typeface="Calibri" charset="0"/>
-                      </a:endParaRPr>
-                    </a:p>
-                  </a:txBody>
-                  <a:tcPr marL="63500" marR="63500" marT="25400" marB="25400" anchor="ctr">
-                    <a:lnL w="9525" cap="flat" cmpd="sng" algn="ctr">
-                      <a:solidFill>
-                        <a:srgbClr val="E3E8EF"/>
-                      </a:solidFill>
-                      <a:prstDash val="solid"/>
-                      <a:round/>
-                      <a:headEnd type="none" w="med" len="med"/>
-                      <a:tailEnd type="none" w="med" len="med"/>
-                    </a:lnL>
-                    <a:lnR w="9525" cap="flat" cmpd="sng" algn="ctr">
-                      <a:solidFill>
-                        <a:srgbClr val="E3E8EF"/>
-                      </a:solidFill>
-                      <a:prstDash val="solid"/>
-                      <a:round/>
-                      <a:headEnd type="none" w="med" len="med"/>
-                      <a:tailEnd type="none" w="med" len="med"/>
-                    </a:lnR>
-                    <a:lnT w="9525" cap="flat" cmpd="sng" algn="ctr">
-                      <a:solidFill>
-                        <a:srgbClr val="E3E8EF"/>
-                      </a:solidFill>
-                      <a:prstDash val="solid"/>
-                      <a:round/>
-                      <a:headEnd type="none" w="med" len="med"/>
-                      <a:tailEnd type="none" w="med" len="med"/>
-                    </a:lnT>
-                    <a:lnB w="9525" cap="flat" cmpd="sng" algn="ctr">
-                      <a:solidFill>
-                        <a:srgbClr val="E3E8EF"/>
-                      </a:solidFill>
-                      <a:prstDash val="solid"/>
-                      <a:round/>
-                      <a:headEnd type="none" w="med" len="med"/>
-                      <a:tailEnd type="none" w="med" len="med"/>
-                    </a:lnB>
-                    <a:solidFill>
-                      <a:srgbClr val="FBFCFE"/>
-                    </a:solidFill>
-                  </a:tcPr>
-                </a:tc>
-                <a:tc>
-                  <a:txBody>
-                    <a:bodyPr/>
-                    <a:lstStyle/>
-                    <a:p>
-                      <a:pPr algn="ctr" indent="0" marL="0">
-                        <a:buNone/>
-                      </a:pPr>
-                      <a:r>
-                        <a:rPr lang="en-US" sz="1100" dirty="0">
-                          <a:solidFill>
-                            <a:srgbClr val="1F2D3D"/>
-                          </a:solidFill>
-                          <a:latin typeface="Calibri" pitchFamily="34" charset="0"/>
-                          <a:ea typeface="Calibri" pitchFamily="34" charset="-122"/>
-                          <a:cs typeface="Calibri" pitchFamily="34" charset="-120"/>
-                        </a:rPr>
-                        <a:t>4</a:t>
-                      </a:r>
-                      <a:endParaRPr lang="en-US" sz="1100" dirty="0">
-                        <a:latin typeface="Calibri" charset="0"/>
-                        <a:ea typeface="Calibri" charset="0"/>
-                        <a:cs typeface="Calibri" charset="0"/>
-                      </a:endParaRPr>
-                    </a:p>
-                  </a:txBody>
-                  <a:tcPr marL="63500" marR="63500" marT="25400" marB="25400" anchor="ctr">
-                    <a:lnL w="9525" cap="flat" cmpd="sng" algn="ctr">
-                      <a:solidFill>
-                        <a:srgbClr val="E3E8EF"/>
-                      </a:solidFill>
-                      <a:prstDash val="solid"/>
-                      <a:round/>
-                      <a:headEnd type="none" w="med" len="med"/>
-                      <a:tailEnd type="none" w="med" len="med"/>
-                    </a:lnL>
-                    <a:lnR w="9525" cap="flat" cmpd="sng" algn="ctr">
-                      <a:solidFill>
-                        <a:srgbClr val="E3E8EF"/>
-                      </a:solidFill>
-                      <a:prstDash val="solid"/>
-                      <a:round/>
-                      <a:headEnd type="none" w="med" len="med"/>
-                      <a:tailEnd type="none" w="med" len="med"/>
-                    </a:lnR>
-                    <a:lnT w="9525" cap="flat" cmpd="sng" algn="ctr">
-                      <a:solidFill>
-                        <a:srgbClr val="E3E8EF"/>
-                      </a:solidFill>
-                      <a:prstDash val="solid"/>
-                      <a:round/>
-                      <a:headEnd type="none" w="med" len="med"/>
-                      <a:tailEnd type="none" w="med" len="med"/>
-                    </a:lnT>
-                    <a:lnB w="9525" cap="flat" cmpd="sng" algn="ctr">
-                      <a:solidFill>
-                        <a:srgbClr val="E3E8EF"/>
-                      </a:solidFill>
-                      <a:prstDash val="solid"/>
-                      <a:round/>
-                      <a:headEnd type="none" w="med" len="med"/>
-                      <a:tailEnd type="none" w="med" len="med"/>
-                    </a:lnB>
-                    <a:solidFill>
-                      <a:srgbClr val="FBFCFE"/>
-                    </a:solidFill>
-                  </a:tcPr>
-                </a:tc>
-                <a:tc>
-                  <a:txBody>
-                    <a:bodyPr/>
-                    <a:lstStyle/>
-                    <a:p>
-                      <a:pPr algn="l" indent="0" marL="0">
-                        <a:buNone/>
-                      </a:pPr>
-                      <a:r>
-                        <a:rPr lang="en-US" sz="1100" dirty="0">
-                          <a:solidFill>
-                            <a:srgbClr val="1F2D3D"/>
-                          </a:solidFill>
-                          <a:latin typeface="Calibri" pitchFamily="34" charset="0"/>
-                          <a:ea typeface="Calibri" pitchFamily="34" charset="-122"/>
-                          <a:cs typeface="Calibri" pitchFamily="34" charset="-120"/>
-                        </a:rPr>
-                        <a:t>#137 forecast evaluation and alerts, #142 forecast write-up, #146 check-a-review page</a:t>
-                      </a:r>
-                      <a:endParaRPr lang="en-US" sz="1100" dirty="0">
-                        <a:latin typeface="Calibri" charset="0"/>
-                        <a:ea typeface="Calibri" charset="0"/>
-                        <a:cs typeface="Calibri" charset="0"/>
-                      </a:endParaRPr>
-                    </a:p>
-                  </a:txBody>
-                  <a:tcPr marL="63500" marR="63500" marT="25400" marB="25400" anchor="ctr">
-                    <a:lnL w="9525" cap="flat" cmpd="sng" algn="ctr">
-                      <a:solidFill>
-                        <a:srgbClr val="E3E8EF"/>
-                      </a:solidFill>
-                      <a:prstDash val="solid"/>
-                      <a:round/>
-                      <a:headEnd type="none" w="med" len="med"/>
-                      <a:tailEnd type="none" w="med" len="med"/>
-                    </a:lnL>
-                    <a:lnR w="9525" cap="flat" cmpd="sng" algn="ctr">
-                      <a:solidFill>
-                        <a:srgbClr val="E3E8EF"/>
-                      </a:solidFill>
-                      <a:prstDash val="solid"/>
-                      <a:round/>
-                      <a:headEnd type="none" w="med" len="med"/>
-                      <a:tailEnd type="none" w="med" len="med"/>
-                    </a:lnR>
-                    <a:lnT w="9525" cap="flat" cmpd="sng" algn="ctr">
-                      <a:solidFill>
-                        <a:srgbClr val="E3E8EF"/>
-                      </a:solidFill>
-                      <a:prstDash val="solid"/>
-                      <a:round/>
-                      <a:headEnd type="none" w="med" len="med"/>
-                      <a:tailEnd type="none" w="med" len="med"/>
-                    </a:lnT>
-                    <a:lnB w="9525" cap="flat" cmpd="sng" algn="ctr">
-                      <a:solidFill>
-                        <a:srgbClr val="E3E8EF"/>
-                      </a:solidFill>
-                      <a:prstDash val="solid"/>
-                      <a:round/>
-                      <a:headEnd type="none" w="med" len="med"/>
-                      <a:tailEnd type="none" w="med" len="med"/>
-                    </a:lnB>
-                    <a:solidFill>
-                      <a:srgbClr val="FBFCFE"/>
-                    </a:solidFill>
-                  </a:tcPr>
-                </a:tc>
-                <a:tc>
-                  <a:txBody>
-                    <a:bodyPr/>
-                    <a:lstStyle/>
-                    <a:p>
-                      <a:pPr algn="l" indent="0" marL="0">
-                        <a:buNone/>
-                      </a:pPr>
-                      <a:r>
-                        <a:rPr lang="en-US" sz="1100" dirty="0">
-                          <a:solidFill>
-                            <a:srgbClr val="1F2D3D"/>
-                          </a:solidFill>
-                          <a:latin typeface="Calibri" pitchFamily="34" charset="0"/>
-                          <a:ea typeface="Calibri" pitchFamily="34" charset="-122"/>
-                          <a:cs typeface="Calibri" pitchFamily="34" charset="-120"/>
-                        </a:rPr>
-                        <a:t>#154, #155, #156 (10 Oct)</a:t>
-                      </a:r>
-                      <a:endParaRPr lang="en-US" sz="1100" dirty="0">
-                        <a:latin typeface="Calibri" charset="0"/>
-                        <a:ea typeface="Calibri" charset="0"/>
-                        <a:cs typeface="Calibri" charset="0"/>
-                      </a:endParaRPr>
-                    </a:p>
-                  </a:txBody>
-                  <a:tcPr marL="63500" marR="63500" marT="25400" marB="25400" anchor="ctr">
-                    <a:lnL w="9525" cap="flat" cmpd="sng" algn="ctr">
-                      <a:solidFill>
-                        <a:srgbClr val="E3E8EF"/>
-                      </a:solidFill>
-                      <a:prstDash val="solid"/>
-                      <a:round/>
-                      <a:headEnd type="none" w="med" len="med"/>
-                      <a:tailEnd type="none" w="med" len="med"/>
-                    </a:lnL>
-                    <a:lnR w="9525" cap="flat" cmpd="sng" algn="ctr">
-                      <a:solidFill>
-                        <a:srgbClr val="E3E8EF"/>
-                      </a:solidFill>
-                      <a:prstDash val="solid"/>
-                      <a:round/>
-                      <a:headEnd type="none" w="med" len="med"/>
-                      <a:tailEnd type="none" w="med" len="med"/>
-                    </a:lnR>
-                    <a:lnT w="9525" cap="flat" cmpd="sng" algn="ctr">
-                      <a:solidFill>
-                        <a:srgbClr val="E3E8EF"/>
-                      </a:solidFill>
-                      <a:prstDash val="solid"/>
-                      <a:round/>
-                      <a:headEnd type="none" w="med" len="med"/>
-                      <a:tailEnd type="none" w="med" len="med"/>
-                    </a:lnT>
-                    <a:lnB w="9525" cap="flat" cmpd="sng" algn="ctr">
-                      <a:solidFill>
-                        <a:srgbClr val="E3E8EF"/>
-                      </a:solidFill>
-                      <a:prstDash val="solid"/>
-                      <a:round/>
-                      <a:headEnd type="none" w="med" len="med"/>
-                      <a:tailEnd type="none" w="med" len="med"/>
-                    </a:lnB>
-                    <a:solidFill>
-                      <a:srgbClr val="FBFCFE"/>
-                    </a:solidFill>
-                  </a:tcPr>
-                </a:tc>
-                <a:tc>
-                  <a:txBody>
-                    <a:bodyPr/>
-                    <a:lstStyle/>
-                    <a:p>
-                      <a:pPr algn="l" indent="0" marL="0">
-                        <a:buNone/>
-                      </a:pPr>
-                      <a:r>
-                        <a:rPr lang="en-US" sz="1100" dirty="0">
-                          <a:solidFill>
-                            <a:srgbClr val="1F2D3D"/>
-                          </a:solidFill>
-                          <a:latin typeface="Calibri" pitchFamily="34" charset="0"/>
-                          <a:ea typeface="Calibri" pitchFamily="34" charset="-122"/>
-                          <a:cs typeface="Calibri" pitchFamily="34" charset="-120"/>
-                        </a:rPr>
-                        <a:t>scripts/20_forecast_evaluation.py, TIME_SERIES.md §2.5, check_review.py</a:t>
-                      </a:r>
-                      <a:endParaRPr lang="en-US" sz="1100" dirty="0">
-                        <a:latin typeface="Calibri" charset="0"/>
-                        <a:ea typeface="Calibri" charset="0"/>
-                        <a:cs typeface="Calibri" charset="0"/>
-                      </a:endParaRPr>
-                    </a:p>
-                  </a:txBody>
-                  <a:tcPr marL="63500" marR="63500" marT="25400" marB="25400" anchor="ctr">
-                    <a:lnL w="9525" cap="flat" cmpd="sng" algn="ctr">
-                      <a:solidFill>
-                        <a:srgbClr val="E3E8EF"/>
-                      </a:solidFill>
-                      <a:prstDash val="solid"/>
-                      <a:round/>
-                      <a:headEnd type="none" w="med" len="med"/>
-                      <a:tailEnd type="none" w="med" len="med"/>
-                    </a:lnL>
-                    <a:lnR w="9525" cap="flat" cmpd="sng" algn="ctr">
-                      <a:solidFill>
-                        <a:srgbClr val="E3E8EF"/>
-                      </a:solidFill>
-                      <a:prstDash val="solid"/>
-                      <a:round/>
-                      <a:headEnd type="none" w="med" len="med"/>
-                      <a:tailEnd type="none" w="med" len="med"/>
-                    </a:lnR>
-                    <a:lnT w="9525" cap="flat" cmpd="sng" algn="ctr">
-                      <a:solidFill>
-                        <a:srgbClr val="E3E8EF"/>
-                      </a:solidFill>
-                      <a:prstDash val="solid"/>
-                      <a:round/>
-                      <a:headEnd type="none" w="med" len="med"/>
-                      <a:tailEnd type="none" w="med" len="med"/>
-                    </a:lnT>
-                    <a:lnB w="9525" cap="flat" cmpd="sng" algn="ctr">
-                      <a:solidFill>
-                        <a:srgbClr val="E3E8EF"/>
-                      </a:solidFill>
-                      <a:prstDash val="solid"/>
-                      <a:round/>
-                      <a:headEnd type="none" w="med" len="med"/>
-                      <a:tailEnd type="none" w="med" len="med"/>
-                    </a:lnB>
-                    <a:solidFill>
-                      <a:srgbClr val="FBFCFE"/>
-                    </a:solidFill>
-                  </a:tcPr>
-                </a:tc>
-              </a:tr>
-              <a:tr h="548640">
-                <a:tc>
-                  <a:txBody>
-                    <a:bodyPr/>
-                    <a:lstStyle/>
-                    <a:p>
-                      <a:pPr algn="l" indent="0" marL="0">
-                        <a:buNone/>
-                      </a:pPr>
-                      <a:r>
-                        <a:rPr lang="en-US" sz="1100" b="1" dirty="0">
-                          <a:solidFill>
-                            <a:srgbClr val="1F2D3D"/>
-                          </a:solidFill>
-                          <a:latin typeface="Calibri" pitchFamily="34" charset="0"/>
-                          <a:ea typeface="Calibri" pitchFamily="34" charset="-122"/>
-                          <a:cs typeface="Calibri" pitchFamily="34" charset="-120"/>
-                        </a:rPr>
-                        <a:t>Kanishka D - CB.SC.U4CSE23155</a:t>
-                      </a:r>
-                      <a:endParaRPr lang="en-US" sz="1100" dirty="0">
-                        <a:latin typeface="Calibri" charset="0"/>
-                        <a:ea typeface="Calibri" charset="0"/>
-                        <a:cs typeface="Calibri" charset="0"/>
-                      </a:endParaRPr>
-                    </a:p>
-                  </a:txBody>
-                  <a:tcPr marL="63500" marR="63500" marT="25400" marB="25400" anchor="ctr">
-                    <a:lnL w="9525" cap="flat" cmpd="sng" algn="ctr">
-                      <a:solidFill>
-                        <a:srgbClr val="E3E8EF"/>
-                      </a:solidFill>
-                      <a:prstDash val="solid"/>
-                      <a:round/>
-                      <a:headEnd type="none" w="med" len="med"/>
-                      <a:tailEnd type="none" w="med" len="med"/>
-                    </a:lnL>
-                    <a:lnR w="9525" cap="flat" cmpd="sng" algn="ctr">
-                      <a:solidFill>
-                        <a:srgbClr val="E3E8EF"/>
-                      </a:solidFill>
-                      <a:prstDash val="solid"/>
-                      <a:round/>
-                      <a:headEnd type="none" w="med" len="med"/>
-                      <a:tailEnd type="none" w="med" len="med"/>
-                    </a:lnR>
-                    <a:lnT w="9525" cap="flat" cmpd="sng" algn="ctr">
-                      <a:solidFill>
-                        <a:srgbClr val="E3E8EF"/>
-                      </a:solidFill>
-                      <a:prstDash val="solid"/>
-                      <a:round/>
-                      <a:headEnd type="none" w="med" len="med"/>
-                      <a:tailEnd type="none" w="med" len="med"/>
-                    </a:lnT>
-                    <a:lnB w="9525" cap="flat" cmpd="sng" algn="ctr">
-                      <a:solidFill>
-                        <a:srgbClr val="E3E8EF"/>
-                      </a:solidFill>
-                      <a:prstDash val="solid"/>
-                      <a:round/>
-                      <a:headEnd type="none" w="med" len="med"/>
-                      <a:tailEnd type="none" w="med" len="med"/>
-                    </a:lnB>
-                    <a:solidFill>
-                      <a:srgbClr val="FFFFFF"/>
-                    </a:solidFill>
-                  </a:tcPr>
-                </a:tc>
-                <a:tc>
-                  <a:txBody>
-                    <a:bodyPr/>
-                    <a:lstStyle/>
-                    <a:p>
-                      <a:pPr algn="ctr" indent="0" marL="0">
-                        <a:buNone/>
-                      </a:pPr>
-                      <a:r>
-                        <a:rPr lang="en-US" sz="1100" dirty="0">
-                          <a:solidFill>
-                            <a:srgbClr val="1F2D3D"/>
-                          </a:solidFill>
-                          <a:latin typeface="Calibri" pitchFamily="34" charset="0"/>
-                          <a:ea typeface="Calibri" pitchFamily="34" charset="-122"/>
-                          <a:cs typeface="Calibri" pitchFamily="34" charset="-120"/>
-                        </a:rPr>
-                        <a:t>5</a:t>
-                      </a:r>
-                      <a:endParaRPr lang="en-US" sz="1100" dirty="0">
-                        <a:latin typeface="Calibri" charset="0"/>
-                        <a:ea typeface="Calibri" charset="0"/>
-                        <a:cs typeface="Calibri" charset="0"/>
-                      </a:endParaRPr>
-                    </a:p>
-                  </a:txBody>
-                  <a:tcPr marL="63500" marR="63500" marT="25400" marB="25400" anchor="ctr">
-                    <a:lnL w="9525" cap="flat" cmpd="sng" algn="ctr">
-                      <a:solidFill>
-                        <a:srgbClr val="E3E8EF"/>
-                      </a:solidFill>
-                      <a:prstDash val="solid"/>
-                      <a:round/>
-                      <a:headEnd type="none" w="med" len="med"/>
-                      <a:tailEnd type="none" w="med" len="med"/>
-                    </a:lnL>
-                    <a:lnR w="9525" cap="flat" cmpd="sng" algn="ctr">
-                      <a:solidFill>
-                        <a:srgbClr val="E3E8EF"/>
-                      </a:solidFill>
-                      <a:prstDash val="solid"/>
-                      <a:round/>
-                      <a:headEnd type="none" w="med" len="med"/>
-                      <a:tailEnd type="none" w="med" len="med"/>
-                    </a:lnR>
-                    <a:lnT w="9525" cap="flat" cmpd="sng" algn="ctr">
-                      <a:solidFill>
-                        <a:srgbClr val="E3E8EF"/>
-                      </a:solidFill>
-                      <a:prstDash val="solid"/>
-                      <a:round/>
-                      <a:headEnd type="none" w="med" len="med"/>
-                      <a:tailEnd type="none" w="med" len="med"/>
-                    </a:lnT>
-                    <a:lnB w="9525" cap="flat" cmpd="sng" algn="ctr">
-                      <a:solidFill>
-                        <a:srgbClr val="E3E8EF"/>
-                      </a:solidFill>
-                      <a:prstDash val="solid"/>
-                      <a:round/>
-                      <a:headEnd type="none" w="med" len="med"/>
-                      <a:tailEnd type="none" w="med" len="med"/>
-                    </a:lnB>
-                    <a:solidFill>
-                      <a:srgbClr val="FFFFFF"/>
-                    </a:solidFill>
-                  </a:tcPr>
-                </a:tc>
-                <a:tc>
-                  <a:txBody>
-                    <a:bodyPr/>
-                    <a:lstStyle/>
-                    <a:p>
-                      <a:pPr algn="l" indent="0" marL="0">
-                        <a:buNone/>
-                      </a:pPr>
-                      <a:r>
-                        <a:rPr lang="en-US" sz="1100" dirty="0">
-                          <a:solidFill>
-                            <a:srgbClr val="1F2D3D"/>
-                          </a:solidFill>
-                          <a:latin typeface="Calibri" pitchFamily="34" charset="0"/>
-                          <a:ea typeface="Calibri" pitchFamily="34" charset="-122"/>
-                          <a:cs typeface="Calibri" pitchFamily="34" charset="-120"/>
-                        </a:rPr>
-                        <a:t>#138 update impact, #141 combined insights, #140 three dashboard pages, #143 final notebook</a:t>
-                      </a:r>
-                      <a:endParaRPr lang="en-US" sz="1100" dirty="0">
-                        <a:latin typeface="Calibri" charset="0"/>
-                        <a:ea typeface="Calibri" charset="0"/>
-                        <a:cs typeface="Calibri" charset="0"/>
-                      </a:endParaRPr>
-                    </a:p>
-                  </a:txBody>
-                  <a:tcPr marL="63500" marR="63500" marT="25400" marB="25400" anchor="ctr">
-                    <a:lnL w="9525" cap="flat" cmpd="sng" algn="ctr">
-                      <a:solidFill>
-                        <a:srgbClr val="E3E8EF"/>
-                      </a:solidFill>
-                      <a:prstDash val="solid"/>
-                      <a:round/>
-                      <a:headEnd type="none" w="med" len="med"/>
-                      <a:tailEnd type="none" w="med" len="med"/>
-                    </a:lnL>
-                    <a:lnR w="9525" cap="flat" cmpd="sng" algn="ctr">
-                      <a:solidFill>
-                        <a:srgbClr val="E3E8EF"/>
-                      </a:solidFill>
-                      <a:prstDash val="solid"/>
-                      <a:round/>
-                      <a:headEnd type="none" w="med" len="med"/>
-                      <a:tailEnd type="none" w="med" len="med"/>
-                    </a:lnR>
-                    <a:lnT w="9525" cap="flat" cmpd="sng" algn="ctr">
-                      <a:solidFill>
-                        <a:srgbClr val="E3E8EF"/>
-                      </a:solidFill>
-                      <a:prstDash val="solid"/>
-                      <a:round/>
-                      <a:headEnd type="none" w="med" len="med"/>
-                      <a:tailEnd type="none" w="med" len="med"/>
-                    </a:lnT>
-                    <a:lnB w="9525" cap="flat" cmpd="sng" algn="ctr">
-                      <a:solidFill>
-                        <a:srgbClr val="E3E8EF"/>
-                      </a:solidFill>
-                      <a:prstDash val="solid"/>
-                      <a:round/>
-                      <a:headEnd type="none" w="med" len="med"/>
-                      <a:tailEnd type="none" w="med" len="med"/>
-                    </a:lnB>
-                    <a:solidFill>
-                      <a:srgbClr val="FFFFFF"/>
-                    </a:solidFill>
-                  </a:tcPr>
-                </a:tc>
-                <a:tc>
-                  <a:txBody>
-                    <a:bodyPr/>
-                    <a:lstStyle/>
-                    <a:p>
-                      <a:pPr algn="l" indent="0" marL="0">
-                        <a:buNone/>
-                      </a:pPr>
-                      <a:r>
-                        <a:rPr lang="en-US" sz="1100" dirty="0">
-                          <a:solidFill>
-                            <a:srgbClr val="1F2D3D"/>
-                          </a:solidFill>
-                          <a:latin typeface="Calibri" pitchFamily="34" charset="0"/>
-                          <a:ea typeface="Calibri" pitchFamily="34" charset="-122"/>
-                          <a:cs typeface="Calibri" pitchFamily="34" charset="-120"/>
-                        </a:rPr>
-                        <a:t>#157, #158 (11 Oct)</a:t>
-                      </a:r>
-                      <a:endParaRPr lang="en-US" sz="1100" dirty="0">
-                        <a:latin typeface="Calibri" charset="0"/>
-                        <a:ea typeface="Calibri" charset="0"/>
-                        <a:cs typeface="Calibri" charset="0"/>
-                      </a:endParaRPr>
-                    </a:p>
-                  </a:txBody>
-                  <a:tcPr marL="63500" marR="63500" marT="25400" marB="25400" anchor="ctr">
-                    <a:lnL w="9525" cap="flat" cmpd="sng" algn="ctr">
-                      <a:solidFill>
-                        <a:srgbClr val="E3E8EF"/>
-                      </a:solidFill>
-                      <a:prstDash val="solid"/>
-                      <a:round/>
-                      <a:headEnd type="none" w="med" len="med"/>
-                      <a:tailEnd type="none" w="med" len="med"/>
-                    </a:lnL>
-                    <a:lnR w="9525" cap="flat" cmpd="sng" algn="ctr">
-                      <a:solidFill>
-                        <a:srgbClr val="E3E8EF"/>
-                      </a:solidFill>
-                      <a:prstDash val="solid"/>
-                      <a:round/>
-                      <a:headEnd type="none" w="med" len="med"/>
-                      <a:tailEnd type="none" w="med" len="med"/>
-                    </a:lnR>
-                    <a:lnT w="9525" cap="flat" cmpd="sng" algn="ctr">
-                      <a:solidFill>
-                        <a:srgbClr val="E3E8EF"/>
-                      </a:solidFill>
-                      <a:prstDash val="solid"/>
-                      <a:round/>
-                      <a:headEnd type="none" w="med" len="med"/>
-                      <a:tailEnd type="none" w="med" len="med"/>
-                    </a:lnT>
-                    <a:lnB w="9525" cap="flat" cmpd="sng" algn="ctr">
-                      <a:solidFill>
-                        <a:srgbClr val="E3E8EF"/>
-                      </a:solidFill>
-                      <a:prstDash val="solid"/>
-                      <a:round/>
-                      <a:headEnd type="none" w="med" len="med"/>
-                      <a:tailEnd type="none" w="med" len="med"/>
-                    </a:lnB>
-                    <a:solidFill>
-                      <a:srgbClr val="FFFFFF"/>
-                    </a:solidFill>
-                  </a:tcPr>
-                </a:tc>
-                <a:tc>
-                  <a:txBody>
-                    <a:bodyPr/>
-                    <a:lstStyle/>
-                    <a:p>
-                      <a:pPr algn="l" indent="0" marL="0">
-                        <a:buNone/>
-                      </a:pPr>
-                      <a:r>
-                        <a:rPr lang="en-US" sz="1100" dirty="0">
-                          <a:solidFill>
-                            <a:srgbClr val="1F2D3D"/>
-                          </a:solidFill>
-                          <a:latin typeface="Calibri" pitchFamily="34" charset="0"/>
-                          <a:ea typeface="Calibri" pitchFamily="34" charset="-122"/>
-                          <a:cs typeface="Calibri" pitchFamily="34" charset="-120"/>
-                        </a:rPr>
-                        <a:t>scripts 21–22, COMBINED_INSIGHTS.md, notebooks/Review_2.ipynb</a:t>
-                      </a:r>
-                      <a:endParaRPr lang="en-US" sz="1100" dirty="0">
-                        <a:latin typeface="Calibri" charset="0"/>
-                        <a:ea typeface="Calibri" charset="0"/>
-                        <a:cs typeface="Calibri" charset="0"/>
-                      </a:endParaRPr>
-                    </a:p>
-                  </a:txBody>
-                  <a:tcPr marL="63500" marR="63500" marT="25400" marB="25400" anchor="ctr">
-                    <a:lnL w="9525" cap="flat" cmpd="sng" algn="ctr">
-                      <a:solidFill>
-                        <a:srgbClr val="E3E8EF"/>
-                      </a:solidFill>
-                      <a:prstDash val="solid"/>
-                      <a:round/>
-                      <a:headEnd type="none" w="med" len="med"/>
-                      <a:tailEnd type="none" w="med" len="med"/>
-                    </a:lnL>
-                    <a:lnR w="9525" cap="flat" cmpd="sng" algn="ctr">
-                      <a:solidFill>
-                        <a:srgbClr val="E3E8EF"/>
-                      </a:solidFill>
-                      <a:prstDash val="solid"/>
-                      <a:round/>
-                      <a:headEnd type="none" w="med" len="med"/>
-                      <a:tailEnd type="none" w="med" len="med"/>
-                    </a:lnR>
-                    <a:lnT w="9525" cap="flat" cmpd="sng" algn="ctr">
-                      <a:solidFill>
-                        <a:srgbClr val="E3E8EF"/>
-                      </a:solidFill>
-                      <a:prstDash val="solid"/>
-                      <a:round/>
-                      <a:headEnd type="none" w="med" len="med"/>
-                      <a:tailEnd type="none" w="med" len="med"/>
-                    </a:lnT>
-                    <a:lnB w="9525" cap="flat" cmpd="sng" algn="ctr">
-                      <a:solidFill>
-                        <a:srgbClr val="E3E8EF"/>
-                      </a:solidFill>
-                      <a:prstDash val="solid"/>
-                      <a:round/>
-                      <a:headEnd type="none" w="med" len="med"/>
-                      <a:tailEnd type="none" w="med" len="med"/>
-                    </a:lnB>
-                    <a:solidFill>
-                      <a:srgbClr val="FFFFFF"/>
-                    </a:solidFill>
-                  </a:tcPr>
-                </a:tc>
-              </a:tr>
-            </a:tbl>
-          </a:graphicData>
-        </a:graphic>
-      </p:graphicFrame>
-      <p:sp>
-        <p:nvSpPr>
-          <p:cNvPr id="16" name="Text 13"/>
+      <p:sp>
+        <p:nvSpPr>
+          <p:cNvPr id="15" name="Text 13"/>
           <p:cNvSpPr txBox="1"/>
           <p:nvPr/>
         </p:nvSpPr>
         <p:spPr>
           <a:xfrm>
-            <a:off x="640080" y="5760720"/>
-            <a:ext cx="10911535" cy="548640"/>
+            <a:off x="640080" y="2212848"/>
+            <a:ext cx="10911535" cy="274320"/>
           </a:xfrm>
           <a:prstGeom prst="rect">
             <a:avLst/>
@@ -25033,49 +23038,48 @@
           <a:ln/>
         </p:spPr>
         <p:txBody>
-          <a:bodyPr wrap="square" lIns="0" tIns="0" rIns="0" bIns="0" rtlCol="0" anchor="t">
-            <a:normAutofit/>
-          </a:bodyPr>
+          <a:bodyPr wrap="square" lIns="0" tIns="0" rIns="0" bIns="0" rtlCol="0" anchor="ctr"/>
           <a:lstStyle/>
           <a:p>
             <a:pPr indent="0" marL="0">
-              <a:lnSpc>
-                <a:spcPct val="100000"/>
-              </a:lnSpc>
-              <a:spcAft>
-                <a:spcPts val="600"/>
-              </a:spcAft>
               <a:buNone/>
             </a:pPr>
             <a:r>
-              <a:rPr lang="en-US" sz="1150" b="1" dirty="0">
+              <a:rPr lang="en-US" sz="1200" b="1" dirty="0">
                 <a:solidFill>
-                  <a:schemeClr val="tx1"/>
+                  <a:schemeClr val="tx2"/>
                 </a:solidFill>
               </a:rPr>
-              <a:t>Activity history: </a:t>
+              <a:t>Evidence and activity history:</a:t>
             </a:r>
-            <a:pPr indent="0" marL="0">
-              <a:lnSpc>
-                <a:spcPct val="100000"/>
-              </a:lnSpc>
-              <a:spcAft>
-                <a:spcPts val="600"/>
-              </a:spcAft>
-              <a:buNone/>
-            </a:pPr>
-            <a:r>
-              <a:rPr lang="en-US" sz="1150" dirty="0">
-                <a:solidFill>
-                  <a:schemeClr val="tx1"/>
-                </a:solidFill>
-              </a:rPr>
-              <a:t>one stage after another, each merged before the next began (Stages 1–2 on 8 Oct, Stage 3 on 9 Oct, Stage 4 on 10 Oct, Stage 5 on 11 Oct). Each task is linked to a merged pull request, and every card is in Completed.</a:t>
-            </a:r>
-            <a:endParaRPr lang="en-US" sz="1150" dirty="0"/>
+            <a:endParaRPr lang="en-US" sz="1200" dirty="0"/>
           </a:p>
         </p:txBody>
       </p:sp>
+      <p:pic>
+        <p:nvPicPr>
+          <p:cNvPr id="16" name="Image 0" descr="Project board, table view of the 14 Review 2 tasks: all Completed, each with assignee, linked pull request and due date 11 Oct 2026">    </p:cNvPr>
+          <p:cNvPicPr>
+            <a:picLocks noChangeAspect="1"/>
+          </p:cNvPicPr>
+          <p:nvPr/>
+        </p:nvPicPr>
+        <p:blipFill>
+          <a:blip r:embed="rId3"/>
+          <a:stretch>
+            <a:fillRect/>
+          </a:stretch>
+        </p:blipFill>
+        <p:spPr>
+          <a:xfrm>
+            <a:off x="954837" y="2560320"/>
+            <a:ext cx="10282021" cy="3749040"/>
+          </a:xfrm>
+          <a:prstGeom prst="rect">
+            <a:avLst/>
+          </a:prstGeom>
+        </p:spPr>
+      </p:pic>
       <p:sp>
         <p:nvSpPr>
           <p:cNvPr id="25" name="Slide Number Placeholder 0"/>
@@ -25178,7 +23182,2302 @@
                   <a:schemeClr val="accent6"/>
                 </a:solidFill>
               </a:rPr>
-              <a:t>14  |  CONCLUSION AND SUBMISSION</a:t>
+              <a:t>14  |  INDIVIDUAL CONTRIBUTIONS</a:t>
+            </a:r>
+            <a:endParaRPr lang="en-US" sz="1100" dirty="0"/>
+          </a:p>
+        </p:txBody>
+      </p:sp>
+      <p:sp>
+        <p:nvSpPr>
+          <p:cNvPr id="3" name="Text 1"/>
+          <p:cNvSpPr/>
+          <p:nvPr>
+            <p:ph idx="102" type="title" hasCustomPrompt="1"/>
+          </p:nvPr>
+        </p:nvSpPr>
+        <p:spPr>
+          <a:xfrm>
+            <a:off x="640080" y="566928"/>
+            <a:ext cx="10911535" cy="685800"/>
+          </a:xfrm>
+          <a:prstGeom prst="rect">
+            <a:avLst/>
+          </a:prstGeom>
+          <a:noFill/>
+          <a:ln/>
+        </p:spPr>
+        <p:txBody>
+          <a:bodyPr wrap="square" lIns="0" tIns="0" rIns="0" bIns="0" rtlCol="0" anchor="ctr"/>
+          <a:lstStyle/>
+          <a:p>
+            <a:pPr algn="l" indent="0" marL="0">
+              <a:buNone/>
+            </a:pPr>
+            <a:r>
+              <a:rPr lang="en-US" sz="2800" b="1" dirty="0">
+                <a:solidFill>
+                  <a:schemeClr val="tx2"/>
+                </a:solidFill>
+                <a:latin typeface="Cambria" pitchFamily="34" charset="0"/>
+                <a:ea typeface="Cambria" pitchFamily="34" charset="-122"/>
+                <a:cs typeface="Cambria" pitchFamily="34" charset="-120"/>
+              </a:rPr>
+              <a:t>Individual Contributions</a:t>
+            </a:r>
+            <a:endParaRPr lang="en-US" sz="2800" dirty="0"/>
+          </a:p>
+        </p:txBody>
+      </p:sp>
+      <p:graphicFrame>
+        <p:nvGraphicFramePr>
+          <p:cNvPr id="22" name="Table 0"/>
+          <p:cNvGraphicFramePr>
+            <a:graphicFrameLocks noGrp="1"/>
+          </p:cNvGraphicFramePr>
+          <p:nvPr>
+            <p:extLst>
+              <p:ext uri="{D42A27DB-BD31-4B8C-83A1-F6EECF244321}">
+                <p14:modId xmlns:p14="http://schemas.microsoft.com/office/powerpoint/2010/main" val="1579011935"/>
+              </p:ext>
+            </p:extLst>
+          </p:nvPr>
+        </p:nvGraphicFramePr>
+        <p:xfrm>
+          <a:off x="640080" y="1463040"/>
+          <a:ext cx="10911535" cy="914400"/>
+        </p:xfrm>
+        <a:graphic>
+          <a:graphicData uri="http://schemas.openxmlformats.org/drawingml/2006/table">
+            <a:tbl>
+              <a:tblPr/>
+              <a:tblGrid>
+                <a:gridCol w="2240280"/>
+                <a:gridCol w="685800"/>
+                <a:gridCol w="3931920"/>
+                <a:gridCol w="1600200"/>
+                <a:gridCol w="2453335"/>
+              </a:tblGrid>
+              <a:tr h="384048">
+                <a:tc>
+                  <a:txBody>
+                    <a:bodyPr/>
+                    <a:lstStyle/>
+                    <a:p>
+                      <a:pPr algn="l" indent="0" marL="0">
+                        <a:buNone/>
+                      </a:pPr>
+                      <a:r>
+                        <a:rPr lang="en-US" sz="1250" b="1" dirty="0">
+                          <a:solidFill>
+                            <a:srgbClr val="FFFFFF"/>
+                          </a:solidFill>
+                          <a:latin typeface="Calibri" pitchFamily="34" charset="0"/>
+                          <a:ea typeface="Calibri" pitchFamily="34" charset="-122"/>
+                          <a:cs typeface="Calibri" pitchFamily="34" charset="-120"/>
+                        </a:rPr>
+                        <a:t>Member</a:t>
+                      </a:r>
+                      <a:endParaRPr lang="en-US" sz="1250" dirty="0">
+                        <a:latin typeface="Calibri" charset="0"/>
+                        <a:ea typeface="Calibri" charset="0"/>
+                        <a:cs typeface="Calibri" charset="0"/>
+                      </a:endParaRPr>
+                    </a:p>
+                  </a:txBody>
+                  <a:tcPr marL="63500" marR="63500" marT="25400" marB="25400" anchor="ctr">
+                    <a:lnL w="9525" cap="flat" cmpd="sng" algn="ctr">
+                      <a:solidFill>
+                        <a:srgbClr val="E3E8EF"/>
+                      </a:solidFill>
+                      <a:prstDash val="solid"/>
+                      <a:round/>
+                      <a:headEnd type="none" w="med" len="med"/>
+                      <a:tailEnd type="none" w="med" len="med"/>
+                    </a:lnL>
+                    <a:lnR w="9525" cap="flat" cmpd="sng" algn="ctr">
+                      <a:solidFill>
+                        <a:srgbClr val="E3E8EF"/>
+                      </a:solidFill>
+                      <a:prstDash val="solid"/>
+                      <a:round/>
+                      <a:headEnd type="none" w="med" len="med"/>
+                      <a:tailEnd type="none" w="med" len="med"/>
+                    </a:lnR>
+                    <a:lnT w="9525" cap="flat" cmpd="sng" algn="ctr">
+                      <a:solidFill>
+                        <a:srgbClr val="E3E8EF"/>
+                      </a:solidFill>
+                      <a:prstDash val="solid"/>
+                      <a:round/>
+                      <a:headEnd type="none" w="med" len="med"/>
+                      <a:tailEnd type="none" w="med" len="med"/>
+                    </a:lnT>
+                    <a:lnB w="9525" cap="flat" cmpd="sng" algn="ctr">
+                      <a:solidFill>
+                        <a:srgbClr val="E3E8EF"/>
+                      </a:solidFill>
+                      <a:prstDash val="solid"/>
+                      <a:round/>
+                      <a:headEnd type="none" w="med" len="med"/>
+                      <a:tailEnd type="none" w="med" len="med"/>
+                    </a:lnB>
+                    <a:solidFill>
+                      <a:srgbClr val="132C43"/>
+                    </a:solidFill>
+                  </a:tcPr>
+                </a:tc>
+                <a:tc>
+                  <a:txBody>
+                    <a:bodyPr/>
+                    <a:lstStyle/>
+                    <a:p>
+                      <a:pPr algn="ctr" indent="0" marL="0">
+                        <a:buNone/>
+                      </a:pPr>
+                      <a:r>
+                        <a:rPr lang="en-US" sz="1250" b="1" dirty="0">
+                          <a:solidFill>
+                            <a:srgbClr val="FFFFFF"/>
+                          </a:solidFill>
+                          <a:latin typeface="Calibri" pitchFamily="34" charset="0"/>
+                          <a:ea typeface="Calibri" pitchFamily="34" charset="-122"/>
+                          <a:cs typeface="Calibri" pitchFamily="34" charset="-120"/>
+                        </a:rPr>
+                        <a:t>Stage</a:t>
+                      </a:r>
+                      <a:endParaRPr lang="en-US" sz="1250" dirty="0">
+                        <a:latin typeface="Calibri" charset="0"/>
+                        <a:ea typeface="Calibri" charset="0"/>
+                        <a:cs typeface="Calibri" charset="0"/>
+                      </a:endParaRPr>
+                    </a:p>
+                  </a:txBody>
+                  <a:tcPr marL="63500" marR="63500" marT="25400" marB="25400" anchor="ctr">
+                    <a:lnL w="9525" cap="flat" cmpd="sng" algn="ctr">
+                      <a:solidFill>
+                        <a:srgbClr val="E3E8EF"/>
+                      </a:solidFill>
+                      <a:prstDash val="solid"/>
+                      <a:round/>
+                      <a:headEnd type="none" w="med" len="med"/>
+                      <a:tailEnd type="none" w="med" len="med"/>
+                    </a:lnL>
+                    <a:lnR w="9525" cap="flat" cmpd="sng" algn="ctr">
+                      <a:solidFill>
+                        <a:srgbClr val="E3E8EF"/>
+                      </a:solidFill>
+                      <a:prstDash val="solid"/>
+                      <a:round/>
+                      <a:headEnd type="none" w="med" len="med"/>
+                      <a:tailEnd type="none" w="med" len="med"/>
+                    </a:lnR>
+                    <a:lnT w="9525" cap="flat" cmpd="sng" algn="ctr">
+                      <a:solidFill>
+                        <a:srgbClr val="E3E8EF"/>
+                      </a:solidFill>
+                      <a:prstDash val="solid"/>
+                      <a:round/>
+                      <a:headEnd type="none" w="med" len="med"/>
+                      <a:tailEnd type="none" w="med" len="med"/>
+                    </a:lnT>
+                    <a:lnB w="9525" cap="flat" cmpd="sng" algn="ctr">
+                      <a:solidFill>
+                        <a:srgbClr val="E3E8EF"/>
+                      </a:solidFill>
+                      <a:prstDash val="solid"/>
+                      <a:round/>
+                      <a:headEnd type="none" w="med" len="med"/>
+                      <a:tailEnd type="none" w="med" len="med"/>
+                    </a:lnB>
+                    <a:solidFill>
+                      <a:srgbClr val="132C43"/>
+                    </a:solidFill>
+                  </a:tcPr>
+                </a:tc>
+                <a:tc>
+                  <a:txBody>
+                    <a:bodyPr/>
+                    <a:lstStyle/>
+                    <a:p>
+                      <a:pPr algn="l" indent="0" marL="0">
+                        <a:buNone/>
+                      </a:pPr>
+                      <a:r>
+                        <a:rPr lang="en-US" sz="1250" b="1" dirty="0">
+                          <a:solidFill>
+                            <a:srgbClr val="FFFFFF"/>
+                          </a:solidFill>
+                          <a:latin typeface="Calibri" pitchFamily="34" charset="0"/>
+                          <a:ea typeface="Calibri" pitchFamily="34" charset="-122"/>
+                          <a:cs typeface="Calibri" pitchFamily="34" charset="-120"/>
+                        </a:rPr>
+                        <a:t>Board tasks (all due 11 Oct, all Completed)</a:t>
+                      </a:r>
+                      <a:endParaRPr lang="en-US" sz="1250" dirty="0">
+                        <a:latin typeface="Calibri" charset="0"/>
+                        <a:ea typeface="Calibri" charset="0"/>
+                        <a:cs typeface="Calibri" charset="0"/>
+                      </a:endParaRPr>
+                    </a:p>
+                  </a:txBody>
+                  <a:tcPr marL="63500" marR="63500" marT="25400" marB="25400" anchor="ctr">
+                    <a:lnL w="9525" cap="flat" cmpd="sng" algn="ctr">
+                      <a:solidFill>
+                        <a:srgbClr val="E3E8EF"/>
+                      </a:solidFill>
+                      <a:prstDash val="solid"/>
+                      <a:round/>
+                      <a:headEnd type="none" w="med" len="med"/>
+                      <a:tailEnd type="none" w="med" len="med"/>
+                    </a:lnL>
+                    <a:lnR w="9525" cap="flat" cmpd="sng" algn="ctr">
+                      <a:solidFill>
+                        <a:srgbClr val="E3E8EF"/>
+                      </a:solidFill>
+                      <a:prstDash val="solid"/>
+                      <a:round/>
+                      <a:headEnd type="none" w="med" len="med"/>
+                      <a:tailEnd type="none" w="med" len="med"/>
+                    </a:lnR>
+                    <a:lnT w="9525" cap="flat" cmpd="sng" algn="ctr">
+                      <a:solidFill>
+                        <a:srgbClr val="E3E8EF"/>
+                      </a:solidFill>
+                      <a:prstDash val="solid"/>
+                      <a:round/>
+                      <a:headEnd type="none" w="med" len="med"/>
+                      <a:tailEnd type="none" w="med" len="med"/>
+                    </a:lnT>
+                    <a:lnB w="9525" cap="flat" cmpd="sng" algn="ctr">
+                      <a:solidFill>
+                        <a:srgbClr val="E3E8EF"/>
+                      </a:solidFill>
+                      <a:prstDash val="solid"/>
+                      <a:round/>
+                      <a:headEnd type="none" w="med" len="med"/>
+                      <a:tailEnd type="none" w="med" len="med"/>
+                    </a:lnB>
+                    <a:solidFill>
+                      <a:srgbClr val="132C43"/>
+                    </a:solidFill>
+                  </a:tcPr>
+                </a:tc>
+                <a:tc>
+                  <a:txBody>
+                    <a:bodyPr/>
+                    <a:lstStyle/>
+                    <a:p>
+                      <a:pPr algn="l" indent="0" marL="0">
+                        <a:buNone/>
+                      </a:pPr>
+                      <a:r>
+                        <a:rPr lang="en-US" sz="1250" b="1" dirty="0">
+                          <a:solidFill>
+                            <a:srgbClr val="FFFFFF"/>
+                          </a:solidFill>
+                          <a:latin typeface="Calibri" pitchFamily="34" charset="0"/>
+                          <a:ea typeface="Calibri" pitchFamily="34" charset="-122"/>
+                          <a:cs typeface="Calibri" pitchFamily="34" charset="-120"/>
+                        </a:rPr>
+                        <a:t>Pull requests (merged)</a:t>
+                      </a:r>
+                      <a:endParaRPr lang="en-US" sz="1250" dirty="0">
+                        <a:latin typeface="Calibri" charset="0"/>
+                        <a:ea typeface="Calibri" charset="0"/>
+                        <a:cs typeface="Calibri" charset="0"/>
+                      </a:endParaRPr>
+                    </a:p>
+                  </a:txBody>
+                  <a:tcPr marL="63500" marR="63500" marT="25400" marB="25400" anchor="ctr">
+                    <a:lnL w="9525" cap="flat" cmpd="sng" algn="ctr">
+                      <a:solidFill>
+                        <a:srgbClr val="E3E8EF"/>
+                      </a:solidFill>
+                      <a:prstDash val="solid"/>
+                      <a:round/>
+                      <a:headEnd type="none" w="med" len="med"/>
+                      <a:tailEnd type="none" w="med" len="med"/>
+                    </a:lnL>
+                    <a:lnR w="9525" cap="flat" cmpd="sng" algn="ctr">
+                      <a:solidFill>
+                        <a:srgbClr val="E3E8EF"/>
+                      </a:solidFill>
+                      <a:prstDash val="solid"/>
+                      <a:round/>
+                      <a:headEnd type="none" w="med" len="med"/>
+                      <a:tailEnd type="none" w="med" len="med"/>
+                    </a:lnR>
+                    <a:lnT w="9525" cap="flat" cmpd="sng" algn="ctr">
+                      <a:solidFill>
+                        <a:srgbClr val="E3E8EF"/>
+                      </a:solidFill>
+                      <a:prstDash val="solid"/>
+                      <a:round/>
+                      <a:headEnd type="none" w="med" len="med"/>
+                      <a:tailEnd type="none" w="med" len="med"/>
+                    </a:lnT>
+                    <a:lnB w="9525" cap="flat" cmpd="sng" algn="ctr">
+                      <a:solidFill>
+                        <a:srgbClr val="E3E8EF"/>
+                      </a:solidFill>
+                      <a:prstDash val="solid"/>
+                      <a:round/>
+                      <a:headEnd type="none" w="med" len="med"/>
+                      <a:tailEnd type="none" w="med" len="med"/>
+                    </a:lnB>
+                    <a:solidFill>
+                      <a:srgbClr val="132C43"/>
+                    </a:solidFill>
+                  </a:tcPr>
+                </a:tc>
+                <a:tc>
+                  <a:txBody>
+                    <a:bodyPr/>
+                    <a:lstStyle/>
+                    <a:p>
+                      <a:pPr algn="l" indent="0" marL="0">
+                        <a:buNone/>
+                      </a:pPr>
+                      <a:r>
+                        <a:rPr lang="en-US" sz="1250" b="1" dirty="0">
+                          <a:solidFill>
+                            <a:srgbClr val="FFFFFF"/>
+                          </a:solidFill>
+                          <a:latin typeface="Calibri" pitchFamily="34" charset="0"/>
+                          <a:ea typeface="Calibri" pitchFamily="34" charset="-122"/>
+                          <a:cs typeface="Calibri" pitchFamily="34" charset="-120"/>
+                        </a:rPr>
+                        <a:t>Evidence</a:t>
+                      </a:r>
+                      <a:endParaRPr lang="en-US" sz="1250" dirty="0">
+                        <a:latin typeface="Calibri" charset="0"/>
+                        <a:ea typeface="Calibri" charset="0"/>
+                        <a:cs typeface="Calibri" charset="0"/>
+                      </a:endParaRPr>
+                    </a:p>
+                  </a:txBody>
+                  <a:tcPr marL="63500" marR="63500" marT="25400" marB="25400" anchor="ctr">
+                    <a:lnL w="9525" cap="flat" cmpd="sng" algn="ctr">
+                      <a:solidFill>
+                        <a:srgbClr val="E3E8EF"/>
+                      </a:solidFill>
+                      <a:prstDash val="solid"/>
+                      <a:round/>
+                      <a:headEnd type="none" w="med" len="med"/>
+                      <a:tailEnd type="none" w="med" len="med"/>
+                    </a:lnL>
+                    <a:lnR w="9525" cap="flat" cmpd="sng" algn="ctr">
+                      <a:solidFill>
+                        <a:srgbClr val="E3E8EF"/>
+                      </a:solidFill>
+                      <a:prstDash val="solid"/>
+                      <a:round/>
+                      <a:headEnd type="none" w="med" len="med"/>
+                      <a:tailEnd type="none" w="med" len="med"/>
+                    </a:lnR>
+                    <a:lnT w="9525" cap="flat" cmpd="sng" algn="ctr">
+                      <a:solidFill>
+                        <a:srgbClr val="E3E8EF"/>
+                      </a:solidFill>
+                      <a:prstDash val="solid"/>
+                      <a:round/>
+                      <a:headEnd type="none" w="med" len="med"/>
+                      <a:tailEnd type="none" w="med" len="med"/>
+                    </a:lnT>
+                    <a:lnB w="9525" cap="flat" cmpd="sng" algn="ctr">
+                      <a:solidFill>
+                        <a:srgbClr val="E3E8EF"/>
+                      </a:solidFill>
+                      <a:prstDash val="solid"/>
+                      <a:round/>
+                      <a:headEnd type="none" w="med" len="med"/>
+                      <a:tailEnd type="none" w="med" len="med"/>
+                    </a:lnB>
+                    <a:solidFill>
+                      <a:srgbClr val="132C43"/>
+                    </a:solidFill>
+                  </a:tcPr>
+                </a:tc>
+              </a:tr>
+              <a:tr h="777240">
+                <a:tc>
+                  <a:txBody>
+                    <a:bodyPr/>
+                    <a:lstStyle/>
+                    <a:p>
+                      <a:pPr algn="l" indent="0" marL="0">
+                        <a:buNone/>
+                      </a:pPr>
+                      <a:r>
+                        <a:rPr lang="en-US" sz="1250" b="1" dirty="0">
+                          <a:solidFill>
+                            <a:srgbClr val="1F2D3D"/>
+                          </a:solidFill>
+                          <a:latin typeface="Calibri" pitchFamily="34" charset="0"/>
+                          <a:ea typeface="Calibri" pitchFamily="34" charset="-122"/>
+                          <a:cs typeface="Calibri" pitchFamily="34" charset="-120"/>
+                        </a:rPr>
+                        <a:t>Aditya Monish Kumar K - CB.SC.U4CSE23103</a:t>
+                      </a:r>
+                      <a:endParaRPr lang="en-US" sz="1250" dirty="0">
+                        <a:latin typeface="Calibri" charset="0"/>
+                        <a:ea typeface="Calibri" charset="0"/>
+                        <a:cs typeface="Calibri" charset="0"/>
+                      </a:endParaRPr>
+                    </a:p>
+                  </a:txBody>
+                  <a:tcPr marL="63500" marR="63500" marT="25400" marB="25400" anchor="ctr">
+                    <a:lnL w="9525" cap="flat" cmpd="sng" algn="ctr">
+                      <a:solidFill>
+                        <a:srgbClr val="E3E8EF"/>
+                      </a:solidFill>
+                      <a:prstDash val="solid"/>
+                      <a:round/>
+                      <a:headEnd type="none" w="med" len="med"/>
+                      <a:tailEnd type="none" w="med" len="med"/>
+                    </a:lnL>
+                    <a:lnR w="9525" cap="flat" cmpd="sng" algn="ctr">
+                      <a:solidFill>
+                        <a:srgbClr val="E3E8EF"/>
+                      </a:solidFill>
+                      <a:prstDash val="solid"/>
+                      <a:round/>
+                      <a:headEnd type="none" w="med" len="med"/>
+                      <a:tailEnd type="none" w="med" len="med"/>
+                    </a:lnR>
+                    <a:lnT w="9525" cap="flat" cmpd="sng" algn="ctr">
+                      <a:solidFill>
+                        <a:srgbClr val="E3E8EF"/>
+                      </a:solidFill>
+                      <a:prstDash val="solid"/>
+                      <a:round/>
+                      <a:headEnd type="none" w="med" len="med"/>
+                      <a:tailEnd type="none" w="med" len="med"/>
+                    </a:lnT>
+                    <a:lnB w="9525" cap="flat" cmpd="sng" algn="ctr">
+                      <a:solidFill>
+                        <a:srgbClr val="E3E8EF"/>
+                      </a:solidFill>
+                      <a:prstDash val="solid"/>
+                      <a:round/>
+                      <a:headEnd type="none" w="med" len="med"/>
+                      <a:tailEnd type="none" w="med" len="med"/>
+                    </a:lnB>
+                    <a:solidFill>
+                      <a:srgbClr val="FFFFFF"/>
+                    </a:solidFill>
+                  </a:tcPr>
+                </a:tc>
+                <a:tc>
+                  <a:txBody>
+                    <a:bodyPr/>
+                    <a:lstStyle/>
+                    <a:p>
+                      <a:pPr algn="ctr" indent="0" marL="0">
+                        <a:buNone/>
+                      </a:pPr>
+                      <a:r>
+                        <a:rPr lang="en-US" sz="1250" dirty="0">
+                          <a:solidFill>
+                            <a:srgbClr val="1F2D3D"/>
+                          </a:solidFill>
+                          <a:latin typeface="Calibri" pitchFamily="34" charset="0"/>
+                          <a:ea typeface="Calibri" pitchFamily="34" charset="-122"/>
+                          <a:cs typeface="Calibri" pitchFamily="34" charset="-120"/>
+                        </a:rPr>
+                        <a:t>1 and 6</a:t>
+                      </a:r>
+                      <a:endParaRPr lang="en-US" sz="1250" dirty="0">
+                        <a:latin typeface="Calibri" charset="0"/>
+                        <a:ea typeface="Calibri" charset="0"/>
+                        <a:cs typeface="Calibri" charset="0"/>
+                      </a:endParaRPr>
+                    </a:p>
+                  </a:txBody>
+                  <a:tcPr marL="63500" marR="63500" marT="25400" marB="25400" anchor="ctr">
+                    <a:lnL w="9525" cap="flat" cmpd="sng" algn="ctr">
+                      <a:solidFill>
+                        <a:srgbClr val="E3E8EF"/>
+                      </a:solidFill>
+                      <a:prstDash val="solid"/>
+                      <a:round/>
+                      <a:headEnd type="none" w="med" len="med"/>
+                      <a:tailEnd type="none" w="med" len="med"/>
+                    </a:lnL>
+                    <a:lnR w="9525" cap="flat" cmpd="sng" algn="ctr">
+                      <a:solidFill>
+                        <a:srgbClr val="E3E8EF"/>
+                      </a:solidFill>
+                      <a:prstDash val="solid"/>
+                      <a:round/>
+                      <a:headEnd type="none" w="med" len="med"/>
+                      <a:tailEnd type="none" w="med" len="med"/>
+                    </a:lnR>
+                    <a:lnT w="9525" cap="flat" cmpd="sng" algn="ctr">
+                      <a:solidFill>
+                        <a:srgbClr val="E3E8EF"/>
+                      </a:solidFill>
+                      <a:prstDash val="solid"/>
+                      <a:round/>
+                      <a:headEnd type="none" w="med" len="med"/>
+                      <a:tailEnd type="none" w="med" len="med"/>
+                    </a:lnT>
+                    <a:lnB w="9525" cap="flat" cmpd="sng" algn="ctr">
+                      <a:solidFill>
+                        <a:srgbClr val="E3E8EF"/>
+                      </a:solidFill>
+                      <a:prstDash val="solid"/>
+                      <a:round/>
+                      <a:headEnd type="none" w="med" len="med"/>
+                      <a:tailEnd type="none" w="med" len="med"/>
+                    </a:lnB>
+                    <a:solidFill>
+                      <a:srgbClr val="FFFFFF"/>
+                    </a:solidFill>
+                  </a:tcPr>
+                </a:tc>
+                <a:tc>
+                  <a:txBody>
+                    <a:bodyPr/>
+                    <a:lstStyle/>
+                    <a:p>
+                      <a:pPr algn="l" indent="0" marL="0">
+                        <a:buNone/>
+                      </a:pPr>
+                      <a:r>
+                        <a:rPr lang="en-US" sz="1250" dirty="0">
+                          <a:solidFill>
+                            <a:srgbClr val="1F2D3D"/>
+                          </a:solidFill>
+                          <a:latin typeface="Calibri" pitchFamily="34" charset="0"/>
+                          <a:ea typeface="Calibri" pitchFamily="34" charset="-122"/>
+                          <a:cs typeface="Calibri" pitchFamily="34" charset="-120"/>
+                        </a:rPr>
+                        <a:t>#131 time series and patterns, #132 text preprocessing, #133 dashboard skeleton and overview; Stage 6: deck, final report, contribution summary</a:t>
+                      </a:r>
+                      <a:endParaRPr lang="en-US" sz="1250" dirty="0">
+                        <a:latin typeface="Calibri" charset="0"/>
+                        <a:ea typeface="Calibri" charset="0"/>
+                        <a:cs typeface="Calibri" charset="0"/>
+                      </a:endParaRPr>
+                    </a:p>
+                  </a:txBody>
+                  <a:tcPr marL="63500" marR="63500" marT="25400" marB="25400" anchor="ctr">
+                    <a:lnL w="9525" cap="flat" cmpd="sng" algn="ctr">
+                      <a:solidFill>
+                        <a:srgbClr val="E3E8EF"/>
+                      </a:solidFill>
+                      <a:prstDash val="solid"/>
+                      <a:round/>
+                      <a:headEnd type="none" w="med" len="med"/>
+                      <a:tailEnd type="none" w="med" len="med"/>
+                    </a:lnL>
+                    <a:lnR w="9525" cap="flat" cmpd="sng" algn="ctr">
+                      <a:solidFill>
+                        <a:srgbClr val="E3E8EF"/>
+                      </a:solidFill>
+                      <a:prstDash val="solid"/>
+                      <a:round/>
+                      <a:headEnd type="none" w="med" len="med"/>
+                      <a:tailEnd type="none" w="med" len="med"/>
+                    </a:lnR>
+                    <a:lnT w="9525" cap="flat" cmpd="sng" algn="ctr">
+                      <a:solidFill>
+                        <a:srgbClr val="E3E8EF"/>
+                      </a:solidFill>
+                      <a:prstDash val="solid"/>
+                      <a:round/>
+                      <a:headEnd type="none" w="med" len="med"/>
+                      <a:tailEnd type="none" w="med" len="med"/>
+                    </a:lnT>
+                    <a:lnB w="9525" cap="flat" cmpd="sng" algn="ctr">
+                      <a:solidFill>
+                        <a:srgbClr val="E3E8EF"/>
+                      </a:solidFill>
+                      <a:prstDash val="solid"/>
+                      <a:round/>
+                      <a:headEnd type="none" w="med" len="med"/>
+                      <a:tailEnd type="none" w="med" len="med"/>
+                    </a:lnB>
+                    <a:solidFill>
+                      <a:srgbClr val="FFFFFF"/>
+                    </a:solidFill>
+                  </a:tcPr>
+                </a:tc>
+                <a:tc>
+                  <a:txBody>
+                    <a:bodyPr/>
+                    <a:lstStyle/>
+                    <a:p>
+                      <a:pPr algn="l" indent="0" marL="0">
+                        <a:buNone/>
+                      </a:pPr>
+                      <a:r>
+                        <a:rPr lang="en-US" sz="1250" dirty="0">
+                          <a:solidFill>
+                            <a:srgbClr val="1F2D3D"/>
+                          </a:solidFill>
+                          <a:latin typeface="Calibri" pitchFamily="34" charset="0"/>
+                          <a:ea typeface="Calibri" pitchFamily="34" charset="-122"/>
+                          <a:cs typeface="Calibri" pitchFamily="34" charset="-120"/>
+                        </a:rPr>
+                        <a:t>#147, #148, #149 (8 Oct)</a:t>
+                      </a:r>
+                      <a:endParaRPr lang="en-US" sz="1250" dirty="0">
+                        <a:latin typeface="Calibri" charset="0"/>
+                        <a:ea typeface="Calibri" charset="0"/>
+                        <a:cs typeface="Calibri" charset="0"/>
+                      </a:endParaRPr>
+                    </a:p>
+                  </a:txBody>
+                  <a:tcPr marL="63500" marR="63500" marT="25400" marB="25400" anchor="ctr">
+                    <a:lnL w="9525" cap="flat" cmpd="sng" algn="ctr">
+                      <a:solidFill>
+                        <a:srgbClr val="E3E8EF"/>
+                      </a:solidFill>
+                      <a:prstDash val="solid"/>
+                      <a:round/>
+                      <a:headEnd type="none" w="med" len="med"/>
+                      <a:tailEnd type="none" w="med" len="med"/>
+                    </a:lnL>
+                    <a:lnR w="9525" cap="flat" cmpd="sng" algn="ctr">
+                      <a:solidFill>
+                        <a:srgbClr val="E3E8EF"/>
+                      </a:solidFill>
+                      <a:prstDash val="solid"/>
+                      <a:round/>
+                      <a:headEnd type="none" w="med" len="med"/>
+                      <a:tailEnd type="none" w="med" len="med"/>
+                    </a:lnR>
+                    <a:lnT w="9525" cap="flat" cmpd="sng" algn="ctr">
+                      <a:solidFill>
+                        <a:srgbClr val="E3E8EF"/>
+                      </a:solidFill>
+                      <a:prstDash val="solid"/>
+                      <a:round/>
+                      <a:headEnd type="none" w="med" len="med"/>
+                      <a:tailEnd type="none" w="med" len="med"/>
+                    </a:lnT>
+                    <a:lnB w="9525" cap="flat" cmpd="sng" algn="ctr">
+                      <a:solidFill>
+                        <a:srgbClr val="E3E8EF"/>
+                      </a:solidFill>
+                      <a:prstDash val="solid"/>
+                      <a:round/>
+                      <a:headEnd type="none" w="med" len="med"/>
+                      <a:tailEnd type="none" w="med" len="med"/>
+                    </a:lnB>
+                    <a:solidFill>
+                      <a:srgbClr val="FFFFFF"/>
+                    </a:solidFill>
+                  </a:tcPr>
+                </a:tc>
+                <a:tc>
+                  <a:txBody>
+                    <a:bodyPr/>
+                    <a:lstStyle/>
+                    <a:p>
+                      <a:pPr algn="l" indent="0" marL="0">
+                        <a:buNone/>
+                      </a:pPr>
+                      <a:r>
+                        <a:rPr lang="en-US" sz="1250" dirty="0">
+                          <a:solidFill>
+                            <a:srgbClr val="1F2D3D"/>
+                          </a:solidFill>
+                          <a:latin typeface="Calibri" pitchFamily="34" charset="0"/>
+                          <a:ea typeface="Calibri" pitchFamily="34" charset="-122"/>
+                          <a:cs typeface="Calibri" pitchFamily="34" charset="-120"/>
+                        </a:rPr>
+                        <a:t>scripts 15–16, dashboard/, FINAL_REPORT.md</a:t>
+                      </a:r>
+                      <a:endParaRPr lang="en-US" sz="1250" dirty="0">
+                        <a:latin typeface="Calibri" charset="0"/>
+                        <a:ea typeface="Calibri" charset="0"/>
+                        <a:cs typeface="Calibri" charset="0"/>
+                      </a:endParaRPr>
+                    </a:p>
+                  </a:txBody>
+                  <a:tcPr marL="63500" marR="63500" marT="25400" marB="25400" anchor="ctr">
+                    <a:lnL w="9525" cap="flat" cmpd="sng" algn="ctr">
+                      <a:solidFill>
+                        <a:srgbClr val="E3E8EF"/>
+                      </a:solidFill>
+                      <a:prstDash val="solid"/>
+                      <a:round/>
+                      <a:headEnd type="none" w="med" len="med"/>
+                      <a:tailEnd type="none" w="med" len="med"/>
+                    </a:lnL>
+                    <a:lnR w="9525" cap="flat" cmpd="sng" algn="ctr">
+                      <a:solidFill>
+                        <a:srgbClr val="E3E8EF"/>
+                      </a:solidFill>
+                      <a:prstDash val="solid"/>
+                      <a:round/>
+                      <a:headEnd type="none" w="med" len="med"/>
+                      <a:tailEnd type="none" w="med" len="med"/>
+                    </a:lnR>
+                    <a:lnT w="9525" cap="flat" cmpd="sng" algn="ctr">
+                      <a:solidFill>
+                        <a:srgbClr val="E3E8EF"/>
+                      </a:solidFill>
+                      <a:prstDash val="solid"/>
+                      <a:round/>
+                      <a:headEnd type="none" w="med" len="med"/>
+                      <a:tailEnd type="none" w="med" len="med"/>
+                    </a:lnT>
+                    <a:lnB w="9525" cap="flat" cmpd="sng" algn="ctr">
+                      <a:solidFill>
+                        <a:srgbClr val="E3E8EF"/>
+                      </a:solidFill>
+                      <a:prstDash val="solid"/>
+                      <a:round/>
+                      <a:headEnd type="none" w="med" len="med"/>
+                      <a:tailEnd type="none" w="med" len="med"/>
+                    </a:lnB>
+                    <a:solidFill>
+                      <a:srgbClr val="FFFFFF"/>
+                    </a:solidFill>
+                  </a:tcPr>
+                </a:tc>
+              </a:tr>
+              <a:tr h="685800">
+                <a:tc>
+                  <a:txBody>
+                    <a:bodyPr/>
+                    <a:lstStyle/>
+                    <a:p>
+                      <a:pPr algn="l" indent="0" marL="0">
+                        <a:buNone/>
+                      </a:pPr>
+                      <a:r>
+                        <a:rPr lang="en-US" sz="1250" b="1" dirty="0">
+                          <a:solidFill>
+                            <a:srgbClr val="1F2D3D"/>
+                          </a:solidFill>
+                          <a:latin typeface="Calibri" pitchFamily="34" charset="0"/>
+                          <a:ea typeface="Calibri" pitchFamily="34" charset="-122"/>
+                          <a:cs typeface="Calibri" pitchFamily="34" charset="-120"/>
+                        </a:rPr>
+                        <a:t>Regella Krishna Saketh - CB.SC.U4CSE23649</a:t>
+                      </a:r>
+                      <a:endParaRPr lang="en-US" sz="1250" dirty="0">
+                        <a:latin typeface="Calibri" charset="0"/>
+                        <a:ea typeface="Calibri" charset="0"/>
+                        <a:cs typeface="Calibri" charset="0"/>
+                      </a:endParaRPr>
+                    </a:p>
+                  </a:txBody>
+                  <a:tcPr marL="63500" marR="63500" marT="25400" marB="25400" anchor="ctr">
+                    <a:lnL w="9525" cap="flat" cmpd="sng" algn="ctr">
+                      <a:solidFill>
+                        <a:srgbClr val="E3E8EF"/>
+                      </a:solidFill>
+                      <a:prstDash val="solid"/>
+                      <a:round/>
+                      <a:headEnd type="none" w="med" len="med"/>
+                      <a:tailEnd type="none" w="med" len="med"/>
+                    </a:lnL>
+                    <a:lnR w="9525" cap="flat" cmpd="sng" algn="ctr">
+                      <a:solidFill>
+                        <a:srgbClr val="E3E8EF"/>
+                      </a:solidFill>
+                      <a:prstDash val="solid"/>
+                      <a:round/>
+                      <a:headEnd type="none" w="med" len="med"/>
+                      <a:tailEnd type="none" w="med" len="med"/>
+                    </a:lnR>
+                    <a:lnT w="9525" cap="flat" cmpd="sng" algn="ctr">
+                      <a:solidFill>
+                        <a:srgbClr val="E3E8EF"/>
+                      </a:solidFill>
+                      <a:prstDash val="solid"/>
+                      <a:round/>
+                      <a:headEnd type="none" w="med" len="med"/>
+                      <a:tailEnd type="none" w="med" len="med"/>
+                    </a:lnT>
+                    <a:lnB w="9525" cap="flat" cmpd="sng" algn="ctr">
+                      <a:solidFill>
+                        <a:srgbClr val="E3E8EF"/>
+                      </a:solidFill>
+                      <a:prstDash val="solid"/>
+                      <a:round/>
+                      <a:headEnd type="none" w="med" len="med"/>
+                      <a:tailEnd type="none" w="med" len="med"/>
+                    </a:lnB>
+                    <a:solidFill>
+                      <a:srgbClr val="FBFCFE"/>
+                    </a:solidFill>
+                  </a:tcPr>
+                </a:tc>
+                <a:tc>
+                  <a:txBody>
+                    <a:bodyPr/>
+                    <a:lstStyle/>
+                    <a:p>
+                      <a:pPr algn="ctr" indent="0" marL="0">
+                        <a:buNone/>
+                      </a:pPr>
+                      <a:r>
+                        <a:rPr lang="en-US" sz="1250" dirty="0">
+                          <a:solidFill>
+                            <a:srgbClr val="1F2D3D"/>
+                          </a:solidFill>
+                          <a:latin typeface="Calibri" pitchFamily="34" charset="0"/>
+                          <a:ea typeface="Calibri" pitchFamily="34" charset="-122"/>
+                          <a:cs typeface="Calibri" pitchFamily="34" charset="-120"/>
+                        </a:rPr>
+                        <a:t>2</a:t>
+                      </a:r>
+                      <a:endParaRPr lang="en-US" sz="1250" dirty="0">
+                        <a:latin typeface="Calibri" charset="0"/>
+                        <a:ea typeface="Calibri" charset="0"/>
+                        <a:cs typeface="Calibri" charset="0"/>
+                      </a:endParaRPr>
+                    </a:p>
+                  </a:txBody>
+                  <a:tcPr marL="63500" marR="63500" marT="25400" marB="25400" anchor="ctr">
+                    <a:lnL w="9525" cap="flat" cmpd="sng" algn="ctr">
+                      <a:solidFill>
+                        <a:srgbClr val="E3E8EF"/>
+                      </a:solidFill>
+                      <a:prstDash val="solid"/>
+                      <a:round/>
+                      <a:headEnd type="none" w="med" len="med"/>
+                      <a:tailEnd type="none" w="med" len="med"/>
+                    </a:lnL>
+                    <a:lnR w="9525" cap="flat" cmpd="sng" algn="ctr">
+                      <a:solidFill>
+                        <a:srgbClr val="E3E8EF"/>
+                      </a:solidFill>
+                      <a:prstDash val="solid"/>
+                      <a:round/>
+                      <a:headEnd type="none" w="med" len="med"/>
+                      <a:tailEnd type="none" w="med" len="med"/>
+                    </a:lnR>
+                    <a:lnT w="9525" cap="flat" cmpd="sng" algn="ctr">
+                      <a:solidFill>
+                        <a:srgbClr val="E3E8EF"/>
+                      </a:solidFill>
+                      <a:prstDash val="solid"/>
+                      <a:round/>
+                      <a:headEnd type="none" w="med" len="med"/>
+                      <a:tailEnd type="none" w="med" len="med"/>
+                    </a:lnT>
+                    <a:lnB w="9525" cap="flat" cmpd="sng" algn="ctr">
+                      <a:solidFill>
+                        <a:srgbClr val="E3E8EF"/>
+                      </a:solidFill>
+                      <a:prstDash val="solid"/>
+                      <a:round/>
+                      <a:headEnd type="none" w="med" len="med"/>
+                      <a:tailEnd type="none" w="med" len="med"/>
+                    </a:lnB>
+                    <a:solidFill>
+                      <a:srgbClr val="FBFCFE"/>
+                    </a:solidFill>
+                  </a:tcPr>
+                </a:tc>
+                <a:tc>
+                  <a:txBody>
+                    <a:bodyPr/>
+                    <a:lstStyle/>
+                    <a:p>
+                      <a:pPr algn="l" indent="0" marL="0">
+                        <a:buNone/>
+                      </a:pPr>
+                      <a:r>
+                        <a:rPr lang="en-US" sz="1250" dirty="0">
+                          <a:solidFill>
+                            <a:srgbClr val="1F2D3D"/>
+                          </a:solidFill>
+                          <a:latin typeface="Calibri" pitchFamily="34" charset="0"/>
+                          <a:ea typeface="Calibri" pitchFamily="34" charset="-122"/>
+                          <a:cs typeface="Calibri" pitchFamily="34" charset="-120"/>
+                        </a:rPr>
+                        <a:t>#134 topic modelling and distinctive terms, #136 topic evaluation and interpretation</a:t>
+                      </a:r>
+                      <a:endParaRPr lang="en-US" sz="1250" dirty="0">
+                        <a:latin typeface="Calibri" charset="0"/>
+                        <a:ea typeface="Calibri" charset="0"/>
+                        <a:cs typeface="Calibri" charset="0"/>
+                      </a:endParaRPr>
+                    </a:p>
+                  </a:txBody>
+                  <a:tcPr marL="63500" marR="63500" marT="25400" marB="25400" anchor="ctr">
+                    <a:lnL w="9525" cap="flat" cmpd="sng" algn="ctr">
+                      <a:solidFill>
+                        <a:srgbClr val="E3E8EF"/>
+                      </a:solidFill>
+                      <a:prstDash val="solid"/>
+                      <a:round/>
+                      <a:headEnd type="none" w="med" len="med"/>
+                      <a:tailEnd type="none" w="med" len="med"/>
+                    </a:lnL>
+                    <a:lnR w="9525" cap="flat" cmpd="sng" algn="ctr">
+                      <a:solidFill>
+                        <a:srgbClr val="E3E8EF"/>
+                      </a:solidFill>
+                      <a:prstDash val="solid"/>
+                      <a:round/>
+                      <a:headEnd type="none" w="med" len="med"/>
+                      <a:tailEnd type="none" w="med" len="med"/>
+                    </a:lnR>
+                    <a:lnT w="9525" cap="flat" cmpd="sng" algn="ctr">
+                      <a:solidFill>
+                        <a:srgbClr val="E3E8EF"/>
+                      </a:solidFill>
+                      <a:prstDash val="solid"/>
+                      <a:round/>
+                      <a:headEnd type="none" w="med" len="med"/>
+                      <a:tailEnd type="none" w="med" len="med"/>
+                    </a:lnT>
+                    <a:lnB w="9525" cap="flat" cmpd="sng" algn="ctr">
+                      <a:solidFill>
+                        <a:srgbClr val="E3E8EF"/>
+                      </a:solidFill>
+                      <a:prstDash val="solid"/>
+                      <a:round/>
+                      <a:headEnd type="none" w="med" len="med"/>
+                      <a:tailEnd type="none" w="med" len="med"/>
+                    </a:lnB>
+                    <a:solidFill>
+                      <a:srgbClr val="FBFCFE"/>
+                    </a:solidFill>
+                  </a:tcPr>
+                </a:tc>
+                <a:tc>
+                  <a:txBody>
+                    <a:bodyPr/>
+                    <a:lstStyle/>
+                    <a:p>
+                      <a:pPr algn="l" indent="0" marL="0">
+                        <a:buNone/>
+                      </a:pPr>
+                      <a:r>
+                        <a:rPr lang="en-US" sz="1250" dirty="0">
+                          <a:solidFill>
+                            <a:srgbClr val="1F2D3D"/>
+                          </a:solidFill>
+                          <a:latin typeface="Calibri" pitchFamily="34" charset="0"/>
+                          <a:ea typeface="Calibri" pitchFamily="34" charset="-122"/>
+                          <a:cs typeface="Calibri" pitchFamily="34" charset="-120"/>
+                        </a:rPr>
+                        <a:t>#150, #151 (8 Oct)</a:t>
+                      </a:r>
+                      <a:endParaRPr lang="en-US" sz="1250" dirty="0">
+                        <a:latin typeface="Calibri" charset="0"/>
+                        <a:ea typeface="Calibri" charset="0"/>
+                        <a:cs typeface="Calibri" charset="0"/>
+                      </a:endParaRPr>
+                    </a:p>
+                  </a:txBody>
+                  <a:tcPr marL="63500" marR="63500" marT="25400" marB="25400" anchor="ctr">
+                    <a:lnL w="9525" cap="flat" cmpd="sng" algn="ctr">
+                      <a:solidFill>
+                        <a:srgbClr val="E3E8EF"/>
+                      </a:solidFill>
+                      <a:prstDash val="solid"/>
+                      <a:round/>
+                      <a:headEnd type="none" w="med" len="med"/>
+                      <a:tailEnd type="none" w="med" len="med"/>
+                    </a:lnL>
+                    <a:lnR w="9525" cap="flat" cmpd="sng" algn="ctr">
+                      <a:solidFill>
+                        <a:srgbClr val="E3E8EF"/>
+                      </a:solidFill>
+                      <a:prstDash val="solid"/>
+                      <a:round/>
+                      <a:headEnd type="none" w="med" len="med"/>
+                      <a:tailEnd type="none" w="med" len="med"/>
+                    </a:lnR>
+                    <a:lnT w="9525" cap="flat" cmpd="sng" algn="ctr">
+                      <a:solidFill>
+                        <a:srgbClr val="E3E8EF"/>
+                      </a:solidFill>
+                      <a:prstDash val="solid"/>
+                      <a:round/>
+                      <a:headEnd type="none" w="med" len="med"/>
+                      <a:tailEnd type="none" w="med" len="med"/>
+                    </a:lnT>
+                    <a:lnB w="9525" cap="flat" cmpd="sng" algn="ctr">
+                      <a:solidFill>
+                        <a:srgbClr val="E3E8EF"/>
+                      </a:solidFill>
+                      <a:prstDash val="solid"/>
+                      <a:round/>
+                      <a:headEnd type="none" w="med" len="med"/>
+                      <a:tailEnd type="none" w="med" len="med"/>
+                    </a:lnB>
+                    <a:solidFill>
+                      <a:srgbClr val="FBFCFE"/>
+                    </a:solidFill>
+                  </a:tcPr>
+                </a:tc>
+                <a:tc>
+                  <a:txBody>
+                    <a:bodyPr/>
+                    <a:lstStyle/>
+                    <a:p>
+                      <a:pPr algn="l" indent="0" marL="0">
+                        <a:buNone/>
+                      </a:pPr>
+                      <a:r>
+                        <a:rPr lang="en-US" sz="1250" dirty="0">
+                          <a:solidFill>
+                            <a:srgbClr val="1F2D3D"/>
+                          </a:solidFill>
+                          <a:latin typeface="Calibri" pitchFamily="34" charset="0"/>
+                          <a:ea typeface="Calibri" pitchFamily="34" charset="-122"/>
+                          <a:cs typeface="Calibri" pitchFamily="34" charset="-120"/>
+                        </a:rPr>
+                        <a:t>scripts 17–18, models/textmining/, TEXT_MINING.md §2–3</a:t>
+                      </a:r>
+                      <a:endParaRPr lang="en-US" sz="1250" dirty="0">
+                        <a:latin typeface="Calibri" charset="0"/>
+                        <a:ea typeface="Calibri" charset="0"/>
+                        <a:cs typeface="Calibri" charset="0"/>
+                      </a:endParaRPr>
+                    </a:p>
+                  </a:txBody>
+                  <a:tcPr marL="63500" marR="63500" marT="25400" marB="25400" anchor="ctr">
+                    <a:lnL w="9525" cap="flat" cmpd="sng" algn="ctr">
+                      <a:solidFill>
+                        <a:srgbClr val="E3E8EF"/>
+                      </a:solidFill>
+                      <a:prstDash val="solid"/>
+                      <a:round/>
+                      <a:headEnd type="none" w="med" len="med"/>
+                      <a:tailEnd type="none" w="med" len="med"/>
+                    </a:lnL>
+                    <a:lnR w="9525" cap="flat" cmpd="sng" algn="ctr">
+                      <a:solidFill>
+                        <a:srgbClr val="E3E8EF"/>
+                      </a:solidFill>
+                      <a:prstDash val="solid"/>
+                      <a:round/>
+                      <a:headEnd type="none" w="med" len="med"/>
+                      <a:tailEnd type="none" w="med" len="med"/>
+                    </a:lnR>
+                    <a:lnT w="9525" cap="flat" cmpd="sng" algn="ctr">
+                      <a:solidFill>
+                        <a:srgbClr val="E3E8EF"/>
+                      </a:solidFill>
+                      <a:prstDash val="solid"/>
+                      <a:round/>
+                      <a:headEnd type="none" w="med" len="med"/>
+                      <a:tailEnd type="none" w="med" len="med"/>
+                    </a:lnT>
+                    <a:lnB w="9525" cap="flat" cmpd="sng" algn="ctr">
+                      <a:solidFill>
+                        <a:srgbClr val="E3E8EF"/>
+                      </a:solidFill>
+                      <a:prstDash val="solid"/>
+                      <a:round/>
+                      <a:headEnd type="none" w="med" len="med"/>
+                      <a:tailEnd type="none" w="med" len="med"/>
+                    </a:lnB>
+                    <a:solidFill>
+                      <a:srgbClr val="FBFCFE"/>
+                    </a:solidFill>
+                  </a:tcPr>
+                </a:tc>
+              </a:tr>
+              <a:tr h="777240">
+                <a:tc>
+                  <a:txBody>
+                    <a:bodyPr/>
+                    <a:lstStyle/>
+                    <a:p>
+                      <a:pPr algn="l" indent="0" marL="0">
+                        <a:buNone/>
+                      </a:pPr>
+                      <a:r>
+                        <a:rPr lang="en-US" sz="1250" b="1" dirty="0">
+                          <a:solidFill>
+                            <a:srgbClr val="1F2D3D"/>
+                          </a:solidFill>
+                          <a:latin typeface="Calibri" pitchFamily="34" charset="0"/>
+                          <a:ea typeface="Calibri" pitchFamily="34" charset="-122"/>
+                          <a:cs typeface="Calibri" pitchFamily="34" charset="-120"/>
+                        </a:rPr>
+                        <a:t>Akshay KS - CB.SC.U4CSE23104</a:t>
+                      </a:r>
+                      <a:endParaRPr lang="en-US" sz="1250" dirty="0">
+                        <a:latin typeface="Calibri" charset="0"/>
+                        <a:ea typeface="Calibri" charset="0"/>
+                        <a:cs typeface="Calibri" charset="0"/>
+                      </a:endParaRPr>
+                    </a:p>
+                  </a:txBody>
+                  <a:tcPr marL="63500" marR="63500" marT="25400" marB="25400" anchor="ctr">
+                    <a:lnL w="9525" cap="flat" cmpd="sng" algn="ctr">
+                      <a:solidFill>
+                        <a:srgbClr val="E3E8EF"/>
+                      </a:solidFill>
+                      <a:prstDash val="solid"/>
+                      <a:round/>
+                      <a:headEnd type="none" w="med" len="med"/>
+                      <a:tailEnd type="none" w="med" len="med"/>
+                    </a:lnL>
+                    <a:lnR w="9525" cap="flat" cmpd="sng" algn="ctr">
+                      <a:solidFill>
+                        <a:srgbClr val="E3E8EF"/>
+                      </a:solidFill>
+                      <a:prstDash val="solid"/>
+                      <a:round/>
+                      <a:headEnd type="none" w="med" len="med"/>
+                      <a:tailEnd type="none" w="med" len="med"/>
+                    </a:lnR>
+                    <a:lnT w="9525" cap="flat" cmpd="sng" algn="ctr">
+                      <a:solidFill>
+                        <a:srgbClr val="E3E8EF"/>
+                      </a:solidFill>
+                      <a:prstDash val="solid"/>
+                      <a:round/>
+                      <a:headEnd type="none" w="med" len="med"/>
+                      <a:tailEnd type="none" w="med" len="med"/>
+                    </a:lnT>
+                    <a:lnB w="9525" cap="flat" cmpd="sng" algn="ctr">
+                      <a:solidFill>
+                        <a:srgbClr val="E3E8EF"/>
+                      </a:solidFill>
+                      <a:prstDash val="solid"/>
+                      <a:round/>
+                      <a:headEnd type="none" w="med" len="med"/>
+                      <a:tailEnd type="none" w="med" len="med"/>
+                    </a:lnB>
+                    <a:solidFill>
+                      <a:srgbClr val="FFFFFF"/>
+                    </a:solidFill>
+                  </a:tcPr>
+                </a:tc>
+                <a:tc>
+                  <a:txBody>
+                    <a:bodyPr/>
+                    <a:lstStyle/>
+                    <a:p>
+                      <a:pPr algn="ctr" indent="0" marL="0">
+                        <a:buNone/>
+                      </a:pPr>
+                      <a:r>
+                        <a:rPr lang="en-US" sz="1250" dirty="0">
+                          <a:solidFill>
+                            <a:srgbClr val="1F2D3D"/>
+                          </a:solidFill>
+                          <a:latin typeface="Calibri" pitchFamily="34" charset="0"/>
+                          <a:ea typeface="Calibri" pitchFamily="34" charset="-122"/>
+                          <a:cs typeface="Calibri" pitchFamily="34" charset="-120"/>
+                        </a:rPr>
+                        <a:t>3</a:t>
+                      </a:r>
+                      <a:endParaRPr lang="en-US" sz="1250" dirty="0">
+                        <a:latin typeface="Calibri" charset="0"/>
+                        <a:ea typeface="Calibri" charset="0"/>
+                        <a:cs typeface="Calibri" charset="0"/>
+                      </a:endParaRPr>
+                    </a:p>
+                  </a:txBody>
+                  <a:tcPr marL="63500" marR="63500" marT="25400" marB="25400" anchor="ctr">
+                    <a:lnL w="9525" cap="flat" cmpd="sng" algn="ctr">
+                      <a:solidFill>
+                        <a:srgbClr val="E3E8EF"/>
+                      </a:solidFill>
+                      <a:prstDash val="solid"/>
+                      <a:round/>
+                      <a:headEnd type="none" w="med" len="med"/>
+                      <a:tailEnd type="none" w="med" len="med"/>
+                    </a:lnL>
+                    <a:lnR w="9525" cap="flat" cmpd="sng" algn="ctr">
+                      <a:solidFill>
+                        <a:srgbClr val="E3E8EF"/>
+                      </a:solidFill>
+                      <a:prstDash val="solid"/>
+                      <a:round/>
+                      <a:headEnd type="none" w="med" len="med"/>
+                      <a:tailEnd type="none" w="med" len="med"/>
+                    </a:lnR>
+                    <a:lnT w="9525" cap="flat" cmpd="sng" algn="ctr">
+                      <a:solidFill>
+                        <a:srgbClr val="E3E8EF"/>
+                      </a:solidFill>
+                      <a:prstDash val="solid"/>
+                      <a:round/>
+                      <a:headEnd type="none" w="med" len="med"/>
+                      <a:tailEnd type="none" w="med" len="med"/>
+                    </a:lnT>
+                    <a:lnB w="9525" cap="flat" cmpd="sng" algn="ctr">
+                      <a:solidFill>
+                        <a:srgbClr val="E3E8EF"/>
+                      </a:solidFill>
+                      <a:prstDash val="solid"/>
+                      <a:round/>
+                      <a:headEnd type="none" w="med" len="med"/>
+                      <a:tailEnd type="none" w="med" len="med"/>
+                    </a:lnB>
+                    <a:solidFill>
+                      <a:srgbClr val="FFFFFF"/>
+                    </a:solidFill>
+                  </a:tcPr>
+                </a:tc>
+                <a:tc>
+                  <a:txBody>
+                    <a:bodyPr/>
+                    <a:lstStyle/>
+                    <a:p>
+                      <a:pPr algn="l" indent="0" marL="0">
+                        <a:buNone/>
+                      </a:pPr>
+                      <a:r>
+                        <a:rPr lang="en-US" sz="1250" dirty="0">
+                          <a:solidFill>
+                            <a:srgbClr val="1F2D3D"/>
+                          </a:solidFill>
+                          <a:latin typeface="Calibri" pitchFamily="34" charset="0"/>
+                          <a:ea typeface="Calibri" pitchFamily="34" charset="-122"/>
+                          <a:cs typeface="Calibri" pitchFamily="34" charset="-120"/>
+                        </a:rPr>
+                        <a:t>#135 ARIMA forecasting with rolling backtest, #139 text-mining dashboard page</a:t>
+                      </a:r>
+                      <a:endParaRPr lang="en-US" sz="1250" dirty="0">
+                        <a:latin typeface="Calibri" charset="0"/>
+                        <a:ea typeface="Calibri" charset="0"/>
+                        <a:cs typeface="Calibri" charset="0"/>
+                      </a:endParaRPr>
+                    </a:p>
+                  </a:txBody>
+                  <a:tcPr marL="63500" marR="63500" marT="25400" marB="25400" anchor="ctr">
+                    <a:lnL w="9525" cap="flat" cmpd="sng" algn="ctr">
+                      <a:solidFill>
+                        <a:srgbClr val="E3E8EF"/>
+                      </a:solidFill>
+                      <a:prstDash val="solid"/>
+                      <a:round/>
+                      <a:headEnd type="none" w="med" len="med"/>
+                      <a:tailEnd type="none" w="med" len="med"/>
+                    </a:lnL>
+                    <a:lnR w="9525" cap="flat" cmpd="sng" algn="ctr">
+                      <a:solidFill>
+                        <a:srgbClr val="E3E8EF"/>
+                      </a:solidFill>
+                      <a:prstDash val="solid"/>
+                      <a:round/>
+                      <a:headEnd type="none" w="med" len="med"/>
+                      <a:tailEnd type="none" w="med" len="med"/>
+                    </a:lnR>
+                    <a:lnT w="9525" cap="flat" cmpd="sng" algn="ctr">
+                      <a:solidFill>
+                        <a:srgbClr val="E3E8EF"/>
+                      </a:solidFill>
+                      <a:prstDash val="solid"/>
+                      <a:round/>
+                      <a:headEnd type="none" w="med" len="med"/>
+                      <a:tailEnd type="none" w="med" len="med"/>
+                    </a:lnT>
+                    <a:lnB w="9525" cap="flat" cmpd="sng" algn="ctr">
+                      <a:solidFill>
+                        <a:srgbClr val="E3E8EF"/>
+                      </a:solidFill>
+                      <a:prstDash val="solid"/>
+                      <a:round/>
+                      <a:headEnd type="none" w="med" len="med"/>
+                      <a:tailEnd type="none" w="med" len="med"/>
+                    </a:lnB>
+                    <a:solidFill>
+                      <a:srgbClr val="FFFFFF"/>
+                    </a:solidFill>
+                  </a:tcPr>
+                </a:tc>
+                <a:tc>
+                  <a:txBody>
+                    <a:bodyPr/>
+                    <a:lstStyle/>
+                    <a:p>
+                      <a:pPr algn="l" indent="0" marL="0">
+                        <a:buNone/>
+                      </a:pPr>
+                      <a:r>
+                        <a:rPr lang="en-US" sz="1250" dirty="0">
+                          <a:solidFill>
+                            <a:srgbClr val="1F2D3D"/>
+                          </a:solidFill>
+                          <a:latin typeface="Calibri" pitchFamily="34" charset="0"/>
+                          <a:ea typeface="Calibri" pitchFamily="34" charset="-122"/>
+                          <a:cs typeface="Calibri" pitchFamily="34" charset="-120"/>
+                        </a:rPr>
+                        <a:t>#152, #153 (9 Oct)</a:t>
+                      </a:r>
+                      <a:endParaRPr lang="en-US" sz="1250" dirty="0">
+                        <a:latin typeface="Calibri" charset="0"/>
+                        <a:ea typeface="Calibri" charset="0"/>
+                        <a:cs typeface="Calibri" charset="0"/>
+                      </a:endParaRPr>
+                    </a:p>
+                  </a:txBody>
+                  <a:tcPr marL="63500" marR="63500" marT="25400" marB="25400" anchor="ctr">
+                    <a:lnL w="9525" cap="flat" cmpd="sng" algn="ctr">
+                      <a:solidFill>
+                        <a:srgbClr val="E3E8EF"/>
+                      </a:solidFill>
+                      <a:prstDash val="solid"/>
+                      <a:round/>
+                      <a:headEnd type="none" w="med" len="med"/>
+                      <a:tailEnd type="none" w="med" len="med"/>
+                    </a:lnL>
+                    <a:lnR w="9525" cap="flat" cmpd="sng" algn="ctr">
+                      <a:solidFill>
+                        <a:srgbClr val="E3E8EF"/>
+                      </a:solidFill>
+                      <a:prstDash val="solid"/>
+                      <a:round/>
+                      <a:headEnd type="none" w="med" len="med"/>
+                      <a:tailEnd type="none" w="med" len="med"/>
+                    </a:lnR>
+                    <a:lnT w="9525" cap="flat" cmpd="sng" algn="ctr">
+                      <a:solidFill>
+                        <a:srgbClr val="E3E8EF"/>
+                      </a:solidFill>
+                      <a:prstDash val="solid"/>
+                      <a:round/>
+                      <a:headEnd type="none" w="med" len="med"/>
+                      <a:tailEnd type="none" w="med" len="med"/>
+                    </a:lnT>
+                    <a:lnB w="9525" cap="flat" cmpd="sng" algn="ctr">
+                      <a:solidFill>
+                        <a:srgbClr val="E3E8EF"/>
+                      </a:solidFill>
+                      <a:prstDash val="solid"/>
+                      <a:round/>
+                      <a:headEnd type="none" w="med" len="med"/>
+                      <a:tailEnd type="none" w="med" len="med"/>
+                    </a:lnB>
+                    <a:solidFill>
+                      <a:srgbClr val="FFFFFF"/>
+                    </a:solidFill>
+                  </a:tcPr>
+                </a:tc>
+                <a:tc>
+                  <a:txBody>
+                    <a:bodyPr/>
+                    <a:lstStyle/>
+                    <a:p>
+                      <a:pPr algn="l" indent="0" marL="0">
+                        <a:buNone/>
+                      </a:pPr>
+                      <a:r>
+                        <a:rPr lang="en-US" sz="1250" dirty="0">
+                          <a:solidFill>
+                            <a:srgbClr val="1F2D3D"/>
+                          </a:solidFill>
+                          <a:latin typeface="Calibri" pitchFamily="34" charset="0"/>
+                          <a:ea typeface="Calibri" pitchFamily="34" charset="-122"/>
+                          <a:cs typeface="Calibri" pitchFamily="34" charset="-120"/>
+                        </a:rPr>
+                        <a:t>scripts/19_forecasting.py, 20_topic_examples.py, TIME_SERIES.md §2, text_mining.py</a:t>
+                      </a:r>
+                      <a:endParaRPr lang="en-US" sz="1250" dirty="0">
+                        <a:latin typeface="Calibri" charset="0"/>
+                        <a:ea typeface="Calibri" charset="0"/>
+                        <a:cs typeface="Calibri" charset="0"/>
+                      </a:endParaRPr>
+                    </a:p>
+                  </a:txBody>
+                  <a:tcPr marL="63500" marR="63500" marT="25400" marB="25400" anchor="ctr">
+                    <a:lnL w="9525" cap="flat" cmpd="sng" algn="ctr">
+                      <a:solidFill>
+                        <a:srgbClr val="E3E8EF"/>
+                      </a:solidFill>
+                      <a:prstDash val="solid"/>
+                      <a:round/>
+                      <a:headEnd type="none" w="med" len="med"/>
+                      <a:tailEnd type="none" w="med" len="med"/>
+                    </a:lnL>
+                    <a:lnR w="9525" cap="flat" cmpd="sng" algn="ctr">
+                      <a:solidFill>
+                        <a:srgbClr val="E3E8EF"/>
+                      </a:solidFill>
+                      <a:prstDash val="solid"/>
+                      <a:round/>
+                      <a:headEnd type="none" w="med" len="med"/>
+                      <a:tailEnd type="none" w="med" len="med"/>
+                    </a:lnR>
+                    <a:lnT w="9525" cap="flat" cmpd="sng" algn="ctr">
+                      <a:solidFill>
+                        <a:srgbClr val="E3E8EF"/>
+                      </a:solidFill>
+                      <a:prstDash val="solid"/>
+                      <a:round/>
+                      <a:headEnd type="none" w="med" len="med"/>
+                      <a:tailEnd type="none" w="med" len="med"/>
+                    </a:lnT>
+                    <a:lnB w="9525" cap="flat" cmpd="sng" algn="ctr">
+                      <a:solidFill>
+                        <a:srgbClr val="E3E8EF"/>
+                      </a:solidFill>
+                      <a:prstDash val="solid"/>
+                      <a:round/>
+                      <a:headEnd type="none" w="med" len="med"/>
+                      <a:tailEnd type="none" w="med" len="med"/>
+                    </a:lnB>
+                    <a:solidFill>
+                      <a:srgbClr val="FFFFFF"/>
+                    </a:solidFill>
+                  </a:tcPr>
+                </a:tc>
+              </a:tr>
+              <a:tr h="685800">
+                <a:tc>
+                  <a:txBody>
+                    <a:bodyPr/>
+                    <a:lstStyle/>
+                    <a:p>
+                      <a:pPr algn="l" indent="0" marL="0">
+                        <a:buNone/>
+                      </a:pPr>
+                      <a:r>
+                        <a:rPr lang="en-US" sz="1250" b="1" dirty="0">
+                          <a:solidFill>
+                            <a:srgbClr val="1F2D3D"/>
+                          </a:solidFill>
+                          <a:latin typeface="Calibri" pitchFamily="34" charset="0"/>
+                          <a:ea typeface="Calibri" pitchFamily="34" charset="-122"/>
+                          <a:cs typeface="Calibri" pitchFamily="34" charset="-120"/>
+                        </a:rPr>
+                        <a:t>Harshini Vennela - CB.SC.U4CSE23455</a:t>
+                      </a:r>
+                      <a:endParaRPr lang="en-US" sz="1250" dirty="0">
+                        <a:latin typeface="Calibri" charset="0"/>
+                        <a:ea typeface="Calibri" charset="0"/>
+                        <a:cs typeface="Calibri" charset="0"/>
+                      </a:endParaRPr>
+                    </a:p>
+                  </a:txBody>
+                  <a:tcPr marL="63500" marR="63500" marT="25400" marB="25400" anchor="ctr">
+                    <a:lnL w="9525" cap="flat" cmpd="sng" algn="ctr">
+                      <a:solidFill>
+                        <a:srgbClr val="E3E8EF"/>
+                      </a:solidFill>
+                      <a:prstDash val="solid"/>
+                      <a:round/>
+                      <a:headEnd type="none" w="med" len="med"/>
+                      <a:tailEnd type="none" w="med" len="med"/>
+                    </a:lnL>
+                    <a:lnR w="9525" cap="flat" cmpd="sng" algn="ctr">
+                      <a:solidFill>
+                        <a:srgbClr val="E3E8EF"/>
+                      </a:solidFill>
+                      <a:prstDash val="solid"/>
+                      <a:round/>
+                      <a:headEnd type="none" w="med" len="med"/>
+                      <a:tailEnd type="none" w="med" len="med"/>
+                    </a:lnR>
+                    <a:lnT w="9525" cap="flat" cmpd="sng" algn="ctr">
+                      <a:solidFill>
+                        <a:srgbClr val="E3E8EF"/>
+                      </a:solidFill>
+                      <a:prstDash val="solid"/>
+                      <a:round/>
+                      <a:headEnd type="none" w="med" len="med"/>
+                      <a:tailEnd type="none" w="med" len="med"/>
+                    </a:lnT>
+                    <a:lnB w="9525" cap="flat" cmpd="sng" algn="ctr">
+                      <a:solidFill>
+                        <a:srgbClr val="E3E8EF"/>
+                      </a:solidFill>
+                      <a:prstDash val="solid"/>
+                      <a:round/>
+                      <a:headEnd type="none" w="med" len="med"/>
+                      <a:tailEnd type="none" w="med" len="med"/>
+                    </a:lnB>
+                    <a:solidFill>
+                      <a:srgbClr val="FBFCFE"/>
+                    </a:solidFill>
+                  </a:tcPr>
+                </a:tc>
+                <a:tc>
+                  <a:txBody>
+                    <a:bodyPr/>
+                    <a:lstStyle/>
+                    <a:p>
+                      <a:pPr algn="ctr" indent="0" marL="0">
+                        <a:buNone/>
+                      </a:pPr>
+                      <a:r>
+                        <a:rPr lang="en-US" sz="1250" dirty="0">
+                          <a:solidFill>
+                            <a:srgbClr val="1F2D3D"/>
+                          </a:solidFill>
+                          <a:latin typeface="Calibri" pitchFamily="34" charset="0"/>
+                          <a:ea typeface="Calibri" pitchFamily="34" charset="-122"/>
+                          <a:cs typeface="Calibri" pitchFamily="34" charset="-120"/>
+                        </a:rPr>
+                        <a:t>4</a:t>
+                      </a:r>
+                      <a:endParaRPr lang="en-US" sz="1250" dirty="0">
+                        <a:latin typeface="Calibri" charset="0"/>
+                        <a:ea typeface="Calibri" charset="0"/>
+                        <a:cs typeface="Calibri" charset="0"/>
+                      </a:endParaRPr>
+                    </a:p>
+                  </a:txBody>
+                  <a:tcPr marL="63500" marR="63500" marT="25400" marB="25400" anchor="ctr">
+                    <a:lnL w="9525" cap="flat" cmpd="sng" algn="ctr">
+                      <a:solidFill>
+                        <a:srgbClr val="E3E8EF"/>
+                      </a:solidFill>
+                      <a:prstDash val="solid"/>
+                      <a:round/>
+                      <a:headEnd type="none" w="med" len="med"/>
+                      <a:tailEnd type="none" w="med" len="med"/>
+                    </a:lnL>
+                    <a:lnR w="9525" cap="flat" cmpd="sng" algn="ctr">
+                      <a:solidFill>
+                        <a:srgbClr val="E3E8EF"/>
+                      </a:solidFill>
+                      <a:prstDash val="solid"/>
+                      <a:round/>
+                      <a:headEnd type="none" w="med" len="med"/>
+                      <a:tailEnd type="none" w="med" len="med"/>
+                    </a:lnR>
+                    <a:lnT w="9525" cap="flat" cmpd="sng" algn="ctr">
+                      <a:solidFill>
+                        <a:srgbClr val="E3E8EF"/>
+                      </a:solidFill>
+                      <a:prstDash val="solid"/>
+                      <a:round/>
+                      <a:headEnd type="none" w="med" len="med"/>
+                      <a:tailEnd type="none" w="med" len="med"/>
+                    </a:lnT>
+                    <a:lnB w="9525" cap="flat" cmpd="sng" algn="ctr">
+                      <a:solidFill>
+                        <a:srgbClr val="E3E8EF"/>
+                      </a:solidFill>
+                      <a:prstDash val="solid"/>
+                      <a:round/>
+                      <a:headEnd type="none" w="med" len="med"/>
+                      <a:tailEnd type="none" w="med" len="med"/>
+                    </a:lnB>
+                    <a:solidFill>
+                      <a:srgbClr val="FBFCFE"/>
+                    </a:solidFill>
+                  </a:tcPr>
+                </a:tc>
+                <a:tc>
+                  <a:txBody>
+                    <a:bodyPr/>
+                    <a:lstStyle/>
+                    <a:p>
+                      <a:pPr algn="l" indent="0" marL="0">
+                        <a:buNone/>
+                      </a:pPr>
+                      <a:r>
+                        <a:rPr lang="en-US" sz="1250" dirty="0">
+                          <a:solidFill>
+                            <a:srgbClr val="1F2D3D"/>
+                          </a:solidFill>
+                          <a:latin typeface="Calibri" pitchFamily="34" charset="0"/>
+                          <a:ea typeface="Calibri" pitchFamily="34" charset="-122"/>
+                          <a:cs typeface="Calibri" pitchFamily="34" charset="-120"/>
+                        </a:rPr>
+                        <a:t>#137 forecast evaluation and alerts, #142 forecast write-up, #146 check-a-review page</a:t>
+                      </a:r>
+                      <a:endParaRPr lang="en-US" sz="1250" dirty="0">
+                        <a:latin typeface="Calibri" charset="0"/>
+                        <a:ea typeface="Calibri" charset="0"/>
+                        <a:cs typeface="Calibri" charset="0"/>
+                      </a:endParaRPr>
+                    </a:p>
+                  </a:txBody>
+                  <a:tcPr marL="63500" marR="63500" marT="25400" marB="25400" anchor="ctr">
+                    <a:lnL w="9525" cap="flat" cmpd="sng" algn="ctr">
+                      <a:solidFill>
+                        <a:srgbClr val="E3E8EF"/>
+                      </a:solidFill>
+                      <a:prstDash val="solid"/>
+                      <a:round/>
+                      <a:headEnd type="none" w="med" len="med"/>
+                      <a:tailEnd type="none" w="med" len="med"/>
+                    </a:lnL>
+                    <a:lnR w="9525" cap="flat" cmpd="sng" algn="ctr">
+                      <a:solidFill>
+                        <a:srgbClr val="E3E8EF"/>
+                      </a:solidFill>
+                      <a:prstDash val="solid"/>
+                      <a:round/>
+                      <a:headEnd type="none" w="med" len="med"/>
+                      <a:tailEnd type="none" w="med" len="med"/>
+                    </a:lnR>
+                    <a:lnT w="9525" cap="flat" cmpd="sng" algn="ctr">
+                      <a:solidFill>
+                        <a:srgbClr val="E3E8EF"/>
+                      </a:solidFill>
+                      <a:prstDash val="solid"/>
+                      <a:round/>
+                      <a:headEnd type="none" w="med" len="med"/>
+                      <a:tailEnd type="none" w="med" len="med"/>
+                    </a:lnT>
+                    <a:lnB w="9525" cap="flat" cmpd="sng" algn="ctr">
+                      <a:solidFill>
+                        <a:srgbClr val="E3E8EF"/>
+                      </a:solidFill>
+                      <a:prstDash val="solid"/>
+                      <a:round/>
+                      <a:headEnd type="none" w="med" len="med"/>
+                      <a:tailEnd type="none" w="med" len="med"/>
+                    </a:lnB>
+                    <a:solidFill>
+                      <a:srgbClr val="FBFCFE"/>
+                    </a:solidFill>
+                  </a:tcPr>
+                </a:tc>
+                <a:tc>
+                  <a:txBody>
+                    <a:bodyPr/>
+                    <a:lstStyle/>
+                    <a:p>
+                      <a:pPr algn="l" indent="0" marL="0">
+                        <a:buNone/>
+                      </a:pPr>
+                      <a:r>
+                        <a:rPr lang="en-US" sz="1250" dirty="0">
+                          <a:solidFill>
+                            <a:srgbClr val="1F2D3D"/>
+                          </a:solidFill>
+                          <a:latin typeface="Calibri" pitchFamily="34" charset="0"/>
+                          <a:ea typeface="Calibri" pitchFamily="34" charset="-122"/>
+                          <a:cs typeface="Calibri" pitchFamily="34" charset="-120"/>
+                        </a:rPr>
+                        <a:t>#154, #155, #156 (10 Oct)</a:t>
+                      </a:r>
+                      <a:endParaRPr lang="en-US" sz="1250" dirty="0">
+                        <a:latin typeface="Calibri" charset="0"/>
+                        <a:ea typeface="Calibri" charset="0"/>
+                        <a:cs typeface="Calibri" charset="0"/>
+                      </a:endParaRPr>
+                    </a:p>
+                  </a:txBody>
+                  <a:tcPr marL="63500" marR="63500" marT="25400" marB="25400" anchor="ctr">
+                    <a:lnL w="9525" cap="flat" cmpd="sng" algn="ctr">
+                      <a:solidFill>
+                        <a:srgbClr val="E3E8EF"/>
+                      </a:solidFill>
+                      <a:prstDash val="solid"/>
+                      <a:round/>
+                      <a:headEnd type="none" w="med" len="med"/>
+                      <a:tailEnd type="none" w="med" len="med"/>
+                    </a:lnL>
+                    <a:lnR w="9525" cap="flat" cmpd="sng" algn="ctr">
+                      <a:solidFill>
+                        <a:srgbClr val="E3E8EF"/>
+                      </a:solidFill>
+                      <a:prstDash val="solid"/>
+                      <a:round/>
+                      <a:headEnd type="none" w="med" len="med"/>
+                      <a:tailEnd type="none" w="med" len="med"/>
+                    </a:lnR>
+                    <a:lnT w="9525" cap="flat" cmpd="sng" algn="ctr">
+                      <a:solidFill>
+                        <a:srgbClr val="E3E8EF"/>
+                      </a:solidFill>
+                      <a:prstDash val="solid"/>
+                      <a:round/>
+                      <a:headEnd type="none" w="med" len="med"/>
+                      <a:tailEnd type="none" w="med" len="med"/>
+                    </a:lnT>
+                    <a:lnB w="9525" cap="flat" cmpd="sng" algn="ctr">
+                      <a:solidFill>
+                        <a:srgbClr val="E3E8EF"/>
+                      </a:solidFill>
+                      <a:prstDash val="solid"/>
+                      <a:round/>
+                      <a:headEnd type="none" w="med" len="med"/>
+                      <a:tailEnd type="none" w="med" len="med"/>
+                    </a:lnB>
+                    <a:solidFill>
+                      <a:srgbClr val="FBFCFE"/>
+                    </a:solidFill>
+                  </a:tcPr>
+                </a:tc>
+                <a:tc>
+                  <a:txBody>
+                    <a:bodyPr/>
+                    <a:lstStyle/>
+                    <a:p>
+                      <a:pPr algn="l" indent="0" marL="0">
+                        <a:buNone/>
+                      </a:pPr>
+                      <a:r>
+                        <a:rPr lang="en-US" sz="1250" dirty="0">
+                          <a:solidFill>
+                            <a:srgbClr val="1F2D3D"/>
+                          </a:solidFill>
+                          <a:latin typeface="Calibri" pitchFamily="34" charset="0"/>
+                          <a:ea typeface="Calibri" pitchFamily="34" charset="-122"/>
+                          <a:cs typeface="Calibri" pitchFamily="34" charset="-120"/>
+                        </a:rPr>
+                        <a:t>scripts/20_forecast_evaluation.py, TIME_SERIES.md §2.5, check_review.py</a:t>
+                      </a:r>
+                      <a:endParaRPr lang="en-US" sz="1250" dirty="0">
+                        <a:latin typeface="Calibri" charset="0"/>
+                        <a:ea typeface="Calibri" charset="0"/>
+                        <a:cs typeface="Calibri" charset="0"/>
+                      </a:endParaRPr>
+                    </a:p>
+                  </a:txBody>
+                  <a:tcPr marL="63500" marR="63500" marT="25400" marB="25400" anchor="ctr">
+                    <a:lnL w="9525" cap="flat" cmpd="sng" algn="ctr">
+                      <a:solidFill>
+                        <a:srgbClr val="E3E8EF"/>
+                      </a:solidFill>
+                      <a:prstDash val="solid"/>
+                      <a:round/>
+                      <a:headEnd type="none" w="med" len="med"/>
+                      <a:tailEnd type="none" w="med" len="med"/>
+                    </a:lnL>
+                    <a:lnR w="9525" cap="flat" cmpd="sng" algn="ctr">
+                      <a:solidFill>
+                        <a:srgbClr val="E3E8EF"/>
+                      </a:solidFill>
+                      <a:prstDash val="solid"/>
+                      <a:round/>
+                      <a:headEnd type="none" w="med" len="med"/>
+                      <a:tailEnd type="none" w="med" len="med"/>
+                    </a:lnR>
+                    <a:lnT w="9525" cap="flat" cmpd="sng" algn="ctr">
+                      <a:solidFill>
+                        <a:srgbClr val="E3E8EF"/>
+                      </a:solidFill>
+                      <a:prstDash val="solid"/>
+                      <a:round/>
+                      <a:headEnd type="none" w="med" len="med"/>
+                      <a:tailEnd type="none" w="med" len="med"/>
+                    </a:lnT>
+                    <a:lnB w="9525" cap="flat" cmpd="sng" algn="ctr">
+                      <a:solidFill>
+                        <a:srgbClr val="E3E8EF"/>
+                      </a:solidFill>
+                      <a:prstDash val="solid"/>
+                      <a:round/>
+                      <a:headEnd type="none" w="med" len="med"/>
+                      <a:tailEnd type="none" w="med" len="med"/>
+                    </a:lnB>
+                    <a:solidFill>
+                      <a:srgbClr val="FBFCFE"/>
+                    </a:solidFill>
+                  </a:tcPr>
+                </a:tc>
+              </a:tr>
+              <a:tr h="685800">
+                <a:tc>
+                  <a:txBody>
+                    <a:bodyPr/>
+                    <a:lstStyle/>
+                    <a:p>
+                      <a:pPr algn="l" indent="0" marL="0">
+                        <a:buNone/>
+                      </a:pPr>
+                      <a:r>
+                        <a:rPr lang="en-US" sz="1250" b="1" dirty="0">
+                          <a:solidFill>
+                            <a:srgbClr val="1F2D3D"/>
+                          </a:solidFill>
+                          <a:latin typeface="Calibri" pitchFamily="34" charset="0"/>
+                          <a:ea typeface="Calibri" pitchFamily="34" charset="-122"/>
+                          <a:cs typeface="Calibri" pitchFamily="34" charset="-120"/>
+                        </a:rPr>
+                        <a:t>Kanishka D - CB.SC.U4CSE23155</a:t>
+                      </a:r>
+                      <a:endParaRPr lang="en-US" sz="1250" dirty="0">
+                        <a:latin typeface="Calibri" charset="0"/>
+                        <a:ea typeface="Calibri" charset="0"/>
+                        <a:cs typeface="Calibri" charset="0"/>
+                      </a:endParaRPr>
+                    </a:p>
+                  </a:txBody>
+                  <a:tcPr marL="63500" marR="63500" marT="25400" marB="25400" anchor="ctr">
+                    <a:lnL w="9525" cap="flat" cmpd="sng" algn="ctr">
+                      <a:solidFill>
+                        <a:srgbClr val="E3E8EF"/>
+                      </a:solidFill>
+                      <a:prstDash val="solid"/>
+                      <a:round/>
+                      <a:headEnd type="none" w="med" len="med"/>
+                      <a:tailEnd type="none" w="med" len="med"/>
+                    </a:lnL>
+                    <a:lnR w="9525" cap="flat" cmpd="sng" algn="ctr">
+                      <a:solidFill>
+                        <a:srgbClr val="E3E8EF"/>
+                      </a:solidFill>
+                      <a:prstDash val="solid"/>
+                      <a:round/>
+                      <a:headEnd type="none" w="med" len="med"/>
+                      <a:tailEnd type="none" w="med" len="med"/>
+                    </a:lnR>
+                    <a:lnT w="9525" cap="flat" cmpd="sng" algn="ctr">
+                      <a:solidFill>
+                        <a:srgbClr val="E3E8EF"/>
+                      </a:solidFill>
+                      <a:prstDash val="solid"/>
+                      <a:round/>
+                      <a:headEnd type="none" w="med" len="med"/>
+                      <a:tailEnd type="none" w="med" len="med"/>
+                    </a:lnT>
+                    <a:lnB w="9525" cap="flat" cmpd="sng" algn="ctr">
+                      <a:solidFill>
+                        <a:srgbClr val="E3E8EF"/>
+                      </a:solidFill>
+                      <a:prstDash val="solid"/>
+                      <a:round/>
+                      <a:headEnd type="none" w="med" len="med"/>
+                      <a:tailEnd type="none" w="med" len="med"/>
+                    </a:lnB>
+                    <a:solidFill>
+                      <a:srgbClr val="FFFFFF"/>
+                    </a:solidFill>
+                  </a:tcPr>
+                </a:tc>
+                <a:tc>
+                  <a:txBody>
+                    <a:bodyPr/>
+                    <a:lstStyle/>
+                    <a:p>
+                      <a:pPr algn="ctr" indent="0" marL="0">
+                        <a:buNone/>
+                      </a:pPr>
+                      <a:r>
+                        <a:rPr lang="en-US" sz="1250" dirty="0">
+                          <a:solidFill>
+                            <a:srgbClr val="1F2D3D"/>
+                          </a:solidFill>
+                          <a:latin typeface="Calibri" pitchFamily="34" charset="0"/>
+                          <a:ea typeface="Calibri" pitchFamily="34" charset="-122"/>
+                          <a:cs typeface="Calibri" pitchFamily="34" charset="-120"/>
+                        </a:rPr>
+                        <a:t>5</a:t>
+                      </a:r>
+                      <a:endParaRPr lang="en-US" sz="1250" dirty="0">
+                        <a:latin typeface="Calibri" charset="0"/>
+                        <a:ea typeface="Calibri" charset="0"/>
+                        <a:cs typeface="Calibri" charset="0"/>
+                      </a:endParaRPr>
+                    </a:p>
+                  </a:txBody>
+                  <a:tcPr marL="63500" marR="63500" marT="25400" marB="25400" anchor="ctr">
+                    <a:lnL w="9525" cap="flat" cmpd="sng" algn="ctr">
+                      <a:solidFill>
+                        <a:srgbClr val="E3E8EF"/>
+                      </a:solidFill>
+                      <a:prstDash val="solid"/>
+                      <a:round/>
+                      <a:headEnd type="none" w="med" len="med"/>
+                      <a:tailEnd type="none" w="med" len="med"/>
+                    </a:lnL>
+                    <a:lnR w="9525" cap="flat" cmpd="sng" algn="ctr">
+                      <a:solidFill>
+                        <a:srgbClr val="E3E8EF"/>
+                      </a:solidFill>
+                      <a:prstDash val="solid"/>
+                      <a:round/>
+                      <a:headEnd type="none" w="med" len="med"/>
+                      <a:tailEnd type="none" w="med" len="med"/>
+                    </a:lnR>
+                    <a:lnT w="9525" cap="flat" cmpd="sng" algn="ctr">
+                      <a:solidFill>
+                        <a:srgbClr val="E3E8EF"/>
+                      </a:solidFill>
+                      <a:prstDash val="solid"/>
+                      <a:round/>
+                      <a:headEnd type="none" w="med" len="med"/>
+                      <a:tailEnd type="none" w="med" len="med"/>
+                    </a:lnT>
+                    <a:lnB w="9525" cap="flat" cmpd="sng" algn="ctr">
+                      <a:solidFill>
+                        <a:srgbClr val="E3E8EF"/>
+                      </a:solidFill>
+                      <a:prstDash val="solid"/>
+                      <a:round/>
+                      <a:headEnd type="none" w="med" len="med"/>
+                      <a:tailEnd type="none" w="med" len="med"/>
+                    </a:lnB>
+                    <a:solidFill>
+                      <a:srgbClr val="FFFFFF"/>
+                    </a:solidFill>
+                  </a:tcPr>
+                </a:tc>
+                <a:tc>
+                  <a:txBody>
+                    <a:bodyPr/>
+                    <a:lstStyle/>
+                    <a:p>
+                      <a:pPr algn="l" indent="0" marL="0">
+                        <a:buNone/>
+                      </a:pPr>
+                      <a:r>
+                        <a:rPr lang="en-US" sz="1250" dirty="0">
+                          <a:solidFill>
+                            <a:srgbClr val="1F2D3D"/>
+                          </a:solidFill>
+                          <a:latin typeface="Calibri" pitchFamily="34" charset="0"/>
+                          <a:ea typeface="Calibri" pitchFamily="34" charset="-122"/>
+                          <a:cs typeface="Calibri" pitchFamily="34" charset="-120"/>
+                        </a:rPr>
+                        <a:t>#138 update impact, #141 combined insights, #140 three dashboard pages, #143 final notebook</a:t>
+                      </a:r>
+                      <a:endParaRPr lang="en-US" sz="1250" dirty="0">
+                        <a:latin typeface="Calibri" charset="0"/>
+                        <a:ea typeface="Calibri" charset="0"/>
+                        <a:cs typeface="Calibri" charset="0"/>
+                      </a:endParaRPr>
+                    </a:p>
+                  </a:txBody>
+                  <a:tcPr marL="63500" marR="63500" marT="25400" marB="25400" anchor="ctr">
+                    <a:lnL w="9525" cap="flat" cmpd="sng" algn="ctr">
+                      <a:solidFill>
+                        <a:srgbClr val="E3E8EF"/>
+                      </a:solidFill>
+                      <a:prstDash val="solid"/>
+                      <a:round/>
+                      <a:headEnd type="none" w="med" len="med"/>
+                      <a:tailEnd type="none" w="med" len="med"/>
+                    </a:lnL>
+                    <a:lnR w="9525" cap="flat" cmpd="sng" algn="ctr">
+                      <a:solidFill>
+                        <a:srgbClr val="E3E8EF"/>
+                      </a:solidFill>
+                      <a:prstDash val="solid"/>
+                      <a:round/>
+                      <a:headEnd type="none" w="med" len="med"/>
+                      <a:tailEnd type="none" w="med" len="med"/>
+                    </a:lnR>
+                    <a:lnT w="9525" cap="flat" cmpd="sng" algn="ctr">
+                      <a:solidFill>
+                        <a:srgbClr val="E3E8EF"/>
+                      </a:solidFill>
+                      <a:prstDash val="solid"/>
+                      <a:round/>
+                      <a:headEnd type="none" w="med" len="med"/>
+                      <a:tailEnd type="none" w="med" len="med"/>
+                    </a:lnT>
+                    <a:lnB w="9525" cap="flat" cmpd="sng" algn="ctr">
+                      <a:solidFill>
+                        <a:srgbClr val="E3E8EF"/>
+                      </a:solidFill>
+                      <a:prstDash val="solid"/>
+                      <a:round/>
+                      <a:headEnd type="none" w="med" len="med"/>
+                      <a:tailEnd type="none" w="med" len="med"/>
+                    </a:lnB>
+                    <a:solidFill>
+                      <a:srgbClr val="FFFFFF"/>
+                    </a:solidFill>
+                  </a:tcPr>
+                </a:tc>
+                <a:tc>
+                  <a:txBody>
+                    <a:bodyPr/>
+                    <a:lstStyle/>
+                    <a:p>
+                      <a:pPr algn="l" indent="0" marL="0">
+                        <a:buNone/>
+                      </a:pPr>
+                      <a:r>
+                        <a:rPr lang="en-US" sz="1250" dirty="0">
+                          <a:solidFill>
+                            <a:srgbClr val="1F2D3D"/>
+                          </a:solidFill>
+                          <a:latin typeface="Calibri" pitchFamily="34" charset="0"/>
+                          <a:ea typeface="Calibri" pitchFamily="34" charset="-122"/>
+                          <a:cs typeface="Calibri" pitchFamily="34" charset="-120"/>
+                        </a:rPr>
+                        <a:t>#157, #158 (11 Oct)</a:t>
+                      </a:r>
+                      <a:endParaRPr lang="en-US" sz="1250" dirty="0">
+                        <a:latin typeface="Calibri" charset="0"/>
+                        <a:ea typeface="Calibri" charset="0"/>
+                        <a:cs typeface="Calibri" charset="0"/>
+                      </a:endParaRPr>
+                    </a:p>
+                  </a:txBody>
+                  <a:tcPr marL="63500" marR="63500" marT="25400" marB="25400" anchor="ctr">
+                    <a:lnL w="9525" cap="flat" cmpd="sng" algn="ctr">
+                      <a:solidFill>
+                        <a:srgbClr val="E3E8EF"/>
+                      </a:solidFill>
+                      <a:prstDash val="solid"/>
+                      <a:round/>
+                      <a:headEnd type="none" w="med" len="med"/>
+                      <a:tailEnd type="none" w="med" len="med"/>
+                    </a:lnL>
+                    <a:lnR w="9525" cap="flat" cmpd="sng" algn="ctr">
+                      <a:solidFill>
+                        <a:srgbClr val="E3E8EF"/>
+                      </a:solidFill>
+                      <a:prstDash val="solid"/>
+                      <a:round/>
+                      <a:headEnd type="none" w="med" len="med"/>
+                      <a:tailEnd type="none" w="med" len="med"/>
+                    </a:lnR>
+                    <a:lnT w="9525" cap="flat" cmpd="sng" algn="ctr">
+                      <a:solidFill>
+                        <a:srgbClr val="E3E8EF"/>
+                      </a:solidFill>
+                      <a:prstDash val="solid"/>
+                      <a:round/>
+                      <a:headEnd type="none" w="med" len="med"/>
+                      <a:tailEnd type="none" w="med" len="med"/>
+                    </a:lnT>
+                    <a:lnB w="9525" cap="flat" cmpd="sng" algn="ctr">
+                      <a:solidFill>
+                        <a:srgbClr val="E3E8EF"/>
+                      </a:solidFill>
+                      <a:prstDash val="solid"/>
+                      <a:round/>
+                      <a:headEnd type="none" w="med" len="med"/>
+                      <a:tailEnd type="none" w="med" len="med"/>
+                    </a:lnB>
+                    <a:solidFill>
+                      <a:srgbClr val="FFFFFF"/>
+                    </a:solidFill>
+                  </a:tcPr>
+                </a:tc>
+                <a:tc>
+                  <a:txBody>
+                    <a:bodyPr/>
+                    <a:lstStyle/>
+                    <a:p>
+                      <a:pPr algn="l" indent="0" marL="0">
+                        <a:buNone/>
+                      </a:pPr>
+                      <a:r>
+                        <a:rPr lang="en-US" sz="1250" dirty="0">
+                          <a:solidFill>
+                            <a:srgbClr val="1F2D3D"/>
+                          </a:solidFill>
+                          <a:latin typeface="Calibri" pitchFamily="34" charset="0"/>
+                          <a:ea typeface="Calibri" pitchFamily="34" charset="-122"/>
+                          <a:cs typeface="Calibri" pitchFamily="34" charset="-120"/>
+                        </a:rPr>
+                        <a:t>scripts 21–22, COMBINED_INSIGHTS.md, notebooks/Review_2.ipynb</a:t>
+                      </a:r>
+                      <a:endParaRPr lang="en-US" sz="1250" dirty="0">
+                        <a:latin typeface="Calibri" charset="0"/>
+                        <a:ea typeface="Calibri" charset="0"/>
+                        <a:cs typeface="Calibri" charset="0"/>
+                      </a:endParaRPr>
+                    </a:p>
+                  </a:txBody>
+                  <a:tcPr marL="63500" marR="63500" marT="25400" marB="25400" anchor="ctr">
+                    <a:lnL w="9525" cap="flat" cmpd="sng" algn="ctr">
+                      <a:solidFill>
+                        <a:srgbClr val="E3E8EF"/>
+                      </a:solidFill>
+                      <a:prstDash val="solid"/>
+                      <a:round/>
+                      <a:headEnd type="none" w="med" len="med"/>
+                      <a:tailEnd type="none" w="med" len="med"/>
+                    </a:lnL>
+                    <a:lnR w="9525" cap="flat" cmpd="sng" algn="ctr">
+                      <a:solidFill>
+                        <a:srgbClr val="E3E8EF"/>
+                      </a:solidFill>
+                      <a:prstDash val="solid"/>
+                      <a:round/>
+                      <a:headEnd type="none" w="med" len="med"/>
+                      <a:tailEnd type="none" w="med" len="med"/>
+                    </a:lnR>
+                    <a:lnT w="9525" cap="flat" cmpd="sng" algn="ctr">
+                      <a:solidFill>
+                        <a:srgbClr val="E3E8EF"/>
+                      </a:solidFill>
+                      <a:prstDash val="solid"/>
+                      <a:round/>
+                      <a:headEnd type="none" w="med" len="med"/>
+                      <a:tailEnd type="none" w="med" len="med"/>
+                    </a:lnT>
+                    <a:lnB w="9525" cap="flat" cmpd="sng" algn="ctr">
+                      <a:solidFill>
+                        <a:srgbClr val="E3E8EF"/>
+                      </a:solidFill>
+                      <a:prstDash val="solid"/>
+                      <a:round/>
+                      <a:headEnd type="none" w="med" len="med"/>
+                      <a:tailEnd type="none" w="med" len="med"/>
+                    </a:lnB>
+                    <a:solidFill>
+                      <a:srgbClr val="FFFFFF"/>
+                    </a:solidFill>
+                  </a:tcPr>
+                </a:tc>
+              </a:tr>
+            </a:tbl>
+          </a:graphicData>
+        </a:graphic>
+      </p:graphicFrame>
+      <p:sp>
+        <p:nvSpPr>
+          <p:cNvPr id="5" name="Text 2"/>
+          <p:cNvSpPr txBox="1"/>
+          <p:nvPr/>
+        </p:nvSpPr>
+        <p:spPr>
+          <a:xfrm>
+            <a:off x="640080" y="5623560"/>
+            <a:ext cx="10911535" cy="685800"/>
+          </a:xfrm>
+          <a:prstGeom prst="rect">
+            <a:avLst/>
+          </a:prstGeom>
+          <a:noFill/>
+          <a:ln/>
+        </p:spPr>
+        <p:txBody>
+          <a:bodyPr wrap="square" lIns="0" tIns="0" rIns="0" bIns="0" rtlCol="0" anchor="t">
+            <a:normAutofit/>
+          </a:bodyPr>
+          <a:lstStyle/>
+          <a:p>
+            <a:pPr indent="0" marL="0">
+              <a:lnSpc>
+                <a:spcPct val="100000"/>
+              </a:lnSpc>
+              <a:spcAft>
+                <a:spcPts val="600"/>
+              </a:spcAft>
+              <a:buNone/>
+            </a:pPr>
+            <a:r>
+              <a:rPr lang="en-US" sz="1250" b="1" dirty="0">
+                <a:solidFill>
+                  <a:schemeClr val="tx1"/>
+                </a:solidFill>
+              </a:rPr>
+              <a:t>Activity history: </a:t>
+            </a:r>
+            <a:pPr indent="0" marL="0">
+              <a:lnSpc>
+                <a:spcPct val="100000"/>
+              </a:lnSpc>
+              <a:spcAft>
+                <a:spcPts val="600"/>
+              </a:spcAft>
+              <a:buNone/>
+            </a:pPr>
+            <a:r>
+              <a:rPr lang="en-US" sz="1250" dirty="0">
+                <a:solidFill>
+                  <a:schemeClr val="tx1"/>
+                </a:solidFill>
+              </a:rPr>
+              <a:t>one stage after another, each merged before the next began (Stages 1–2 on 8 Oct, Stage 3 on 9 Oct, Stage 4 on 10 Oct, Stage 5 on 11 Oct). Each task is linked to a merged pull request, and every card is in Completed.</a:t>
+            </a:r>
+            <a:endParaRPr lang="en-US" sz="1250" dirty="0"/>
+          </a:p>
+        </p:txBody>
+      </p:sp>
+      <p:sp>
+        <p:nvSpPr>
+          <p:cNvPr id="25" name="Slide Number Placeholder 0"/>
+          <p:cNvSpPr>
+            <a:spLocks noGrp="1"/>
+          </p:cNvSpPr>
+          <p:nvPr>
+            <p:ph type="sldNum" sz="quarter" idx="4294967295"/>
+          </p:nvPr>
+        </p:nvSpPr>
+        <p:spPr>
+          <a:xfrm>
+            <a:off x="11091672" y="6446520"/>
+            <a:ext cx="457200" cy="256032"/>
+          </a:xfrm>
+          <a:prstGeom prst="rect">
+            <a:avLst/>
+          </a:prstGeom>
+          <a:extLst>
+            <a:ext uri="{C572A759-6A51-4108-AA02-DFA0A04FC94B}">
+              <ma14:wrappingTextBoxFlag xmlns:ma14="http://schemas.microsoft.com/office/mac/drawingml/2011/main" val="0"/>
+            </a:ext>
+          </a:extLst>
+        </p:spPr>
+        <p:txBody>
+          <a:bodyPr/>
+          <a:lstStyle>
+            <a:lvl1pPr>
+              <a:defRPr sz="1000">
+                <a:solidFill>
+                  <a:schemeClr val="accent6"/>
+                </a:solidFill>
+              </a:defRPr>
+            </a:lvl1pPr>
+          </a:lstStyle>
+          <a:p>
+            <a:pPr algn="r"/>
+            <a:fld id="{F7021451-1387-4CA6-816F-3879F97B5CBC}" type="slidenum">
+              <a:rPr b="0" lang="en-US"/>
+              <a:t>21</a:t>
+            </a:fld>
+            <a:endParaRPr lang="en-US"/>
+          </a:p>
+        </p:txBody>
+      </p:sp>
+    </p:spTree>
+  </p:cSld>
+  <p:clrMapOvr>
+    <a:masterClrMapping/>
+  </p:clrMapOvr>
+</p:sld>
+</file>
+
+<file path=ppt/slides/slide22.xml><?xml version="1.0" encoding="utf-8"?>
+<p:sld xmlns:a="http://schemas.openxmlformats.org/drawingml/2006/main" xmlns:r="http://schemas.openxmlformats.org/officeDocument/2006/relationships" xmlns:p="http://schemas.openxmlformats.org/presentationml/2006/main">
+  <p:cSld name="Slide 22">
+    <p:spTree>
+      <p:nvGrpSpPr>
+        <p:cNvPr id="1" name=""/>
+        <p:cNvGrpSpPr/>
+        <p:nvPr/>
+      </p:nvGrpSpPr>
+      <p:grpSpPr>
+        <a:xfrm>
+          <a:off x="0" y="0"/>
+          <a:ext cx="0" cy="0"/>
+          <a:chOff x="0" y="0"/>
+          <a:chExt cx="0" cy="0"/>
+        </a:xfrm>
+      </p:grpSpPr>
+      <p:sp>
+        <p:nvSpPr>
+          <p:cNvPr id="2" name="Text 1"/>
+          <p:cNvSpPr/>
+          <p:nvPr>
+            <p:ph idx="101" type="body" hasCustomPrompt="1"/>
+          </p:nvPr>
+        </p:nvSpPr>
+        <p:spPr>
+          <a:xfrm>
+            <a:off x="640080" y="292608"/>
+            <a:ext cx="10911535" cy="274320"/>
+          </a:xfrm>
+          <a:prstGeom prst="rect">
+            <a:avLst/>
+          </a:prstGeom>
+          <a:noFill/>
+          <a:ln/>
+        </p:spPr>
+        <p:txBody>
+          <a:bodyPr wrap="square" lIns="0" tIns="0" rIns="0" bIns="0" rtlCol="0" anchor="ctr"/>
+          <a:lstStyle/>
+          <a:p>
+            <a:pPr algn="l" indent="0" marL="0">
+              <a:buNone/>
+            </a:pPr>
+            <a:r>
+              <a:rPr lang="en-US" sz="1100" b="1" spc="200" kern="0" dirty="0">
+                <a:solidFill>
+                  <a:schemeClr val="accent6"/>
+                </a:solidFill>
+              </a:rPr>
+              <a:t>15  |  CONCLUSION AND SUBMISSION</a:t>
             </a:r>
             <a:endParaRPr lang="en-US" sz="1100" dirty="0"/>
           </a:p>
@@ -26080,7 +26379,7 @@
             <a:pPr algn="r"/>
             <a:fld id="{F7021451-1387-4CA6-816F-3879F97B5CBC}" type="slidenum">
               <a:rPr b="0" lang="en-US"/>
-              <a:t>21</a:t>
+              <a:t>22</a:t>
             </a:fld>
             <a:endParaRPr lang="en-US"/>
           </a:p>

--- a/docs/Review_2_Presentation.pptx
+++ b/docs/Review_2_Presentation.pptx
@@ -4353,7 +4353,7 @@
         </p:nvSpPr>
         <p:spPr>
           <a:xfrm xmlns:a="http://schemas.openxmlformats.org/drawingml/2006/main">
-            <a:off x="685800" y="2428875"/>
+            <a:off x="685800" y="2148840"/>
             <a:ext cx="10477500" cy="666750"/>
           </a:xfrm>
           <a:prstGeom xmlns:a="http://schemas.openxmlformats.org/drawingml/2006/main" prst="rect">
@@ -4420,8 +4420,8 @@
         </p:nvSpPr>
         <p:spPr>
           <a:xfrm xmlns:a="http://schemas.openxmlformats.org/drawingml/2006/main">
-            <a:off x="685800" y="3246120"/>
-            <a:ext cx="10477500" cy="1600200"/>
+            <a:off x="685800" y="2926080"/>
+            <a:ext cx="10477500" cy="2011680"/>
           </a:xfrm>
           <a:prstGeom xmlns:a="http://schemas.openxmlformats.org/drawingml/2006/main" prst="rect">
             <a:avLst/>
@@ -4449,7 +4449,7 @@
           <ns2:p xmlns:ns2="http://schemas.openxmlformats.org/drawingml/2006/main">
             <ns2:pPr>
               <ns2:spcAft>
-                <ns2:spcPts val="400"/>
+                <ns2:spcPts val="300"/>
               </ns2:spcAft>
               <ns2:defRPr sz="1875" b="0">
                 <ns2:solidFill>
@@ -4475,7 +4475,7 @@
           <ns3:p xmlns:ns3="http://schemas.openxmlformats.org/drawingml/2006/main">
             <ns3:pPr>
               <ns3:spcAft>
-                <ns3:spcPts val="400"/>
+                <ns3:spcPts val="300"/>
               </ns3:spcAft>
               <ns3:defRPr sz="1875" b="0">
                 <ns3:solidFill>
@@ -4485,6 +4485,9 @@
                 <ns3:ea typeface="Arial"/>
                 <ns3:cs typeface="Arial"/>
               </ns3:defRPr>
+              <ns3:tabLst>
+                <ns3:tab pos="3291840" algn="l"/>
+              </ns3:tabLst>
             </ns3:pPr>
             <ns3:r>
               <ns3:rPr sz="1600" b="0">
@@ -4495,13 +4498,13 @@
                 <ns3:ea typeface="Arial"/>
                 <ns3:cs typeface="Arial"/>
               </ns3:rPr>
-              <ns3:t>Aditya Monish Kumar K (CB.SC.U4CSE23103)  ·  Regella Krishna Saketh (CB.SC.U4CSE23649)</ns3:t>
+              <ns3:t>Aditya Monish Kumar K	CB.SC.U4CSE23103</ns3:t>
             </ns3:r>
           </ns3:p>
           <ns4:p xmlns:ns4="http://schemas.openxmlformats.org/drawingml/2006/main">
             <ns4:pPr>
               <ns4:spcAft>
-                <ns4:spcPts val="400"/>
+                <ns4:spcPts val="300"/>
               </ns4:spcAft>
               <ns4:defRPr sz="1875" b="0">
                 <ns4:solidFill>
@@ -4511,6 +4514,9 @@
                 <ns4:ea typeface="Arial"/>
                 <ns4:cs typeface="Arial"/>
               </ns4:defRPr>
+              <ns4:tabLst>
+                <ns4:tab pos="3291840" algn="l"/>
+              </ns4:tabLst>
             </ns4:pPr>
             <ns4:r>
               <ns4:rPr sz="1600" b="0">
@@ -4521,13 +4527,13 @@
                 <ns4:ea typeface="Arial"/>
                 <ns4:cs typeface="Arial"/>
               </ns4:rPr>
-              <ns4:t>Akshay KS (CB.SC.U4CSE23104)  ·  Harshini Vennela (CB.SC.U4CSE23455)</ns4:t>
+              <ns4:t>Regella Krishna Saketh	CB.SC.U4CSE23649</ns4:t>
             </ns4:r>
           </ns4:p>
           <ns5:p xmlns:ns5="http://schemas.openxmlformats.org/drawingml/2006/main">
             <ns5:pPr>
               <ns5:spcAft>
-                <ns5:spcPts val="400"/>
+                <ns5:spcPts val="300"/>
               </ns5:spcAft>
               <ns5:defRPr sz="1875" b="0">
                 <ns5:solidFill>
@@ -4537,6 +4543,9 @@
                 <ns5:ea typeface="Arial"/>
                 <ns5:cs typeface="Arial"/>
               </ns5:defRPr>
+              <ns5:tabLst>
+                <ns5:tab pos="3291840" algn="l"/>
+              </ns5:tabLst>
             </ns5:pPr>
             <ns5:r>
               <ns5:rPr sz="1600" b="0">
@@ -4547,9 +4556,67 @@
                 <ns5:ea typeface="Arial"/>
                 <ns5:cs typeface="Arial"/>
               </ns5:rPr>
-              <ns5:t>Kanishka D (CB.SC.U4CSE23155)</ns5:t>
+              <ns5:t>Akshay KS	CB.SC.U4CSE23104</ns5:t>
             </ns5:r>
           </ns5:p>
+          <ns6:p xmlns:ns6="http://schemas.openxmlformats.org/drawingml/2006/main">
+            <ns6:pPr>
+              <ns6:spcAft>
+                <ns6:spcPts val="300"/>
+              </ns6:spcAft>
+              <ns6:defRPr sz="1875" b="0">
+                <ns6:solidFill>
+                  <ns6:srgbClr val="233247"/>
+                </ns6:solidFill>
+                <ns6:latin typeface="Arial"/>
+                <ns6:ea typeface="Arial"/>
+                <ns6:cs typeface="Arial"/>
+              </ns6:defRPr>
+              <ns6:tabLst>
+                <ns6:tab pos="3291840" algn="l"/>
+              </ns6:tabLst>
+            </ns6:pPr>
+            <ns6:r>
+              <ns6:rPr sz="1600" b="0">
+                <ns6:solidFill>
+                  <ns6:srgbClr val="233247"/>
+                </ns6:solidFill>
+                <ns6:latin typeface="Arial"/>
+                <ns6:ea typeface="Arial"/>
+                <ns6:cs typeface="Arial"/>
+              </ns6:rPr>
+              <ns6:t>Harshini Vennela	CB.SC.U4CSE23455</ns6:t>
+            </ns6:r>
+          </ns6:p>
+          <ns7:p xmlns:ns7="http://schemas.openxmlformats.org/drawingml/2006/main">
+            <ns7:pPr>
+              <ns7:spcAft>
+                <ns7:spcPts val="300"/>
+              </ns7:spcAft>
+              <ns7:defRPr sz="1875" b="0">
+                <ns7:solidFill>
+                  <ns7:srgbClr val="233247"/>
+                </ns7:solidFill>
+                <ns7:latin typeface="Arial"/>
+                <ns7:ea typeface="Arial"/>
+                <ns7:cs typeface="Arial"/>
+              </ns7:defRPr>
+              <ns7:tabLst>
+                <ns7:tab pos="3291840" algn="l"/>
+              </ns7:tabLst>
+            </ns7:pPr>
+            <ns7:r>
+              <ns7:rPr sz="1600" b="0">
+                <ns7:solidFill>
+                  <ns7:srgbClr val="233247"/>
+                </ns7:solidFill>
+                <ns7:latin typeface="Arial"/>
+                <ns7:ea typeface="Arial"/>
+                <ns7:cs typeface="Arial"/>
+              </ns7:rPr>
+              <ns7:t>Kanishka D	CB.SC.U4CSE23155</ns7:t>
+            </ns7:r>
+          </ns7:p>
         </p:txBody>
       </p:sp>
       <p:sp>
@@ -4568,7 +4635,7 @@
         </p:nvSpPr>
         <p:spPr>
           <a:xfrm xmlns:a="http://schemas.openxmlformats.org/drawingml/2006/main">
-            <a:off x="685800" y="5074920"/>
+            <a:off x="685800" y="5120640"/>
             <a:ext cx="10477500" cy="571500"/>
           </a:xfrm>
           <a:prstGeom xmlns:a="http://schemas.openxmlformats.org/drawingml/2006/main" prst="rect">
@@ -4594,73 +4661,73 @@
               </a:defRPr>
             </a:defPPr>
           </a:lstStyle>
-          <ns6:p xmlns:ns6="http://schemas.openxmlformats.org/drawingml/2006/main">
-            <ns6:pPr>
-              <ns6:defRPr sz="1800" b="0">
-                <ns6:solidFill>
-                  <ns6:srgbClr val="233247"/>
-                </ns6:solidFill>
-                <ns6:latin typeface="Arial"/>
-                <ns6:ea typeface="Arial"/>
-                <ns6:cs typeface="Arial"/>
-              </ns6:defRPr>
-            </ns6:pPr>
-            <ns6:r>
-              <ns6:rPr sz="1800" b="1">
-                <ns6:solidFill>
-                  <ns6:srgbClr val="233247"/>
-                </ns6:solidFill>
-                <ns6:latin typeface="Arial"/>
-                <ns6:ea typeface="Arial"/>
-                <ns6:cs typeface="Arial"/>
-              </ns6:rPr>
-              <ns6:t>Guide / Faculty: </ns6:t>
-            </ns6:r>
-            <ns6:r>
-              <ns6:rPr sz="1800" b="0">
-                <ns6:solidFill>
-                  <ns6:srgbClr val="233247"/>
-                </ns6:solidFill>
-                <ns6:latin typeface="Arial"/>
-                <ns6:ea typeface="Arial"/>
-                <ns6:cs typeface="Arial"/>
-              </ns6:rPr>
-              <ns6:t>Rohini S.</ns6:t>
-            </ns6:r>
-            <ns6:r>
-              <ns6:rPr sz="1800" b="0">
-                <ns6:solidFill>
-                  <ns6:srgbClr val="233247"/>
-                </ns6:solidFill>
-                <ns6:latin typeface="Arial"/>
-                <ns6:ea typeface="Arial"/>
-                <ns6:cs typeface="Arial"/>
-              </ns6:rPr>
-              <ns6:t>          </ns6:t>
-            </ns6:r>
-            <ns6:r>
-              <ns6:rPr sz="1800" b="1">
-                <ns6:solidFill>
-                  <ns6:srgbClr val="233247"/>
-                </ns6:solidFill>
-                <ns6:latin typeface="Arial"/>
-                <ns6:ea typeface="Arial"/>
-                <ns6:cs typeface="Arial"/>
-              </ns6:rPr>
-              <ns6:t>Presentation date: </ns6:t>
-            </ns6:r>
-            <ns6:r>
-              <ns6:rPr sz="1800" b="0">
-                <ns6:solidFill>
-                  <ns6:srgbClr val="233247"/>
-                </ns6:solidFill>
-                <ns6:latin typeface="Arial"/>
-                <ns6:ea typeface="Arial"/>
-                <ns6:cs typeface="Arial"/>
-              </ns6:rPr>
-              <ns6:t>20/10/2026</ns6:t>
-            </ns6:r>
-          </ns6:p>
+          <ns8:p xmlns:ns8="http://schemas.openxmlformats.org/drawingml/2006/main">
+            <ns8:pPr>
+              <ns8:defRPr sz="1800" b="0">
+                <ns8:solidFill>
+                  <ns8:srgbClr val="233247"/>
+                </ns8:solidFill>
+                <ns8:latin typeface="Arial"/>
+                <ns8:ea typeface="Arial"/>
+                <ns8:cs typeface="Arial"/>
+              </ns8:defRPr>
+            </ns8:pPr>
+            <ns8:r>
+              <ns8:rPr sz="1800" b="1">
+                <ns8:solidFill>
+                  <ns8:srgbClr val="233247"/>
+                </ns8:solidFill>
+                <ns8:latin typeface="Arial"/>
+                <ns8:ea typeface="Arial"/>
+                <ns8:cs typeface="Arial"/>
+              </ns8:rPr>
+              <ns8:t>Guide / Faculty: </ns8:t>
+            </ns8:r>
+            <ns8:r>
+              <ns8:rPr sz="1800" b="0">
+                <ns8:solidFill>
+                  <ns8:srgbClr val="233247"/>
+                </ns8:solidFill>
+                <ns8:latin typeface="Arial"/>
+                <ns8:ea typeface="Arial"/>
+                <ns8:cs typeface="Arial"/>
+              </ns8:rPr>
+              <ns8:t>Rohini S.</ns8:t>
+            </ns8:r>
+            <ns8:r>
+              <ns8:rPr sz="1800" b="0">
+                <ns8:solidFill>
+                  <ns8:srgbClr val="233247"/>
+                </ns8:solidFill>
+                <ns8:latin typeface="Arial"/>
+                <ns8:ea typeface="Arial"/>
+                <ns8:cs typeface="Arial"/>
+              </ns8:rPr>
+              <ns8:t>          </ns8:t>
+            </ns8:r>
+            <ns8:r>
+              <ns8:rPr sz="1800" b="1">
+                <ns8:solidFill>
+                  <ns8:srgbClr val="233247"/>
+                </ns8:solidFill>
+                <ns8:latin typeface="Arial"/>
+                <ns8:ea typeface="Arial"/>
+                <ns8:cs typeface="Arial"/>
+              </ns8:rPr>
+              <ns8:t>Presentation date: </ns8:t>
+            </ns8:r>
+            <ns8:r>
+              <ns8:rPr sz="1800" b="0">
+                <ns8:solidFill>
+                  <ns8:srgbClr val="233247"/>
+                </ns8:solidFill>
+                <ns8:latin typeface="Arial"/>
+                <ns8:ea typeface="Arial"/>
+                <ns8:cs typeface="Arial"/>
+              </ns8:rPr>
+              <ns8:t>20/10/2026</ns8:t>
+            </ns8:r>
+          </ns8:p>
         </p:txBody>
       </p:sp>
     </p:spTree>

--- a/docs/Review_2_Presentation.pptx
+++ b/docs/Review_2_Presentation.pptx
@@ -15,13 +15,19 @@
     <p:sldId xmlns:r="http://schemas.openxmlformats.org/officeDocument/2006/relationships" id="260" r:id="R56c54f390aab4e6f"/>
     <p:sldId xmlns:r="http://schemas.openxmlformats.org/officeDocument/2006/relationships" id="261" r:id="Rcdb49c028e314ea1"/>
     <p:sldId xmlns:r="http://schemas.openxmlformats.org/officeDocument/2006/relationships" id="262" r:id="R14c78c32adbc45b3"/>
+    <p:sldId xmlns:ns0="http://schemas.openxmlformats.org/officeDocument/2006/relationships" id="277" ns0:id="rId27"/>
     <p:sldId xmlns:r="http://schemas.openxmlformats.org/officeDocument/2006/relationships" id="263" r:id="Rb2ccc4eace8642f4"/>
     <p:sldId xmlns:r="http://schemas.openxmlformats.org/officeDocument/2006/relationships" id="264" r:id="R2432138f375d4f6f"/>
     <p:sldId xmlns:r="http://schemas.openxmlformats.org/officeDocument/2006/relationships" id="265" r:id="Rc5e53e3b48fb4bde"/>
+    <p:sldId xmlns:ns0="http://schemas.openxmlformats.org/officeDocument/2006/relationships" id="279" ns0:id="rId29"/>
     <p:sldId xmlns:r="http://schemas.openxmlformats.org/officeDocument/2006/relationships" id="266" r:id="Rda9f68c7d5914242"/>
+    <p:sldId xmlns:ns0="http://schemas.openxmlformats.org/officeDocument/2006/relationships" id="280" ns0:id="rId30"/>
     <p:sldId xmlns:r="http://schemas.openxmlformats.org/officeDocument/2006/relationships" id="267" r:id="R422860c0b274425a"/>
+    <p:sldId xmlns:ns0="http://schemas.openxmlformats.org/officeDocument/2006/relationships" id="281" ns0:id="rId31"/>
     <p:sldId xmlns:r="http://schemas.openxmlformats.org/officeDocument/2006/relationships" id="268" r:id="R7c0ae61b31f74095"/>
+    <p:sldId xmlns:ns0="http://schemas.openxmlformats.org/officeDocument/2006/relationships" id="282" ns0:id="rId32"/>
     <p:sldId xmlns:r="http://schemas.openxmlformats.org/officeDocument/2006/relationships" id="269" r:id="Ra78f76bec3d04acf"/>
+    <p:sldId xmlns:ns0="http://schemas.openxmlformats.org/officeDocument/2006/relationships" id="283" ns0:id="rId33"/>
     <p:sldId xmlns:r="http://schemas.openxmlformats.org/officeDocument/2006/relationships" id="270" r:id="R2e171858890a4a8a"/>
     <p:sldId xmlns:r="http://schemas.openxmlformats.org/officeDocument/2006/relationships" id="271" r:id="Rd363396806b54603"/>
     <p:sldId xmlns:r="http://schemas.openxmlformats.org/officeDocument/2006/relationships" id="272" r:id="Ra40b414c916644d9"/>
@@ -532,7 +538,7 @@
           <a:lstStyle xmlns:a="http://schemas.openxmlformats.org/drawingml/2006/main"/>
           <a:p xmlns:a="http://schemas.openxmlformats.org/drawingml/2006/main">
             <a:r>
-              <a:t>[Saketh, 45 s] Method 1. The input is the 167,357 complaint reviews long enough to carry a topic. We cleaned them, keeping negations so 'not delivered' keeps its meaning, mapping Hinglish negations, and removing app names. Each domain gets its own matrix of words and two-word phrases. We fit NMF on TF-IDF weights with six, six and five topics, chosen by coherence, and add VADER sentiment per topic. The output is 17 complaint topics. For example, order cancellation and refund is 35% of food complaints, and failed transfers are half of all payment complaints.</a:t>
+              <a:t>[Saketh, 45 s] Method 1. The input is the 167,303 complaint reviews long enough to carry a topic. We cleaned them, keeping negations so 'not delivered' keeps its meaning, mapping Hinglish negations, and removing app and brand names, including 'phone pay'. Each domain gets its own matrix of words and two-word phrases. We fit NMF on TF-IDF weights with six, six and five topics, guided by coherence, and add VADER sentiment per topic. The output is 17 complaint topics. For example, order cancellation and refund is 35% of food complaints, and payment, UPI and bank-account problems are half of all payment complaints.</a:t>
             </a:r>
           </a:p>
         </p:txBody>
@@ -602,7 +608,7 @@
           <a:lstStyle xmlns:a="http://schemas.openxmlformats.org/drawingml/2006/main"/>
           <a:p xmlns:a="http://schemas.openxmlformats.org/drawingml/2006/main">
             <a:r>
-              <a:t>[Saketh, 65 s] To evaluate Method 1 fairly, we compared NMF with LDA on exactly the same matrices and number of topics. Each was fitted on 80% of the complaints and scored on the unseen 20%. Held-out NPMI measures how often a topic's top words really appear together; topic diversity measures how distinct the topics are. NMF wins both in all three domains, for example 0.19 against 0.12 coherence in food, so we selected it. LDA spreads reviews more evenly, but its topics overlap. We also checked the topics against the nine keyword tags: they agree where they should, and they cover the 43% of complaints that no keyword matched. For the business, refunds, returns and failed transfers are the largest themes, and scam allegations and poor quality are the angriest. The limit is that topic names are our interpretation. Akshay will present Method 2.</a:t>
+              <a:t>[Saketh, 65 s] To evaluate Method 1 fairly, we compared NMF with LDA on exactly the same matrices and number of topics. Each was fitted on 80% of the complaints and scored on the unseen 20%. Held-out NPMI measures how often a topic's top words really appear together; topic diversity measures how distinct the topics are. NMF wins both in all three domains, for example 0.19 against 0.11 coherence in food, so we selected it. LDA spreads reviews more evenly, but its topics overlap. We also checked the topics against the nine keyword tags: they agree where they should, and they cover the 43% of complaints that no keyword matched. For the business, refunds, returns and payment problems are the largest themes, and unanswered support is the angriest specific complaint. The limit is that topic names are our interpretation. The next slide shows what this means for the business.</a:t>
             </a:r>
           </a:p>
         </p:txBody>
@@ -672,7 +678,7 @@
           <a:lstStyle xmlns:a="http://schemas.openxmlformats.org/drawingml/2006/main"/>
           <a:p xmlns:a="http://schemas.openxmlformats.org/drawingml/2006/main">
             <a:r>
-              <a:t>[Akshay, 45 s] Method 2 models the daily number of 1–2 star reviews for each app: 11 series of 173 days. We use counts because of the feed gap, which enters the model as an input. The model is ARIMA, with weekly seasonal terms for the food apps because of their Sunday peak; the orders come from ACF, PACF and AICc. For a fair time split we use a rolling origin: train on 84 days, forecast the next 28, move a week, nine times. The output is a four-week forecast with intervals, unusual-day alerts, and a verdict for each release. Harshini will evaluate it.</a:t>
+              <a:t>[Akshay, 45 s] Method 2 models the daily number of 1–2 star reviews for each app: 11 series of 173 days. We use counts because of the feed gap, which enters the model as an input. The model is ARIMA, with weekly seasonal terms for the food apps because of their Sunday peak; the differencing, the weekly check and the orders come from ADF, ACF, PACF and AICc on the training days only. For a fair time split we use a rolling origin: train on 84 days, forecast the next 28, move a week, nine times. The output is a four-week forecast with intervals, unusual-day alerts, and a verdict for each release. The next slide shows the pattern and the forecast.</a:t>
             </a:r>
           </a:p>
         </p:txBody>
@@ -742,7 +748,7 @@
           <a:lstStyle xmlns:a="http://schemas.openxmlformats.org/drawingml/2006/main"/>
           <a:p xmlns:a="http://schemas.openxmlformats.org/drawingml/2006/main">
             <a:r>
-              <a:t>[Harshini, 65 s] We evaluated all three forecasting models on the same future, held-out days: 252 forecasts per app and model. ARIMA has the lowest error on every measure: an average error of 18 reviews a day, and a MASE of 0.88, which means it beats a naive weekly forecast; the seasonal naive baseline is at 1.08. ARIMA wins for 10 of the 11 apps. Its 95% intervals contained 93% of the days, and the residuals show no leftover pattern. Days outside the interval become alerts: 83 unusual days. For the business, this is reliable enough for capacity planning. The limits: only 173 days, Google Pay is better served by the baseline, and sudden level shifts like Paytm's in September cannot be predicted. Kanishka will bring it together.</a:t>
+              <a:t>[Harshini, 65 s] We evaluated all three models on the same future, held-out days: 252 forecasts per app and model, and every choice, the differencing, the weekly terms and the orders, was made on the training days only. Both ARIMA and Holt-Winters clearly beat the naive 'same weekday last week' forecast: MASE 0.93 against 1.08, and both win for 10 of the 11 apps. Between the two it is a tie, about 19 reviews a day of error each: ARIMA is better for six apps, Holt-Winters for the food apps. We keep ARIMA because only it gives prediction intervals, which we need for the alerts and for capacity planning, and it takes the feed gap as an input. Its 95% intervals contained 94% of the days, and the residuals show no leftover pattern. Days outside the interval become alerts: 77 unusual days. The limits: only 173 days, Google Pay is better served by the baseline, and level shifts like Paytm's in September cannot be predicted. Kanishka will show what the releases did.</a:t>
             </a:r>
           </a:p>
         </p:txBody>
@@ -1022,7 +1028,7 @@
           <a:lstStyle xmlns:a="http://schemas.openxmlformats.org/drawingml/2006/main"/>
           <a:p xmlns:a="http://schemas.openxmlformats.org/drawingml/2006/main">
             <a:r>
-              <a:t>[Aditya, 40 s] To conclude: from 1.14 million reviews we collected ourselves, we built a classifier, complaint topics, forecasts and release tests, and joined them in a live dashboard. The evidence says to fix refunds, returns and failed transfers first, to investigate Paytm 10.84.5, and to start with Swiggy, Flipkart, Amazon and Paytm. The main limits are the six-month window and that a low rating is a judgement, not a confirmed defect. Next steps would be daily collection and alerts and Hindi text models. Thank you; we are happy to take questions.</a:t>
+              <a:t>[Aditya, 40 s] To conclude: from 1.14 million reviews we collected ourselves, we built a classifier, complaint topics, forecasts and release tests, and joined them in a live dashboard. The evidence says to fix refunds, returns and payment problems first, to investigate Paytm 10.84.5, and to start with Swiggy, Flipkart, Amazon and Paytm. The main limits are the six-month window and that a low rating is a judgement, not a confirmed defect. Next steps would be daily collection and alerts and Hindi text models. Thank you; we are happy to take questions.</a:t>
             </a:r>
           </a:p>
         </p:txBody>
@@ -1402,6 +1408,426 @@
 </p:notes>
 </file>
 
+<file path=ppt/notesSlides/notesSlide22.xml><?xml version="1.0" encoding="utf-8"?>
+<p:notes xmlns:a="http://schemas.openxmlformats.org/drawingml/2006/main" xmlns:p="http://schemas.openxmlformats.org/presentationml/2006/main" xmlns:r="http://schemas.openxmlformats.org/officeDocument/2006/relationships">
+  <p:cSld>
+    <p:spTree>
+      <p:nvGrpSpPr>
+        <p:cNvPr id="1" name=""/>
+        <p:cNvGrpSpPr/>
+        <p:nvPr/>
+      </p:nvGrpSpPr>
+      <p:grpSpPr>
+        <a:xfrm>
+          <a:off x="0" y="0"/>
+          <a:ext cx="0" cy="0"/>
+          <a:chOff x="0" y="0"/>
+          <a:chExt cx="0" cy="0"/>
+        </a:xfrm>
+      </p:grpSpPr>
+      <p:sp>
+        <p:nvSpPr>
+          <p:cNvPr id="2" name="Slide Image Placeholder 1"/>
+          <p:cNvSpPr>
+            <a:spLocks noGrp="1"/>
+          </p:cNvSpPr>
+          <p:nvPr>
+            <p:ph type="sldImg" idx="2"/>
+          </p:nvPr>
+        </p:nvSpPr>
+        <p:spPr/>
+      </p:sp>
+      <p:sp>
+        <p:nvSpPr>
+          <p:cNvPr id="3" name="Notes Placeholder 2"/>
+          <p:cNvSpPr>
+            <a:spLocks noGrp="1"/>
+          </p:cNvSpPr>
+          <p:nvPr>
+            <p:ph type="body" idx="3" sz="quarter"/>
+          </p:nvPr>
+        </p:nvSpPr>
+        <p:spPr/>
+        <p:txBody>
+          <a:bodyPr/>
+          <a:lstStyle/>
+          <a:p>
+            <a:r>
+              <a:t>[Akshay, 45 s] Two more findings from the EDA shaped Unit 3. Left: during the late-April Play Store gap, positive reviews for five apps fell 78%, but complaints only 24%. A share of 1–2 star reviews would therefore show a false wave of complaints, so the time series counts complaints and gives the gap to the model as an input. Right: praise is short, three quarters of it one to three words, while complaints have a median of twelve words; and the keyword tags find an issue in only 46% of complaints, under a third of the four-to-ten-word ones. That is why text mining uses topic models on the complaints with at least three content words, not the keyword tags. Harshini will present the predictive model.</a:t>
+            </a:r>
+          </a:p>
+        </p:txBody>
+      </p:sp>
+      <p:sp>
+        <p:nvSpPr>
+          <p:cNvPr id="4" name="Slide Number Placeholder 3"/>
+          <p:cNvSpPr>
+            <a:spLocks noGrp="1"/>
+          </p:cNvSpPr>
+          <p:nvPr>
+            <p:ph type="sldNum" idx="5" sz="quarter"/>
+          </p:nvPr>
+        </p:nvSpPr>
+        <p:spPr/>
+      </p:sp>
+    </p:spTree>
+  </p:cSld>
+  <p:clrMapOvr>
+    <a:masterClrMapping/>
+  </p:clrMapOvr>
+</p:notes>
+</file>
+
+<file path=ppt/notesSlides/notesSlide24.xml><?xml version="1.0" encoding="utf-8"?>
+<p:notes xmlns:a="http://schemas.openxmlformats.org/drawingml/2006/main" xmlns:p="http://schemas.openxmlformats.org/presentationml/2006/main" xmlns:r="http://schemas.openxmlformats.org/officeDocument/2006/relationships">
+  <p:cSld>
+    <p:spTree>
+      <p:nvGrpSpPr>
+        <p:cNvPr id="1" name=""/>
+        <p:cNvGrpSpPr/>
+        <p:nvPr/>
+      </p:nvGrpSpPr>
+      <p:grpSpPr>
+        <a:xfrm>
+          <a:off x="0" y="0"/>
+          <a:ext cx="0" cy="0"/>
+          <a:chOff x="0" y="0"/>
+          <a:chExt cx="0" cy="0"/>
+        </a:xfrm>
+      </p:grpSpPr>
+      <p:sp>
+        <p:nvSpPr>
+          <p:cNvPr id="2" name="Slide Image Placeholder 1"/>
+          <p:cNvSpPr>
+            <a:spLocks noGrp="1"/>
+          </p:cNvSpPr>
+          <p:nvPr>
+            <p:ph type="sldImg" idx="2"/>
+          </p:nvPr>
+        </p:nvSpPr>
+        <p:spPr/>
+      </p:sp>
+      <p:sp>
+        <p:nvSpPr>
+          <p:cNvPr id="3" name="Notes Placeholder 2"/>
+          <p:cNvSpPr>
+            <a:spLocks noGrp="1"/>
+          </p:cNvSpPr>
+          <p:nvPr>
+            <p:ph type="body" idx="3" sz="quarter"/>
+          </p:nvPr>
+        </p:nvSpPr>
+        <p:spPr/>
+        <p:txBody>
+          <a:bodyPr/>
+          <a:lstStyle/>
+          <a:p>
+            <a:r>
+              <a:t>[Saketh, 45 s] Here are the 17 topics. Each bar is the topic's share of the domain's complaints, and the bracket is its average sentiment. In every domain one operational theme leads: cancellations and refunds in food, returns in shopping, payment and UPI problems in payments, where a separate topic for cashback and rewards not given also appears. The grey topics are general anger without a specific fault. Among specific faults, support draws the angriest reviews, while app and device errors are described calmly.</a:t>
+            </a:r>
+          </a:p>
+        </p:txBody>
+      </p:sp>
+      <p:sp>
+        <p:nvSpPr>
+          <p:cNvPr id="4" name="Slide Number Placeholder 3"/>
+          <p:cNvSpPr>
+            <a:spLocks noGrp="1"/>
+          </p:cNvSpPr>
+          <p:nvPr>
+            <p:ph type="sldNum" idx="5" sz="quarter"/>
+          </p:nvPr>
+        </p:nvSpPr>
+        <p:spPr/>
+      </p:sp>
+    </p:spTree>
+  </p:cSld>
+  <p:clrMapOvr>
+    <a:masterClrMapping/>
+  </p:clrMapOvr>
+</p:notes>
+</file>
+
+<file path=ppt/notesSlides/notesSlide25.xml><?xml version="1.0" encoding="utf-8"?>
+<p:notes xmlns:a="http://schemas.openxmlformats.org/drawingml/2006/main" xmlns:p="http://schemas.openxmlformats.org/presentationml/2006/main" xmlns:r="http://schemas.openxmlformats.org/officeDocument/2006/relationships">
+  <p:cSld>
+    <p:spTree>
+      <p:nvGrpSpPr>
+        <p:cNvPr id="1" name=""/>
+        <p:cNvGrpSpPr/>
+        <p:nvPr/>
+      </p:nvGrpSpPr>
+      <p:grpSpPr>
+        <a:xfrm>
+          <a:off x="0" y="0"/>
+          <a:ext cx="0" cy="0"/>
+          <a:chOff x="0" y="0"/>
+          <a:chExt cx="0" cy="0"/>
+        </a:xfrm>
+      </p:grpSpPr>
+      <p:sp>
+        <p:nvSpPr>
+          <p:cNvPr id="2" name="Slide Image Placeholder 1"/>
+          <p:cNvSpPr>
+            <a:spLocks noGrp="1"/>
+          </p:cNvSpPr>
+          <p:nvPr>
+            <p:ph type="sldImg" idx="2"/>
+          </p:nvPr>
+        </p:nvSpPr>
+        <p:spPr/>
+      </p:sp>
+      <p:sp>
+        <p:nvSpPr>
+          <p:cNvPr id="3" name="Notes Placeholder 2"/>
+          <p:cNvSpPr>
+            <a:spLocks noGrp="1"/>
+          </p:cNvSpPr>
+          <p:nvPr>
+            <p:ph type="body" idx="3" sz="quarter"/>
+          </p:nvPr>
+        </p:nvSpPr>
+        <p:spPr/>
+        <p:txBody>
+          <a:bodyPr/>
+          <a:lstStyle/>
+          <a:p>
+            <a:r>
+              <a:t>[Saketh, 40 s] What does text mining add for the business? The keyword rules from Review 1 found no issue in 43 percent of complaints, almost 72,000 reviews. The topic models give every one of them a theme. On the left, the largest hidden groups: thirteen thousand refund and cancellation complaints, eight thousand about returns and product quality. On the right, some themes are almost entirely invisible to keywords: 80 percent of cash-on-delivery complaints and 77 percent of cashback complaints carry no tag. Akshay will present Method 2.</a:t>
+            </a:r>
+          </a:p>
+        </p:txBody>
+      </p:sp>
+      <p:sp>
+        <p:nvSpPr>
+          <p:cNvPr id="4" name="Slide Number Placeholder 3"/>
+          <p:cNvSpPr>
+            <a:spLocks noGrp="1"/>
+          </p:cNvSpPr>
+          <p:nvPr>
+            <p:ph type="sldNum" idx="5" sz="quarter"/>
+          </p:nvPr>
+        </p:nvSpPr>
+        <p:spPr/>
+      </p:sp>
+    </p:spTree>
+  </p:cSld>
+  <p:clrMapOvr>
+    <a:masterClrMapping/>
+  </p:clrMapOvr>
+</p:notes>
+</file>
+
+<file path=ppt/notesSlides/notesSlide26.xml><?xml version="1.0" encoding="utf-8"?>
+<p:notes xmlns:a="http://schemas.openxmlformats.org/drawingml/2006/main" xmlns:p="http://schemas.openxmlformats.org/presentationml/2006/main" xmlns:r="http://schemas.openxmlformats.org/officeDocument/2006/relationships">
+  <p:cSld>
+    <p:spTree>
+      <p:nvGrpSpPr>
+        <p:cNvPr id="1" name=""/>
+        <p:cNvGrpSpPr/>
+        <p:nvPr/>
+      </p:nvGrpSpPr>
+      <p:grpSpPr>
+        <a:xfrm>
+          <a:off x="0" y="0"/>
+          <a:ext cx="0" cy="0"/>
+          <a:chOff x="0" y="0"/>
+          <a:chExt cx="0" cy="0"/>
+        </a:xfrm>
+      </p:grpSpPr>
+      <p:sp>
+        <p:nvSpPr>
+          <p:cNvPr id="2" name="Slide Image Placeholder 1"/>
+          <p:cNvSpPr>
+            <a:spLocks noGrp="1"/>
+          </p:cNvSpPr>
+          <p:nvPr>
+            <p:ph type="sldImg" idx="2"/>
+          </p:nvPr>
+        </p:nvSpPr>
+        <p:spPr/>
+      </p:sp>
+      <p:sp>
+        <p:nvSpPr>
+          <p:cNvPr id="3" name="Notes Placeholder 2"/>
+          <p:cNvSpPr>
+            <a:spLocks noGrp="1"/>
+          </p:cNvSpPr>
+          <p:nvPr>
+            <p:ph type="body" idx="3" sz="quarter"/>
+          </p:nvPr>
+        </p:nvSpPr>
+        <p:spPr/>
+        <p:txBody>
+          <a:bodyPr/>
+          <a:lstStyle/>
+          <a:p>
+            <a:r>
+              <a:t>[Akshay, 40 s] Left: the weekday effect for each app. The food apps peak on Sundays, by 22 to 38 percent; the other apps are almost flat, which is why only the food models have weekly terms. Right: Swiggy's next four weeks. The forecast keeps the Sunday peaks, and the bands are the 80 and 95 percent intervals: about 1,037 complaints in the first week. Harshini will evaluate it.</a:t>
+            </a:r>
+          </a:p>
+        </p:txBody>
+      </p:sp>
+      <p:sp>
+        <p:nvSpPr>
+          <p:cNvPr id="4" name="Slide Number Placeholder 3"/>
+          <p:cNvSpPr>
+            <a:spLocks noGrp="1"/>
+          </p:cNvSpPr>
+          <p:nvPr>
+            <p:ph type="sldNum" idx="5" sz="quarter"/>
+          </p:nvPr>
+        </p:nvSpPr>
+        <p:spPr/>
+      </p:sp>
+    </p:spTree>
+  </p:cSld>
+  <p:clrMapOvr>
+    <a:masterClrMapping/>
+  </p:clrMapOvr>
+</p:notes>
+</file>
+
+<file path=ppt/notesSlides/notesSlide27.xml><?xml version="1.0" encoding="utf-8"?>
+<p:notes xmlns:a="http://schemas.openxmlformats.org/drawingml/2006/main" xmlns:p="http://schemas.openxmlformats.org/presentationml/2006/main" xmlns:r="http://schemas.openxmlformats.org/officeDocument/2006/relationships">
+  <p:cSld>
+    <p:spTree>
+      <p:nvGrpSpPr>
+        <p:cNvPr id="1" name=""/>
+        <p:cNvGrpSpPr/>
+        <p:nvPr/>
+      </p:nvGrpSpPr>
+      <p:grpSpPr>
+        <a:xfrm>
+          <a:off x="0" y="0"/>
+          <a:ext cx="0" cy="0"/>
+          <a:chOff x="0" y="0"/>
+          <a:chExt cx="0" cy="0"/>
+        </a:xfrm>
+      </p:grpSpPr>
+      <p:sp>
+        <p:nvSpPr>
+          <p:cNvPr id="2" name="Slide Image Placeholder 1"/>
+          <p:cNvSpPr>
+            <a:spLocks noGrp="1"/>
+          </p:cNvSpPr>
+          <p:nvPr>
+            <p:ph type="sldImg" idx="2"/>
+          </p:nvPr>
+        </p:nvSpPr>
+        <p:spPr/>
+      </p:sp>
+      <p:sp>
+        <p:nvSpPr>
+          <p:cNvPr id="3" name="Notes Placeholder 2"/>
+          <p:cNvSpPr>
+            <a:spLocks noGrp="1"/>
+          </p:cNvSpPr>
+          <p:nvPr>
+            <p:ph type="body" idx="3" sz="quarter"/>
+          </p:nvPr>
+        </p:nvSpPr>
+        <p:spPr/>
+        <p:txBody>
+          <a:bodyPr/>
+          <a:lstStyle/>
+          <a:p>
+            <a:r>
+              <a:t>[Kanishka, 45 s] Did a new app version make things worse? On the left, every release of every app: almost all changed nothing measurable, five made things better and four made things worse. On the right, the one confirmed case: Paytm 10.84.5 on 3 September. The forecast raised ten alerts in the days after it, and the version test shows the cause: 23 percent of reviews on the new version were 1 or 2 stars, against 13 percent on older versions, and Paytm's complaints doubled from 34 to 66 a day. So this release is the first thing to fix.</a:t>
+            </a:r>
+          </a:p>
+        </p:txBody>
+      </p:sp>
+      <p:sp>
+        <p:nvSpPr>
+          <p:cNvPr id="4" name="Slide Number Placeholder 3"/>
+          <p:cNvSpPr>
+            <a:spLocks noGrp="1"/>
+          </p:cNvSpPr>
+          <p:nvPr>
+            <p:ph type="sldNum" idx="5" sz="quarter"/>
+          </p:nvPr>
+        </p:nvSpPr>
+        <p:spPr/>
+      </p:sp>
+    </p:spTree>
+  </p:cSld>
+  <p:clrMapOvr>
+    <a:masterClrMapping/>
+  </p:clrMapOvr>
+</p:notes>
+</file>
+
+<file path=ppt/notesSlides/notesSlide28.xml><?xml version="1.0" encoding="utf-8"?>
+<p:notes xmlns:a="http://schemas.openxmlformats.org/drawingml/2006/main" xmlns:p="http://schemas.openxmlformats.org/presentationml/2006/main" xmlns:r="http://schemas.openxmlformats.org/officeDocument/2006/relationships">
+  <p:cSld>
+    <p:spTree>
+      <p:nvGrpSpPr>
+        <p:cNvPr id="1" name=""/>
+        <p:cNvGrpSpPr/>
+        <p:nvPr/>
+      </p:nvGrpSpPr>
+      <p:grpSpPr>
+        <a:xfrm>
+          <a:off x="0" y="0"/>
+          <a:ext cx="0" cy="0"/>
+          <a:chOff x="0" y="0"/>
+          <a:chExt cx="0" cy="0"/>
+        </a:xfrm>
+      </p:grpSpPr>
+      <p:sp>
+        <p:nvSpPr>
+          <p:cNvPr id="2" name="Slide Image Placeholder 1"/>
+          <p:cNvSpPr>
+            <a:spLocks noGrp="1"/>
+          </p:cNvSpPr>
+          <p:nvPr>
+            <p:ph type="sldImg" idx="2"/>
+          </p:nvPr>
+        </p:nvSpPr>
+        <p:spPr/>
+      </p:sp>
+      <p:sp>
+        <p:nvSpPr>
+          <p:cNvPr id="3" name="Notes Placeholder 2"/>
+          <p:cNvSpPr>
+            <a:spLocks noGrp="1"/>
+          </p:cNvSpPr>
+          <p:nvPr>
+            <p:ph type="body" idx="3" sz="quarter"/>
+          </p:nvPr>
+        </p:nvSpPr>
+        <p:spPr/>
+        <p:txBody>
+          <a:bodyPr/>
+          <a:lstStyle/>
+          <a:p>
+            <a:r>
+              <a:t>[Kanishka, 40 s] This is the priority table as a picture. Each column is one warning sign from an earlier stage, and a filled cell means the app shows it. Three or more signs make an app High priority: Swiggy with four, Flipkart, Amazon and Paytm with three. Every sign is one number with a fixed threshold, so anyone can check the result by hand.</a:t>
+            </a:r>
+          </a:p>
+        </p:txBody>
+      </p:sp>
+      <p:sp>
+        <p:nvSpPr>
+          <p:cNvPr id="4" name="Slide Number Placeholder 3"/>
+          <p:cNvSpPr>
+            <a:spLocks noGrp="1"/>
+          </p:cNvSpPr>
+          <p:nvPr>
+            <p:ph type="sldNum" idx="5" sz="quarter"/>
+          </p:nvPr>
+        </p:nvSpPr>
+        <p:spPr/>
+      </p:sp>
+    </p:spTree>
+  </p:cSld>
+  <p:clrMapOvr>
+    <a:masterClrMapping/>
+  </p:clrMapOvr>
+</p:notes>
+</file>
+
 <file path=ppt/notesSlides/notesSlide3.xml><?xml version="1.0" encoding="utf-8"?>
 <p:notes xmlns:p="http://schemas.openxmlformats.org/presentationml/2006/main">
   <p:cSld>
@@ -1722,7 +2148,7 @@
           <a:lstStyle xmlns:a="http://schemas.openxmlformats.org/drawingml/2006/main"/>
           <a:p xmlns:a="http://schemas.openxmlformats.org/drawingml/2006/main">
             <a:r>
-              <a:t>[Akshay, 55 s] Two findings from the EDA. Left: the share of 1–2 star reviews differs a lot even between apps that do the same job: 54% for Amazon against 10% for Myntra, and 35% for Swiggy against 19% for Zomato. Right: when a complaint names an issue, 91% of the time it is a service problem, support, delivery, refunds or returns, and only 7% an app fault. So the business objective is mostly about operations, not code. For preparation, we cleaned the text, added the issue tags and sentiment, and flagged the late-April feed gap, which would otherwise look like a wave of complaints. Harshini will present the predictive model.</a:t>
+              <a:t>[Akshay, 55 s] Two findings from the EDA. Left: the share of 1–2 star reviews differs a lot even between apps that do the same job: 54% for Amazon against 10% for Myntra, and 35% for Swiggy against 19% for Zomato. Right: when a complaint names an issue, 91% of the time it is a service problem, support, delivery, refunds or returns, and only 7% an app fault. Payment apps are the exception: there, 38% name an app fault. So the business objective is mostly about operations, not code. For preparation, we cleaned the text, added the issue tags and sentiment, and flagged the late-April feed gap, which would otherwise look like a wave of complaints. Two more findings shaped Unit 3.</a:t>
             </a:r>
           </a:p>
         </p:txBody>
@@ -1792,7 +2218,7 @@
           <a:lstStyle xmlns:a="http://schemas.openxmlformats.org/drawingml/2006/main"/>
           <a:p xmlns:a="http://schemas.openxmlformats.org/drawingml/2006/main">
             <a:r>
-              <a:t>[Harshini, 65 s] Unit 2 predicts whether a review is a problem review, rated 1 or 2 stars. The inputs are 200 text components from TF-IDF and SVD plus 15 structural features: the issue tags, the sentiment scores, length and upvotes. We trained on 80% and tested on 227,598 held-out reviews. The text features and scaler are fitted on the training rows only. A model that never flags anything gets a PR-AUC of 0.195, the base rate. Both models reach about 0.87. We chose Random Forest for triage because it finds 87% of problem reviews with about three in four flags correct; it also holds up on September, which it never saw. The limit is that the target is the user's rating, not a confirmed defect. Saketh will now present Unit 3.</a:t>
+              <a:t>[Harshini, 65 s] Unit 2 predicts whether a review is a problem review, rated 1 or 2 stars. The inputs are 200 text components from TF-IDF and SVD plus 15 structural features: the issue tags, the sentiment scores, length and upvotes. We trained on 80% and tested on 227,598 held-out reviews. Refitting the text features and scaler on the training rows only changes no metric by more than 0.003. A model that never flags anything gets a PR-AUC of 0.195, the base rate. Both models reach about 0.87. We chose Random Forest for triage because it finds 87% of problem reviews with about three in four flags correct; it also holds up on September, which it never saw. The limit is that the target is the user's rating, not a confirmed defect. Saketh will now present Unit 3.</a:t>
             </a:r>
           </a:p>
         </p:txBody>
@@ -1862,7 +2288,7 @@
           <a:lstStyle xmlns:a="http://schemas.openxmlformats.org/drawingml/2006/main"/>
           <a:p xmlns:a="http://schemas.openxmlformats.org/drawingml/2006/main">
             <a:r>
-              <a:t>[Saketh, 30 s] For Unit 3 we chose the two methods that fit review data. Text mining answers what users complain about and how angry they are, using the text of 167,357 complaints. Time-series analysis answers how many complaints are coming, which days are unusual and whether a release made things worse, using daily counts and release events. We did not choose association rules because only 3.4% of reviews carry two or more issues, so there are few items to combine.</a:t>
+              <a:t>[Saketh, 30 s] For Unit 3 we chose the two methods that fit review data. Text mining answers what users complain about and how angry they are, using the text of 167,303 complaints. Time-series analysis answers how many complaints are coming, which days are unusual and whether a release made things worse, using daily counts and release events. We did not choose association rules because only 3.4% of reviews carry two or more issues, so there are few items to combine.</a:t>
             </a:r>
           </a:p>
         </p:txBody>
@@ -4761,10 +5187,10 @@
       </p:grpSpPr>
       <p:sp>
         <p:nvSpPr>
-          <p:cNvPr id="8" name="">
+          <p:cNvPr id="6" name="">
             <a:extLst xmlns:a="http://schemas.openxmlformats.org/drawingml/2006/main">
               <a:ext uri="{FF2B5EF4-FFF2-40B4-BE49-F238E27FC236}">
-                <a16:creationId xmlns:a16="http://schemas.microsoft.com/office/drawing/2014/main" id="{D869BBDF-8FEE-4A35-9821-C8CF275E3863}"/>
+                <a16:creationId xmlns:a16="http://schemas.microsoft.com/office/drawing/2014/main" id="{D90A2372-5E66-42DE-8B53-9300E5035622}"/>
               </a:ext>
             </a:extLst>
           </p:cNvPr>
@@ -4831,7 +5257,7 @@
           <p:cNvPr id="2" name="">
             <a:extLst xmlns:a="http://schemas.openxmlformats.org/drawingml/2006/main">
               <a:ext uri="{FF2B5EF4-FFF2-40B4-BE49-F238E27FC236}">
-                <a16:creationId xmlns:a16="http://schemas.microsoft.com/office/drawing/2014/main" id="{FD2BBE01-1719-4C72-B8A4-45DC27F96536}"/>
+                <a16:creationId xmlns:a16="http://schemas.microsoft.com/office/drawing/2014/main" id="{22EAF5FB-AC58-4E29-9EA6-A0EA2B8A645E}"/>
               </a:ext>
             </a:extLst>
           </p:cNvPr>
@@ -4888,7 +5314,7 @@
                 <a:ea typeface="Arial"/>
                 <a:cs typeface="Arial"/>
               </a:rPr>
-              <a:t>Method 1 implementation</a:t>
+              <a:t>Selected advanced analytics methods</a:t>
             </a:r>
           </a:p>
         </p:txBody>
@@ -4898,7 +5324,7 @@
           <p:cNvPr id="3" name="">
             <a:extLst xmlns:a="http://schemas.openxmlformats.org/drawingml/2006/main">
               <a:ext uri="{FF2B5EF4-FFF2-40B4-BE49-F238E27FC236}">
-                <a16:creationId xmlns:a16="http://schemas.microsoft.com/office/drawing/2014/main" id="{0FA7164B-B878-4DBD-809C-47ABFBDCAF5D}"/>
+                <a16:creationId xmlns:a16="http://schemas.microsoft.com/office/drawing/2014/main" id="{AF2A2B95-75AB-4A68-84B4-6C002BEFE498}"/>
               </a:ext>
             </a:extLst>
           </p:cNvPr>
@@ -4956,6 +5382,718 @@
                 <a:cs typeface="Arial"/>
               </a:rPr>
               <a:t>10</a:t>
+            </a:r>
+          </a:p>
+        </p:txBody>
+      </p:sp>
+      <p:graphicFrame>
+        <p:nvGraphicFramePr>
+          <p:cNvPr id="4" name="">
+            <a:extLst xmlns:a="http://schemas.openxmlformats.org/drawingml/2006/main">
+              <a:ext uri="{FF2B5EF4-FFF2-40B4-BE49-F238E27FC236}">
+                <a16:creationId xmlns:a16="http://schemas.microsoft.com/office/drawing/2014/main" id="{36A543E7-13D8-4126-84D0-9539E1F5455E}"/>
+              </a:ext>
+            </a:extLst>
+          </p:cNvPr>
+          <p:cNvGraphicFramePr/>
+          <p:nvPr/>
+        </p:nvGraphicFramePr>
+        <p:xfrm>
+          <a:off xmlns:a="http://schemas.openxmlformats.org/drawingml/2006/main" x="609600" y="2238375"/>
+          <a:ext xmlns:a="http://schemas.openxmlformats.org/drawingml/2006/main" cx="10972800" cy="2657094"/>
+        </p:xfrm>
+        <a:graphic xmlns:a="http://schemas.openxmlformats.org/drawingml/2006/main">
+          <a:graphicData uri="http://schemas.openxmlformats.org/drawingml/2006/table">
+            <a:tbl>
+              <a:tblPr/>
+              <a:tblGrid>
+                <a:gridCol w="2743200"/>
+                <a:gridCol w="4206240"/>
+                <a:gridCol w="4023360"/>
+              </a:tblGrid>
+              <a:tr h="371094">
+                <a:tc>
+                  <a:txBody>
+                    <a:bodyPr/>
+                    <a:lstStyle/>
+                    <a:p>
+                      <a:pPr/>
+                      <a:r>
+                        <a:rPr sz="1500" b="1">
+                          <a:solidFill>
+                            <a:srgbClr val="FFFFFF"/>
+                          </a:solidFill>
+                          <a:latin typeface="Arial"/>
+                          <a:ea typeface="Arial"/>
+                          <a:cs typeface="Arial"/>
+                        </a:rPr>
+                        <a:t>Selected method</a:t>
+                      </a:r>
+                    </a:p>
+                  </a:txBody>
+                  <a:tcPr marL="91440" marR="91440" marT="45720" marB="45720" anchor="ctr">
+                    <a:lnL w="9525">
+                      <a:solidFill>
+                        <a:srgbClr val="CDD7DF"/>
+                      </a:solidFill>
+                      <a:prstDash val="solid"/>
+                    </a:lnL>
+                    <a:lnR w="9525">
+                      <a:solidFill>
+                        <a:srgbClr val="CDD7DF"/>
+                      </a:solidFill>
+                      <a:prstDash val="solid"/>
+                    </a:lnR>
+                    <a:lnT w="9525">
+                      <a:solidFill>
+                        <a:srgbClr val="CDD7DF"/>
+                      </a:solidFill>
+                      <a:prstDash val="solid"/>
+                    </a:lnT>
+                    <a:lnB w="9525">
+                      <a:solidFill>
+                        <a:srgbClr val="CDD7DF"/>
+                      </a:solidFill>
+                      <a:prstDash val="solid"/>
+                    </a:lnB>
+                    <a:solidFill>
+                      <a:srgbClr val="142D4E"/>
+                    </a:solidFill>
+                  </a:tcPr>
+                </a:tc>
+                <a:tc>
+                  <a:txBody>
+                    <a:bodyPr/>
+                    <a:lstStyle/>
+                    <a:p>
+                      <a:pPr/>
+                      <a:r>
+                        <a:rPr sz="1500" b="1">
+                          <a:solidFill>
+                            <a:srgbClr val="FFFFFF"/>
+                          </a:solidFill>
+                          <a:latin typeface="Arial"/>
+                          <a:ea typeface="Arial"/>
+                          <a:cs typeface="Arial"/>
+                        </a:rPr>
+                        <a:t>Business question</a:t>
+                      </a:r>
+                    </a:p>
+                  </a:txBody>
+                  <a:tcPr marL="91440" marR="91440" marT="45720" marB="45720" anchor="ctr">
+                    <a:lnR w="9525">
+                      <a:solidFill>
+                        <a:srgbClr val="CDD7DF"/>
+                      </a:solidFill>
+                      <a:prstDash val="solid"/>
+                    </a:lnR>
+                    <a:lnT w="9525">
+                      <a:solidFill>
+                        <a:srgbClr val="CDD7DF"/>
+                      </a:solidFill>
+                      <a:prstDash val="solid"/>
+                    </a:lnT>
+                    <a:lnB w="9525">
+                      <a:solidFill>
+                        <a:srgbClr val="CDD7DF"/>
+                      </a:solidFill>
+                      <a:prstDash val="solid"/>
+                    </a:lnB>
+                    <a:solidFill>
+                      <a:srgbClr val="142D4E"/>
+                    </a:solidFill>
+                  </a:tcPr>
+                </a:tc>
+                <a:tc>
+                  <a:txBody>
+                    <a:bodyPr/>
+                    <a:lstStyle/>
+                    <a:p>
+                      <a:pPr/>
+                      <a:r>
+                        <a:rPr sz="1500" b="1">
+                          <a:solidFill>
+                            <a:srgbClr val="FFFFFF"/>
+                          </a:solidFill>
+                          <a:latin typeface="Arial"/>
+                          <a:ea typeface="Arial"/>
+                          <a:cs typeface="Arial"/>
+                        </a:rPr>
+                        <a:t>Data used</a:t>
+                      </a:r>
+                    </a:p>
+                  </a:txBody>
+                  <a:tcPr marL="91440" marR="91440" marT="45720" marB="45720" anchor="ctr">
+                    <a:lnR w="9525">
+                      <a:solidFill>
+                        <a:srgbClr val="CDD7DF"/>
+                      </a:solidFill>
+                      <a:prstDash val="solid"/>
+                    </a:lnR>
+                    <a:lnT w="9525">
+                      <a:solidFill>
+                        <a:srgbClr val="CDD7DF"/>
+                      </a:solidFill>
+                      <a:prstDash val="solid"/>
+                    </a:lnT>
+                    <a:lnB w="9525">
+                      <a:solidFill>
+                        <a:srgbClr val="CDD7DF"/>
+                      </a:solidFill>
+                      <a:prstDash val="solid"/>
+                    </a:lnB>
+                    <a:solidFill>
+                      <a:srgbClr val="142D4E"/>
+                    </a:solidFill>
+                  </a:tcPr>
+                </a:tc>
+              </a:tr>
+              <a:tr h="1143000">
+                <a:tc>
+                  <a:txBody>
+                    <a:bodyPr/>
+                    <a:lstStyle/>
+                    <a:p>
+                      <a:pPr/>
+                      <a:r>
+                        <a:rPr sz="1400" b="1">
+                          <a:solidFill>
+                            <a:srgbClr val="233247"/>
+                          </a:solidFill>
+                          <a:latin typeface="Arial"/>
+                          <a:ea typeface="Arial"/>
+                          <a:cs typeface="Arial"/>
+                        </a:rPr>
+                        <a:t>Method 1: Text Mining</a:t>
+                      </a:r>
+                    </a:p>
+                  </a:txBody>
+                  <a:tcPr marL="91440" marR="91440" marT="45720" marB="45720" anchor="ctr">
+                    <a:lnL w="9525">
+                      <a:solidFill>
+                        <a:srgbClr val="CDD7DF"/>
+                      </a:solidFill>
+                      <a:prstDash val="solid"/>
+                    </a:lnL>
+                    <a:lnR w="9525">
+                      <a:solidFill>
+                        <a:srgbClr val="CDD7DF"/>
+                      </a:solidFill>
+                      <a:prstDash val="solid"/>
+                    </a:lnR>
+                    <a:lnB w="9525">
+                      <a:solidFill>
+                        <a:srgbClr val="CDD7DF"/>
+                      </a:solidFill>
+                      <a:prstDash val="solid"/>
+                    </a:lnB>
+                    <a:solidFill>
+                      <a:srgbClr val="F0F5F7"/>
+                    </a:solidFill>
+                  </a:tcPr>
+                </a:tc>
+                <a:tc>
+                  <a:txBody>
+                    <a:bodyPr/>
+                    <a:lstStyle/>
+                    <a:p>
+                      <a:pPr/>
+                      <a:r>
+                        <a:rPr sz="1400" b="0">
+                          <a:solidFill>
+                            <a:srgbClr val="233247"/>
+                          </a:solidFill>
+                          <a:latin typeface="Arial"/>
+                          <a:ea typeface="Arial"/>
+                          <a:cs typeface="Arial"/>
+                        </a:rPr>
+                        <a:t>What are users complaining about in each domain and app, and which complaints are the angriest?</a:t>
+                      </a:r>
+                    </a:p>
+                  </a:txBody>
+                  <a:tcPr marL="91440" marR="91440" marT="45720" marB="45720" anchor="ctr">
+                    <a:lnR w="9525">
+                      <a:solidFill>
+                        <a:srgbClr val="CDD7DF"/>
+                      </a:solidFill>
+                      <a:prstDash val="solid"/>
+                    </a:lnR>
+                    <a:lnB w="9525">
+                      <a:solidFill>
+                        <a:srgbClr val="CDD7DF"/>
+                      </a:solidFill>
+                      <a:prstDash val="solid"/>
+                    </a:lnB>
+                    <a:solidFill>
+                      <a:srgbClr val="F0F5F7"/>
+                    </a:solidFill>
+                  </a:tcPr>
+                </a:tc>
+                <a:tc>
+                  <a:txBody>
+                    <a:bodyPr/>
+                    <a:lstStyle/>
+                    <a:p>
+                      <a:pPr/>
+                      <a:r>
+                        <a:rPr sz="1400" b="0">
+                          <a:solidFill>
+                            <a:srgbClr val="233247"/>
+                          </a:solidFill>
+                          <a:latin typeface="Arial"/>
+                          <a:ea typeface="Arial"/>
+                          <a:cs typeface="Arial"/>
+                        </a:rPr>
+                        <a:t>content of 1–2★ reviews with ≥ 3 content words (167,303), 4–5★ reviews as a contrast (166,635), VADER scores, the 9 keyword tags for comparison</a:t>
+                      </a:r>
+                    </a:p>
+                  </a:txBody>
+                  <a:tcPr marL="91440" marR="91440" marT="45720" marB="45720" anchor="ctr">
+                    <a:lnR w="9525">
+                      <a:solidFill>
+                        <a:srgbClr val="CDD7DF"/>
+                      </a:solidFill>
+                      <a:prstDash val="solid"/>
+                    </a:lnR>
+                    <a:lnB w="9525">
+                      <a:solidFill>
+                        <a:srgbClr val="CDD7DF"/>
+                      </a:solidFill>
+                      <a:prstDash val="solid"/>
+                    </a:lnB>
+                    <a:solidFill>
+                      <a:srgbClr val="F0F5F7"/>
+                    </a:solidFill>
+                  </a:tcPr>
+                </a:tc>
+              </a:tr>
+              <a:tr h="1143000">
+                <a:tc>
+                  <a:txBody>
+                    <a:bodyPr/>
+                    <a:lstStyle/>
+                    <a:p>
+                      <a:pPr/>
+                      <a:r>
+                        <a:rPr sz="1400" b="1">
+                          <a:solidFill>
+                            <a:srgbClr val="233247"/>
+                          </a:solidFill>
+                          <a:latin typeface="Arial"/>
+                          <a:ea typeface="Arial"/>
+                          <a:cs typeface="Arial"/>
+                        </a:rPr>
+                        <a:t>Method 2: Time-Series Analysis</a:t>
+                      </a:r>
+                    </a:p>
+                  </a:txBody>
+                  <a:tcPr marL="91440" marR="91440" marT="45720" marB="45720" anchor="ctr">
+                    <a:lnL w="9525">
+                      <a:solidFill>
+                        <a:srgbClr val="CDD7DF"/>
+                      </a:solidFill>
+                      <a:prstDash val="solid"/>
+                    </a:lnL>
+                    <a:lnR w="9525">
+                      <a:solidFill>
+                        <a:srgbClr val="CDD7DF"/>
+                      </a:solidFill>
+                      <a:prstDash val="solid"/>
+                    </a:lnR>
+                    <a:lnB w="9525">
+                      <a:solidFill>
+                        <a:srgbClr val="CDD7DF"/>
+                      </a:solidFill>
+                      <a:prstDash val="solid"/>
+                    </a:lnB>
+                    <a:solidFill>
+                      <a:srgbClr val="FFFFFF"/>
+                    </a:solidFill>
+                  </a:tcPr>
+                </a:tc>
+                <a:tc>
+                  <a:txBody>
+                    <a:bodyPr/>
+                    <a:lstStyle/>
+                    <a:p>
+                      <a:pPr/>
+                      <a:r>
+                        <a:rPr sz="1400" b="0">
+                          <a:solidFill>
+                            <a:srgbClr val="233247"/>
+                          </a:solidFill>
+                          <a:latin typeface="Arial"/>
+                          <a:ea typeface="Arial"/>
+                          <a:cs typeface="Arial"/>
+                        </a:rPr>
+                        <a:t>How many 1–2★ reviews will each app get in the next weeks, which days are unusual, and did a new release make things worse?</a:t>
+                      </a:r>
+                    </a:p>
+                  </a:txBody>
+                  <a:tcPr marL="91440" marR="91440" marT="45720" marB="45720" anchor="ctr">
+                    <a:lnR w="9525">
+                      <a:solidFill>
+                        <a:srgbClr val="CDD7DF"/>
+                      </a:solidFill>
+                      <a:prstDash val="solid"/>
+                    </a:lnR>
+                    <a:lnB w="9525">
+                      <a:solidFill>
+                        <a:srgbClr val="CDD7DF"/>
+                      </a:solidFill>
+                      <a:prstDash val="solid"/>
+                    </a:lnB>
+                    <a:solidFill>
+                      <a:srgbClr val="FFFFFF"/>
+                    </a:solidFill>
+                  </a:tcPr>
+                </a:tc>
+                <a:tc>
+                  <a:txBody>
+                    <a:bodyPr/>
+                    <a:lstStyle/>
+                    <a:p>
+                      <a:pPr/>
+                      <a:r>
+                        <a:rPr sz="1400" b="0">
+                          <a:solidFill>
+                            <a:srgbClr val="233247"/>
+                          </a:solidFill>
+                          <a:latin typeface="Arial"/>
+                          <a:ea typeface="Arial"/>
+                          <a:cs typeface="Arial"/>
+                        </a:rPr>
+                        <a:t>review_date + score → daily 1–2★ counts per app (11 × 173 days); app_version → 224 release events</a:t>
+                      </a:r>
+                    </a:p>
+                  </a:txBody>
+                  <a:tcPr marL="91440" marR="91440" marT="45720" marB="45720" anchor="ctr">
+                    <a:lnR w="9525">
+                      <a:solidFill>
+                        <a:srgbClr val="CDD7DF"/>
+                      </a:solidFill>
+                      <a:prstDash val="solid"/>
+                    </a:lnR>
+                    <a:lnB w="9525">
+                      <a:solidFill>
+                        <a:srgbClr val="CDD7DF"/>
+                      </a:solidFill>
+                      <a:prstDash val="solid"/>
+                    </a:lnB>
+                    <a:solidFill>
+                      <a:srgbClr val="FFFFFF"/>
+                    </a:solidFill>
+                  </a:tcPr>
+                </a:tc>
+              </a:tr>
+            </a:tbl>
+          </a:graphicData>
+        </a:graphic>
+      </p:graphicFrame>
+      <p:sp>
+        <p:nvSpPr>
+          <p:cNvPr id="5" name="">
+            <a:extLst xmlns:a="http://schemas.openxmlformats.org/drawingml/2006/main">
+              <a:ext uri="{FF2B5EF4-FFF2-40B4-BE49-F238E27FC236}">
+                <a16:creationId xmlns:a16="http://schemas.microsoft.com/office/drawing/2014/main" id="{036D661E-F7DF-42DC-BD9B-EDE438C1C04A}"/>
+              </a:ext>
+            </a:extLst>
+          </p:cNvPr>
+          <p:cNvSpPr>
+            <a:spLocks xmlns:a="http://schemas.openxmlformats.org/drawingml/2006/main" noGrp="1"/>
+          </p:cNvSpPr>
+          <p:nvPr/>
+        </p:nvSpPr>
+        <p:spPr>
+          <a:xfrm xmlns:a="http://schemas.openxmlformats.org/drawingml/2006/main">
+            <a:off x="685800" y="5169789"/>
+            <a:ext cx="10572750" cy="619125"/>
+          </a:xfrm>
+          <a:prstGeom xmlns:a="http://schemas.openxmlformats.org/drawingml/2006/main" prst="rect">
+            <a:avLst/>
+          </a:prstGeom>
+          <a:noFill xmlns:a="http://schemas.openxmlformats.org/drawingml/2006/main"/>
+          <a:ln xmlns:a="http://schemas.openxmlformats.org/drawingml/2006/main" w="0">
+            <a:noFill/>
+            <a:prstDash val="solid"/>
+          </a:ln>
+        </p:spPr>
+        <p:txBody>
+          <a:bodyPr xmlns:a="http://schemas.openxmlformats.org/drawingml/2006/main" wrap="square" lIns="0" rIns="0"/>
+          <a:lstStyle xmlns:a="http://schemas.openxmlformats.org/drawingml/2006/main">
+            <a:defPPr>
+              <a:defRPr sz="1875" b="1">
+                <a:solidFill>
+                  <a:srgbClr val="157A80"/>
+                </a:solidFill>
+                <a:latin typeface="Arial"/>
+                <a:ea typeface="Arial"/>
+                <a:cs typeface="Arial"/>
+              </a:defRPr>
+            </a:defPPr>
+          </a:lstStyle>
+          <ns0:p xmlns:ns0="http://schemas.openxmlformats.org/drawingml/2006/main">
+            <ns0:pPr>
+              <ns0:defRPr sz="1875" b="1">
+                <ns0:solidFill>
+                  <ns0:srgbClr val="157A80"/>
+                </ns0:solidFill>
+                <ns0:latin typeface="Arial"/>
+                <ns0:ea typeface="Arial"/>
+                <ns0:cs typeface="Arial"/>
+              </ns0:defRPr>
+            </ns0:pPr>
+            <ns0:r>
+              <ns0:rPr sz="1600" b="1">
+                <ns0:solidFill>
+                  <ns0:srgbClr val="157A80"/>
+                </ns0:solidFill>
+                <ns0:latin typeface="Arial"/>
+                <ns0:ea typeface="Arial"/>
+                <ns0:cs typeface="Arial"/>
+              </ns0:rPr>
+              <ns0:t>Selected: </ns0:t>
+            </ns0:r>
+            <ns0:r>
+              <ns0:rPr sz="1600" b="1">
+                <ns0:solidFill>
+                  <ns0:srgbClr val="157A80"/>
+                </ns0:solidFill>
+                <ns0:latin typeface="Arial"/>
+                <ns0:ea typeface="Arial"/>
+                <ns0:cs typeface="Arial"/>
+              </ns0:rPr>
+              <ns0:t>Time-Series Analysis and Text Mining. Association rules not chosen: only 3.4% of reviews carry two or more issue tags.</ns0:t>
+            </ns0:r>
+          </ns0:p>
+        </p:txBody>
+      </p:sp>
+    </p:spTree>
+    <p:extLst>
+      <p:ext uri="{BB962C8B-B14F-4D97-AF65-F5344CB8AC3E}">
+        <p14:creationId xmlns:p14="http://schemas.microsoft.com/office/powerpoint/2010/main" val="1237099396"/>
+      </p:ext>
+    </p:extLst>
+  </p:cSld>
+</p:sld>
+</file>
+
+<file path=ppt/slides/slide11.xml><?xml version="1.0" encoding="utf-8"?>
+<p:sld xmlns:p="http://schemas.openxmlformats.org/presentationml/2006/main">
+  <p:cSld>
+    <p:bg>
+      <p:bgPr>
+        <a:solidFill xmlns:a="http://schemas.openxmlformats.org/drawingml/2006/main">
+          <a:srgbClr val="FFFFFF"/>
+        </a:solidFill>
+      </p:bgPr>
+    </p:bg>
+    <p:spTree>
+      <p:nvGrpSpPr>
+        <p:cNvPr id="1" name=""/>
+        <p:cNvGrpSpPr/>
+        <p:nvPr/>
+      </p:nvGrpSpPr>
+      <p:grpSpPr>
+        <a:xfrm xmlns:a="http://schemas.openxmlformats.org/drawingml/2006/main"/>
+      </p:grpSpPr>
+      <p:sp>
+        <p:nvSpPr>
+          <p:cNvPr id="8" name="">
+            <a:extLst xmlns:a="http://schemas.openxmlformats.org/drawingml/2006/main">
+              <a:ext uri="{FF2B5EF4-FFF2-40B4-BE49-F238E27FC236}">
+                <a16:creationId xmlns:a16="http://schemas.microsoft.com/office/drawing/2014/main" id="{D869BBDF-8FEE-4A35-9821-C8CF275E3863}"/>
+              </a:ext>
+            </a:extLst>
+          </p:cNvPr>
+          <p:cNvSpPr>
+            <a:spLocks xmlns:a="http://schemas.openxmlformats.org/drawingml/2006/main" noGrp="1"/>
+          </p:cNvSpPr>
+          <p:nvPr/>
+        </p:nvSpPr>
+        <p:spPr>
+          <a:xfrm xmlns:a="http://schemas.openxmlformats.org/drawingml/2006/main">
+            <a:off x="609600" y="342900"/>
+            <a:ext cx="10477500" cy="285750"/>
+          </a:xfrm>
+          <a:prstGeom xmlns:a="http://schemas.openxmlformats.org/drawingml/2006/main" prst="rect">
+            <a:avLst/>
+          </a:prstGeom>
+          <a:noFill xmlns:a="http://schemas.openxmlformats.org/drawingml/2006/main"/>
+          <a:ln xmlns:a="http://schemas.openxmlformats.org/drawingml/2006/main" w="0">
+            <a:noFill/>
+            <a:prstDash val="solid"/>
+          </a:ln>
+        </p:spPr>
+        <p:txBody>
+          <a:bodyPr xmlns:a="http://schemas.openxmlformats.org/drawingml/2006/main"/>
+          <a:lstStyle xmlns:a="http://schemas.openxmlformats.org/drawingml/2006/main">
+            <a:defPPr>
+              <a:defRPr sz="1350" b="1">
+                <a:solidFill>
+                  <a:srgbClr val="157A80"/>
+                </a:solidFill>
+                <a:latin typeface="Arial"/>
+                <a:ea typeface="Arial"/>
+                <a:cs typeface="Arial"/>
+              </a:defRPr>
+            </a:defPPr>
+          </a:lstStyle>
+          <a:p xmlns:a="http://schemas.openxmlformats.org/drawingml/2006/main">
+            <a:pPr>
+              <a:defRPr sz="1350" b="1">
+                <a:solidFill>
+                  <a:srgbClr val="157A80"/>
+                </a:solidFill>
+                <a:latin typeface="Arial"/>
+                <a:ea typeface="Arial"/>
+                <a:cs typeface="Arial"/>
+              </a:defRPr>
+            </a:pPr>
+            <a:r>
+              <a:rPr sz="1350" b="1">
+                <a:solidFill>
+                  <a:srgbClr val="157A80"/>
+                </a:solidFill>
+                <a:latin typeface="Arial"/>
+                <a:ea typeface="Arial"/>
+                <a:cs typeface="Arial"/>
+              </a:rPr>
+              <a:t>UNIT 3</a:t>
+            </a:r>
+          </a:p>
+        </p:txBody>
+      </p:sp>
+      <p:sp>
+        <p:nvSpPr>
+          <p:cNvPr id="2" name="">
+            <a:extLst xmlns:a="http://schemas.openxmlformats.org/drawingml/2006/main">
+              <a:ext uri="{FF2B5EF4-FFF2-40B4-BE49-F238E27FC236}">
+                <a16:creationId xmlns:a16="http://schemas.microsoft.com/office/drawing/2014/main" id="{FD2BBE01-1719-4C72-B8A4-45DC27F96536}"/>
+              </a:ext>
+            </a:extLst>
+          </p:cNvPr>
+          <p:cNvSpPr>
+            <a:spLocks xmlns:a="http://schemas.openxmlformats.org/drawingml/2006/main" noGrp="1"/>
+          </p:cNvSpPr>
+          <p:nvPr/>
+        </p:nvSpPr>
+        <p:spPr>
+          <a:xfrm xmlns:a="http://schemas.openxmlformats.org/drawingml/2006/main">
+            <a:off x="609600" y="838200"/>
+            <a:ext cx="10972800" cy="857250"/>
+          </a:xfrm>
+          <a:prstGeom xmlns:a="http://schemas.openxmlformats.org/drawingml/2006/main" prst="rect">
+            <a:avLst/>
+          </a:prstGeom>
+          <a:noFill xmlns:a="http://schemas.openxmlformats.org/drawingml/2006/main"/>
+          <a:ln xmlns:a="http://schemas.openxmlformats.org/drawingml/2006/main" w="0">
+            <a:noFill/>
+            <a:prstDash val="solid"/>
+          </a:ln>
+        </p:spPr>
+        <p:txBody>
+          <a:bodyPr xmlns:a="http://schemas.openxmlformats.org/drawingml/2006/main"/>
+          <a:lstStyle xmlns:a="http://schemas.openxmlformats.org/drawingml/2006/main">
+            <a:defPPr>
+              <a:defRPr sz="3150" b="1">
+                <a:solidFill>
+                  <a:srgbClr val="142D4E"/>
+                </a:solidFill>
+                <a:latin typeface="Arial"/>
+                <a:ea typeface="Arial"/>
+                <a:cs typeface="Arial"/>
+              </a:defRPr>
+            </a:defPPr>
+          </a:lstStyle>
+          <a:p xmlns:a="http://schemas.openxmlformats.org/drawingml/2006/main">
+            <a:pPr>
+              <a:defRPr sz="3150" b="1">
+                <a:solidFill>
+                  <a:srgbClr val="142D4E"/>
+                </a:solidFill>
+                <a:latin typeface="Arial"/>
+                <a:ea typeface="Arial"/>
+                <a:cs typeface="Arial"/>
+              </a:defRPr>
+            </a:pPr>
+            <a:r>
+              <a:rPr sz="3150" b="1">
+                <a:solidFill>
+                  <a:srgbClr val="142D4E"/>
+                </a:solidFill>
+                <a:latin typeface="Arial"/>
+                <a:ea typeface="Arial"/>
+                <a:cs typeface="Arial"/>
+              </a:rPr>
+              <a:t>Method 1 implementation</a:t>
+            </a:r>
+          </a:p>
+        </p:txBody>
+      </p:sp>
+      <p:sp>
+        <p:nvSpPr>
+          <p:cNvPr id="3" name="">
+            <a:extLst xmlns:a="http://schemas.openxmlformats.org/drawingml/2006/main">
+              <a:ext uri="{FF2B5EF4-FFF2-40B4-BE49-F238E27FC236}">
+                <a16:creationId xmlns:a16="http://schemas.microsoft.com/office/drawing/2014/main" id="{0FA7164B-B878-4DBD-809C-47ABFBDCAF5D}"/>
+              </a:ext>
+            </a:extLst>
+          </p:cNvPr>
+          <p:cNvSpPr>
+            <a:spLocks xmlns:a="http://schemas.openxmlformats.org/drawingml/2006/main" noGrp="1"/>
+          </p:cNvSpPr>
+          <p:nvPr/>
+        </p:nvSpPr>
+        <p:spPr>
+          <a:xfrm xmlns:a="http://schemas.openxmlformats.org/drawingml/2006/main">
+            <a:off x="10953750" y="6343650"/>
+            <a:ext cx="619125" cy="238125"/>
+          </a:xfrm>
+          <a:prstGeom xmlns:a="http://schemas.openxmlformats.org/drawingml/2006/main" prst="rect">
+            <a:avLst/>
+          </a:prstGeom>
+          <a:noFill xmlns:a="http://schemas.openxmlformats.org/drawingml/2006/main"/>
+          <a:ln xmlns:a="http://schemas.openxmlformats.org/drawingml/2006/main" w="0">
+            <a:noFill/>
+            <a:prstDash val="solid"/>
+          </a:ln>
+        </p:spPr>
+        <p:txBody>
+          <a:bodyPr xmlns:a="http://schemas.openxmlformats.org/drawingml/2006/main"/>
+          <a:lstStyle xmlns:a="http://schemas.openxmlformats.org/drawingml/2006/main">
+            <a:defPPr>
+              <a:defRPr sz="1200" b="0">
+                <a:solidFill>
+                  <a:srgbClr val="66758A"/>
+                </a:solidFill>
+                <a:latin typeface="Arial"/>
+                <a:ea typeface="Arial"/>
+                <a:cs typeface="Arial"/>
+              </a:defRPr>
+            </a:defPPr>
+          </a:lstStyle>
+          <a:p xmlns:a="http://schemas.openxmlformats.org/drawingml/2006/main">
+            <a:pPr>
+              <a:defRPr sz="1200" b="0">
+                <a:solidFill>
+                  <a:srgbClr val="66758A"/>
+                </a:solidFill>
+                <a:latin typeface="Arial"/>
+                <a:ea typeface="Arial"/>
+                <a:cs typeface="Arial"/>
+              </a:defRPr>
+            </a:pPr>
+            <a:r>
+              <a:rPr sz="1200" b="0">
+                <a:solidFill>
+                  <a:srgbClr val="66758A"/>
+                </a:solidFill>
+                <a:latin typeface="Arial"/>
+                <a:ea typeface="Arial"/>
+                <a:cs typeface="Arial"/>
+              </a:rPr>
+              <a:t>11</a:t>
             </a:r>
           </a:p>
         </p:txBody>
@@ -5111,7 +6249,7 @@
                 <ns1:ea typeface="Arial"/>
                 <ns1:cs typeface="Arial"/>
               </ns1:rPr>
-              <ns1:t>167,357 complaint reviews (1–2★, ≥ 3 content words). Lowercase; keep negations ("not delivered"); Hinglish "nahi" → "not"; drop app names and brand phrases; lemmatise. One document-term matrix per domain with words and two-word phrases (in ≥ 10 reviews and ≤ 50% of them).</ns1:t>
+              <ns1:t>167,303 complaint reviews (1–2★, ≥ 3 content words). Lowercase; keep negations ("not delivered"); Hinglish "nahi" → "not"; drop app names and brand phrases (incl. "phone pay"); lemmatise. One document-term matrix per domain with words and two-word phrases (in ≥ 10 reviews and ≤ 50% of them).</ns1:t>
             </ns1:r>
           </ns1:p>
         </p:txBody>
@@ -5189,7 +6327,7 @@
                 <ns2:ea typeface="Arial"/>
                 <ns2:cs typeface="Arial"/>
               </ns2:rPr>
-              <ns2:t>scikit-learn: TF-IDF weights → NMF (nndsvda start, seed 42), K = 6 / 6 / 5 topics for Food &amp; Grocery / Shopping / Payments, chosen by NPMI coherence over K = 3–10. Log-odds with an informative prior for words distinctive to each app. Pipelines saved for the dashboard.</ns2:t>
+              <ns2:t>scikit-learn: TF-IDF weights → NMF (nndsvda start, seed 42), K = 6 / 6 / 5 topics for Food &amp; Grocery / Shopping / Payments, NPMI coherence over K = 3–10 (the peak for Food and Payments; a guide for Shopping, whose curve is flat). Log-odds with an informative prior for words distinctive to each app. Pipelines saved for the dashboard.</ns2:t>
             </ns2:r>
           </ns2:p>
         </p:txBody>
@@ -5267,7 +6405,7 @@
                 <ns3:ea typeface="Arial"/>
                 <ns3:cs typeface="Arial"/>
               </ns3:rPr>
-              <ns3:t>17 complaint topics, each with top terms, example reviews and sentiment: Order Cancellation &amp; Refund is 35% of food complaints (VADER −0.27), Return Rejection &amp; Defective Products 25% of shopping, Failed Transfers &amp; Debited Amounts 52% of payments; angriest: Scam Allegations (−0.61, 80% strongly negative).</ns3:t>
+              <ns3:t>17 complaint topics, each with top terms, example reviews and sentiment: Order Cancellation &amp; Refund is 35% of food complaints (VADER −0.27), Returns, Refunds &amp; Product Quality 25% of shopping, Payment, UPI &amp; Bank Account Problems 49% of payments; angriest specific fault: Poor Customer Support (−0.40, 56% strongly negative).</ns3:t>
             </ns3:r>
           </ns3:p>
         </p:txBody>
@@ -5282,7 +6420,406 @@
 </p:sld>
 </file>
 
-<file path=ppt/slides/slide11.xml><?xml version="1.0" encoding="utf-8"?>
+<file path=ppt/slides/slide12.xml><?xml version="1.0" encoding="utf-8"?>
+<p:sld xmlns:a="http://schemas.openxmlformats.org/drawingml/2006/main" xmlns:p="http://schemas.openxmlformats.org/presentationml/2006/main" xmlns:r="http://schemas.openxmlformats.org/officeDocument/2006/relationships">
+  <p:cSld>
+    <p:spTree>
+      <p:nvGrpSpPr>
+        <p:cNvPr id="1" name=""/>
+        <p:cNvGrpSpPr/>
+        <p:nvPr/>
+      </p:nvGrpSpPr>
+      <p:grpSpPr/>
+      <p:sp>
+        <p:nvSpPr>
+          <p:cNvPr id="7" name="">
+            <a:extLst>
+              <a:ext uri="{FF2B5EF4-FFF2-40B4-BE49-F238E27FC236}">
+                <a16:creationId xmlns:a16="http://schemas.microsoft.com/office/drawing/2014/main" id="{B4CE5281-5814-4291-B8DE-FB11715A86D4}"/>
+              </a:ext>
+            </a:extLst>
+          </p:cNvPr>
+          <p:cNvSpPr>
+            <a:spLocks noGrp="1"/>
+          </p:cNvSpPr>
+          <p:nvPr/>
+        </p:nvSpPr>
+        <p:spPr>
+          <a:xfrm>
+            <a:off x="609600" y="342900"/>
+            <a:ext cx="10477500" cy="285750"/>
+          </a:xfrm>
+          <a:prstGeom prst="rect">
+            <a:avLst/>
+          </a:prstGeom>
+          <a:noFill/>
+          <a:ln w="0">
+            <a:noFill/>
+            <a:prstDash val="solid"/>
+          </a:ln>
+        </p:spPr>
+        <p:txBody>
+          <a:bodyPr/>
+          <a:lstStyle>
+            <a:defPPr>
+              <a:defRPr sz="1350" b="1">
+                <a:solidFill>
+                  <a:srgbClr val="157A80"/>
+                </a:solidFill>
+                <a:latin typeface="Arial"/>
+                <a:ea typeface="Arial"/>
+                <a:cs typeface="Arial"/>
+              </a:defRPr>
+            </a:defPPr>
+          </a:lstStyle>
+          <a:p>
+            <a:pPr>
+              <a:defRPr sz="1350" b="1">
+                <a:solidFill>
+                  <a:srgbClr val="157A80"/>
+                </a:solidFill>
+                <a:latin typeface="Arial"/>
+                <a:ea typeface="Arial"/>
+                <a:cs typeface="Arial"/>
+              </a:defRPr>
+            </a:pPr>
+            <a:r>
+              <a:rPr sz="1350" b="1">
+                <a:solidFill>
+                  <a:srgbClr val="157A80"/>
+                </a:solidFill>
+                <a:latin typeface="Arial"/>
+                <a:ea typeface="Arial"/>
+                <a:cs typeface="Arial"/>
+              </a:rPr>
+              <a:t>UNIT 3</a:t>
+            </a:r>
+          </a:p>
+        </p:txBody>
+      </p:sp>
+      <p:sp>
+        <p:nvSpPr>
+          <p:cNvPr id="2" name="">
+            <a:extLst>
+              <a:ext uri="{FF2B5EF4-FFF2-40B4-BE49-F238E27FC236}">
+                <a16:creationId xmlns:a16="http://schemas.microsoft.com/office/drawing/2014/main" id="{F2D70B92-C245-446F-A6B2-954E4F469C2A}"/>
+              </a:ext>
+            </a:extLst>
+          </p:cNvPr>
+          <p:cNvSpPr>
+            <a:spLocks noGrp="1"/>
+          </p:cNvSpPr>
+          <p:nvPr/>
+        </p:nvSpPr>
+        <p:spPr>
+          <a:xfrm>
+            <a:off x="609600" y="838200"/>
+            <a:ext cx="10972800" cy="857250"/>
+          </a:xfrm>
+          <a:prstGeom prst="rect">
+            <a:avLst/>
+          </a:prstGeom>
+          <a:noFill/>
+          <a:ln w="0">
+            <a:noFill/>
+            <a:prstDash val="solid"/>
+          </a:ln>
+        </p:spPr>
+        <p:txBody>
+          <a:bodyPr/>
+          <a:lstStyle>
+            <a:defPPr>
+              <a:defRPr sz="3150" b="1">
+                <a:solidFill>
+                  <a:srgbClr val="142D4E"/>
+                </a:solidFill>
+                <a:latin typeface="Arial"/>
+                <a:ea typeface="Arial"/>
+                <a:cs typeface="Arial"/>
+              </a:defRPr>
+            </a:defPPr>
+          </a:lstStyle>
+          <a:p>
+            <a:pPr>
+              <a:defRPr sz="3150" b="1">
+                <a:solidFill>
+                  <a:srgbClr val="142D4E"/>
+                </a:solidFill>
+                <a:latin typeface="Arial"/>
+                <a:ea typeface="Arial"/>
+                <a:cs typeface="Arial"/>
+              </a:defRPr>
+            </a:pPr>
+            <a:r>
+              <a:rPr sz="3150" b="1">
+                <a:solidFill>
+                  <a:srgbClr val="142D4E"/>
+                </a:solidFill>
+                <a:latin typeface="Arial"/>
+                <a:ea typeface="Arial"/>
+                <a:cs typeface="Arial"/>
+              </a:rPr>
+              <a:t>Method 1 results: complaint topics and their sentiment</a:t>
+            </a:r>
+          </a:p>
+        </p:txBody>
+      </p:sp>
+      <p:sp>
+        <p:nvSpPr>
+          <p:cNvPr id="3" name="">
+            <a:extLst>
+              <a:ext uri="{FF2B5EF4-FFF2-40B4-BE49-F238E27FC236}">
+                <a16:creationId xmlns:a16="http://schemas.microsoft.com/office/drawing/2014/main" id="{8A76EF40-5FAD-4E83-9187-5FE9CC845698}"/>
+              </a:ext>
+            </a:extLst>
+          </p:cNvPr>
+          <p:cNvSpPr>
+            <a:spLocks noGrp="1"/>
+          </p:cNvSpPr>
+          <p:nvPr/>
+        </p:nvSpPr>
+        <p:spPr>
+          <a:xfrm>
+            <a:off x="10953750" y="6343650"/>
+            <a:ext cx="619125" cy="238125"/>
+          </a:xfrm>
+          <a:prstGeom prst="rect">
+            <a:avLst/>
+          </a:prstGeom>
+          <a:noFill/>
+          <a:ln w="0">
+            <a:noFill/>
+            <a:prstDash val="solid"/>
+          </a:ln>
+        </p:spPr>
+        <p:txBody>
+          <a:bodyPr/>
+          <a:lstStyle>
+            <a:defPPr>
+              <a:defRPr sz="1200" b="0">
+                <a:solidFill>
+                  <a:srgbClr val="66758A"/>
+                </a:solidFill>
+                <a:latin typeface="Arial"/>
+                <a:ea typeface="Arial"/>
+                <a:cs typeface="Arial"/>
+              </a:defRPr>
+            </a:defPPr>
+          </a:lstStyle>
+          <a:p>
+            <a:pPr>
+              <a:defRPr sz="1200" b="0">
+                <a:solidFill>
+                  <a:srgbClr val="66758A"/>
+                </a:solidFill>
+                <a:latin typeface="Arial"/>
+                <a:ea typeface="Arial"/>
+                <a:cs typeface="Arial"/>
+              </a:defRPr>
+            </a:pPr>
+            <a:r>
+              <a:rPr sz="1200" b="0">
+                <a:solidFill>
+                  <a:srgbClr val="66758A"/>
+                </a:solidFill>
+                <a:latin typeface="Arial"/>
+                <a:ea typeface="Arial"/>
+                <a:cs typeface="Arial"/>
+              </a:rPr>
+              <a:t>12</a:t>
+            </a:r>
+          </a:p>
+        </p:txBody>
+      </p:sp>
+      <p:sp>
+        <p:nvSpPr>
+          <p:cNvPr id="5" name="">
+            <a:extLst>
+              <a:ext uri="{FF2B5EF4-FFF2-40B4-BE49-F238E27FC236}">
+                <a16:creationId xmlns:a16="http://schemas.microsoft.com/office/drawing/2014/main" id="{B775F0BD-DAEF-4688-97F4-0C8CC4593B56}"/>
+              </a:ext>
+            </a:extLst>
+          </p:cNvPr>
+          <p:cNvSpPr>
+            <a:spLocks noGrp="1"/>
+          </p:cNvSpPr>
+          <p:nvPr/>
+        </p:nvSpPr>
+        <p:spPr>
+          <a:xfrm>
+            <a:off x="685800" y="4983480"/>
+            <a:ext cx="10668000" cy="760476"/>
+          </a:xfrm>
+          <a:prstGeom prst="rect">
+            <a:avLst/>
+          </a:prstGeom>
+          <a:noFill/>
+          <a:ln w="0">
+            <a:noFill/>
+            <a:prstDash val="solid"/>
+          </a:ln>
+        </p:spPr>
+        <p:txBody>
+          <a:bodyPr wrap="square" lIns="0" rIns="0"/>
+          <a:lstStyle>
+            <a:defPPr>
+              <a:defRPr sz="2025" b="0">
+                <a:solidFill>
+                  <a:srgbClr val="233247"/>
+                </a:solidFill>
+                <a:latin typeface="Arial"/>
+                <a:ea typeface="Arial"/>
+                <a:cs typeface="Arial"/>
+              </a:defRPr>
+            </a:defPPr>
+          </a:lstStyle>
+          <a:p>
+            <a:pPr>
+              <a:defRPr sz="2025" b="0">
+                <a:solidFill>
+                  <a:srgbClr val="233247"/>
+                </a:solidFill>
+                <a:latin typeface="Arial"/>
+                <a:ea typeface="Arial"/>
+                <a:cs typeface="Arial"/>
+              </a:defRPr>
+            </a:pPr>
+            <a:r>
+              <a:rPr sz="1400" b="1">
+                <a:solidFill>
+                  <a:srgbClr val="233247"/>
+                </a:solidFill>
+                <a:latin typeface="Arial"/>
+                <a:ea typeface="Arial"/>
+                <a:cs typeface="Arial"/>
+              </a:rPr>
+              <a:t>Key findings: </a:t>
+            </a:r>
+            <a:r>
+              <a:rPr sz="1400" b="0">
+                <a:solidFill>
+                  <a:srgbClr val="233247"/>
+                </a:solidFill>
+                <a:latin typeface="Arial"/>
+                <a:ea typeface="Arial"/>
+                <a:cs typeface="Arial"/>
+              </a:rPr>
+              <a:t>one operational theme leads each domain: order cancellation and refunds (35% of food complaints), returns, refunds and product quality (25% of shopping), payment, UPI and bank-account problems (49% of payments). Among specific faults, support is the angriest (−0.40 in food apps); grey topics are general dissatisfaction with no specific fault.</a:t>
+            </a:r>
+          </a:p>
+        </p:txBody>
+      </p:sp>
+      <p:sp>
+        <p:nvSpPr>
+          <p:cNvPr id="6" name="">
+            <a:extLst>
+              <a:ext uri="{FF2B5EF4-FFF2-40B4-BE49-F238E27FC236}">
+                <a16:creationId xmlns:a16="http://schemas.microsoft.com/office/drawing/2014/main" id="{CD68E0AF-687D-43C3-AA48-711AD2792F7A}"/>
+              </a:ext>
+            </a:extLst>
+          </p:cNvPr>
+          <p:cNvSpPr>
+            <a:spLocks noGrp="1"/>
+          </p:cNvSpPr>
+          <p:nvPr/>
+        </p:nvSpPr>
+        <p:spPr>
+          <a:xfrm>
+            <a:off x="685800" y="5817108"/>
+            <a:ext cx="10668000" cy="543559"/>
+          </a:xfrm>
+          <a:prstGeom prst="rect">
+            <a:avLst/>
+          </a:prstGeom>
+          <a:noFill/>
+          <a:ln w="0">
+            <a:noFill/>
+            <a:prstDash val="solid"/>
+          </a:ln>
+        </p:spPr>
+        <p:txBody>
+          <a:bodyPr wrap="square" lIns="0" rIns="0"/>
+          <a:lstStyle>
+            <a:defPPr>
+              <a:defRPr sz="2025" b="0">
+                <a:solidFill>
+                  <a:srgbClr val="233247"/>
+                </a:solidFill>
+                <a:latin typeface="Arial"/>
+                <a:ea typeface="Arial"/>
+                <a:cs typeface="Arial"/>
+              </a:defRPr>
+            </a:defPPr>
+          </a:lstStyle>
+          <a:p>
+            <a:pPr>
+              <a:defRPr sz="2025" b="0">
+                <a:solidFill>
+                  <a:srgbClr val="233247"/>
+                </a:solidFill>
+                <a:latin typeface="Arial"/>
+                <a:ea typeface="Arial"/>
+                <a:cs typeface="Arial"/>
+              </a:defRPr>
+            </a:pPr>
+            <a:r>
+              <a:rPr sz="1400" b="1">
+                <a:solidFill>
+                  <a:srgbClr val="233247"/>
+                </a:solidFill>
+                <a:latin typeface="Arial"/>
+                <a:ea typeface="Arial"/>
+                <a:cs typeface="Arial"/>
+              </a:rPr>
+              <a:t>Calm but serious: </a:t>
+            </a:r>
+            <a:r>
+              <a:rPr sz="1400" b="0">
+                <a:solidFill>
+                  <a:srgbClr val="233247"/>
+                </a:solidFill>
+                <a:latin typeface="Arial"/>
+                <a:ea typeface="Arial"/>
+                <a:cs typeface="Arial"/>
+              </a:rPr>
+              <a:t>app or scanner failures (−0.09) and device errors (−0.13) are described factually, so a mild sentiment score does not mean a mild problem.</a:t>
+            </a:r>
+          </a:p>
+        </p:txBody>
+      </p:sp>
+      <p:pic>
+        <p:nvPicPr>
+          <p:cNvPr id="8" name="Picture 7" descr="tm_topics.png"/>
+          <p:cNvPicPr>
+            <a:picLocks noChangeAspect="1"/>
+          </p:cNvPicPr>
+          <p:nvPr/>
+        </p:nvPicPr>
+        <p:blipFill>
+          <a:blip r:embed="rId2"/>
+          <a:stretch>
+            <a:fillRect/>
+          </a:stretch>
+        </p:blipFill>
+        <p:spPr>
+          <a:xfrm>
+            <a:off x="620267" y="1700000"/>
+            <a:ext cx="10946893" cy="3173679"/>
+          </a:xfrm>
+          <a:prstGeom prst="rect">
+            <a:avLst/>
+          </a:prstGeom>
+        </p:spPr>
+      </p:pic>
+    </p:spTree>
+  </p:cSld>
+  <p:clrMapOvr>
+    <a:masterClrMapping/>
+  </p:clrMapOvr>
+</p:sld>
+</file>
+
+<file path=ppt/slides/slide13.xml><?xml version="1.0" encoding="utf-8"?>
 <p:sld xmlns:p="http://schemas.openxmlformats.org/presentationml/2006/main">
   <p:cSld>
     <p:bg>
@@ -5497,7 +7034,7 @@
                 <a:ea typeface="Arial"/>
                 <a:cs typeface="Arial"/>
               </a:rPr>
-              <a:t>11</a:t>
+              <a:t>13</a:t>
             </a:r>
           </a:p>
         </p:txBody>
@@ -5767,7 +7304,7 @@
                           <a:ea typeface="Arial"/>
                           <a:cs typeface="Arial"/>
                         </a:rPr>
-                        <a:t>0.192</a:t>
+                        <a:t>0.190</a:t>
                       </a:r>
                     </a:p>
                   </a:txBody>
@@ -5841,7 +7378,7 @@
                           <a:ea typeface="Arial"/>
                           <a:cs typeface="Arial"/>
                         </a:rPr>
-                        <a:t>34%</a:t>
+                        <a:t>35%</a:t>
                       </a:r>
                     </a:p>
                   </a:txBody>
@@ -5923,7 +7460,7 @@
                           <a:ea typeface="Arial"/>
                           <a:cs typeface="Arial"/>
                         </a:rPr>
-                        <a:t>0.117</a:t>
+                        <a:t>0.111</a:t>
                       </a:r>
                     </a:p>
                   </a:txBody>
@@ -5997,7 +7534,7 @@
                           <a:ea typeface="Arial"/>
                           <a:cs typeface="Arial"/>
                         </a:rPr>
-                        <a:t>23%</a:t>
+                        <a:t>30%</a:t>
                       </a:r>
                     </a:p>
                   </a:txBody>
@@ -6079,7 +7616,7 @@
                           <a:ea typeface="Arial"/>
                           <a:cs typeface="Arial"/>
                         </a:rPr>
-                        <a:t>0.164</a:t>
+                        <a:t>0.157</a:t>
                       </a:r>
                     </a:p>
                   </a:txBody>
@@ -6153,7 +7690,7 @@
                           <a:ea typeface="Arial"/>
                           <a:cs typeface="Arial"/>
                         </a:rPr>
-                        <a:t>26%</a:t>
+                        <a:t>25%</a:t>
                       </a:r>
                     </a:p>
                   </a:txBody>
@@ -6235,7 +7772,7 @@
                           <a:ea typeface="Arial"/>
                           <a:cs typeface="Arial"/>
                         </a:rPr>
-                        <a:t>0.120</a:t>
+                        <a:t>0.108</a:t>
                       </a:r>
                     </a:p>
                   </a:txBody>
@@ -6272,7 +7809,7 @@
                           <a:ea typeface="Arial"/>
                           <a:cs typeface="Arial"/>
                         </a:rPr>
-                        <a:t>0.73</a:t>
+                        <a:t>0.63</a:t>
                       </a:r>
                     </a:p>
                   </a:txBody>
@@ -6309,7 +7846,7 @@
                           <a:ea typeface="Arial"/>
                           <a:cs typeface="Arial"/>
                         </a:rPr>
-                        <a:t>26%</a:t>
+                        <a:t>24%</a:t>
                       </a:r>
                     </a:p>
                   </a:txBody>
@@ -6391,7 +7928,7 @@
                           <a:ea typeface="Arial"/>
                           <a:cs typeface="Arial"/>
                         </a:rPr>
-                        <a:t>0.152</a:t>
+                        <a:t>0.188</a:t>
                       </a:r>
                     </a:p>
                   </a:txBody>
@@ -6428,7 +7965,7 @@
                           <a:ea typeface="Arial"/>
                           <a:cs typeface="Arial"/>
                         </a:rPr>
-                        <a:t>0.94</a:t>
+                        <a:t>0.90</a:t>
                       </a:r>
                     </a:p>
                   </a:txBody>
@@ -6465,7 +8002,7 @@
                           <a:ea typeface="Arial"/>
                           <a:cs typeface="Arial"/>
                         </a:rPr>
-                        <a:t>50%</a:t>
+                        <a:t>55%</a:t>
                       </a:r>
                     </a:p>
                   </a:txBody>
@@ -6547,7 +8084,7 @@
                           <a:ea typeface="Arial"/>
                           <a:cs typeface="Arial"/>
                         </a:rPr>
-                        <a:t>0.076</a:t>
+                        <a:t>0.103</a:t>
                       </a:r>
                     </a:p>
                   </a:txBody>
@@ -6584,7 +8121,7 @@
                           <a:ea typeface="Arial"/>
                           <a:cs typeface="Arial"/>
                         </a:rPr>
-                        <a:t>0.76</a:t>
+                        <a:t>0.80</a:t>
                       </a:r>
                     </a:p>
                   </a:txBody>
@@ -6621,7 +8158,7 @@
                           <a:ea typeface="Arial"/>
                           <a:cs typeface="Arial"/>
                         </a:rPr>
-                        <a:t>29%</a:t>
+                        <a:t>28%</a:t>
                       </a:r>
                     </a:p>
                   </a:txBody>
@@ -6721,7 +8258,7 @@
                 <ns0:ea typeface="Arial"/>
                 <ns0:cs typeface="Arial"/>
               </ns0:rPr>
-              <ns0:t>the same document-term matrices and K for both models; each fitted on 80% of a domain's complaints (133,884 reviews) and scored on the unseen 20% (33,473). K itself chosen by NPMI over K = 3–10. Topics vs the 9 keyword tags: 71,929 complaints (43%) match no tag but get a topic.</ns0:t>
+              <ns0:t>the same document-term matrices and K for both models; each fitted on 80% of a domain's complaints (133,841 reviews) and scored on the unseen 20% (33,462). K itself chosen by NPMI over K = 3–10. Topics vs the 9 keyword tags: 71,775 complaints (43%) match no tag but get a topic.</ns0:t>
             </ns0:r>
           </ns0:p>
         </p:txBody>
@@ -6799,7 +8336,7 @@
                 <ns1:ea typeface="Arial"/>
                 <ns1:cs typeface="Arial"/>
               </ns1:rPr>
-              <ns1:t>NMF gives more coherent and more distinct topics in every domain, so it is selected; LDA spreads reviews more evenly but mixes themes. Business meaning: refunds, returns and failed transfers are the largest fixes; loss and broken trust drive the angriest reviews. Limitation: topic names are our reading of the top terms; VADER underrates calm technical complaints.</ns1:t>
+              <ns1:t>NMF gives more coherent and more distinct topics in every domain, so it is selected; LDA spreads reviews more evenly but mixes themes. Business meaning: refunds, returns and payment problems are the largest fixes; unanswered support drives the angriest specific complaints. Limitation: topic names are our reading of the top terms (3 topics are general “bad / worst” dissatisfaction); K was tuned for NMF; VADER underrates calm technical complaints.</ns1:t>
             </ns1:r>
           </ns1:p>
         </p:txBody>
@@ -6814,7 +8351,407 @@
 </p:sld>
 </file>
 
-<file path=ppt/slides/slide12.xml><?xml version="1.0" encoding="utf-8"?>
+<file path=ppt/slides/slide14.xml><?xml version="1.0" encoding="utf-8"?>
+<p:sld xmlns:a="http://schemas.openxmlformats.org/drawingml/2006/main" xmlns:p="http://schemas.openxmlformats.org/presentationml/2006/main" xmlns:r="http://schemas.openxmlformats.org/officeDocument/2006/relationships">
+  <p:cSld>
+    <p:spTree>
+      <p:nvGrpSpPr>
+        <p:cNvPr id="1" name=""/>
+        <p:cNvGrpSpPr/>
+        <p:nvPr/>
+      </p:nvGrpSpPr>
+      <p:grpSpPr/>
+      <p:sp>
+        <p:nvSpPr>
+          <p:cNvPr id="7" name="">
+            <a:extLst>
+              <a:ext uri="{FF2B5EF4-FFF2-40B4-BE49-F238E27FC236}">
+                <a16:creationId xmlns:a16="http://schemas.microsoft.com/office/drawing/2014/main" id="{B4CE5281-5814-4291-B8DE-FB11715A86D4}"/>
+              </a:ext>
+            </a:extLst>
+          </p:cNvPr>
+          <p:cNvSpPr>
+            <a:spLocks noGrp="1"/>
+          </p:cNvSpPr>
+          <p:nvPr/>
+        </p:nvSpPr>
+        <p:spPr>
+          <a:xfrm>
+            <a:off x="609600" y="342900"/>
+            <a:ext cx="10477500" cy="285750"/>
+          </a:xfrm>
+          <a:prstGeom prst="rect">
+            <a:avLst/>
+          </a:prstGeom>
+          <a:noFill/>
+          <a:ln w="0">
+            <a:noFill/>
+            <a:prstDash val="solid"/>
+          </a:ln>
+        </p:spPr>
+        <p:txBody>
+          <a:bodyPr/>
+          <a:lstStyle>
+            <a:defPPr>
+              <a:defRPr sz="1350" b="1">
+                <a:solidFill>
+                  <a:srgbClr val="157A80"/>
+                </a:solidFill>
+                <a:latin typeface="Arial"/>
+                <a:ea typeface="Arial"/>
+                <a:cs typeface="Arial"/>
+              </a:defRPr>
+            </a:defPPr>
+          </a:lstStyle>
+          <a:p>
+            <a:pPr>
+              <a:defRPr sz="1350" b="1">
+                <a:solidFill>
+                  <a:srgbClr val="157A80"/>
+                </a:solidFill>
+                <a:latin typeface="Arial"/>
+                <a:ea typeface="Arial"/>
+                <a:cs typeface="Arial"/>
+              </a:defRPr>
+            </a:pPr>
+            <a:r>
+              <a:rPr sz="1350" b="1">
+                <a:solidFill>
+                  <a:srgbClr val="157A80"/>
+                </a:solidFill>
+                <a:latin typeface="Arial"/>
+                <a:ea typeface="Arial"/>
+                <a:cs typeface="Arial"/>
+              </a:rPr>
+              <a:t>UNIT 3</a:t>
+            </a:r>
+          </a:p>
+        </p:txBody>
+      </p:sp>
+      <p:sp>
+        <p:nvSpPr>
+          <p:cNvPr id="2" name="">
+            <a:extLst>
+              <a:ext uri="{FF2B5EF4-FFF2-40B4-BE49-F238E27FC236}">
+                <a16:creationId xmlns:a16="http://schemas.microsoft.com/office/drawing/2014/main" id="{F2D70B92-C245-446F-A6B2-954E4F469C2A}"/>
+              </a:ext>
+            </a:extLst>
+          </p:cNvPr>
+          <p:cNvSpPr>
+            <a:spLocks noGrp="1"/>
+          </p:cNvSpPr>
+          <p:nvPr/>
+        </p:nvSpPr>
+        <p:spPr>
+          <a:xfrm>
+            <a:off x="609600" y="838200"/>
+            <a:ext cx="10972800" cy="857250"/>
+          </a:xfrm>
+          <a:prstGeom prst="rect">
+            <a:avLst/>
+          </a:prstGeom>
+          <a:noFill/>
+          <a:ln w="0">
+            <a:noFill/>
+            <a:prstDash val="solid"/>
+          </a:ln>
+        </p:spPr>
+        <p:txBody>
+          <a:bodyPr/>
+          <a:lstStyle>
+            <a:defPPr>
+              <a:defRPr sz="3150" b="1">
+                <a:solidFill>
+                  <a:srgbClr val="142D4E"/>
+                </a:solidFill>
+                <a:latin typeface="Arial"/>
+                <a:ea typeface="Arial"/>
+                <a:cs typeface="Arial"/>
+              </a:defRPr>
+            </a:defPPr>
+          </a:lstStyle>
+          <a:p>
+            <a:pPr>
+              <a:defRPr sz="3150" b="1">
+                <a:solidFill>
+                  <a:srgbClr val="142D4E"/>
+                </a:solidFill>
+                <a:latin typeface="Arial"/>
+                <a:ea typeface="Arial"/>
+                <a:cs typeface="Arial"/>
+              </a:defRPr>
+            </a:pPr>
+            <a:r>
+              <a:rPr sz="3150" b="1">
+                <a:solidFill>
+                  <a:srgbClr val="142D4E"/>
+                </a:solidFill>
+                <a:latin typeface="Arial"/>
+                <a:ea typeface="Arial"/>
+                <a:cs typeface="Arial"/>
+              </a:rPr>
+              <a:t>Method 1 interpretation: what the keyword rules missed</a:t>
+            </a:r>
+          </a:p>
+        </p:txBody>
+      </p:sp>
+      <p:sp>
+        <p:nvSpPr>
+          <p:cNvPr id="3" name="">
+            <a:extLst>
+              <a:ext uri="{FF2B5EF4-FFF2-40B4-BE49-F238E27FC236}">
+                <a16:creationId xmlns:a16="http://schemas.microsoft.com/office/drawing/2014/main" id="{8A76EF40-5FAD-4E83-9187-5FE9CC845698}"/>
+              </a:ext>
+            </a:extLst>
+          </p:cNvPr>
+          <p:cNvSpPr>
+            <a:spLocks noGrp="1"/>
+          </p:cNvSpPr>
+          <p:nvPr/>
+        </p:nvSpPr>
+        <p:spPr>
+          <a:xfrm>
+            <a:off x="10953750" y="6343650"/>
+            <a:ext cx="619125" cy="238125"/>
+          </a:xfrm>
+          <a:prstGeom prst="rect">
+            <a:avLst/>
+          </a:prstGeom>
+          <a:noFill/>
+          <a:ln w="0">
+            <a:noFill/>
+            <a:prstDash val="solid"/>
+          </a:ln>
+        </p:spPr>
+        <p:txBody>
+          <a:bodyPr/>
+          <a:lstStyle>
+            <a:defPPr>
+              <a:defRPr sz="1200" b="0">
+                <a:solidFill>
+                  <a:srgbClr val="66758A"/>
+                </a:solidFill>
+                <a:latin typeface="Arial"/>
+                <a:ea typeface="Arial"/>
+                <a:cs typeface="Arial"/>
+              </a:defRPr>
+            </a:defPPr>
+          </a:lstStyle>
+          <a:p>
+            <a:pPr>
+              <a:defRPr sz="1200" b="0">
+                <a:solidFill>
+                  <a:srgbClr val="66758A"/>
+                </a:solidFill>
+                <a:latin typeface="Arial"/>
+                <a:ea typeface="Arial"/>
+                <a:cs typeface="Arial"/>
+              </a:defRPr>
+            </a:pPr>
+            <a:r>
+              <a:rPr sz="1200" b="0">
+                <a:solidFill>
+                  <a:srgbClr val="66758A"/>
+                </a:solidFill>
+                <a:latin typeface="Arial"/>
+                <a:ea typeface="Arial"/>
+                <a:cs typeface="Arial"/>
+              </a:rPr>
+              <a:t>14</a:t>
+            </a:r>
+          </a:p>
+        </p:txBody>
+      </p:sp>
+      <p:sp>
+        <p:nvSpPr>
+          <p:cNvPr id="5" name="">
+            <a:extLst>
+              <a:ext uri="{FF2B5EF4-FFF2-40B4-BE49-F238E27FC236}">
+                <a16:creationId xmlns:a16="http://schemas.microsoft.com/office/drawing/2014/main" id="{B775F0BD-DAEF-4688-97F4-0C8CC4593B56}"/>
+              </a:ext>
+            </a:extLst>
+          </p:cNvPr>
+          <p:cNvSpPr>
+            <a:spLocks noGrp="1"/>
+          </p:cNvSpPr>
+          <p:nvPr/>
+        </p:nvSpPr>
+        <p:spPr>
+          <a:xfrm>
+            <a:off x="685800" y="4983480"/>
+            <a:ext cx="10668000" cy="760476"/>
+          </a:xfrm>
+          <a:prstGeom prst="rect">
+            <a:avLst/>
+          </a:prstGeom>
+          <a:noFill/>
+          <a:ln w="0">
+            <a:noFill/>
+            <a:prstDash val="solid"/>
+          </a:ln>
+        </p:spPr>
+        <p:txBody>
+          <a:bodyPr wrap="square" lIns="0" rIns="0"/>
+          <a:lstStyle>
+            <a:defPPr>
+              <a:defRPr sz="2025" b="0">
+                <a:solidFill>
+                  <a:srgbClr val="233247"/>
+                </a:solidFill>
+                <a:latin typeface="Arial"/>
+                <a:ea typeface="Arial"/>
+                <a:cs typeface="Arial"/>
+              </a:defRPr>
+            </a:defPPr>
+          </a:lstStyle>
+          <a:p>
+            <a:pPr>
+              <a:defRPr sz="2025" b="0">
+                <a:solidFill>
+                  <a:srgbClr val="233247"/>
+                </a:solidFill>
+                <a:latin typeface="Arial"/>
+                <a:ea typeface="Arial"/>
+                <a:cs typeface="Arial"/>
+              </a:defRPr>
+            </a:pPr>
+            <a:r>
+              <a:rPr sz="1400" b="1">
+                <a:solidFill>
+                  <a:srgbClr val="233247"/>
+                </a:solidFill>
+                <a:latin typeface="Arial"/>
+                <a:ea typeface="Arial"/>
+                <a:cs typeface="Arial"/>
+              </a:rPr>
+              <a:t>Key findings: </a:t>
+            </a:r>
+            <a:r>
+              <a:rPr sz="1400" b="0">
+                <a:solidFill>
+                  <a:srgbClr val="233247"/>
+                </a:solidFill>
+                <a:latin typeface="Arial"/>
+                <a:ea typeface="Arial"/>
+                <a:cs typeface="Arial"/>
+              </a:rPr>
+              <a:t>71,775 complaints (43%) match no keyword tag but get a topic from the text-mining models. The largest hidden groups are order cancellation &amp; refund (13,060) and returns, refunds &amp; product quality (8,242); 80% of cash-on-delivery and 77% of cashback complaints carry no tag at all.</a:t>
+            </a:r>
+          </a:p>
+        </p:txBody>
+      </p:sp>
+      <p:sp>
+        <p:nvSpPr>
+          <p:cNvPr id="6" name="">
+            <a:extLst>
+              <a:ext uri="{FF2B5EF4-FFF2-40B4-BE49-F238E27FC236}">
+                <a16:creationId xmlns:a16="http://schemas.microsoft.com/office/drawing/2014/main" id="{CD68E0AF-687D-43C3-AA48-711AD2792F7A}"/>
+              </a:ext>
+            </a:extLst>
+          </p:cNvPr>
+          <p:cNvSpPr>
+            <a:spLocks noGrp="1"/>
+          </p:cNvSpPr>
+          <p:nvPr/>
+        </p:nvSpPr>
+        <p:spPr>
+          <a:xfrm>
+            <a:off x="685800" y="5817108"/>
+            <a:ext cx="10668000" cy="543559"/>
+          </a:xfrm>
+          <a:prstGeom prst="rect">
+            <a:avLst/>
+          </a:prstGeom>
+          <a:noFill/>
+          <a:ln w="0">
+            <a:noFill/>
+            <a:prstDash val="solid"/>
+          </a:ln>
+        </p:spPr>
+        <p:txBody>
+          <a:bodyPr wrap="square" lIns="0" rIns="0"/>
+          <a:lstStyle>
+            <a:defPPr>
+              <a:defRPr sz="2025" b="0">
+                <a:solidFill>
+                  <a:srgbClr val="233247"/>
+                </a:solidFill>
+                <a:latin typeface="Arial"/>
+                <a:ea typeface="Arial"/>
+                <a:cs typeface="Arial"/>
+              </a:defRPr>
+            </a:defPPr>
+          </a:lstStyle>
+          <a:p>
+            <a:pPr>
+              <a:defRPr sz="2025" b="0">
+                <a:solidFill>
+                  <a:srgbClr val="233247"/>
+                </a:solidFill>
+                <a:latin typeface="Arial"/>
+                <a:ea typeface="Arial"/>
+                <a:cs typeface="Arial"/>
+              </a:defRPr>
+            </a:pPr>
+            <a:r>
+              <a:rPr sz="1400" b="1">
+                <a:solidFill>
+                  <a:srgbClr val="233247"/>
+                </a:solidFill>
+                <a:latin typeface="Arial"/>
+                <a:ea typeface="Arial"/>
+                <a:cs typeface="Arial"/>
+              </a:rPr>
+              <a:t>Business value: </a:t>
+            </a:r>
+            <a:r>
+              <a:rPr sz="1400" b="0">
+                <a:solidFill>
+                  <a:srgbClr val="233247"/>
+                </a:solidFill>
+                <a:latin typeface="Arial"/>
+                <a:ea typeface="Arial"/>
+                <a:cs typeface="Arial"/>
+              </a:rPr>
+              <a:t>these complaints were invisible to keyword monitoring; with topics, every complaint can be counted and routed to the team that owns it.</a:t>
+            </a:r>
+          </a:p>
+        </p:txBody>
+      </p:sp>
+      <p:pic>
+        <p:nvPicPr>
+          <p:cNvPr id="8" name="Picture 7" descr="tm_08_untagged_topics_breakdown.png"/>
+          <p:cNvPicPr>
+            <a:picLocks noChangeAspect="1"/>
+          </p:cNvPicPr>
+          <p:nvPr/>
+        </p:nvPicPr>
+        <p:blipFill>
+          <a:blip r:embed="rId5"/>
+          <a:srcRect t="7333"/>
+          <a:stretch>
+            <a:fillRect/>
+          </a:stretch>
+        </p:blipFill>
+        <p:spPr>
+          <a:xfrm>
+            <a:off x="2177327" y="1700000"/>
+            <a:ext cx="7832773" cy="3202222"/>
+          </a:xfrm>
+          <a:prstGeom prst="rect">
+            <a:avLst/>
+          </a:prstGeom>
+        </p:spPr>
+      </p:pic>
+    </p:spTree>
+  </p:cSld>
+  <p:clrMapOvr>
+    <a:masterClrMapping/>
+  </p:clrMapOvr>
+</p:sld>
+</file>
+
+<file path=ppt/slides/slide15.xml><?xml version="1.0" encoding="utf-8"?>
 <p:sld xmlns:p="http://schemas.openxmlformats.org/presentationml/2006/main">
   <p:cSld>
     <p:bg>
@@ -7029,7 +8966,7 @@
                 <a:ea typeface="Arial"/>
                 <a:cs typeface="Arial"/>
               </a:rPr>
-              <a:t>12</a:t>
+              <a:t>15</a:t>
             </a:r>
           </a:p>
         </p:txBody>
@@ -7185,7 +9122,7 @@
                 <ns1:ea typeface="Arial"/>
                 <ns1:cs typeface="Arial"/>
               </ns1:rPr>
-              <ns1:t>daily 1–2★ counts per app, 11 series × 173 days (1 Apr – 20 Sep). Counts, not shares, because of the feed gap, which enters the model as a 0/1 input; Zomato's missing 24 Jul filled. ADF test: differencing only for Zomato and Blinkit. 224 release events from app_version.</ns1:t>
+              <ns1:t>daily 1–2★ counts per app, 11 series × 173 days (1 Apr – 20 Sep). Counts, not shares, because of the feed gap, which enters the model as a 0/1 input; Zomato's missing 24 Jul filled. ADF test on the training days decides differencing (final model: Zomato and Blinkit). 224 release events from app_version.</ns1:t>
             </ns1:r>
           </ns1:p>
         </p:txBody>
@@ -7263,7 +9200,7 @@
                 <ns2:ea typeface="Arial"/>
                 <ns2:cs typeface="Arial"/>
               </ns2:rPr>
-              <ns2:t>statsmodels SARIMAX: weekly seasonal terms (lag 7) for the 4 food apps (Sundays +22–38%), orders from ACF/PACF and lowest AICc (378 fits). Time split: rolling origin, train on the first 84 days, forecast 28, move one week (9 origins). Baselines: seasonal naive and Holt-Winters. Releases: new- vs older-version 1–2★ share over the same 7 days, Benjamini–Hochberg corrected.</ns2:t>
+              <ns2:t>statsmodels SARIMAX: weekly seasonal terms (lag 7) for the 4 food apps (Sundays +22–38%), differencing, weekly check and orders from the training days only: ACF/PACF + lowest AICc (384 fits). Time split: rolling origin, train on the first 84 days, forecast 28, move one week (9 origins). Baselines: seasonal naive and Holt-Winters. Releases: new- vs older-version 1–2★ share over the same 7 days, Benjamini–Hochberg corrected.</ns2:t>
             </ns2:r>
           </ns2:p>
         </p:txBody>
@@ -7341,7 +9278,7 @@
                 <ns3:ea typeface="Arial"/>
                 <ns3:cs typeface="Arial"/>
               </ns3:rPr>
-              <ns3:t>4-week forecast with 80% and 95% intervals, e.g. 21–27 Sep: Flipkart 1,830 (1,596–2,056), Swiggy 1,037 (889–1,180); 83 unusual days flagged; 4 of 205 releases worse, Paytm 10.84.5 confirmed (34 → 66 1–2★ per day).</ns3:t>
+              <ns3:t>4-week forecast with 80% and 95% intervals, e.g. 21–27 Sep: Flipkart 1,830 (1,596–2,056), Swiggy 1,037 (889–1,180); 77 unusual days flagged; 4 of 205 releases worse, Paytm 10.84.5 confirmed (34 → 66 1–2★ per day).</ns3:t>
             </ns3:r>
           </ns3:p>
         </p:txBody>
@@ -7356,7 +9293,430 @@
 </p:sld>
 </file>
 
-<file path=ppt/slides/slide13.xml><?xml version="1.0" encoding="utf-8"?>
+<file path=ppt/slides/slide16.xml><?xml version="1.0" encoding="utf-8"?>
+<p:sld xmlns:a="http://schemas.openxmlformats.org/drawingml/2006/main" xmlns:p="http://schemas.openxmlformats.org/presentationml/2006/main" xmlns:r="http://schemas.openxmlformats.org/officeDocument/2006/relationships">
+  <p:cSld>
+    <p:spTree>
+      <p:nvGrpSpPr>
+        <p:cNvPr id="1" name=""/>
+        <p:cNvGrpSpPr/>
+        <p:nvPr/>
+      </p:nvGrpSpPr>
+      <p:grpSpPr/>
+      <p:sp>
+        <p:nvSpPr>
+          <p:cNvPr id="7" name="">
+            <a:extLst>
+              <a:ext uri="{FF2B5EF4-FFF2-40B4-BE49-F238E27FC236}">
+                <a16:creationId xmlns:a16="http://schemas.microsoft.com/office/drawing/2014/main" id="{B4CE5281-5814-4291-B8DE-FB11715A86D4}"/>
+              </a:ext>
+            </a:extLst>
+          </p:cNvPr>
+          <p:cNvSpPr>
+            <a:spLocks noGrp="1"/>
+          </p:cNvSpPr>
+          <p:nvPr/>
+        </p:nvSpPr>
+        <p:spPr>
+          <a:xfrm>
+            <a:off x="609600" y="342900"/>
+            <a:ext cx="10477500" cy="285750"/>
+          </a:xfrm>
+          <a:prstGeom prst="rect">
+            <a:avLst/>
+          </a:prstGeom>
+          <a:noFill/>
+          <a:ln w="0">
+            <a:noFill/>
+            <a:prstDash val="solid"/>
+          </a:ln>
+        </p:spPr>
+        <p:txBody>
+          <a:bodyPr/>
+          <a:lstStyle>
+            <a:defPPr>
+              <a:defRPr sz="1350" b="1">
+                <a:solidFill>
+                  <a:srgbClr val="157A80"/>
+                </a:solidFill>
+                <a:latin typeface="Arial"/>
+                <a:ea typeface="Arial"/>
+                <a:cs typeface="Arial"/>
+              </a:defRPr>
+            </a:defPPr>
+          </a:lstStyle>
+          <a:p>
+            <a:pPr>
+              <a:defRPr sz="1350" b="1">
+                <a:solidFill>
+                  <a:srgbClr val="157A80"/>
+                </a:solidFill>
+                <a:latin typeface="Arial"/>
+                <a:ea typeface="Arial"/>
+                <a:cs typeface="Arial"/>
+              </a:defRPr>
+            </a:pPr>
+            <a:r>
+              <a:rPr sz="1350" b="1">
+                <a:solidFill>
+                  <a:srgbClr val="157A80"/>
+                </a:solidFill>
+                <a:latin typeface="Arial"/>
+                <a:ea typeface="Arial"/>
+                <a:cs typeface="Arial"/>
+              </a:rPr>
+              <a:t>UNIT 3</a:t>
+            </a:r>
+          </a:p>
+        </p:txBody>
+      </p:sp>
+      <p:sp>
+        <p:nvSpPr>
+          <p:cNvPr id="2" name="">
+            <a:extLst>
+              <a:ext uri="{FF2B5EF4-FFF2-40B4-BE49-F238E27FC236}">
+                <a16:creationId xmlns:a16="http://schemas.microsoft.com/office/drawing/2014/main" id="{F2D70B92-C245-446F-A6B2-954E4F469C2A}"/>
+              </a:ext>
+            </a:extLst>
+          </p:cNvPr>
+          <p:cNvSpPr>
+            <a:spLocks noGrp="1"/>
+          </p:cNvSpPr>
+          <p:nvPr/>
+        </p:nvSpPr>
+        <p:spPr>
+          <a:xfrm>
+            <a:off x="609600" y="838200"/>
+            <a:ext cx="10972800" cy="857250"/>
+          </a:xfrm>
+          <a:prstGeom prst="rect">
+            <a:avLst/>
+          </a:prstGeom>
+          <a:noFill/>
+          <a:ln w="0">
+            <a:noFill/>
+            <a:prstDash val="solid"/>
+          </a:ln>
+        </p:spPr>
+        <p:txBody>
+          <a:bodyPr/>
+          <a:lstStyle>
+            <a:defPPr>
+              <a:defRPr sz="3150" b="1">
+                <a:solidFill>
+                  <a:srgbClr val="142D4E"/>
+                </a:solidFill>
+                <a:latin typeface="Arial"/>
+                <a:ea typeface="Arial"/>
+                <a:cs typeface="Arial"/>
+              </a:defRPr>
+            </a:defPPr>
+          </a:lstStyle>
+          <a:p>
+            <a:pPr>
+              <a:defRPr sz="3150" b="1">
+                <a:solidFill>
+                  <a:srgbClr val="142D4E"/>
+                </a:solidFill>
+                <a:latin typeface="Arial"/>
+                <a:ea typeface="Arial"/>
+                <a:cs typeface="Arial"/>
+              </a:defRPr>
+            </a:pPr>
+            <a:r>
+              <a:rPr sz="3150" b="1">
+                <a:solidFill>
+                  <a:srgbClr val="142D4E"/>
+                </a:solidFill>
+                <a:latin typeface="Arial"/>
+                <a:ea typeface="Arial"/>
+                <a:cs typeface="Arial"/>
+              </a:rPr>
+              <a:t>Method 2 results: weekly pattern and forecast</a:t>
+            </a:r>
+          </a:p>
+        </p:txBody>
+      </p:sp>
+      <p:sp>
+        <p:nvSpPr>
+          <p:cNvPr id="3" name="">
+            <a:extLst>
+              <a:ext uri="{FF2B5EF4-FFF2-40B4-BE49-F238E27FC236}">
+                <a16:creationId xmlns:a16="http://schemas.microsoft.com/office/drawing/2014/main" id="{8A76EF40-5FAD-4E83-9187-5FE9CC845698}"/>
+              </a:ext>
+            </a:extLst>
+          </p:cNvPr>
+          <p:cNvSpPr>
+            <a:spLocks noGrp="1"/>
+          </p:cNvSpPr>
+          <p:nvPr/>
+        </p:nvSpPr>
+        <p:spPr>
+          <a:xfrm>
+            <a:off x="10953750" y="6343650"/>
+            <a:ext cx="619125" cy="238125"/>
+          </a:xfrm>
+          <a:prstGeom prst="rect">
+            <a:avLst/>
+          </a:prstGeom>
+          <a:noFill/>
+          <a:ln w="0">
+            <a:noFill/>
+            <a:prstDash val="solid"/>
+          </a:ln>
+        </p:spPr>
+        <p:txBody>
+          <a:bodyPr/>
+          <a:lstStyle>
+            <a:defPPr>
+              <a:defRPr sz="1200" b="0">
+                <a:solidFill>
+                  <a:srgbClr val="66758A"/>
+                </a:solidFill>
+                <a:latin typeface="Arial"/>
+                <a:ea typeface="Arial"/>
+                <a:cs typeface="Arial"/>
+              </a:defRPr>
+            </a:defPPr>
+          </a:lstStyle>
+          <a:p>
+            <a:pPr>
+              <a:defRPr sz="1200" b="0">
+                <a:solidFill>
+                  <a:srgbClr val="66758A"/>
+                </a:solidFill>
+                <a:latin typeface="Arial"/>
+                <a:ea typeface="Arial"/>
+                <a:cs typeface="Arial"/>
+              </a:defRPr>
+            </a:pPr>
+            <a:r>
+              <a:rPr sz="1200" b="0">
+                <a:solidFill>
+                  <a:srgbClr val="66758A"/>
+                </a:solidFill>
+                <a:latin typeface="Arial"/>
+                <a:ea typeface="Arial"/>
+                <a:cs typeface="Arial"/>
+              </a:rPr>
+              <a:t>16</a:t>
+            </a:r>
+          </a:p>
+        </p:txBody>
+      </p:sp>
+      <p:sp>
+        <p:nvSpPr>
+          <p:cNvPr id="5" name="">
+            <a:extLst>
+              <a:ext uri="{FF2B5EF4-FFF2-40B4-BE49-F238E27FC236}">
+                <a16:creationId xmlns:a16="http://schemas.microsoft.com/office/drawing/2014/main" id="{B775F0BD-DAEF-4688-97F4-0C8CC4593B56}"/>
+              </a:ext>
+            </a:extLst>
+          </p:cNvPr>
+          <p:cNvSpPr>
+            <a:spLocks noGrp="1"/>
+          </p:cNvSpPr>
+          <p:nvPr/>
+        </p:nvSpPr>
+        <p:spPr>
+          <a:xfrm>
+            <a:off x="685800" y="4983480"/>
+            <a:ext cx="10668000" cy="760476"/>
+          </a:xfrm>
+          <a:prstGeom prst="rect">
+            <a:avLst/>
+          </a:prstGeom>
+          <a:noFill/>
+          <a:ln w="0">
+            <a:noFill/>
+            <a:prstDash val="solid"/>
+          </a:ln>
+        </p:spPr>
+        <p:txBody>
+          <a:bodyPr wrap="square" lIns="0" rIns="0"/>
+          <a:lstStyle>
+            <a:defPPr>
+              <a:defRPr sz="2025" b="0">
+                <a:solidFill>
+                  <a:srgbClr val="233247"/>
+                </a:solidFill>
+                <a:latin typeface="Arial"/>
+                <a:ea typeface="Arial"/>
+                <a:cs typeface="Arial"/>
+              </a:defRPr>
+            </a:defPPr>
+          </a:lstStyle>
+          <a:p>
+            <a:pPr>
+              <a:defRPr sz="2025" b="0">
+                <a:solidFill>
+                  <a:srgbClr val="233247"/>
+                </a:solidFill>
+                <a:latin typeface="Arial"/>
+                <a:ea typeface="Arial"/>
+                <a:cs typeface="Arial"/>
+              </a:defRPr>
+            </a:pPr>
+            <a:r>
+              <a:rPr sz="1400" b="1">
+                <a:solidFill>
+                  <a:srgbClr val="233247"/>
+                </a:solidFill>
+                <a:latin typeface="Arial"/>
+                <a:ea typeface="Arial"/>
+                <a:cs typeface="Arial"/>
+              </a:rPr>
+              <a:t>Key findings: </a:t>
+            </a:r>
+            <a:r>
+              <a:rPr sz="1400" b="0">
+                <a:solidFill>
+                  <a:srgbClr val="233247"/>
+                </a:solidFill>
+                <a:latin typeface="Arial"/>
+                <a:ea typeface="Arial"/>
+                <a:cs typeface="Arial"/>
+              </a:rPr>
+              <a:t>food apps get 22–38% more complaints on Sundays; shopping and payment apps have no strong weekday pattern, so only the four food apps get weekly seasonal terms. The forecast keeps that Sunday peak: Swiggy expects about 1,037 1–2★ reviews in 21–27 Sep (80% interval 889–1,180).</a:t>
+            </a:r>
+          </a:p>
+        </p:txBody>
+      </p:sp>
+      <p:sp>
+        <p:nvSpPr>
+          <p:cNvPr id="6" name="">
+            <a:extLst>
+              <a:ext uri="{FF2B5EF4-FFF2-40B4-BE49-F238E27FC236}">
+                <a16:creationId xmlns:a16="http://schemas.microsoft.com/office/drawing/2014/main" id="{CD68E0AF-687D-43C3-AA48-711AD2792F7A}"/>
+              </a:ext>
+            </a:extLst>
+          </p:cNvPr>
+          <p:cNvSpPr>
+            <a:spLocks noGrp="1"/>
+          </p:cNvSpPr>
+          <p:nvPr/>
+        </p:nvSpPr>
+        <p:spPr>
+          <a:xfrm>
+            <a:off x="685800" y="5817108"/>
+            <a:ext cx="10668000" cy="543559"/>
+          </a:xfrm>
+          <a:prstGeom prst="rect">
+            <a:avLst/>
+          </a:prstGeom>
+          <a:noFill/>
+          <a:ln w="0">
+            <a:noFill/>
+            <a:prstDash val="solid"/>
+          </a:ln>
+        </p:spPr>
+        <p:txBody>
+          <a:bodyPr wrap="square" lIns="0" rIns="0"/>
+          <a:lstStyle>
+            <a:defPPr>
+              <a:defRPr sz="2025" b="0">
+                <a:solidFill>
+                  <a:srgbClr val="233247"/>
+                </a:solidFill>
+                <a:latin typeface="Arial"/>
+                <a:ea typeface="Arial"/>
+                <a:cs typeface="Arial"/>
+              </a:defRPr>
+            </a:defPPr>
+          </a:lstStyle>
+          <a:p>
+            <a:pPr>
+              <a:defRPr sz="2025" b="0">
+                <a:solidFill>
+                  <a:srgbClr val="233247"/>
+                </a:solidFill>
+                <a:latin typeface="Arial"/>
+                <a:ea typeface="Arial"/>
+                <a:cs typeface="Arial"/>
+              </a:defRPr>
+            </a:pPr>
+            <a:r>
+              <a:rPr sz="1400" b="1">
+                <a:solidFill>
+                  <a:srgbClr val="233247"/>
+                </a:solidFill>
+                <a:latin typeface="Arial"/>
+                <a:ea typeface="Arial"/>
+                <a:cs typeface="Arial"/>
+              </a:rPr>
+              <a:t>Use: </a:t>
+            </a:r>
+            <a:r>
+              <a:rPr sz="1400" b="0">
+                <a:solidFill>
+                  <a:srgbClr val="233247"/>
+                </a:solidFill>
+                <a:latin typeface="Arial"/>
+                <a:ea typeface="Arial"/>
+                <a:cs typeface="Arial"/>
+              </a:rPr>
+              <a:t>weekly totals with intervals for support staffing; days outside the 95% interval become unusual-day alerts.</a:t>
+            </a:r>
+          </a:p>
+        </p:txBody>
+      </p:sp>
+      <p:pic>
+        <p:nvPicPr>
+          <p:cNvPr id="9" name="Picture 8" descr="ts_forecast_swiggy.png"/>
+          <p:cNvPicPr>
+            <a:picLocks noChangeAspect="1"/>
+          </p:cNvPicPr>
+          <p:nvPr/>
+        </p:nvPicPr>
+        <p:blipFill>
+          <a:blip r:embed="rId3"/>
+          <a:stretch>
+            <a:fillRect/>
+          </a:stretch>
+        </p:blipFill>
+        <p:spPr>
+          <a:xfrm>
+            <a:off x="6183713" y="1700000"/>
+            <a:ext cx="5383446" cy="3202222"/>
+          </a:xfrm>
+          <a:prstGeom prst="rect">
+            <a:avLst/>
+          </a:prstGeom>
+        </p:spPr>
+      </p:pic>
+      <p:pic>
+        <p:nvPicPr>
+          <p:cNvPr id="10" name="Picture 9" descr="ts_03_weekday_effect.png"/>
+          <p:cNvPicPr>
+            <a:picLocks noChangeAspect="1"/>
+          </p:cNvPicPr>
+          <p:nvPr/>
+        </p:nvPicPr>
+        <p:blipFill>
+          <a:blip r:embed="rId5"/>
+          <a:stretch>
+            <a:fillRect/>
+          </a:stretch>
+        </p:blipFill>
+        <p:spPr>
+          <a:xfrm>
+            <a:off x="935341" y="1700000"/>
+            <a:ext cx="4753298" cy="3202222"/>
+          </a:xfrm>
+          <a:prstGeom prst="rect">
+            <a:avLst/>
+          </a:prstGeom>
+        </p:spPr>
+      </p:pic>
+    </p:spTree>
+  </p:cSld>
+  <p:clrMapOvr>
+    <a:masterClrMapping/>
+  </p:clrMapOvr>
+</p:sld>
+</file>
+
+<file path=ppt/slides/slide17.xml><?xml version="1.0" encoding="utf-8"?>
 <p:sld xmlns:p="http://schemas.openxmlformats.org/presentationml/2006/main">
   <p:cSld>
     <p:bg>
@@ -7571,7 +9931,7 @@
                 <a:ea typeface="Arial"/>
                 <a:cs typeface="Arial"/>
               </a:rPr>
-              <a:t>13</a:t>
+              <a:t>17</a:t>
             </a:r>
           </a:p>
         </p:txBody>
@@ -7797,7 +10157,7 @@
                           <a:ea typeface="Arial"/>
                           <a:cs typeface="Arial"/>
                         </a:rPr>
-                        <a:t>Beats baseline</a:t>
+                        <a:t>Beats baseline (MAE ÷ baseline)</a:t>
                       </a:r>
                     </a:p>
                   </a:txBody>
@@ -7885,7 +10245,7 @@
                           <a:ea typeface="Arial"/>
                           <a:cs typeface="Arial"/>
                         </a:rPr>
-                        <a:t>17.95</a:t>
+                        <a:t>19.39</a:t>
                       </a:r>
                     </a:p>
                   </a:txBody>
@@ -7922,7 +10282,7 @@
                           <a:ea typeface="Arial"/>
                           <a:cs typeface="Arial"/>
                         </a:rPr>
-                        <a:t>24.95</a:t>
+                        <a:t>26.74</a:t>
                       </a:r>
                     </a:p>
                   </a:txBody>
@@ -7959,7 +10319,7 @@
                           <a:ea typeface="Arial"/>
                           <a:cs typeface="Arial"/>
                         </a:rPr>
-                        <a:t>0.88</a:t>
+                        <a:t>0.93</a:t>
                       </a:r>
                     </a:p>
                   </a:txBody>
@@ -7996,7 +10356,7 @@
                           <a:ea typeface="Arial"/>
                           <a:cs typeface="Arial"/>
                         </a:rPr>
-                        <a:t>10 of 11 apps</a:t>
+                        <a:t>10 of 11 apps (0.93)</a:t>
                       </a:r>
                     </a:p>
                   </a:txBody>
@@ -8189,7 +10549,7 @@
                           <a:ea typeface="Arial"/>
                           <a:cs typeface="Arial"/>
                         </a:rPr>
-                        <a:t>–</a:t>
+                        <a:t>10 of 11 apps (0.88)</a:t>
                       </a:r>
                     </a:p>
                   </a:txBody>
@@ -8382,7 +10742,7 @@
                           <a:ea typeface="Arial"/>
                           <a:cs typeface="Arial"/>
                         </a:rPr>
-                        <a:t>baseline</a:t>
+                        <a:t>baseline (1.00)</a:t>
                       </a:r>
                     </a:p>
                   </a:txBody>
@@ -8482,7 +10842,7 @@
                 <ns0:ea typeface="Arial"/>
                 <ns0:cs typeface="Arial"/>
               </ns0:rPr>
-              <ns0:t>future held-out days only: 9 rolling origins × 28 days = 252 forecasts per app and model (2,772 per model), orders chosen on training days; mean over the 11 apps (1–2★ reviews per day). 95% intervals contain 93% of days; Ljung–Box finds no residual autocorrelation for 11 of 11 apps.</ns0:t>
+              <ns0:t>future held-out days only: 9 rolling origins × 28 days = 252 forecasts per app and model (2,772 per model), orders chosen on training days; mean over the 11 apps (1–2★ reviews per day). 95% intervals contain 94% of days; Ljung–Box finds no residual autocorrelation for 11 of 11 apps.</ns0:t>
             </ns0:r>
           </ns0:p>
         </p:txBody>
@@ -8560,7 +10920,7 @@
                 <ns1:ea typeface="Arial"/>
                 <ns1:cs typeface="Arial"/>
               </ns1:rPr>
-              <ns1:t>ARIMA is the most accurate and the only model with intervals, so it drives capacity planning and daily alerts. Zomato, Blinkit and Domino's are the most predictable; Google Pay is the one app where the baseline wins, and Paytm's September jump makes its forecast unreliable. Limitation: 173 days, no yearly season; level shifts cannot be predicted.</ns1:t>
+              <ns1:t>ARIMA and Holt-Winters are equally accurate (ARIMA better for 6 apps, Holt-Winters for the 4 food apps); ARIMA is selected because only it gives prediction intervals (daily alerts, capacity planning) and takes the feed gap as an input. Google Pay: the baseline wins; Paytm's September jump makes its forecast unreliable. Limitation: 173 days, no yearly season; level shifts cannot be predicted; intervals too narrow for shopping apps.</ns1:t>
             </ns1:r>
           </ns1:p>
         </p:txBody>
@@ -8575,7 +10935,431 @@
 </p:sld>
 </file>
 
-<file path=ppt/slides/slide14.xml><?xml version="1.0" encoding="utf-8"?>
+<file path=ppt/slides/slide18.xml><?xml version="1.0" encoding="utf-8"?>
+<p:sld xmlns:a="http://schemas.openxmlformats.org/drawingml/2006/main" xmlns:p="http://schemas.openxmlformats.org/presentationml/2006/main" xmlns:r="http://schemas.openxmlformats.org/officeDocument/2006/relationships">
+  <p:cSld>
+    <p:spTree>
+      <p:nvGrpSpPr>
+        <p:cNvPr id="1" name=""/>
+        <p:cNvGrpSpPr/>
+        <p:nvPr/>
+      </p:nvGrpSpPr>
+      <p:grpSpPr/>
+      <p:sp>
+        <p:nvSpPr>
+          <p:cNvPr id="7" name="">
+            <a:extLst>
+              <a:ext uri="{FF2B5EF4-FFF2-40B4-BE49-F238E27FC236}">
+                <a16:creationId xmlns:a16="http://schemas.microsoft.com/office/drawing/2014/main" id="{B4CE5281-5814-4291-B8DE-FB11715A86D4}"/>
+              </a:ext>
+            </a:extLst>
+          </p:cNvPr>
+          <p:cNvSpPr>
+            <a:spLocks noGrp="1"/>
+          </p:cNvSpPr>
+          <p:nvPr/>
+        </p:nvSpPr>
+        <p:spPr>
+          <a:xfrm>
+            <a:off x="609600" y="342900"/>
+            <a:ext cx="10477500" cy="285750"/>
+          </a:xfrm>
+          <a:prstGeom prst="rect">
+            <a:avLst/>
+          </a:prstGeom>
+          <a:noFill/>
+          <a:ln w="0">
+            <a:noFill/>
+            <a:prstDash val="solid"/>
+          </a:ln>
+        </p:spPr>
+        <p:txBody>
+          <a:bodyPr/>
+          <a:lstStyle>
+            <a:defPPr>
+              <a:defRPr sz="1350" b="1">
+                <a:solidFill>
+                  <a:srgbClr val="157A80"/>
+                </a:solidFill>
+                <a:latin typeface="Arial"/>
+                <a:ea typeface="Arial"/>
+                <a:cs typeface="Arial"/>
+              </a:defRPr>
+            </a:defPPr>
+          </a:lstStyle>
+          <a:p>
+            <a:pPr>
+              <a:defRPr sz="1350" b="1">
+                <a:solidFill>
+                  <a:srgbClr val="157A80"/>
+                </a:solidFill>
+                <a:latin typeface="Arial"/>
+                <a:ea typeface="Arial"/>
+                <a:cs typeface="Arial"/>
+              </a:defRPr>
+            </a:pPr>
+            <a:r>
+              <a:rPr sz="1350" b="1">
+                <a:solidFill>
+                  <a:srgbClr val="157A80"/>
+                </a:solidFill>
+                <a:latin typeface="Arial"/>
+                <a:ea typeface="Arial"/>
+                <a:cs typeface="Arial"/>
+              </a:rPr>
+              <a:t>UNIT 3</a:t>
+            </a:r>
+          </a:p>
+        </p:txBody>
+      </p:sp>
+      <p:sp>
+        <p:nvSpPr>
+          <p:cNvPr id="2" name="">
+            <a:extLst>
+              <a:ext uri="{FF2B5EF4-FFF2-40B4-BE49-F238E27FC236}">
+                <a16:creationId xmlns:a16="http://schemas.microsoft.com/office/drawing/2014/main" id="{F2D70B92-C245-446F-A6B2-954E4F469C2A}"/>
+              </a:ext>
+            </a:extLst>
+          </p:cNvPr>
+          <p:cNvSpPr>
+            <a:spLocks noGrp="1"/>
+          </p:cNvSpPr>
+          <p:nvPr/>
+        </p:nvSpPr>
+        <p:spPr>
+          <a:xfrm>
+            <a:off x="609600" y="838200"/>
+            <a:ext cx="10972800" cy="857250"/>
+          </a:xfrm>
+          <a:prstGeom prst="rect">
+            <a:avLst/>
+          </a:prstGeom>
+          <a:noFill/>
+          <a:ln w="0">
+            <a:noFill/>
+            <a:prstDash val="solid"/>
+          </a:ln>
+        </p:spPr>
+        <p:txBody>
+          <a:bodyPr/>
+          <a:lstStyle>
+            <a:defPPr>
+              <a:defRPr sz="3150" b="1">
+                <a:solidFill>
+                  <a:srgbClr val="142D4E"/>
+                </a:solidFill>
+                <a:latin typeface="Arial"/>
+                <a:ea typeface="Arial"/>
+                <a:cs typeface="Arial"/>
+              </a:defRPr>
+            </a:defPPr>
+          </a:lstStyle>
+          <a:p>
+            <a:pPr>
+              <a:defRPr sz="3150" b="1">
+                <a:solidFill>
+                  <a:srgbClr val="142D4E"/>
+                </a:solidFill>
+                <a:latin typeface="Arial"/>
+                <a:ea typeface="Arial"/>
+                <a:cs typeface="Arial"/>
+              </a:defRPr>
+            </a:pPr>
+            <a:r>
+              <a:rPr sz="3150" b="1">
+                <a:solidFill>
+                  <a:srgbClr val="142D4E"/>
+                </a:solidFill>
+                <a:latin typeface="Arial"/>
+                <a:ea typeface="Arial"/>
+                <a:cs typeface="Arial"/>
+              </a:rPr>
+              <a:t>Method 2: which releases made things worse</a:t>
+            </a:r>
+          </a:p>
+        </p:txBody>
+      </p:sp>
+      <p:sp>
+        <p:nvSpPr>
+          <p:cNvPr id="3" name="">
+            <a:extLst>
+              <a:ext uri="{FF2B5EF4-FFF2-40B4-BE49-F238E27FC236}">
+                <a16:creationId xmlns:a16="http://schemas.microsoft.com/office/drawing/2014/main" id="{8A76EF40-5FAD-4E83-9187-5FE9CC845698}"/>
+              </a:ext>
+            </a:extLst>
+          </p:cNvPr>
+          <p:cNvSpPr>
+            <a:spLocks noGrp="1"/>
+          </p:cNvSpPr>
+          <p:nvPr/>
+        </p:nvSpPr>
+        <p:spPr>
+          <a:xfrm>
+            <a:off x="10953750" y="6343650"/>
+            <a:ext cx="619125" cy="238125"/>
+          </a:xfrm>
+          <a:prstGeom prst="rect">
+            <a:avLst/>
+          </a:prstGeom>
+          <a:noFill/>
+          <a:ln w="0">
+            <a:noFill/>
+            <a:prstDash val="solid"/>
+          </a:ln>
+        </p:spPr>
+        <p:txBody>
+          <a:bodyPr/>
+          <a:lstStyle>
+            <a:defPPr>
+              <a:defRPr sz="1200" b="0">
+                <a:solidFill>
+                  <a:srgbClr val="66758A"/>
+                </a:solidFill>
+                <a:latin typeface="Arial"/>
+                <a:ea typeface="Arial"/>
+                <a:cs typeface="Arial"/>
+              </a:defRPr>
+            </a:defPPr>
+          </a:lstStyle>
+          <a:p>
+            <a:pPr>
+              <a:defRPr sz="1200" b="0">
+                <a:solidFill>
+                  <a:srgbClr val="66758A"/>
+                </a:solidFill>
+                <a:latin typeface="Arial"/>
+                <a:ea typeface="Arial"/>
+                <a:cs typeface="Arial"/>
+              </a:defRPr>
+            </a:pPr>
+            <a:r>
+              <a:rPr sz="1200" b="0">
+                <a:solidFill>
+                  <a:srgbClr val="66758A"/>
+                </a:solidFill>
+                <a:latin typeface="Arial"/>
+                <a:ea typeface="Arial"/>
+                <a:cs typeface="Arial"/>
+              </a:rPr>
+              <a:t>18</a:t>
+            </a:r>
+          </a:p>
+        </p:txBody>
+      </p:sp>
+      <p:sp>
+        <p:nvSpPr>
+          <p:cNvPr id="5" name="">
+            <a:extLst>
+              <a:ext uri="{FF2B5EF4-FFF2-40B4-BE49-F238E27FC236}">
+                <a16:creationId xmlns:a16="http://schemas.microsoft.com/office/drawing/2014/main" id="{B775F0BD-DAEF-4688-97F4-0C8CC4593B56}"/>
+              </a:ext>
+            </a:extLst>
+          </p:cNvPr>
+          <p:cNvSpPr>
+            <a:spLocks noGrp="1"/>
+          </p:cNvSpPr>
+          <p:nvPr/>
+        </p:nvSpPr>
+        <p:spPr>
+          <a:xfrm>
+            <a:off x="685800" y="4983480"/>
+            <a:ext cx="10668000" cy="760476"/>
+          </a:xfrm>
+          <a:prstGeom prst="rect">
+            <a:avLst/>
+          </a:prstGeom>
+          <a:noFill/>
+          <a:ln w="0">
+            <a:noFill/>
+            <a:prstDash val="solid"/>
+          </a:ln>
+        </p:spPr>
+        <p:txBody>
+          <a:bodyPr wrap="square" lIns="0" rIns="0"/>
+          <a:lstStyle>
+            <a:defPPr>
+              <a:defRPr sz="2025" b="0">
+                <a:solidFill>
+                  <a:srgbClr val="233247"/>
+                </a:solidFill>
+                <a:latin typeface="Arial"/>
+                <a:ea typeface="Arial"/>
+                <a:cs typeface="Arial"/>
+              </a:defRPr>
+            </a:defPPr>
+          </a:lstStyle>
+          <a:p>
+            <a:pPr>
+              <a:defRPr sz="2025" b="0">
+                <a:solidFill>
+                  <a:srgbClr val="233247"/>
+                </a:solidFill>
+                <a:latin typeface="Arial"/>
+                <a:ea typeface="Arial"/>
+                <a:cs typeface="Arial"/>
+              </a:defRPr>
+            </a:pPr>
+            <a:r>
+              <a:rPr sz="1400" b="1">
+                <a:solidFill>
+                  <a:srgbClr val="233247"/>
+                </a:solidFill>
+                <a:latin typeface="Arial"/>
+                <a:ea typeface="Arial"/>
+                <a:cs typeface="Arial"/>
+              </a:rPr>
+              <a:t>Key findings: </a:t>
+            </a:r>
+            <a:r>
+              <a:rPr sz="1400" b="0">
+                <a:solidFill>
+                  <a:srgbClr val="233247"/>
+                </a:solidFill>
+                <a:latin typeface="Arial"/>
+                <a:ea typeface="Arial"/>
+                <a:cs typeface="Arial"/>
+              </a:rPr>
+              <a:t>of 205 testable releases, 196 changed nothing measurable, 5 made things better and 4 made things worse. Only Paytm 10.84.5 is confirmed at app level: 23% vs 13% 1–2★ on the new version, 34 → 66 a day, and 10 days above the forecast interval.</a:t>
+            </a:r>
+          </a:p>
+        </p:txBody>
+      </p:sp>
+      <p:sp>
+        <p:nvSpPr>
+          <p:cNvPr id="6" name="">
+            <a:extLst>
+              <a:ext uri="{FF2B5EF4-FFF2-40B4-BE49-F238E27FC236}">
+                <a16:creationId xmlns:a16="http://schemas.microsoft.com/office/drawing/2014/main" id="{CD68E0AF-687D-43C3-AA48-711AD2792F7A}"/>
+              </a:ext>
+            </a:extLst>
+          </p:cNvPr>
+          <p:cNvSpPr>
+            <a:spLocks noGrp="1"/>
+          </p:cNvSpPr>
+          <p:nvPr/>
+        </p:nvSpPr>
+        <p:spPr>
+          <a:xfrm>
+            <a:off x="685800" y="5817108"/>
+            <a:ext cx="10668000" cy="543559"/>
+          </a:xfrm>
+          <a:prstGeom prst="rect">
+            <a:avLst/>
+          </a:prstGeom>
+          <a:noFill/>
+          <a:ln w="0">
+            <a:noFill/>
+            <a:prstDash val="solid"/>
+          </a:ln>
+        </p:spPr>
+        <p:txBody>
+          <a:bodyPr wrap="square" lIns="0" rIns="0"/>
+          <a:lstStyle>
+            <a:defPPr>
+              <a:defRPr sz="2025" b="0">
+                <a:solidFill>
+                  <a:srgbClr val="233247"/>
+                </a:solidFill>
+                <a:latin typeface="Arial"/>
+                <a:ea typeface="Arial"/>
+                <a:cs typeface="Arial"/>
+              </a:defRPr>
+            </a:defPPr>
+          </a:lstStyle>
+          <a:p>
+            <a:pPr>
+              <a:defRPr sz="2025" b="0">
+                <a:solidFill>
+                  <a:srgbClr val="233247"/>
+                </a:solidFill>
+                <a:latin typeface="Arial"/>
+                <a:ea typeface="Arial"/>
+                <a:cs typeface="Arial"/>
+              </a:defRPr>
+            </a:pPr>
+            <a:r>
+              <a:rPr sz="1400" b="1">
+                <a:solidFill>
+                  <a:srgbClr val="233247"/>
+                </a:solidFill>
+                <a:latin typeface="Arial"/>
+                <a:ea typeface="Arial"/>
+                <a:cs typeface="Arial"/>
+              </a:rPr>
+              <a:t>Action: </a:t>
+            </a:r>
+            <a:r>
+              <a:rPr sz="1400" b="0">
+                <a:solidFill>
+                  <a:srgbClr val="233247"/>
+                </a:solidFill>
+                <a:latin typeface="Arial"/>
+                <a:ea typeface="Arial"/>
+                <a:cs typeface="Arial"/>
+              </a:rPr>
+              <a:t>investigate and patch Paytm 10.84.5 first; test every new release against the app's usual new-version gap before the full rollout.</a:t>
+            </a:r>
+          </a:p>
+        </p:txBody>
+      </p:sp>
+      <p:pic>
+        <p:nvPicPr>
+          <p:cNvPr id="9" name="Picture 8" descr="ts_paytm_release.png"/>
+          <p:cNvPicPr>
+            <a:picLocks noChangeAspect="1"/>
+          </p:cNvPicPr>
+          <p:nvPr/>
+        </p:nvPicPr>
+        <p:blipFill>
+          <a:blip r:embed="rId3"/>
+          <a:stretch>
+            <a:fillRect/>
+          </a:stretch>
+        </p:blipFill>
+        <p:spPr>
+          <a:xfrm>
+            <a:off x="6183713" y="1700000"/>
+            <a:ext cx="5383446" cy="3202222"/>
+          </a:xfrm>
+          <a:prstGeom prst="rect">
+            <a:avLst/>
+          </a:prstGeom>
+        </p:spPr>
+      </p:pic>
+      <p:pic>
+        <p:nvPicPr>
+          <p:cNvPr id="10" name="Picture 9" descr="01_release_verdicts_by_app.png"/>
+          <p:cNvPicPr>
+            <a:picLocks noChangeAspect="1"/>
+          </p:cNvPicPr>
+          <p:nvPr/>
+        </p:nvPicPr>
+        <p:blipFill>
+          <a:blip r:embed="rId5"/>
+          <a:srcRect t="25595"/>
+          <a:stretch>
+            <a:fillRect/>
+          </a:stretch>
+        </p:blipFill>
+        <p:spPr>
+          <a:xfrm>
+            <a:off x="620267" y="1700000"/>
+            <a:ext cx="5383446" cy="2039184"/>
+          </a:xfrm>
+          <a:prstGeom prst="rect">
+            <a:avLst/>
+          </a:prstGeom>
+        </p:spPr>
+      </p:pic>
+    </p:spTree>
+  </p:cSld>
+  <p:clrMapOvr>
+    <a:masterClrMapping/>
+  </p:clrMapOvr>
+</p:sld>
+</file>
+
+<file path=ppt/slides/slide19.xml><?xml version="1.0" encoding="utf-8"?>
 <p:sld xmlns:p="http://schemas.openxmlformats.org/presentationml/2006/main">
   <p:cSld>
     <p:bg>
@@ -8790,7 +11574,7 @@
                 <a:ea typeface="Arial"/>
                 <a:cs typeface="Arial"/>
               </a:rPr>
-              <a:t>14</a:t>
+              <a:t>19</a:t>
             </a:r>
           </a:p>
         </p:txBody>
@@ -9211,7 +11995,7 @@
                           <a:ea typeface="Arial"/>
                           <a:cs typeface="Arial"/>
                         </a:rPr>
-                        <a:t>Text mining: refunds 35% of food complaints, returns 25% of shopping, failed transfers 52% of payments</a:t>
+                        <a:t>Text mining: refunds 35% of food complaints, returns 25% of shopping, payment &amp; UPI problems 49% of payments</a:t>
                       </a:r>
                     </a:p>
                   </a:txBody>
@@ -9254,7 +12038,7 @@
                           <a:ea typeface="Arial"/>
                           <a:cs typeface="Arial"/>
                         </a:rPr>
-                        <a:t>Fix these flows first in every app of the domain; answer scam allegations quickly (−0.61)</a:t>
+                        <a:t>Fix these flows first in every app of the domain; speed up support replies, the angriest specific complaint (−0.40 in food apps)</a:t>
                       </a:r>
                     </a:p>
                   </a:txBody>
@@ -9525,7 +12309,7 @@
 </p:sld>
 </file>
 
-<file path=ppt/slides/slide15.xml><?xml version="1.0" encoding="utf-8"?>
+<file path=ppt/slides/slide2.xml><?xml version="1.0" encoding="utf-8"?>
 <p:sld xmlns:p="http://schemas.openxmlformats.org/presentationml/2006/main">
   <p:cSld>
     <p:bg>
@@ -9549,7 +12333,7 @@
           <p:cNvPr id="8" name="">
             <a:extLst xmlns:a="http://schemas.openxmlformats.org/drawingml/2006/main">
               <a:ext uri="{FF2B5EF4-FFF2-40B4-BE49-F238E27FC236}">
-                <a16:creationId xmlns:a16="http://schemas.microsoft.com/office/drawing/2014/main" id="{A83E0F18-477D-4762-971E-5CA6A560D37E}"/>
+                <a16:creationId xmlns:a16="http://schemas.microsoft.com/office/drawing/2014/main" id="{6E7343E7-897E-4DAC-BDC5-EAE42CCBBA13}"/>
               </a:ext>
             </a:extLst>
           </p:cNvPr>
@@ -9606,7 +12390,7 @@
                 <a:ea typeface="Arial"/>
                 <a:cs typeface="Arial"/>
               </a:rPr>
-              <a:t>MANDATORY LIVE DEMONSTRATION</a:t>
+              <a:t>PROJECT OVERVIEW</a:t>
             </a:r>
           </a:p>
         </p:txBody>
@@ -9616,7 +12400,7 @@
           <p:cNvPr id="2" name="">
             <a:extLst xmlns:a="http://schemas.openxmlformats.org/drawingml/2006/main">
               <a:ext uri="{FF2B5EF4-FFF2-40B4-BE49-F238E27FC236}">
-                <a16:creationId xmlns:a16="http://schemas.microsoft.com/office/drawing/2014/main" id="{8C0E321D-DD7C-40A2-8CD0-AAF7C8D32984}"/>
+                <a16:creationId xmlns:a16="http://schemas.microsoft.com/office/drawing/2014/main" id="{FED1F470-9F33-4ECE-9801-5FEC2B16012C}"/>
               </a:ext>
             </a:extLst>
           </p:cNvPr>
@@ -9673,7 +12457,7 @@
                 <a:ea typeface="Arial"/>
                 <a:cs typeface="Arial"/>
               </a:rPr>
-              <a:t>Interactive dashboard or website</a:t>
+              <a:t>Business problem and objectives</a:t>
             </a:r>
           </a:p>
         </p:txBody>
@@ -9683,7 +12467,7 @@
           <p:cNvPr id="3" name="">
             <a:extLst xmlns:a="http://schemas.openxmlformats.org/drawingml/2006/main">
               <a:ext uri="{FF2B5EF4-FFF2-40B4-BE49-F238E27FC236}">
-                <a16:creationId xmlns:a16="http://schemas.microsoft.com/office/drawing/2014/main" id="{740C65A0-85F7-48CD-A9F0-1A88D47161BA}"/>
+                <a16:creationId xmlns:a16="http://schemas.microsoft.com/office/drawing/2014/main" id="{1C59113F-EFA7-4894-9DAC-CFF6316D49B3}"/>
               </a:ext>
             </a:extLst>
           </p:cNvPr>
@@ -9740,7 +12524,949 @@
                 <a:ea typeface="Arial"/>
                 <a:cs typeface="Arial"/>
               </a:rPr>
-              <a:t>15</a:t>
+              <a:t>02</a:t>
+            </a:r>
+          </a:p>
+        </p:txBody>
+      </p:sp>
+      <p:sp>
+        <p:nvSpPr>
+          <p:cNvPr id="4" name="">
+            <a:extLst xmlns:a="http://schemas.openxmlformats.org/drawingml/2006/main">
+              <a:ext uri="{FF2B5EF4-FFF2-40B4-BE49-F238E27FC236}">
+                <a16:creationId xmlns:a16="http://schemas.microsoft.com/office/drawing/2014/main" id="{EE0745E4-06FC-4A61-A5EC-5ACBCB04D1A2}"/>
+              </a:ext>
+            </a:extLst>
+          </p:cNvPr>
+          <p:cNvSpPr>
+            <a:spLocks xmlns:a="http://schemas.openxmlformats.org/drawingml/2006/main" noGrp="1"/>
+          </p:cNvSpPr>
+          <p:nvPr/>
+        </p:nvSpPr>
+        <p:spPr>
+          <a:xfrm xmlns:a="http://schemas.openxmlformats.org/drawingml/2006/main">
+            <a:off x="685800" y="1874519"/>
+            <a:ext cx="10668000" cy="899922"/>
+          </a:xfrm>
+          <a:prstGeom xmlns:a="http://schemas.openxmlformats.org/drawingml/2006/main" prst="rect">
+            <a:avLst/>
+          </a:prstGeom>
+          <a:noFill xmlns:a="http://schemas.openxmlformats.org/drawingml/2006/main"/>
+          <a:ln xmlns:a="http://schemas.openxmlformats.org/drawingml/2006/main" w="0">
+            <a:noFill/>
+            <a:prstDash val="solid"/>
+          </a:ln>
+        </p:spPr>
+        <p:txBody>
+          <a:bodyPr xmlns:a="http://schemas.openxmlformats.org/drawingml/2006/main" wrap="square" lIns="0" rIns="0"/>
+          <a:lstStyle xmlns:a="http://schemas.openxmlformats.org/drawingml/2006/main">
+            <a:defPPr>
+              <a:defRPr sz="2025" b="0">
+                <a:solidFill>
+                  <a:srgbClr val="233247"/>
+                </a:solidFill>
+                <a:latin typeface="Arial"/>
+                <a:ea typeface="Arial"/>
+                <a:cs typeface="Arial"/>
+              </a:defRPr>
+            </a:defPPr>
+          </a:lstStyle>
+          <ns0:p xmlns:ns0="http://schemas.openxmlformats.org/drawingml/2006/main">
+            <ns0:pPr>
+              <ns0:defRPr sz="2025" b="0">
+                <ns0:solidFill>
+                  <ns0:srgbClr val="233247"/>
+                </ns0:solidFill>
+                <ns0:latin typeface="Arial"/>
+                <ns0:ea typeface="Arial"/>
+                <ns0:cs typeface="Arial"/>
+              </ns0:defRPr>
+            </ns0:pPr>
+            <ns0:r>
+              <ns0:rPr sz="1700" b="1">
+                <ns0:solidFill>
+                  <ns0:srgbClr val="233247"/>
+                </ns0:solidFill>
+                <ns0:latin typeface="Arial"/>
+                <ns0:ea typeface="Arial"/>
+                <ns0:cs typeface="Arial"/>
+              </ns0:rPr>
+              <ns0:t>Business problem: </ns0:t>
+            </ns0:r>
+            <ns0:r>
+              <ns0:rPr sz="1700" b="0">
+                <ns0:solidFill>
+                  <ns0:srgbClr val="233247"/>
+                </ns0:solidFill>
+                <ns0:latin typeface="Arial"/>
+                <ns0:ea typeface="Arial"/>
+                <ns0:cs typeface="Arial"/>
+              </ns0:rPr>
+              <ns0:t>Product and support teams of 11 Indian consumer apps (Swiggy, Flipkart, Paytm and others) receive 117 to 1,539 Play Store reviews a day. Failed payments, refunds, late deliveries and bad updates are noticed late, because nobody can read them all.</ns0:t>
+            </ns0:r>
+          </ns0:p>
+        </p:txBody>
+      </p:sp>
+      <p:sp>
+        <p:nvSpPr>
+          <p:cNvPr id="5" name="">
+            <a:extLst xmlns:a="http://schemas.openxmlformats.org/drawingml/2006/main">
+              <a:ext uri="{FF2B5EF4-FFF2-40B4-BE49-F238E27FC236}">
+                <a16:creationId xmlns:a16="http://schemas.microsoft.com/office/drawing/2014/main" id="{5B7A7B16-567A-4CE1-8454-F080C301E37C}"/>
+              </a:ext>
+            </a:extLst>
+          </p:cNvPr>
+          <p:cNvSpPr>
+            <a:spLocks xmlns:a="http://schemas.openxmlformats.org/drawingml/2006/main" noGrp="1"/>
+          </p:cNvSpPr>
+          <p:nvPr/>
+        </p:nvSpPr>
+        <p:spPr>
+          <a:xfrm xmlns:a="http://schemas.openxmlformats.org/drawingml/2006/main">
+            <a:off x="685800" y="3046349"/>
+            <a:ext cx="10668000" cy="636523"/>
+          </a:xfrm>
+          <a:prstGeom xmlns:a="http://schemas.openxmlformats.org/drawingml/2006/main" prst="rect">
+            <a:avLst/>
+          </a:prstGeom>
+          <a:noFill xmlns:a="http://schemas.openxmlformats.org/drawingml/2006/main"/>
+          <a:ln xmlns:a="http://schemas.openxmlformats.org/drawingml/2006/main" w="0">
+            <a:noFill/>
+            <a:prstDash val="solid"/>
+          </a:ln>
+        </p:spPr>
+        <p:txBody>
+          <a:bodyPr xmlns:a="http://schemas.openxmlformats.org/drawingml/2006/main" wrap="square" lIns="0" rIns="0"/>
+          <a:lstStyle xmlns:a="http://schemas.openxmlformats.org/drawingml/2006/main">
+            <a:defPPr>
+              <a:defRPr sz="2025" b="0">
+                <a:solidFill>
+                  <a:srgbClr val="233247"/>
+                </a:solidFill>
+                <a:latin typeface="Arial"/>
+                <a:ea typeface="Arial"/>
+                <a:cs typeface="Arial"/>
+              </a:defRPr>
+            </a:defPPr>
+          </a:lstStyle>
+          <ns1:p xmlns:ns1="http://schemas.openxmlformats.org/drawingml/2006/main">
+            <ns1:pPr>
+              <ns1:defRPr sz="2025" b="0">
+                <ns1:solidFill>
+                  <ns1:srgbClr val="233247"/>
+                </ns1:solidFill>
+                <ns1:latin typeface="Arial"/>
+                <ns1:ea typeface="Arial"/>
+                <ns1:cs typeface="Arial"/>
+              </ns1:defRPr>
+            </ns1:pPr>
+            <ns1:r>
+              <ns1:rPr sz="1700" b="1">
+                <ns1:solidFill>
+                  <ns1:srgbClr val="233247"/>
+                </ns1:solidFill>
+                <ns1:latin typeface="Arial"/>
+                <ns1:ea typeface="Arial"/>
+                <ns1:cs typeface="Arial"/>
+              </ns1:rPr>
+              <ns1:t>Objectives: </ns1:t>
+            </ns1:r>
+            <ns1:r>
+              <ns1:rPr sz="1700" b="0">
+                <ns1:solidFill>
+                  <ns1:srgbClr val="233247"/>
+                </ns1:solidFill>
+                <ns1:latin typeface="Arial"/>
+                <ns1:ea typeface="Arial"/>
+                <ns1:cs typeface="Arial"/>
+              </ns1:rPr>
+              <ns1:t>(1) Flag problem reviews automatically, far above the 19.5% base rate. (2) Find what users complain about, forecast daily 1–2★ reviews per app, and test every app release for harm.</ns1:t>
+            </ns1:r>
+          </ns1:p>
+        </p:txBody>
+      </p:sp>
+      <p:sp>
+        <p:nvSpPr>
+          <p:cNvPr id="6" name="">
+            <a:extLst xmlns:a="http://schemas.openxmlformats.org/drawingml/2006/main">
+              <a:ext uri="{FF2B5EF4-FFF2-40B4-BE49-F238E27FC236}">
+                <a16:creationId xmlns:a16="http://schemas.microsoft.com/office/drawing/2014/main" id="{6A41A58E-E834-43D8-B9AA-B3ECB73E2FE8}"/>
+              </a:ext>
+            </a:extLst>
+          </p:cNvPr>
+          <p:cNvSpPr>
+            <a:spLocks xmlns:a="http://schemas.openxmlformats.org/drawingml/2006/main" noGrp="1"/>
+          </p:cNvSpPr>
+          <p:nvPr/>
+        </p:nvSpPr>
+        <p:spPr>
+          <a:xfrm xmlns:a="http://schemas.openxmlformats.org/drawingml/2006/main">
+            <a:off x="685800" y="3954780"/>
+            <a:ext cx="10668000" cy="636523"/>
+          </a:xfrm>
+          <a:prstGeom xmlns:a="http://schemas.openxmlformats.org/drawingml/2006/main" prst="rect">
+            <a:avLst/>
+          </a:prstGeom>
+          <a:noFill xmlns:a="http://schemas.openxmlformats.org/drawingml/2006/main"/>
+          <a:ln xmlns:a="http://schemas.openxmlformats.org/drawingml/2006/main" w="0">
+            <a:noFill/>
+            <a:prstDash val="solid"/>
+          </a:ln>
+        </p:spPr>
+        <p:txBody>
+          <a:bodyPr xmlns:a="http://schemas.openxmlformats.org/drawingml/2006/main" wrap="square" lIns="0" rIns="0"/>
+          <a:lstStyle xmlns:a="http://schemas.openxmlformats.org/drawingml/2006/main">
+            <a:defPPr>
+              <a:defRPr sz="2025" b="0">
+                <a:solidFill>
+                  <a:srgbClr val="233247"/>
+                </a:solidFill>
+                <a:latin typeface="Arial"/>
+                <a:ea typeface="Arial"/>
+                <a:cs typeface="Arial"/>
+              </a:defRPr>
+            </a:defPPr>
+          </a:lstStyle>
+          <ns2:p xmlns:ns2="http://schemas.openxmlformats.org/drawingml/2006/main">
+            <ns2:pPr>
+              <ns2:defRPr sz="2025" b="0">
+                <ns2:solidFill>
+                  <ns2:srgbClr val="233247"/>
+                </ns2:solidFill>
+                <ns2:latin typeface="Arial"/>
+                <ns2:ea typeface="Arial"/>
+                <ns2:cs typeface="Arial"/>
+              </ns2:defRPr>
+            </ns2:pPr>
+            <ns2:r>
+              <ns2:rPr sz="1700" b="1">
+                <ns2:solidFill>
+                  <ns2:srgbClr val="233247"/>
+                </ns2:solidFill>
+                <ns2:latin typeface="Arial"/>
+                <ns2:ea typeface="Arial"/>
+                <ns2:cs typeface="Arial"/>
+              </ns2:rPr>
+              <ns2:t>Business decision: </ns2:t>
+            </ns2:r>
+            <ns2:r>
+              <ns2:rPr sz="1700" b="0">
+                <ns2:solidFill>
+                  <ns2:srgbClr val="233247"/>
+                </ns2:solidFill>
+                <ns2:latin typeface="Arial"/>
+                <ns2:ea typeface="Arial"/>
+                <ns2:cs typeface="Arial"/>
+              </ns2:rPr>
+              <ns2:t>Which app, complaint and release to fix first, and how much support capacity to plan for next week.</ns2:t>
+            </ns2:r>
+          </ns2:p>
+        </p:txBody>
+      </p:sp>
+      <p:sp>
+        <p:nvSpPr>
+          <p:cNvPr id="7" name="">
+            <a:extLst xmlns:a="http://schemas.openxmlformats.org/drawingml/2006/main">
+              <a:ext uri="{FF2B5EF4-FFF2-40B4-BE49-F238E27FC236}">
+                <a16:creationId xmlns:a16="http://schemas.microsoft.com/office/drawing/2014/main" id="{A95CB975-5F85-44EA-9A3E-9E1BBD5AC1A0}"/>
+              </a:ext>
+            </a:extLst>
+          </p:cNvPr>
+          <p:cNvSpPr>
+            <a:spLocks xmlns:a="http://schemas.openxmlformats.org/drawingml/2006/main" noGrp="1"/>
+          </p:cNvSpPr>
+          <p:nvPr/>
+        </p:nvSpPr>
+        <p:spPr>
+          <a:xfrm xmlns:a="http://schemas.openxmlformats.org/drawingml/2006/main">
+            <a:off x="685800" y="4863211"/>
+            <a:ext cx="10668000" cy="899922"/>
+          </a:xfrm>
+          <a:prstGeom xmlns:a="http://schemas.openxmlformats.org/drawingml/2006/main" prst="rect">
+            <a:avLst/>
+          </a:prstGeom>
+          <a:noFill xmlns:a="http://schemas.openxmlformats.org/drawingml/2006/main"/>
+          <a:ln xmlns:a="http://schemas.openxmlformats.org/drawingml/2006/main" w="0">
+            <a:noFill/>
+            <a:prstDash val="solid"/>
+          </a:ln>
+        </p:spPr>
+        <p:txBody>
+          <a:bodyPr xmlns:a="http://schemas.openxmlformats.org/drawingml/2006/main" wrap="square" lIns="0" rIns="0"/>
+          <a:lstStyle xmlns:a="http://schemas.openxmlformats.org/drawingml/2006/main">
+            <a:defPPr>
+              <a:defRPr sz="2025" b="0">
+                <a:solidFill>
+                  <a:srgbClr val="233247"/>
+                </a:solidFill>
+                <a:latin typeface="Arial"/>
+                <a:ea typeface="Arial"/>
+                <a:cs typeface="Arial"/>
+              </a:defRPr>
+            </a:defPPr>
+          </a:lstStyle>
+          <ns3:p xmlns:ns3="http://schemas.openxmlformats.org/drawingml/2006/main">
+            <ns3:pPr>
+              <ns3:defRPr sz="2025" b="0">
+                <ns3:solidFill>
+                  <ns3:srgbClr val="233247"/>
+                </ns3:solidFill>
+                <ns3:latin typeface="Arial"/>
+                <ns3:ea typeface="Arial"/>
+                <ns3:cs typeface="Arial"/>
+              </ns3:defRPr>
+            </ns3:pPr>
+            <ns3:r>
+              <ns3:rPr sz="1700" b="1">
+                <ns3:solidFill>
+                  <ns3:srgbClr val="233247"/>
+                </ns3:solidFill>
+                <ns3:latin typeface="Arial"/>
+                <ns3:ea typeface="Arial"/>
+                <ns3:cs typeface="Arial"/>
+              </ns3:rPr>
+              <ns3:t>Expected output: </ns3:t>
+            </ns3:r>
+            <ns3:r>
+              <ns3:rPr sz="1700" b="0">
+                <ns3:solidFill>
+                  <ns3:srgbClr val="233247"/>
+                </ns3:solidFill>
+                <ns3:latin typeface="Arial"/>
+                <ns3:ea typeface="Arial"/>
+                <ns3:cs typeface="Arial"/>
+              </ns3:rPr>
+              <ns3:t>A problem-review classifier, complaint topics with sentiment, 4-week forecasts with unusual-day alerts, release verdicts and a per-app priority table with 65 recommendations, all in a live dashboard.</ns3:t>
+            </ns3:r>
+          </ns3:p>
+        </p:txBody>
+      </p:sp>
+    </p:spTree>
+    <p:extLst>
+      <p:ext uri="{BB962C8B-B14F-4D97-AF65-F5344CB8AC3E}">
+        <p14:creationId xmlns:p14="http://schemas.microsoft.com/office/powerpoint/2010/main" val="120750324"/>
+      </p:ext>
+    </p:extLst>
+  </p:cSld>
+</p:sld>
+</file>
+
+<file path=ppt/slides/slide20.xml><?xml version="1.0" encoding="utf-8"?>
+<p:sld xmlns:a="http://schemas.openxmlformats.org/drawingml/2006/main" xmlns:p="http://schemas.openxmlformats.org/presentationml/2006/main" xmlns:r="http://schemas.openxmlformats.org/officeDocument/2006/relationships">
+  <p:cSld>
+    <p:spTree>
+      <p:nvGrpSpPr>
+        <p:cNvPr id="1" name=""/>
+        <p:cNvGrpSpPr/>
+        <p:nvPr/>
+      </p:nvGrpSpPr>
+      <p:grpSpPr/>
+      <p:sp>
+        <p:nvSpPr>
+          <p:cNvPr id="7" name="">
+            <a:extLst>
+              <a:ext uri="{FF2B5EF4-FFF2-40B4-BE49-F238E27FC236}">
+                <a16:creationId xmlns:a16="http://schemas.microsoft.com/office/drawing/2014/main" id="{B4CE5281-5814-4291-B8DE-FB11715A86D4}"/>
+              </a:ext>
+            </a:extLst>
+          </p:cNvPr>
+          <p:cNvSpPr>
+            <a:spLocks noGrp="1"/>
+          </p:cNvSpPr>
+          <p:nvPr/>
+        </p:nvSpPr>
+        <p:spPr>
+          <a:xfrm>
+            <a:off x="609600" y="342900"/>
+            <a:ext cx="10477500" cy="285750"/>
+          </a:xfrm>
+          <a:prstGeom prst="rect">
+            <a:avLst/>
+          </a:prstGeom>
+          <a:noFill/>
+          <a:ln w="0">
+            <a:noFill/>
+            <a:prstDash val="solid"/>
+          </a:ln>
+        </p:spPr>
+        <p:txBody>
+          <a:bodyPr/>
+          <a:lstStyle>
+            <a:defPPr>
+              <a:defRPr sz="1350" b="1">
+                <a:solidFill>
+                  <a:srgbClr val="157A80"/>
+                </a:solidFill>
+                <a:latin typeface="Arial"/>
+                <a:ea typeface="Arial"/>
+                <a:cs typeface="Arial"/>
+              </a:defRPr>
+            </a:defPPr>
+          </a:lstStyle>
+          <a:p>
+            <a:pPr>
+              <a:defRPr sz="1350" b="1">
+                <a:solidFill>
+                  <a:srgbClr val="157A80"/>
+                </a:solidFill>
+                <a:latin typeface="Arial"/>
+                <a:ea typeface="Arial"/>
+                <a:cs typeface="Arial"/>
+              </a:defRPr>
+            </a:pPr>
+            <a:r>
+              <a:rPr sz="1350" b="1">
+                <a:solidFill>
+                  <a:srgbClr val="157A80"/>
+                </a:solidFill>
+                <a:latin typeface="Arial"/>
+                <a:ea typeface="Arial"/>
+                <a:cs typeface="Arial"/>
+              </a:rPr>
+              <a:t>BUSINESS OUTCOMES</a:t>
+            </a:r>
+          </a:p>
+        </p:txBody>
+      </p:sp>
+      <p:sp>
+        <p:nvSpPr>
+          <p:cNvPr id="2" name="">
+            <a:extLst>
+              <a:ext uri="{FF2B5EF4-FFF2-40B4-BE49-F238E27FC236}">
+                <a16:creationId xmlns:a16="http://schemas.microsoft.com/office/drawing/2014/main" id="{F2D70B92-C245-446F-A6B2-954E4F469C2A}"/>
+              </a:ext>
+            </a:extLst>
+          </p:cNvPr>
+          <p:cNvSpPr>
+            <a:spLocks noGrp="1"/>
+          </p:cNvSpPr>
+          <p:nvPr/>
+        </p:nvSpPr>
+        <p:spPr>
+          <a:xfrm>
+            <a:off x="609600" y="838200"/>
+            <a:ext cx="10972800" cy="857250"/>
+          </a:xfrm>
+          <a:prstGeom prst="rect">
+            <a:avLst/>
+          </a:prstGeom>
+          <a:noFill/>
+          <a:ln w="0">
+            <a:noFill/>
+            <a:prstDash val="solid"/>
+          </a:ln>
+        </p:spPr>
+        <p:txBody>
+          <a:bodyPr/>
+          <a:lstStyle>
+            <a:defPPr>
+              <a:defRPr sz="3150" b="1">
+                <a:solidFill>
+                  <a:srgbClr val="142D4E"/>
+                </a:solidFill>
+                <a:latin typeface="Arial"/>
+                <a:ea typeface="Arial"/>
+                <a:cs typeface="Arial"/>
+              </a:defRPr>
+            </a:defPPr>
+          </a:lstStyle>
+          <a:p>
+            <a:pPr>
+              <a:defRPr sz="3150" b="1">
+                <a:solidFill>
+                  <a:srgbClr val="142D4E"/>
+                </a:solidFill>
+                <a:latin typeface="Arial"/>
+                <a:ea typeface="Arial"/>
+                <a:cs typeface="Arial"/>
+              </a:defRPr>
+            </a:pPr>
+            <a:r>
+              <a:rPr sz="3150" b="1">
+                <a:solidFill>
+                  <a:srgbClr val="142D4E"/>
+                </a:solidFill>
+                <a:latin typeface="Arial"/>
+                <a:ea typeface="Arial"/>
+                <a:cs typeface="Arial"/>
+              </a:rPr>
+              <a:t>Priority by app: six warning signs from every stage</a:t>
+            </a:r>
+          </a:p>
+        </p:txBody>
+      </p:sp>
+      <p:sp>
+        <p:nvSpPr>
+          <p:cNvPr id="3" name="">
+            <a:extLst>
+              <a:ext uri="{FF2B5EF4-FFF2-40B4-BE49-F238E27FC236}">
+                <a16:creationId xmlns:a16="http://schemas.microsoft.com/office/drawing/2014/main" id="{8A76EF40-5FAD-4E83-9187-5FE9CC845698}"/>
+              </a:ext>
+            </a:extLst>
+          </p:cNvPr>
+          <p:cNvSpPr>
+            <a:spLocks noGrp="1"/>
+          </p:cNvSpPr>
+          <p:nvPr/>
+        </p:nvSpPr>
+        <p:spPr>
+          <a:xfrm>
+            <a:off x="10953750" y="6343650"/>
+            <a:ext cx="619125" cy="238125"/>
+          </a:xfrm>
+          <a:prstGeom prst="rect">
+            <a:avLst/>
+          </a:prstGeom>
+          <a:noFill/>
+          <a:ln w="0">
+            <a:noFill/>
+            <a:prstDash val="solid"/>
+          </a:ln>
+        </p:spPr>
+        <p:txBody>
+          <a:bodyPr/>
+          <a:lstStyle>
+            <a:defPPr>
+              <a:defRPr sz="1200" b="0">
+                <a:solidFill>
+                  <a:srgbClr val="66758A"/>
+                </a:solidFill>
+                <a:latin typeface="Arial"/>
+                <a:ea typeface="Arial"/>
+                <a:cs typeface="Arial"/>
+              </a:defRPr>
+            </a:defPPr>
+          </a:lstStyle>
+          <a:p>
+            <a:pPr>
+              <a:defRPr sz="1200" b="0">
+                <a:solidFill>
+                  <a:srgbClr val="66758A"/>
+                </a:solidFill>
+                <a:latin typeface="Arial"/>
+                <a:ea typeface="Arial"/>
+                <a:cs typeface="Arial"/>
+              </a:defRPr>
+            </a:pPr>
+            <a:r>
+              <a:rPr sz="1200" b="0">
+                <a:solidFill>
+                  <a:srgbClr val="66758A"/>
+                </a:solidFill>
+                <a:latin typeface="Arial"/>
+                <a:ea typeface="Arial"/>
+                <a:cs typeface="Arial"/>
+              </a:rPr>
+              <a:t>20</a:t>
+            </a:r>
+          </a:p>
+        </p:txBody>
+      </p:sp>
+      <p:sp>
+        <p:nvSpPr>
+          <p:cNvPr id="5" name="">
+            <a:extLst>
+              <a:ext uri="{FF2B5EF4-FFF2-40B4-BE49-F238E27FC236}">
+                <a16:creationId xmlns:a16="http://schemas.microsoft.com/office/drawing/2014/main" id="{B775F0BD-DAEF-4688-97F4-0C8CC4593B56}"/>
+              </a:ext>
+            </a:extLst>
+          </p:cNvPr>
+          <p:cNvSpPr>
+            <a:spLocks noGrp="1"/>
+          </p:cNvSpPr>
+          <p:nvPr/>
+        </p:nvSpPr>
+        <p:spPr>
+          <a:xfrm>
+            <a:off x="685800" y="4983480"/>
+            <a:ext cx="10668000" cy="760476"/>
+          </a:xfrm>
+          <a:prstGeom prst="rect">
+            <a:avLst/>
+          </a:prstGeom>
+          <a:noFill/>
+          <a:ln w="0">
+            <a:noFill/>
+            <a:prstDash val="solid"/>
+          </a:ln>
+        </p:spPr>
+        <p:txBody>
+          <a:bodyPr wrap="square" lIns="0" rIns="0"/>
+          <a:lstStyle>
+            <a:defPPr>
+              <a:defRPr sz="2025" b="0">
+                <a:solidFill>
+                  <a:srgbClr val="233247"/>
+                </a:solidFill>
+                <a:latin typeface="Arial"/>
+                <a:ea typeface="Arial"/>
+                <a:cs typeface="Arial"/>
+              </a:defRPr>
+            </a:defPPr>
+          </a:lstStyle>
+          <a:p>
+            <a:pPr>
+              <a:defRPr sz="2025" b="0">
+                <a:solidFill>
+                  <a:srgbClr val="233247"/>
+                </a:solidFill>
+                <a:latin typeface="Arial"/>
+                <a:ea typeface="Arial"/>
+                <a:cs typeface="Arial"/>
+              </a:defRPr>
+            </a:pPr>
+            <a:r>
+              <a:rPr sz="1400" b="1">
+                <a:solidFill>
+                  <a:srgbClr val="233247"/>
+                </a:solidFill>
+                <a:latin typeface="Arial"/>
+                <a:ea typeface="Arial"/>
+                <a:cs typeface="Arial"/>
+              </a:rPr>
+              <a:t>Key findings: </a:t>
+            </a:r>
+            <a:r>
+              <a:rPr sz="1400" b="0">
+                <a:solidFill>
+                  <a:srgbClr val="233247"/>
+                </a:solidFill>
+                <a:latin typeface="Arial"/>
+                <a:ea typeface="Arial"/>
+                <a:cs typeface="Arial"/>
+              </a:rPr>
+              <a:t>each filled dot is one warning sign, from the time series (volume, share, trend, forecast, alerts) and the release test. Three or more signs make an app High priority: Swiggy (4), Flipkart, Amazon and Paytm (3 each); the last column names the complaint topic to fix first.</a:t>
+            </a:r>
+          </a:p>
+        </p:txBody>
+      </p:sp>
+      <p:sp>
+        <p:nvSpPr>
+          <p:cNvPr id="6" name="">
+            <a:extLst>
+              <a:ext uri="{FF2B5EF4-FFF2-40B4-BE49-F238E27FC236}">
+                <a16:creationId xmlns:a16="http://schemas.microsoft.com/office/drawing/2014/main" id="{CD68E0AF-687D-43C3-AA48-711AD2792F7A}"/>
+              </a:ext>
+            </a:extLst>
+          </p:cNvPr>
+          <p:cNvSpPr>
+            <a:spLocks noGrp="1"/>
+          </p:cNvSpPr>
+          <p:nvPr/>
+        </p:nvSpPr>
+        <p:spPr>
+          <a:xfrm>
+            <a:off x="685800" y="5817108"/>
+            <a:ext cx="10668000" cy="543559"/>
+          </a:xfrm>
+          <a:prstGeom prst="rect">
+            <a:avLst/>
+          </a:prstGeom>
+          <a:noFill/>
+          <a:ln w="0">
+            <a:noFill/>
+            <a:prstDash val="solid"/>
+          </a:ln>
+        </p:spPr>
+        <p:txBody>
+          <a:bodyPr wrap="square" lIns="0" rIns="0"/>
+          <a:lstStyle>
+            <a:defPPr>
+              <a:defRPr sz="2025" b="0">
+                <a:solidFill>
+                  <a:srgbClr val="233247"/>
+                </a:solidFill>
+                <a:latin typeface="Arial"/>
+                <a:ea typeface="Arial"/>
+                <a:cs typeface="Arial"/>
+              </a:defRPr>
+            </a:defPPr>
+          </a:lstStyle>
+          <a:p>
+            <a:pPr>
+              <a:defRPr sz="2025" b="0">
+                <a:solidFill>
+                  <a:srgbClr val="233247"/>
+                </a:solidFill>
+                <a:latin typeface="Arial"/>
+                <a:ea typeface="Arial"/>
+                <a:cs typeface="Arial"/>
+              </a:defRPr>
+            </a:pPr>
+            <a:r>
+              <a:rPr sz="1400" b="1">
+                <a:solidFill>
+                  <a:srgbClr val="233247"/>
+                </a:solidFill>
+                <a:latin typeface="Arial"/>
+                <a:ea typeface="Arial"/>
+                <a:cs typeface="Arial"/>
+              </a:rPr>
+              <a:t>Traceable: </a:t>
+            </a:r>
+            <a:r>
+              <a:rPr sz="1400" b="0">
+                <a:solidFill>
+                  <a:srgbClr val="233247"/>
+                </a:solidFill>
+                <a:latin typeface="Arial"/>
+                <a:ea typeface="Arial"/>
+                <a:cs typeface="Arial"/>
+              </a:rPr>
+              <a:t>every sign is one number from one stage with a fixed threshold (median, 10%, 5%, 5 days), so a manager can check it by hand; the 65 recommendations follow from these signs and the complaint topics.</a:t>
+            </a:r>
+          </a:p>
+        </p:txBody>
+      </p:sp>
+      <p:pic>
+        <p:nvPicPr>
+          <p:cNvPr id="8" name="Picture 7" descr="ci_01_priority_overview.png"/>
+          <p:cNvPicPr>
+            <a:picLocks noChangeAspect="1"/>
+          </p:cNvPicPr>
+          <p:nvPr/>
+        </p:nvPicPr>
+        <p:blipFill>
+          <a:blip r:embed="rId4"/>
+          <a:srcRect t="21505"/>
+          <a:stretch>
+            <a:fillRect/>
+          </a:stretch>
+        </p:blipFill>
+        <p:spPr>
+          <a:xfrm>
+            <a:off x="2145768" y="1700000"/>
+            <a:ext cx="7895890" cy="3202222"/>
+          </a:xfrm>
+          <a:prstGeom prst="rect">
+            <a:avLst/>
+          </a:prstGeom>
+        </p:spPr>
+      </p:pic>
+    </p:spTree>
+  </p:cSld>
+  <p:clrMapOvr>
+    <a:masterClrMapping/>
+  </p:clrMapOvr>
+</p:sld>
+</file>
+
+<file path=ppt/slides/slide21.xml><?xml version="1.0" encoding="utf-8"?>
+<p:sld xmlns:p="http://schemas.openxmlformats.org/presentationml/2006/main">
+  <p:cSld>
+    <p:bg>
+      <p:bgPr>
+        <a:solidFill xmlns:a="http://schemas.openxmlformats.org/drawingml/2006/main">
+          <a:srgbClr val="FFFFFF"/>
+        </a:solidFill>
+      </p:bgPr>
+    </p:bg>
+    <p:spTree>
+      <p:nvGrpSpPr>
+        <p:cNvPr id="1" name=""/>
+        <p:cNvGrpSpPr/>
+        <p:nvPr/>
+      </p:nvGrpSpPr>
+      <p:grpSpPr>
+        <a:xfrm xmlns:a="http://schemas.openxmlformats.org/drawingml/2006/main"/>
+      </p:grpSpPr>
+      <p:sp>
+        <p:nvSpPr>
+          <p:cNvPr id="8" name="">
+            <a:extLst xmlns:a="http://schemas.openxmlformats.org/drawingml/2006/main">
+              <a:ext uri="{FF2B5EF4-FFF2-40B4-BE49-F238E27FC236}">
+                <a16:creationId xmlns:a16="http://schemas.microsoft.com/office/drawing/2014/main" id="{A83E0F18-477D-4762-971E-5CA6A560D37E}"/>
+              </a:ext>
+            </a:extLst>
+          </p:cNvPr>
+          <p:cNvSpPr>
+            <a:spLocks xmlns:a="http://schemas.openxmlformats.org/drawingml/2006/main" noGrp="1"/>
+          </p:cNvSpPr>
+          <p:nvPr/>
+        </p:nvSpPr>
+        <p:spPr>
+          <a:xfrm xmlns:a="http://schemas.openxmlformats.org/drawingml/2006/main">
+            <a:off x="609600" y="342900"/>
+            <a:ext cx="10477500" cy="285750"/>
+          </a:xfrm>
+          <a:prstGeom xmlns:a="http://schemas.openxmlformats.org/drawingml/2006/main" prst="rect">
+            <a:avLst/>
+          </a:prstGeom>
+          <a:noFill xmlns:a="http://schemas.openxmlformats.org/drawingml/2006/main"/>
+          <a:ln xmlns:a="http://schemas.openxmlformats.org/drawingml/2006/main" w="0">
+            <a:noFill/>
+            <a:prstDash val="solid"/>
+          </a:ln>
+        </p:spPr>
+        <p:txBody>
+          <a:bodyPr xmlns:a="http://schemas.openxmlformats.org/drawingml/2006/main"/>
+          <a:lstStyle xmlns:a="http://schemas.openxmlformats.org/drawingml/2006/main">
+            <a:defPPr>
+              <a:defRPr sz="1350" b="1">
+                <a:solidFill>
+                  <a:srgbClr val="157A80"/>
+                </a:solidFill>
+                <a:latin typeface="Arial"/>
+                <a:ea typeface="Arial"/>
+                <a:cs typeface="Arial"/>
+              </a:defRPr>
+            </a:defPPr>
+          </a:lstStyle>
+          <a:p xmlns:a="http://schemas.openxmlformats.org/drawingml/2006/main">
+            <a:pPr>
+              <a:defRPr sz="1350" b="1">
+                <a:solidFill>
+                  <a:srgbClr val="157A80"/>
+                </a:solidFill>
+                <a:latin typeface="Arial"/>
+                <a:ea typeface="Arial"/>
+                <a:cs typeface="Arial"/>
+              </a:defRPr>
+            </a:pPr>
+            <a:r>
+              <a:rPr sz="1350" b="1">
+                <a:solidFill>
+                  <a:srgbClr val="157A80"/>
+                </a:solidFill>
+                <a:latin typeface="Arial"/>
+                <a:ea typeface="Arial"/>
+                <a:cs typeface="Arial"/>
+              </a:rPr>
+              <a:t>MANDATORY LIVE DEMONSTRATION</a:t>
+            </a:r>
+          </a:p>
+        </p:txBody>
+      </p:sp>
+      <p:sp>
+        <p:nvSpPr>
+          <p:cNvPr id="2" name="">
+            <a:extLst xmlns:a="http://schemas.openxmlformats.org/drawingml/2006/main">
+              <a:ext uri="{FF2B5EF4-FFF2-40B4-BE49-F238E27FC236}">
+                <a16:creationId xmlns:a16="http://schemas.microsoft.com/office/drawing/2014/main" id="{8C0E321D-DD7C-40A2-8CD0-AAF7C8D32984}"/>
+              </a:ext>
+            </a:extLst>
+          </p:cNvPr>
+          <p:cNvSpPr>
+            <a:spLocks xmlns:a="http://schemas.openxmlformats.org/drawingml/2006/main" noGrp="1"/>
+          </p:cNvSpPr>
+          <p:nvPr/>
+        </p:nvSpPr>
+        <p:spPr>
+          <a:xfrm xmlns:a="http://schemas.openxmlformats.org/drawingml/2006/main">
+            <a:off x="609600" y="838200"/>
+            <a:ext cx="10972800" cy="857250"/>
+          </a:xfrm>
+          <a:prstGeom xmlns:a="http://schemas.openxmlformats.org/drawingml/2006/main" prst="rect">
+            <a:avLst/>
+          </a:prstGeom>
+          <a:noFill xmlns:a="http://schemas.openxmlformats.org/drawingml/2006/main"/>
+          <a:ln xmlns:a="http://schemas.openxmlformats.org/drawingml/2006/main" w="0">
+            <a:noFill/>
+            <a:prstDash val="solid"/>
+          </a:ln>
+        </p:spPr>
+        <p:txBody>
+          <a:bodyPr xmlns:a="http://schemas.openxmlformats.org/drawingml/2006/main"/>
+          <a:lstStyle xmlns:a="http://schemas.openxmlformats.org/drawingml/2006/main">
+            <a:defPPr>
+              <a:defRPr sz="3150" b="1">
+                <a:solidFill>
+                  <a:srgbClr val="142D4E"/>
+                </a:solidFill>
+                <a:latin typeface="Arial"/>
+                <a:ea typeface="Arial"/>
+                <a:cs typeface="Arial"/>
+              </a:defRPr>
+            </a:defPPr>
+          </a:lstStyle>
+          <a:p xmlns:a="http://schemas.openxmlformats.org/drawingml/2006/main">
+            <a:pPr>
+              <a:defRPr sz="3150" b="1">
+                <a:solidFill>
+                  <a:srgbClr val="142D4E"/>
+                </a:solidFill>
+                <a:latin typeface="Arial"/>
+                <a:ea typeface="Arial"/>
+                <a:cs typeface="Arial"/>
+              </a:defRPr>
+            </a:pPr>
+            <a:r>
+              <a:rPr sz="3150" b="1">
+                <a:solidFill>
+                  <a:srgbClr val="142D4E"/>
+                </a:solidFill>
+                <a:latin typeface="Arial"/>
+                <a:ea typeface="Arial"/>
+                <a:cs typeface="Arial"/>
+              </a:rPr>
+              <a:t>Interactive dashboard or website</a:t>
+            </a:r>
+          </a:p>
+        </p:txBody>
+      </p:sp>
+      <p:sp>
+        <p:nvSpPr>
+          <p:cNvPr id="3" name="">
+            <a:extLst xmlns:a="http://schemas.openxmlformats.org/drawingml/2006/main">
+              <a:ext uri="{FF2B5EF4-FFF2-40B4-BE49-F238E27FC236}">
+                <a16:creationId xmlns:a16="http://schemas.microsoft.com/office/drawing/2014/main" id="{740C65A0-85F7-48CD-A9F0-1A88D47161BA}"/>
+              </a:ext>
+            </a:extLst>
+          </p:cNvPr>
+          <p:cNvSpPr>
+            <a:spLocks xmlns:a="http://schemas.openxmlformats.org/drawingml/2006/main" noGrp="1"/>
+          </p:cNvSpPr>
+          <p:nvPr/>
+        </p:nvSpPr>
+        <p:spPr>
+          <a:xfrm xmlns:a="http://schemas.openxmlformats.org/drawingml/2006/main">
+            <a:off x="10953750" y="6343650"/>
+            <a:ext cx="619125" cy="238125"/>
+          </a:xfrm>
+          <a:prstGeom xmlns:a="http://schemas.openxmlformats.org/drawingml/2006/main" prst="rect">
+            <a:avLst/>
+          </a:prstGeom>
+          <a:noFill xmlns:a="http://schemas.openxmlformats.org/drawingml/2006/main"/>
+          <a:ln xmlns:a="http://schemas.openxmlformats.org/drawingml/2006/main" w="0">
+            <a:noFill/>
+            <a:prstDash val="solid"/>
+          </a:ln>
+        </p:spPr>
+        <p:txBody>
+          <a:bodyPr xmlns:a="http://schemas.openxmlformats.org/drawingml/2006/main"/>
+          <a:lstStyle xmlns:a="http://schemas.openxmlformats.org/drawingml/2006/main">
+            <a:defPPr>
+              <a:defRPr sz="1200" b="0">
+                <a:solidFill>
+                  <a:srgbClr val="66758A"/>
+                </a:solidFill>
+                <a:latin typeface="Arial"/>
+                <a:ea typeface="Arial"/>
+                <a:cs typeface="Arial"/>
+              </a:defRPr>
+            </a:defPPr>
+          </a:lstStyle>
+          <a:p xmlns:a="http://schemas.openxmlformats.org/drawingml/2006/main">
+            <a:pPr>
+              <a:defRPr sz="1200" b="0">
+                <a:solidFill>
+                  <a:srgbClr val="66758A"/>
+                </a:solidFill>
+                <a:latin typeface="Arial"/>
+                <a:ea typeface="Arial"/>
+                <a:cs typeface="Arial"/>
+              </a:defRPr>
+            </a:pPr>
+            <a:r>
+              <a:rPr sz="1200" b="0">
+                <a:solidFill>
+                  <a:srgbClr val="66758A"/>
+                </a:solidFill>
+                <a:latin typeface="Arial"/>
+                <a:ea typeface="Arial"/>
+                <a:cs typeface="Arial"/>
+              </a:rPr>
+              <a:t>21</a:t>
             </a:r>
           </a:p>
         </p:txBody>
@@ -10018,7 +13744,7 @@
 </p:sld>
 </file>
 
-<file path=ppt/slides/slide16.xml><?xml version="1.0" encoding="utf-8"?>
+<file path=ppt/slides/slide22.xml><?xml version="1.0" encoding="utf-8"?>
 <p:sld xmlns:p="http://schemas.openxmlformats.org/presentationml/2006/main">
   <p:cSld>
     <p:bg>
@@ -10233,7 +13959,7 @@
                 <a:ea typeface="Arial"/>
                 <a:cs typeface="Arial"/>
               </a:rPr>
-              <a:t>16</a:t>
+              <a:t>22</a:t>
             </a:r>
           </a:p>
         </p:txBody>
@@ -11109,7 +14835,7 @@
 </p:sld>
 </file>
 
-<file path=ppt/slides/slide17.xml><?xml version="1.0" encoding="utf-8"?>
+<file path=ppt/slides/slide23.xml><?xml version="1.0" encoding="utf-8"?>
 <p:sld xmlns:p="http://schemas.openxmlformats.org/presentationml/2006/main">
   <p:cSld>
     <p:bg>
@@ -11324,7 +15050,7 @@
                 <a:ea typeface="Arial"/>
                 <a:cs typeface="Arial"/>
               </a:rPr>
-              <a:t>17</a:t>
+              <a:t>23</a:t>
             </a:r>
           </a:p>
         </p:txBody>
@@ -11480,7 +15206,7 @@
                 <ns1:ea typeface="Arial"/>
                 <ns1:cs typeface="Arial"/>
               </ns1:rPr>
-              <ns1:t>the biggest fixes are refunds, returns and failed transfers; Paytm 10.84.5 explains the September rise; Swiggy, Flipkart, Amazon and Paytm come first; next week's complaint volume is forecast with an interval.</ns1:t>
+              <ns1:t>the biggest fixes are refunds, returns and payment problems; Paytm 10.84.5 explains the September rise; Swiggy, Flipkart, Amazon and Paytm come first; next week's complaint volume is forecast with an interval.</ns1:t>
             </ns1:r>
           </ns1:p>
         </p:txBody>
@@ -11651,7 +15377,7 @@
 </p:sld>
 </file>
 
-<file path=ppt/slides/slide18.xml><?xml version="1.0" encoding="utf-8"?>
+<file path=ppt/slides/slide24.xml><?xml version="1.0" encoding="utf-8"?>
 <p:sld xmlns:a="http://schemas.openxmlformats.org/drawingml/2006/main" xmlns:p="http://schemas.openxmlformats.org/presentationml/2006/main" xmlns:r="http://schemas.openxmlformats.org/officeDocument/2006/relationships">
   <p:cSld>
     <p:spTree>
@@ -12140,7 +15866,7 @@
 </p:sld>
 </file>
 
-<file path=ppt/slides/slide19.xml><?xml version="1.0" encoding="utf-8"?>
+<file path=ppt/slides/slide25.xml><?xml version="1.0" encoding="utf-8"?>
 <p:sld xmlns:a="http://schemas.openxmlformats.org/drawingml/2006/main" xmlns:p="http://schemas.openxmlformats.org/presentationml/2006/main" xmlns:r="http://schemas.openxmlformats.org/officeDocument/2006/relationships">
   <p:cSld>
     <p:spTree>
@@ -12466,549 +16192,7 @@
 </p:sld>
 </file>
 
-<file path=ppt/slides/slide2.xml><?xml version="1.0" encoding="utf-8"?>
-<p:sld xmlns:p="http://schemas.openxmlformats.org/presentationml/2006/main">
-  <p:cSld>
-    <p:bg>
-      <p:bgPr>
-        <a:solidFill xmlns:a="http://schemas.openxmlformats.org/drawingml/2006/main">
-          <a:srgbClr val="FFFFFF"/>
-        </a:solidFill>
-      </p:bgPr>
-    </p:bg>
-    <p:spTree>
-      <p:nvGrpSpPr>
-        <p:cNvPr id="1" name=""/>
-        <p:cNvGrpSpPr/>
-        <p:nvPr/>
-      </p:nvGrpSpPr>
-      <p:grpSpPr>
-        <a:xfrm xmlns:a="http://schemas.openxmlformats.org/drawingml/2006/main"/>
-      </p:grpSpPr>
-      <p:sp>
-        <p:nvSpPr>
-          <p:cNvPr id="8" name="">
-            <a:extLst xmlns:a="http://schemas.openxmlformats.org/drawingml/2006/main">
-              <a:ext uri="{FF2B5EF4-FFF2-40B4-BE49-F238E27FC236}">
-                <a16:creationId xmlns:a16="http://schemas.microsoft.com/office/drawing/2014/main" id="{6E7343E7-897E-4DAC-BDC5-EAE42CCBBA13}"/>
-              </a:ext>
-            </a:extLst>
-          </p:cNvPr>
-          <p:cNvSpPr>
-            <a:spLocks xmlns:a="http://schemas.openxmlformats.org/drawingml/2006/main" noGrp="1"/>
-          </p:cNvSpPr>
-          <p:nvPr/>
-        </p:nvSpPr>
-        <p:spPr>
-          <a:xfrm xmlns:a="http://schemas.openxmlformats.org/drawingml/2006/main">
-            <a:off x="609600" y="342900"/>
-            <a:ext cx="10477500" cy="285750"/>
-          </a:xfrm>
-          <a:prstGeom xmlns:a="http://schemas.openxmlformats.org/drawingml/2006/main" prst="rect">
-            <a:avLst/>
-          </a:prstGeom>
-          <a:noFill xmlns:a="http://schemas.openxmlformats.org/drawingml/2006/main"/>
-          <a:ln xmlns:a="http://schemas.openxmlformats.org/drawingml/2006/main" w="0">
-            <a:noFill/>
-            <a:prstDash val="solid"/>
-          </a:ln>
-        </p:spPr>
-        <p:txBody>
-          <a:bodyPr xmlns:a="http://schemas.openxmlformats.org/drawingml/2006/main"/>
-          <a:lstStyle xmlns:a="http://schemas.openxmlformats.org/drawingml/2006/main">
-            <a:defPPr>
-              <a:defRPr sz="1350" b="1">
-                <a:solidFill>
-                  <a:srgbClr val="157A80"/>
-                </a:solidFill>
-                <a:latin typeface="Arial"/>
-                <a:ea typeface="Arial"/>
-                <a:cs typeface="Arial"/>
-              </a:defRPr>
-            </a:defPPr>
-          </a:lstStyle>
-          <a:p xmlns:a="http://schemas.openxmlformats.org/drawingml/2006/main">
-            <a:pPr>
-              <a:defRPr sz="1350" b="1">
-                <a:solidFill>
-                  <a:srgbClr val="157A80"/>
-                </a:solidFill>
-                <a:latin typeface="Arial"/>
-                <a:ea typeface="Arial"/>
-                <a:cs typeface="Arial"/>
-              </a:defRPr>
-            </a:pPr>
-            <a:r>
-              <a:rPr sz="1350" b="1">
-                <a:solidFill>
-                  <a:srgbClr val="157A80"/>
-                </a:solidFill>
-                <a:latin typeface="Arial"/>
-                <a:ea typeface="Arial"/>
-                <a:cs typeface="Arial"/>
-              </a:rPr>
-              <a:t>PROJECT OVERVIEW</a:t>
-            </a:r>
-          </a:p>
-        </p:txBody>
-      </p:sp>
-      <p:sp>
-        <p:nvSpPr>
-          <p:cNvPr id="2" name="">
-            <a:extLst xmlns:a="http://schemas.openxmlformats.org/drawingml/2006/main">
-              <a:ext uri="{FF2B5EF4-FFF2-40B4-BE49-F238E27FC236}">
-                <a16:creationId xmlns:a16="http://schemas.microsoft.com/office/drawing/2014/main" id="{FED1F470-9F33-4ECE-9801-5FEC2B16012C}"/>
-              </a:ext>
-            </a:extLst>
-          </p:cNvPr>
-          <p:cNvSpPr>
-            <a:spLocks xmlns:a="http://schemas.openxmlformats.org/drawingml/2006/main" noGrp="1"/>
-          </p:cNvSpPr>
-          <p:nvPr/>
-        </p:nvSpPr>
-        <p:spPr>
-          <a:xfrm xmlns:a="http://schemas.openxmlformats.org/drawingml/2006/main">
-            <a:off x="609600" y="838200"/>
-            <a:ext cx="10972800" cy="857250"/>
-          </a:xfrm>
-          <a:prstGeom xmlns:a="http://schemas.openxmlformats.org/drawingml/2006/main" prst="rect">
-            <a:avLst/>
-          </a:prstGeom>
-          <a:noFill xmlns:a="http://schemas.openxmlformats.org/drawingml/2006/main"/>
-          <a:ln xmlns:a="http://schemas.openxmlformats.org/drawingml/2006/main" w="0">
-            <a:noFill/>
-            <a:prstDash val="solid"/>
-          </a:ln>
-        </p:spPr>
-        <p:txBody>
-          <a:bodyPr xmlns:a="http://schemas.openxmlformats.org/drawingml/2006/main"/>
-          <a:lstStyle xmlns:a="http://schemas.openxmlformats.org/drawingml/2006/main">
-            <a:defPPr>
-              <a:defRPr sz="3150" b="1">
-                <a:solidFill>
-                  <a:srgbClr val="142D4E"/>
-                </a:solidFill>
-                <a:latin typeface="Arial"/>
-                <a:ea typeface="Arial"/>
-                <a:cs typeface="Arial"/>
-              </a:defRPr>
-            </a:defPPr>
-          </a:lstStyle>
-          <a:p xmlns:a="http://schemas.openxmlformats.org/drawingml/2006/main">
-            <a:pPr>
-              <a:defRPr sz="3150" b="1">
-                <a:solidFill>
-                  <a:srgbClr val="142D4E"/>
-                </a:solidFill>
-                <a:latin typeface="Arial"/>
-                <a:ea typeface="Arial"/>
-                <a:cs typeface="Arial"/>
-              </a:defRPr>
-            </a:pPr>
-            <a:r>
-              <a:rPr sz="3150" b="1">
-                <a:solidFill>
-                  <a:srgbClr val="142D4E"/>
-                </a:solidFill>
-                <a:latin typeface="Arial"/>
-                <a:ea typeface="Arial"/>
-                <a:cs typeface="Arial"/>
-              </a:rPr>
-              <a:t>Business problem and objectives</a:t>
-            </a:r>
-          </a:p>
-        </p:txBody>
-      </p:sp>
-      <p:sp>
-        <p:nvSpPr>
-          <p:cNvPr id="3" name="">
-            <a:extLst xmlns:a="http://schemas.openxmlformats.org/drawingml/2006/main">
-              <a:ext uri="{FF2B5EF4-FFF2-40B4-BE49-F238E27FC236}">
-                <a16:creationId xmlns:a16="http://schemas.microsoft.com/office/drawing/2014/main" id="{1C59113F-EFA7-4894-9DAC-CFF6316D49B3}"/>
-              </a:ext>
-            </a:extLst>
-          </p:cNvPr>
-          <p:cNvSpPr>
-            <a:spLocks xmlns:a="http://schemas.openxmlformats.org/drawingml/2006/main" noGrp="1"/>
-          </p:cNvSpPr>
-          <p:nvPr/>
-        </p:nvSpPr>
-        <p:spPr>
-          <a:xfrm xmlns:a="http://schemas.openxmlformats.org/drawingml/2006/main">
-            <a:off x="10953750" y="6343650"/>
-            <a:ext cx="619125" cy="238125"/>
-          </a:xfrm>
-          <a:prstGeom xmlns:a="http://schemas.openxmlformats.org/drawingml/2006/main" prst="rect">
-            <a:avLst/>
-          </a:prstGeom>
-          <a:noFill xmlns:a="http://schemas.openxmlformats.org/drawingml/2006/main"/>
-          <a:ln xmlns:a="http://schemas.openxmlformats.org/drawingml/2006/main" w="0">
-            <a:noFill/>
-            <a:prstDash val="solid"/>
-          </a:ln>
-        </p:spPr>
-        <p:txBody>
-          <a:bodyPr xmlns:a="http://schemas.openxmlformats.org/drawingml/2006/main"/>
-          <a:lstStyle xmlns:a="http://schemas.openxmlformats.org/drawingml/2006/main">
-            <a:defPPr>
-              <a:defRPr sz="1200" b="0">
-                <a:solidFill>
-                  <a:srgbClr val="66758A"/>
-                </a:solidFill>
-                <a:latin typeface="Arial"/>
-                <a:ea typeface="Arial"/>
-                <a:cs typeface="Arial"/>
-              </a:defRPr>
-            </a:defPPr>
-          </a:lstStyle>
-          <a:p xmlns:a="http://schemas.openxmlformats.org/drawingml/2006/main">
-            <a:pPr>
-              <a:defRPr sz="1200" b="0">
-                <a:solidFill>
-                  <a:srgbClr val="66758A"/>
-                </a:solidFill>
-                <a:latin typeface="Arial"/>
-                <a:ea typeface="Arial"/>
-                <a:cs typeface="Arial"/>
-              </a:defRPr>
-            </a:pPr>
-            <a:r>
-              <a:rPr sz="1200" b="0">
-                <a:solidFill>
-                  <a:srgbClr val="66758A"/>
-                </a:solidFill>
-                <a:latin typeface="Arial"/>
-                <a:ea typeface="Arial"/>
-                <a:cs typeface="Arial"/>
-              </a:rPr>
-              <a:t>02</a:t>
-            </a:r>
-          </a:p>
-        </p:txBody>
-      </p:sp>
-      <p:sp>
-        <p:nvSpPr>
-          <p:cNvPr id="4" name="">
-            <a:extLst xmlns:a="http://schemas.openxmlformats.org/drawingml/2006/main">
-              <a:ext uri="{FF2B5EF4-FFF2-40B4-BE49-F238E27FC236}">
-                <a16:creationId xmlns:a16="http://schemas.microsoft.com/office/drawing/2014/main" id="{EE0745E4-06FC-4A61-A5EC-5ACBCB04D1A2}"/>
-              </a:ext>
-            </a:extLst>
-          </p:cNvPr>
-          <p:cNvSpPr>
-            <a:spLocks xmlns:a="http://schemas.openxmlformats.org/drawingml/2006/main" noGrp="1"/>
-          </p:cNvSpPr>
-          <p:nvPr/>
-        </p:nvSpPr>
-        <p:spPr>
-          <a:xfrm xmlns:a="http://schemas.openxmlformats.org/drawingml/2006/main">
-            <a:off x="685800" y="1874519"/>
-            <a:ext cx="10668000" cy="899922"/>
-          </a:xfrm>
-          <a:prstGeom xmlns:a="http://schemas.openxmlformats.org/drawingml/2006/main" prst="rect">
-            <a:avLst/>
-          </a:prstGeom>
-          <a:noFill xmlns:a="http://schemas.openxmlformats.org/drawingml/2006/main"/>
-          <a:ln xmlns:a="http://schemas.openxmlformats.org/drawingml/2006/main" w="0">
-            <a:noFill/>
-            <a:prstDash val="solid"/>
-          </a:ln>
-        </p:spPr>
-        <p:txBody>
-          <a:bodyPr xmlns:a="http://schemas.openxmlformats.org/drawingml/2006/main" wrap="square" lIns="0" rIns="0"/>
-          <a:lstStyle xmlns:a="http://schemas.openxmlformats.org/drawingml/2006/main">
-            <a:defPPr>
-              <a:defRPr sz="2025" b="0">
-                <a:solidFill>
-                  <a:srgbClr val="233247"/>
-                </a:solidFill>
-                <a:latin typeface="Arial"/>
-                <a:ea typeface="Arial"/>
-                <a:cs typeface="Arial"/>
-              </a:defRPr>
-            </a:defPPr>
-          </a:lstStyle>
-          <ns0:p xmlns:ns0="http://schemas.openxmlformats.org/drawingml/2006/main">
-            <ns0:pPr>
-              <ns0:defRPr sz="2025" b="0">
-                <ns0:solidFill>
-                  <ns0:srgbClr val="233247"/>
-                </ns0:solidFill>
-                <ns0:latin typeface="Arial"/>
-                <ns0:ea typeface="Arial"/>
-                <ns0:cs typeface="Arial"/>
-              </ns0:defRPr>
-            </ns0:pPr>
-            <ns0:r>
-              <ns0:rPr sz="1700" b="1">
-                <ns0:solidFill>
-                  <ns0:srgbClr val="233247"/>
-                </ns0:solidFill>
-                <ns0:latin typeface="Arial"/>
-                <ns0:ea typeface="Arial"/>
-                <ns0:cs typeface="Arial"/>
-              </ns0:rPr>
-              <ns0:t>Business problem: </ns0:t>
-            </ns0:r>
-            <ns0:r>
-              <ns0:rPr sz="1700" b="0">
-                <ns0:solidFill>
-                  <ns0:srgbClr val="233247"/>
-                </ns0:solidFill>
-                <ns0:latin typeface="Arial"/>
-                <ns0:ea typeface="Arial"/>
-                <ns0:cs typeface="Arial"/>
-              </ns0:rPr>
-              <ns0:t>Product and support teams of 11 Indian consumer apps (Swiggy, Flipkart, Paytm and others) receive 117 to 1,539 Play Store reviews a day. Failed payments, refunds, late deliveries and bad updates are noticed late, because nobody can read them all.</ns0:t>
-            </ns0:r>
-          </ns0:p>
-        </p:txBody>
-      </p:sp>
-      <p:sp>
-        <p:nvSpPr>
-          <p:cNvPr id="5" name="">
-            <a:extLst xmlns:a="http://schemas.openxmlformats.org/drawingml/2006/main">
-              <a:ext uri="{FF2B5EF4-FFF2-40B4-BE49-F238E27FC236}">
-                <a16:creationId xmlns:a16="http://schemas.microsoft.com/office/drawing/2014/main" id="{5B7A7B16-567A-4CE1-8454-F080C301E37C}"/>
-              </a:ext>
-            </a:extLst>
-          </p:cNvPr>
-          <p:cNvSpPr>
-            <a:spLocks xmlns:a="http://schemas.openxmlformats.org/drawingml/2006/main" noGrp="1"/>
-          </p:cNvSpPr>
-          <p:nvPr/>
-        </p:nvSpPr>
-        <p:spPr>
-          <a:xfrm xmlns:a="http://schemas.openxmlformats.org/drawingml/2006/main">
-            <a:off x="685800" y="3046349"/>
-            <a:ext cx="10668000" cy="636523"/>
-          </a:xfrm>
-          <a:prstGeom xmlns:a="http://schemas.openxmlformats.org/drawingml/2006/main" prst="rect">
-            <a:avLst/>
-          </a:prstGeom>
-          <a:noFill xmlns:a="http://schemas.openxmlformats.org/drawingml/2006/main"/>
-          <a:ln xmlns:a="http://schemas.openxmlformats.org/drawingml/2006/main" w="0">
-            <a:noFill/>
-            <a:prstDash val="solid"/>
-          </a:ln>
-        </p:spPr>
-        <p:txBody>
-          <a:bodyPr xmlns:a="http://schemas.openxmlformats.org/drawingml/2006/main" wrap="square" lIns="0" rIns="0"/>
-          <a:lstStyle xmlns:a="http://schemas.openxmlformats.org/drawingml/2006/main">
-            <a:defPPr>
-              <a:defRPr sz="2025" b="0">
-                <a:solidFill>
-                  <a:srgbClr val="233247"/>
-                </a:solidFill>
-                <a:latin typeface="Arial"/>
-                <a:ea typeface="Arial"/>
-                <a:cs typeface="Arial"/>
-              </a:defRPr>
-            </a:defPPr>
-          </a:lstStyle>
-          <ns1:p xmlns:ns1="http://schemas.openxmlformats.org/drawingml/2006/main">
-            <ns1:pPr>
-              <ns1:defRPr sz="2025" b="0">
-                <ns1:solidFill>
-                  <ns1:srgbClr val="233247"/>
-                </ns1:solidFill>
-                <ns1:latin typeface="Arial"/>
-                <ns1:ea typeface="Arial"/>
-                <ns1:cs typeface="Arial"/>
-              </ns1:defRPr>
-            </ns1:pPr>
-            <ns1:r>
-              <ns1:rPr sz="1700" b="1">
-                <ns1:solidFill>
-                  <ns1:srgbClr val="233247"/>
-                </ns1:solidFill>
-                <ns1:latin typeface="Arial"/>
-                <ns1:ea typeface="Arial"/>
-                <ns1:cs typeface="Arial"/>
-              </ns1:rPr>
-              <ns1:t>Objectives: </ns1:t>
-            </ns1:r>
-            <ns1:r>
-              <ns1:rPr sz="1700" b="0">
-                <ns1:solidFill>
-                  <ns1:srgbClr val="233247"/>
-                </ns1:solidFill>
-                <ns1:latin typeface="Arial"/>
-                <ns1:ea typeface="Arial"/>
-                <ns1:cs typeface="Arial"/>
-              </ns1:rPr>
-              <ns1:t>(1) Flag problem reviews automatically, far above the 19.5% base rate. (2) Find what users complain about, forecast daily 1–2★ reviews per app, and test every app release for harm.</ns1:t>
-            </ns1:r>
-          </ns1:p>
-        </p:txBody>
-      </p:sp>
-      <p:sp>
-        <p:nvSpPr>
-          <p:cNvPr id="6" name="">
-            <a:extLst xmlns:a="http://schemas.openxmlformats.org/drawingml/2006/main">
-              <a:ext uri="{FF2B5EF4-FFF2-40B4-BE49-F238E27FC236}">
-                <a16:creationId xmlns:a16="http://schemas.microsoft.com/office/drawing/2014/main" id="{6A41A58E-E834-43D8-B9AA-B3ECB73E2FE8}"/>
-              </a:ext>
-            </a:extLst>
-          </p:cNvPr>
-          <p:cNvSpPr>
-            <a:spLocks xmlns:a="http://schemas.openxmlformats.org/drawingml/2006/main" noGrp="1"/>
-          </p:cNvSpPr>
-          <p:nvPr/>
-        </p:nvSpPr>
-        <p:spPr>
-          <a:xfrm xmlns:a="http://schemas.openxmlformats.org/drawingml/2006/main">
-            <a:off x="685800" y="3954780"/>
-            <a:ext cx="10668000" cy="636523"/>
-          </a:xfrm>
-          <a:prstGeom xmlns:a="http://schemas.openxmlformats.org/drawingml/2006/main" prst="rect">
-            <a:avLst/>
-          </a:prstGeom>
-          <a:noFill xmlns:a="http://schemas.openxmlformats.org/drawingml/2006/main"/>
-          <a:ln xmlns:a="http://schemas.openxmlformats.org/drawingml/2006/main" w="0">
-            <a:noFill/>
-            <a:prstDash val="solid"/>
-          </a:ln>
-        </p:spPr>
-        <p:txBody>
-          <a:bodyPr xmlns:a="http://schemas.openxmlformats.org/drawingml/2006/main" wrap="square" lIns="0" rIns="0"/>
-          <a:lstStyle xmlns:a="http://schemas.openxmlformats.org/drawingml/2006/main">
-            <a:defPPr>
-              <a:defRPr sz="2025" b="0">
-                <a:solidFill>
-                  <a:srgbClr val="233247"/>
-                </a:solidFill>
-                <a:latin typeface="Arial"/>
-                <a:ea typeface="Arial"/>
-                <a:cs typeface="Arial"/>
-              </a:defRPr>
-            </a:defPPr>
-          </a:lstStyle>
-          <ns2:p xmlns:ns2="http://schemas.openxmlformats.org/drawingml/2006/main">
-            <ns2:pPr>
-              <ns2:defRPr sz="2025" b="0">
-                <ns2:solidFill>
-                  <ns2:srgbClr val="233247"/>
-                </ns2:solidFill>
-                <ns2:latin typeface="Arial"/>
-                <ns2:ea typeface="Arial"/>
-                <ns2:cs typeface="Arial"/>
-              </ns2:defRPr>
-            </ns2:pPr>
-            <ns2:r>
-              <ns2:rPr sz="1700" b="1">
-                <ns2:solidFill>
-                  <ns2:srgbClr val="233247"/>
-                </ns2:solidFill>
-                <ns2:latin typeface="Arial"/>
-                <ns2:ea typeface="Arial"/>
-                <ns2:cs typeface="Arial"/>
-              </ns2:rPr>
-              <ns2:t>Business decision: </ns2:t>
-            </ns2:r>
-            <ns2:r>
-              <ns2:rPr sz="1700" b="0">
-                <ns2:solidFill>
-                  <ns2:srgbClr val="233247"/>
-                </ns2:solidFill>
-                <ns2:latin typeface="Arial"/>
-                <ns2:ea typeface="Arial"/>
-                <ns2:cs typeface="Arial"/>
-              </ns2:rPr>
-              <ns2:t>Which app, complaint and release to fix first, and how much support capacity to plan for next week.</ns2:t>
-            </ns2:r>
-          </ns2:p>
-        </p:txBody>
-      </p:sp>
-      <p:sp>
-        <p:nvSpPr>
-          <p:cNvPr id="7" name="">
-            <a:extLst xmlns:a="http://schemas.openxmlformats.org/drawingml/2006/main">
-              <a:ext uri="{FF2B5EF4-FFF2-40B4-BE49-F238E27FC236}">
-                <a16:creationId xmlns:a16="http://schemas.microsoft.com/office/drawing/2014/main" id="{A95CB975-5F85-44EA-9A3E-9E1BBD5AC1A0}"/>
-              </a:ext>
-            </a:extLst>
-          </p:cNvPr>
-          <p:cNvSpPr>
-            <a:spLocks xmlns:a="http://schemas.openxmlformats.org/drawingml/2006/main" noGrp="1"/>
-          </p:cNvSpPr>
-          <p:nvPr/>
-        </p:nvSpPr>
-        <p:spPr>
-          <a:xfrm xmlns:a="http://schemas.openxmlformats.org/drawingml/2006/main">
-            <a:off x="685800" y="4863211"/>
-            <a:ext cx="10668000" cy="899922"/>
-          </a:xfrm>
-          <a:prstGeom xmlns:a="http://schemas.openxmlformats.org/drawingml/2006/main" prst="rect">
-            <a:avLst/>
-          </a:prstGeom>
-          <a:noFill xmlns:a="http://schemas.openxmlformats.org/drawingml/2006/main"/>
-          <a:ln xmlns:a="http://schemas.openxmlformats.org/drawingml/2006/main" w="0">
-            <a:noFill/>
-            <a:prstDash val="solid"/>
-          </a:ln>
-        </p:spPr>
-        <p:txBody>
-          <a:bodyPr xmlns:a="http://schemas.openxmlformats.org/drawingml/2006/main" wrap="square" lIns="0" rIns="0"/>
-          <a:lstStyle xmlns:a="http://schemas.openxmlformats.org/drawingml/2006/main">
-            <a:defPPr>
-              <a:defRPr sz="2025" b="0">
-                <a:solidFill>
-                  <a:srgbClr val="233247"/>
-                </a:solidFill>
-                <a:latin typeface="Arial"/>
-                <a:ea typeface="Arial"/>
-                <a:cs typeface="Arial"/>
-              </a:defRPr>
-            </a:defPPr>
-          </a:lstStyle>
-          <ns3:p xmlns:ns3="http://schemas.openxmlformats.org/drawingml/2006/main">
-            <ns3:pPr>
-              <ns3:defRPr sz="2025" b="0">
-                <ns3:solidFill>
-                  <ns3:srgbClr val="233247"/>
-                </ns3:solidFill>
-                <ns3:latin typeface="Arial"/>
-                <ns3:ea typeface="Arial"/>
-                <ns3:cs typeface="Arial"/>
-              </ns3:defRPr>
-            </ns3:pPr>
-            <ns3:r>
-              <ns3:rPr sz="1700" b="1">
-                <ns3:solidFill>
-                  <ns3:srgbClr val="233247"/>
-                </ns3:solidFill>
-                <ns3:latin typeface="Arial"/>
-                <ns3:ea typeface="Arial"/>
-                <ns3:cs typeface="Arial"/>
-              </ns3:rPr>
-              <ns3:t>Expected output: </ns3:t>
-            </ns3:r>
-            <ns3:r>
-              <ns3:rPr sz="1700" b="0">
-                <ns3:solidFill>
-                  <ns3:srgbClr val="233247"/>
-                </ns3:solidFill>
-                <ns3:latin typeface="Arial"/>
-                <ns3:ea typeface="Arial"/>
-                <ns3:cs typeface="Arial"/>
-              </ns3:rPr>
-              <ns3:t>A problem-review classifier, complaint topics with sentiment, 4-week forecasts with unusual-day alerts, release verdicts and a per-app priority table with 65 recommendations, all in a live dashboard.</ns3:t>
-            </ns3:r>
-          </ns3:p>
-        </p:txBody>
-      </p:sp>
-    </p:spTree>
-    <p:extLst>
-      <p:ext uri="{BB962C8B-B14F-4D97-AF65-F5344CB8AC3E}">
-        <p14:creationId xmlns:p14="http://schemas.microsoft.com/office/powerpoint/2010/main" val="120750324"/>
-      </p:ext>
-    </p:extLst>
-  </p:cSld>
-</p:sld>
-</file>
-
-<file path=ppt/slides/slide20.xml><?xml version="1.0" encoding="utf-8"?>
+<file path=ppt/slides/slide26.xml><?xml version="1.0" encoding="utf-8"?>
 <p:sld xmlns:a="http://schemas.openxmlformats.org/drawingml/2006/main" xmlns:p="http://schemas.openxmlformats.org/presentationml/2006/main" xmlns:r="http://schemas.openxmlformats.org/officeDocument/2006/relationships">
   <p:cSld>
     <p:spTree>
@@ -13339,7 +16523,7 @@
                 <a:ea typeface="Arial"/>
                 <a:cs typeface="Arial"/>
               </a:rPr>
-              <a:t>Angriest topics: </a:t>
+              <a:t>Most negative: </a:t>
             </a:r>
             <a:r>
               <a:rPr sz="1300" b="0">
@@ -13350,7 +16534,7 @@
                 <a:ea typeface="Arial"/>
                 <a:cs typeface="Arial"/>
               </a:rPr>
-              <a:t>scam allegations (−0.61) and poor product quality (−0.60) in shopping; stale food (−0.44) angers more than late food (−0.29).</a:t>
+              <a:t>the general “worst ever” and “bad” topics (−0.61, −0.59) name no fault; the angriest specific fault is support (−0.40 food, −0.23 payments).</a:t>
             </a:r>
           </a:p>
           <a:p>
@@ -13384,7 +16568,7 @@
                 <a:ea typeface="Arial"/>
                 <a:cs typeface="Arial"/>
               </a:rPr>
-              <a:t>payment app crashes (−0.09) are described factually, so tone is not severity.</a:t>
+              <a:t>‘app or scanner not working’ (−0.09) is described factually, so tone is not severity.</a:t>
             </a:r>
           </a:p>
           <a:p>
@@ -13431,7 +16615,7 @@
 </p:sld>
 </file>
 
-<file path=ppt/slides/slide21.xml><?xml version="1.0" encoding="utf-8"?>
+<file path=ppt/slides/slide27.xml><?xml version="1.0" encoding="utf-8"?>
 <p:sld xmlns:a="http://schemas.openxmlformats.org/drawingml/2006/main" xmlns:p="http://schemas.openxmlformats.org/presentationml/2006/main" xmlns:r="http://schemas.openxmlformats.org/officeDocument/2006/relationships">
   <p:cSld>
     <p:spTree>
@@ -16923,7 +20107,7 @@
                 <ns1:ea typeface="Arial"/>
                 <ns1:cs typeface="Arial"/>
               </ns1:rPr>
-              <ns1:t>text mining uses 167,357 complaint and 166,929 praise reviews with ≥ 3 content words; time series uses daily 1–2★ counts (11 apps × 173 days) and 224 release events. Sample: data/sample/final_dataset_sample.csv (110 rows)</ns1:t>
+              <ns1:t>text mining uses 167,303 complaint and 166,635 praise reviews with ≥ 3 content words; time series uses daily 1–2★ counts (11 apps × 173 days) and 224 release events. Sample: data/sample/final_dataset_sample.csv (110 rows)</ns1:t>
             </ns1:r>
           </ns1:p>
         </p:txBody>
@@ -18181,7 +21365,7 @@
                 <ns0:ea typeface="Arial"/>
                 <ns0:cs typeface="Arial"/>
               </ns0:rPr>
-              <ns0:t>(1) Apps differ widely even within a domain: 54% of Amazon's reviews are 1–2★ vs 10% for Myntra; Swiggy 35% vs Zomato 19%. (2) 91% of 1–2★ reviews that name an issue describe a service problem (support, delivery, refunds, returns), only 7% an app fault.</ns0:t>
+              <ns0:t>(1) Apps differ widely even within a domain: 54% of Amazon's reviews are 1–2★ vs 10% for Myntra; Swiggy 35% vs Zomato 19%. (2) 91% of 1–2★ reviews that name an issue describe a service problem (support, delivery, refunds, returns), only 7% an app fault; payment apps are the exception (38% name an app fault).</ns0:t>
             </ns0:r>
           </ns0:p>
         </p:txBody>
@@ -18274,14 +21458,15 @@
         </p:nvPicPr>
         <p:blipFill>
           <a:blip r:embed="rId3"/>
+          <a:srcRect/>
           <a:stretch>
             <a:fillRect/>
           </a:stretch>
         </p:blipFill>
         <p:spPr>
           <a:xfrm>
-            <a:off x="620267" y="1691640"/>
-            <a:ext cx="5334000" cy="3200400"/>
+            <a:off x="620267" y="1700000"/>
+            <a:ext cx="5383446" cy="3202222"/>
           </a:xfrm>
           <a:prstGeom prst="rect">
             <a:avLst/>
@@ -18303,14 +21488,15 @@
         </p:nvPicPr>
         <p:blipFill>
           <a:blip r:embed="rId4"/>
+          <a:srcRect/>
           <a:stretch>
             <a:fillRect/>
           </a:stretch>
         </p:blipFill>
         <p:spPr>
           <a:xfrm>
-            <a:off x="6172200" y="1808226"/>
-            <a:ext cx="5394960" cy="2967228"/>
+            <a:off x="6183713" y="1700000"/>
+            <a:ext cx="5383446" cy="3202222"/>
           </a:xfrm>
           <a:prstGeom prst="rect">
             <a:avLst/>
@@ -18333,6 +21519,429 @@
 </file>
 
 <file path=ppt/slides/slide8.xml><?xml version="1.0" encoding="utf-8"?>
+<p:sld xmlns:a="http://schemas.openxmlformats.org/drawingml/2006/main" xmlns:p="http://schemas.openxmlformats.org/presentationml/2006/main" xmlns:r="http://schemas.openxmlformats.org/officeDocument/2006/relationships">
+  <p:cSld>
+    <p:spTree>
+      <p:nvGrpSpPr>
+        <p:cNvPr id="1" name=""/>
+        <p:cNvGrpSpPr/>
+        <p:nvPr/>
+      </p:nvGrpSpPr>
+      <p:grpSpPr/>
+      <p:sp>
+        <p:nvSpPr>
+          <p:cNvPr id="7" name="">
+            <a:extLst>
+              <a:ext uri="{FF2B5EF4-FFF2-40B4-BE49-F238E27FC236}">
+                <a16:creationId xmlns:a16="http://schemas.microsoft.com/office/drawing/2014/main" id="{B4CE5281-5814-4291-B8DE-FB11715A86D4}"/>
+              </a:ext>
+            </a:extLst>
+          </p:cNvPr>
+          <p:cNvSpPr>
+            <a:spLocks noGrp="1"/>
+          </p:cNvSpPr>
+          <p:nvPr/>
+        </p:nvSpPr>
+        <p:spPr>
+          <a:xfrm>
+            <a:off x="609600" y="342900"/>
+            <a:ext cx="10477500" cy="285750"/>
+          </a:xfrm>
+          <a:prstGeom prst="rect">
+            <a:avLst/>
+          </a:prstGeom>
+          <a:noFill/>
+          <a:ln w="0">
+            <a:noFill/>
+            <a:prstDash val="solid"/>
+          </a:ln>
+        </p:spPr>
+        <p:txBody>
+          <a:bodyPr/>
+          <a:lstStyle>
+            <a:defPPr>
+              <a:defRPr sz="1350" b="1">
+                <a:solidFill>
+                  <a:srgbClr val="157A80"/>
+                </a:solidFill>
+                <a:latin typeface="Arial"/>
+                <a:ea typeface="Arial"/>
+                <a:cs typeface="Arial"/>
+              </a:defRPr>
+            </a:defPPr>
+          </a:lstStyle>
+          <a:p>
+            <a:pPr>
+              <a:defRPr sz="1350" b="1">
+                <a:solidFill>
+                  <a:srgbClr val="157A80"/>
+                </a:solidFill>
+                <a:latin typeface="Arial"/>
+                <a:ea typeface="Arial"/>
+                <a:cs typeface="Arial"/>
+              </a:defRPr>
+            </a:pPr>
+            <a:r>
+              <a:rPr sz="1350" b="1">
+                <a:solidFill>
+                  <a:srgbClr val="157A80"/>
+                </a:solidFill>
+                <a:latin typeface="Arial"/>
+                <a:ea typeface="Arial"/>
+                <a:cs typeface="Arial"/>
+              </a:rPr>
+              <a:t>UNIT 1</a:t>
+            </a:r>
+          </a:p>
+        </p:txBody>
+      </p:sp>
+      <p:sp>
+        <p:nvSpPr>
+          <p:cNvPr id="2" name="">
+            <a:extLst>
+              <a:ext uri="{FF2B5EF4-FFF2-40B4-BE49-F238E27FC236}">
+                <a16:creationId xmlns:a16="http://schemas.microsoft.com/office/drawing/2014/main" id="{F2D70B92-C245-446F-A6B2-954E4F469C2A}"/>
+              </a:ext>
+            </a:extLst>
+          </p:cNvPr>
+          <p:cNvSpPr>
+            <a:spLocks noGrp="1"/>
+          </p:cNvSpPr>
+          <p:nvPr/>
+        </p:nvSpPr>
+        <p:spPr>
+          <a:xfrm>
+            <a:off x="609600" y="838200"/>
+            <a:ext cx="10972800" cy="857250"/>
+          </a:xfrm>
+          <a:prstGeom prst="rect">
+            <a:avLst/>
+          </a:prstGeom>
+          <a:noFill/>
+          <a:ln w="0">
+            <a:noFill/>
+            <a:prstDash val="solid"/>
+          </a:ln>
+        </p:spPr>
+        <p:txBody>
+          <a:bodyPr/>
+          <a:lstStyle>
+            <a:defPPr>
+              <a:defRPr sz="3150" b="1">
+                <a:solidFill>
+                  <a:srgbClr val="142D4E"/>
+                </a:solidFill>
+                <a:latin typeface="Arial"/>
+                <a:ea typeface="Arial"/>
+                <a:cs typeface="Arial"/>
+              </a:defRPr>
+            </a:defPPr>
+          </a:lstStyle>
+          <a:p>
+            <a:pPr>
+              <a:defRPr sz="3150" b="1">
+                <a:solidFill>
+                  <a:srgbClr val="142D4E"/>
+                </a:solidFill>
+                <a:latin typeface="Arial"/>
+                <a:ea typeface="Arial"/>
+                <a:cs typeface="Arial"/>
+              </a:defRPr>
+            </a:pPr>
+            <a:r>
+              <a:rPr sz="3150" b="1">
+                <a:solidFill>
+                  <a:srgbClr val="142D4E"/>
+                </a:solidFill>
+                <a:latin typeface="Arial"/>
+                <a:ea typeface="Arial"/>
+                <a:cs typeface="Arial"/>
+              </a:rPr>
+              <a:t>Exploratory analysis: what shaped Unit 3</a:t>
+            </a:r>
+          </a:p>
+        </p:txBody>
+      </p:sp>
+      <p:sp>
+        <p:nvSpPr>
+          <p:cNvPr id="3" name="">
+            <a:extLst>
+              <a:ext uri="{FF2B5EF4-FFF2-40B4-BE49-F238E27FC236}">
+                <a16:creationId xmlns:a16="http://schemas.microsoft.com/office/drawing/2014/main" id="{8A76EF40-5FAD-4E83-9187-5FE9CC845698}"/>
+              </a:ext>
+            </a:extLst>
+          </p:cNvPr>
+          <p:cNvSpPr>
+            <a:spLocks noGrp="1"/>
+          </p:cNvSpPr>
+          <p:nvPr/>
+        </p:nvSpPr>
+        <p:spPr>
+          <a:xfrm>
+            <a:off x="10953750" y="6343650"/>
+            <a:ext cx="619125" cy="238125"/>
+          </a:xfrm>
+          <a:prstGeom prst="rect">
+            <a:avLst/>
+          </a:prstGeom>
+          <a:noFill/>
+          <a:ln w="0">
+            <a:noFill/>
+            <a:prstDash val="solid"/>
+          </a:ln>
+        </p:spPr>
+        <p:txBody>
+          <a:bodyPr/>
+          <a:lstStyle>
+            <a:defPPr>
+              <a:defRPr sz="1200" b="0">
+                <a:solidFill>
+                  <a:srgbClr val="66758A"/>
+                </a:solidFill>
+                <a:latin typeface="Arial"/>
+                <a:ea typeface="Arial"/>
+                <a:cs typeface="Arial"/>
+              </a:defRPr>
+            </a:defPPr>
+          </a:lstStyle>
+          <a:p>
+            <a:pPr>
+              <a:defRPr sz="1200" b="0">
+                <a:solidFill>
+                  <a:srgbClr val="66758A"/>
+                </a:solidFill>
+                <a:latin typeface="Arial"/>
+                <a:ea typeface="Arial"/>
+                <a:cs typeface="Arial"/>
+              </a:defRPr>
+            </a:pPr>
+            <a:r>
+              <a:rPr sz="1200" b="0">
+                <a:solidFill>
+                  <a:srgbClr val="66758A"/>
+                </a:solidFill>
+                <a:latin typeface="Arial"/>
+                <a:ea typeface="Arial"/>
+                <a:cs typeface="Arial"/>
+              </a:rPr>
+              <a:t>08</a:t>
+            </a:r>
+          </a:p>
+        </p:txBody>
+      </p:sp>
+      <p:sp>
+        <p:nvSpPr>
+          <p:cNvPr id="5" name="">
+            <a:extLst>
+              <a:ext uri="{FF2B5EF4-FFF2-40B4-BE49-F238E27FC236}">
+                <a16:creationId xmlns:a16="http://schemas.microsoft.com/office/drawing/2014/main" id="{B775F0BD-DAEF-4688-97F4-0C8CC4593B56}"/>
+              </a:ext>
+            </a:extLst>
+          </p:cNvPr>
+          <p:cNvSpPr>
+            <a:spLocks noGrp="1"/>
+          </p:cNvSpPr>
+          <p:nvPr/>
+        </p:nvSpPr>
+        <p:spPr>
+          <a:xfrm>
+            <a:off x="685800" y="4983480"/>
+            <a:ext cx="10668000" cy="760476"/>
+          </a:xfrm>
+          <a:prstGeom prst="rect">
+            <a:avLst/>
+          </a:prstGeom>
+          <a:noFill/>
+          <a:ln w="0">
+            <a:noFill/>
+            <a:prstDash val="solid"/>
+          </a:ln>
+        </p:spPr>
+        <p:txBody>
+          <a:bodyPr wrap="square" lIns="0" rIns="0"/>
+          <a:lstStyle>
+            <a:defPPr>
+              <a:defRPr sz="2025" b="0">
+                <a:solidFill>
+                  <a:srgbClr val="233247"/>
+                </a:solidFill>
+                <a:latin typeface="Arial"/>
+                <a:ea typeface="Arial"/>
+                <a:cs typeface="Arial"/>
+              </a:defRPr>
+            </a:defPPr>
+          </a:lstStyle>
+          <a:p>
+            <a:pPr>
+              <a:defRPr sz="2025" b="0">
+                <a:solidFill>
+                  <a:srgbClr val="233247"/>
+                </a:solidFill>
+                <a:latin typeface="Arial"/>
+                <a:ea typeface="Arial"/>
+                <a:cs typeface="Arial"/>
+              </a:defRPr>
+            </a:pPr>
+            <a:r>
+              <a:rPr sz="1400" b="1">
+                <a:solidFill>
+                  <a:srgbClr val="233247"/>
+                </a:solidFill>
+                <a:latin typeface="Arial"/>
+                <a:ea typeface="Arial"/>
+                <a:cs typeface="Arial"/>
+              </a:rPr>
+              <a:t>Key findings: </a:t>
+            </a:r>
+            <a:r>
+              <a:rPr sz="1400" b="0">
+                <a:solidFill>
+                  <a:srgbClr val="233247"/>
+                </a:solidFill>
+                <a:latin typeface="Arial"/>
+                <a:ea typeface="Arial"/>
+                <a:cs typeface="Arial"/>
+              </a:rPr>
+              <a:t>(3) The 21 Apr – 5 May Play Store feed gap removed mostly positive reviews: for the five affected apps 4–5★ fell 78% but 1–2★ only 24%. (4) Praise is short (76% of 4–5★ reviews have 1–3 words) but complaints are not (median 12 words); keyword tags find an issue in only 46% of 1–2★ reviews.</a:t>
+            </a:r>
+          </a:p>
+        </p:txBody>
+      </p:sp>
+      <p:sp>
+        <p:nvSpPr>
+          <p:cNvPr id="6" name="">
+            <a:extLst>
+              <a:ext uri="{FF2B5EF4-FFF2-40B4-BE49-F238E27FC236}">
+                <a16:creationId xmlns:a16="http://schemas.microsoft.com/office/drawing/2014/main" id="{CD68E0AF-687D-43C3-AA48-711AD2792F7A}"/>
+              </a:ext>
+            </a:extLst>
+          </p:cNvPr>
+          <p:cNvSpPr>
+            <a:spLocks noGrp="1"/>
+          </p:cNvSpPr>
+          <p:nvPr/>
+        </p:nvSpPr>
+        <p:spPr>
+          <a:xfrm>
+            <a:off x="685800" y="5817108"/>
+            <a:ext cx="10668000" cy="543559"/>
+          </a:xfrm>
+          <a:prstGeom prst="rect">
+            <a:avLst/>
+          </a:prstGeom>
+          <a:noFill/>
+          <a:ln w="0">
+            <a:noFill/>
+            <a:prstDash val="solid"/>
+          </a:ln>
+        </p:spPr>
+        <p:txBody>
+          <a:bodyPr wrap="square" lIns="0" rIns="0"/>
+          <a:lstStyle>
+            <a:defPPr>
+              <a:defRPr sz="2025" b="0">
+                <a:solidFill>
+                  <a:srgbClr val="233247"/>
+                </a:solidFill>
+                <a:latin typeface="Arial"/>
+                <a:ea typeface="Arial"/>
+                <a:cs typeface="Arial"/>
+              </a:defRPr>
+            </a:defPPr>
+          </a:lstStyle>
+          <a:p>
+            <a:pPr>
+              <a:defRPr sz="2025" b="0">
+                <a:solidFill>
+                  <a:srgbClr val="233247"/>
+                </a:solidFill>
+                <a:latin typeface="Arial"/>
+                <a:ea typeface="Arial"/>
+                <a:cs typeface="Arial"/>
+              </a:defRPr>
+            </a:pPr>
+            <a:r>
+              <a:rPr sz="1400" b="1">
+                <a:solidFill>
+                  <a:srgbClr val="233247"/>
+                </a:solidFill>
+                <a:latin typeface="Arial"/>
+                <a:ea typeface="Arial"/>
+                <a:cs typeface="Arial"/>
+              </a:rPr>
+              <a:t>What it changed: </a:t>
+            </a:r>
+            <a:r>
+              <a:rPr sz="1400" b="0">
+                <a:solidFill>
+                  <a:srgbClr val="233247"/>
+                </a:solidFill>
+                <a:latin typeface="Arial"/>
+                <a:ea typeface="Arial"/>
+                <a:cs typeface="Arial"/>
+              </a:rPr>
+              <a:t>the time series model daily 1–2★ counts, not shares, with the gap as a 0/1 input; text mining uses topic models on the 1–2★ reviews with ≥ 3 content words instead of the keyword tags.</a:t>
+            </a:r>
+          </a:p>
+        </p:txBody>
+      </p:sp>
+      <p:pic>
+        <p:nvPicPr>
+          <p:cNvPr id="8" name="Picture 7" descr="slide8_a.png"/>
+          <p:cNvPicPr>
+            <a:picLocks noChangeAspect="1"/>
+          </p:cNvPicPr>
+          <p:nvPr/>
+        </p:nvPicPr>
+        <p:blipFill>
+          <a:blip r:embed="rId2"/>
+          <a:stretch>
+            <a:fillRect/>
+          </a:stretch>
+        </p:blipFill>
+        <p:spPr>
+          <a:xfrm>
+            <a:off x="620267" y="1700000"/>
+            <a:ext cx="5383446" cy="3202222"/>
+          </a:xfrm>
+          <a:prstGeom prst="rect">
+            <a:avLst/>
+          </a:prstGeom>
+        </p:spPr>
+      </p:pic>
+      <p:pic>
+        <p:nvPicPr>
+          <p:cNvPr id="9" name="Picture 8" descr="slide8_b.png"/>
+          <p:cNvPicPr>
+            <a:picLocks noChangeAspect="1"/>
+          </p:cNvPicPr>
+          <p:nvPr/>
+        </p:nvPicPr>
+        <p:blipFill>
+          <a:blip r:embed="rId3"/>
+          <a:stretch>
+            <a:fillRect/>
+          </a:stretch>
+        </p:blipFill>
+        <p:spPr>
+          <a:xfrm>
+            <a:off x="6183713" y="1700000"/>
+            <a:ext cx="5383446" cy="3202222"/>
+          </a:xfrm>
+          <a:prstGeom prst="rect">
+            <a:avLst/>
+          </a:prstGeom>
+        </p:spPr>
+      </p:pic>
+    </p:spTree>
+  </p:cSld>
+  <p:clrMapOvr>
+    <a:masterClrMapping/>
+  </p:clrMapOvr>
+</p:sld>
+</file>
+
+<file path=ppt/slides/slide9.xml><?xml version="1.0" encoding="utf-8"?>
 <p:sld xmlns:p="http://schemas.openxmlformats.org/presentationml/2006/main">
   <p:cSld>
     <p:bg>
@@ -18547,7 +22156,7 @@
                 <a:ea typeface="Arial"/>
                 <a:cs typeface="Arial"/>
               </a:rPr>
-              <a:t>08</a:t>
+              <a:t>09</a:t>
             </a:r>
           </a:p>
         </p:txBody>
@@ -19458,7 +23067,7 @@
                 <ns0:ea typeface="Arial"/>
                 <ns0:cs typeface="Arial"/>
               </ns0:rPr>
-              <ns0:t>target is_problematic = 1–2★ (19.5%); inputs: 200 SVD text components + 15 structural features; stratified 80/20 split, 910,389 training and 227,598 held-out test reviews. TF-IDF, SVD and the scaler are fitted on training rows only (scripts/25); this changes no metric by more than 0.003 against Review 1. Out-of-time test (train Apr–Aug, test Sep): PR-AUC 0.866.</ns0:t>
+              <ns0:t>target is_problematic = 1–2★ (19.5%); inputs: 200 SVD text components + 15 structural features; stratified 80/20 split, 910,389 training and 227,598 held-out test reviews. Re-checked with TF-IDF, SVD and the scaler fitted on training rows only (scripts/25): no metric changes by more than 0.003. Out-of-time test (train Apr–Aug, test Sep): PR-AUC 0.866.</ns0:t>
             </ns0:r>
           </ns0:p>
         </p:txBody>
@@ -19545,718 +23154,6 @@
     <p:extLst>
       <p:ext uri="{BB962C8B-B14F-4D97-AF65-F5344CB8AC3E}">
         <p14:creationId xmlns:p14="http://schemas.microsoft.com/office/powerpoint/2010/main" val="119055955"/>
-      </p:ext>
-    </p:extLst>
-  </p:cSld>
-</p:sld>
-</file>
-
-<file path=ppt/slides/slide9.xml><?xml version="1.0" encoding="utf-8"?>
-<p:sld xmlns:p="http://schemas.openxmlformats.org/presentationml/2006/main">
-  <p:cSld>
-    <p:bg>
-      <p:bgPr>
-        <a:solidFill xmlns:a="http://schemas.openxmlformats.org/drawingml/2006/main">
-          <a:srgbClr val="FFFFFF"/>
-        </a:solidFill>
-      </p:bgPr>
-    </p:bg>
-    <p:spTree>
-      <p:nvGrpSpPr>
-        <p:cNvPr id="1" name=""/>
-        <p:cNvGrpSpPr/>
-        <p:nvPr/>
-      </p:nvGrpSpPr>
-      <p:grpSpPr>
-        <a:xfrm xmlns:a="http://schemas.openxmlformats.org/drawingml/2006/main"/>
-      </p:grpSpPr>
-      <p:sp>
-        <p:nvSpPr>
-          <p:cNvPr id="6" name="">
-            <a:extLst xmlns:a="http://schemas.openxmlformats.org/drawingml/2006/main">
-              <a:ext uri="{FF2B5EF4-FFF2-40B4-BE49-F238E27FC236}">
-                <a16:creationId xmlns:a16="http://schemas.microsoft.com/office/drawing/2014/main" id="{D90A2372-5E66-42DE-8B53-9300E5035622}"/>
-              </a:ext>
-            </a:extLst>
-          </p:cNvPr>
-          <p:cNvSpPr>
-            <a:spLocks xmlns:a="http://schemas.openxmlformats.org/drawingml/2006/main" noGrp="1"/>
-          </p:cNvSpPr>
-          <p:nvPr/>
-        </p:nvSpPr>
-        <p:spPr>
-          <a:xfrm xmlns:a="http://schemas.openxmlformats.org/drawingml/2006/main">
-            <a:off x="609600" y="342900"/>
-            <a:ext cx="10477500" cy="285750"/>
-          </a:xfrm>
-          <a:prstGeom xmlns:a="http://schemas.openxmlformats.org/drawingml/2006/main" prst="rect">
-            <a:avLst/>
-          </a:prstGeom>
-          <a:noFill xmlns:a="http://schemas.openxmlformats.org/drawingml/2006/main"/>
-          <a:ln xmlns:a="http://schemas.openxmlformats.org/drawingml/2006/main" w="0">
-            <a:noFill/>
-            <a:prstDash val="solid"/>
-          </a:ln>
-        </p:spPr>
-        <p:txBody>
-          <a:bodyPr xmlns:a="http://schemas.openxmlformats.org/drawingml/2006/main"/>
-          <a:lstStyle xmlns:a="http://schemas.openxmlformats.org/drawingml/2006/main">
-            <a:defPPr>
-              <a:defRPr sz="1350" b="1">
-                <a:solidFill>
-                  <a:srgbClr val="157A80"/>
-                </a:solidFill>
-                <a:latin typeface="Arial"/>
-                <a:ea typeface="Arial"/>
-                <a:cs typeface="Arial"/>
-              </a:defRPr>
-            </a:defPPr>
-          </a:lstStyle>
-          <a:p xmlns:a="http://schemas.openxmlformats.org/drawingml/2006/main">
-            <a:pPr>
-              <a:defRPr sz="1350" b="1">
-                <a:solidFill>
-                  <a:srgbClr val="157A80"/>
-                </a:solidFill>
-                <a:latin typeface="Arial"/>
-                <a:ea typeface="Arial"/>
-                <a:cs typeface="Arial"/>
-              </a:defRPr>
-            </a:pPr>
-            <a:r>
-              <a:rPr sz="1350" b="1">
-                <a:solidFill>
-                  <a:srgbClr val="157A80"/>
-                </a:solidFill>
-                <a:latin typeface="Arial"/>
-                <a:ea typeface="Arial"/>
-                <a:cs typeface="Arial"/>
-              </a:rPr>
-              <a:t>UNIT 3</a:t>
-            </a:r>
-          </a:p>
-        </p:txBody>
-      </p:sp>
-      <p:sp>
-        <p:nvSpPr>
-          <p:cNvPr id="2" name="">
-            <a:extLst xmlns:a="http://schemas.openxmlformats.org/drawingml/2006/main">
-              <a:ext uri="{FF2B5EF4-FFF2-40B4-BE49-F238E27FC236}">
-                <a16:creationId xmlns:a16="http://schemas.microsoft.com/office/drawing/2014/main" id="{22EAF5FB-AC58-4E29-9EA6-A0EA2B8A645E}"/>
-              </a:ext>
-            </a:extLst>
-          </p:cNvPr>
-          <p:cNvSpPr>
-            <a:spLocks xmlns:a="http://schemas.openxmlformats.org/drawingml/2006/main" noGrp="1"/>
-          </p:cNvSpPr>
-          <p:nvPr/>
-        </p:nvSpPr>
-        <p:spPr>
-          <a:xfrm xmlns:a="http://schemas.openxmlformats.org/drawingml/2006/main">
-            <a:off x="609600" y="838200"/>
-            <a:ext cx="10972800" cy="857250"/>
-          </a:xfrm>
-          <a:prstGeom xmlns:a="http://schemas.openxmlformats.org/drawingml/2006/main" prst="rect">
-            <a:avLst/>
-          </a:prstGeom>
-          <a:noFill xmlns:a="http://schemas.openxmlformats.org/drawingml/2006/main"/>
-          <a:ln xmlns:a="http://schemas.openxmlformats.org/drawingml/2006/main" w="0">
-            <a:noFill/>
-            <a:prstDash val="solid"/>
-          </a:ln>
-        </p:spPr>
-        <p:txBody>
-          <a:bodyPr xmlns:a="http://schemas.openxmlformats.org/drawingml/2006/main"/>
-          <a:lstStyle xmlns:a="http://schemas.openxmlformats.org/drawingml/2006/main">
-            <a:defPPr>
-              <a:defRPr sz="3150" b="1">
-                <a:solidFill>
-                  <a:srgbClr val="142D4E"/>
-                </a:solidFill>
-                <a:latin typeface="Arial"/>
-                <a:ea typeface="Arial"/>
-                <a:cs typeface="Arial"/>
-              </a:defRPr>
-            </a:defPPr>
-          </a:lstStyle>
-          <a:p xmlns:a="http://schemas.openxmlformats.org/drawingml/2006/main">
-            <a:pPr>
-              <a:defRPr sz="3150" b="1">
-                <a:solidFill>
-                  <a:srgbClr val="142D4E"/>
-                </a:solidFill>
-                <a:latin typeface="Arial"/>
-                <a:ea typeface="Arial"/>
-                <a:cs typeface="Arial"/>
-              </a:defRPr>
-            </a:pPr>
-            <a:r>
-              <a:rPr sz="3150" b="1">
-                <a:solidFill>
-                  <a:srgbClr val="142D4E"/>
-                </a:solidFill>
-                <a:latin typeface="Arial"/>
-                <a:ea typeface="Arial"/>
-                <a:cs typeface="Arial"/>
-              </a:rPr>
-              <a:t>Selected advanced analytics methods</a:t>
-            </a:r>
-          </a:p>
-        </p:txBody>
-      </p:sp>
-      <p:sp>
-        <p:nvSpPr>
-          <p:cNvPr id="3" name="">
-            <a:extLst xmlns:a="http://schemas.openxmlformats.org/drawingml/2006/main">
-              <a:ext uri="{FF2B5EF4-FFF2-40B4-BE49-F238E27FC236}">
-                <a16:creationId xmlns:a16="http://schemas.microsoft.com/office/drawing/2014/main" id="{AF2A2B95-75AB-4A68-84B4-6C002BEFE498}"/>
-              </a:ext>
-            </a:extLst>
-          </p:cNvPr>
-          <p:cNvSpPr>
-            <a:spLocks xmlns:a="http://schemas.openxmlformats.org/drawingml/2006/main" noGrp="1"/>
-          </p:cNvSpPr>
-          <p:nvPr/>
-        </p:nvSpPr>
-        <p:spPr>
-          <a:xfrm xmlns:a="http://schemas.openxmlformats.org/drawingml/2006/main">
-            <a:off x="10953750" y="6343650"/>
-            <a:ext cx="619125" cy="238125"/>
-          </a:xfrm>
-          <a:prstGeom xmlns:a="http://schemas.openxmlformats.org/drawingml/2006/main" prst="rect">
-            <a:avLst/>
-          </a:prstGeom>
-          <a:noFill xmlns:a="http://schemas.openxmlformats.org/drawingml/2006/main"/>
-          <a:ln xmlns:a="http://schemas.openxmlformats.org/drawingml/2006/main" w="0">
-            <a:noFill/>
-            <a:prstDash val="solid"/>
-          </a:ln>
-        </p:spPr>
-        <p:txBody>
-          <a:bodyPr xmlns:a="http://schemas.openxmlformats.org/drawingml/2006/main"/>
-          <a:lstStyle xmlns:a="http://schemas.openxmlformats.org/drawingml/2006/main">
-            <a:defPPr>
-              <a:defRPr sz="1200" b="0">
-                <a:solidFill>
-                  <a:srgbClr val="66758A"/>
-                </a:solidFill>
-                <a:latin typeface="Arial"/>
-                <a:ea typeface="Arial"/>
-                <a:cs typeface="Arial"/>
-              </a:defRPr>
-            </a:defPPr>
-          </a:lstStyle>
-          <a:p xmlns:a="http://schemas.openxmlformats.org/drawingml/2006/main">
-            <a:pPr>
-              <a:defRPr sz="1200" b="0">
-                <a:solidFill>
-                  <a:srgbClr val="66758A"/>
-                </a:solidFill>
-                <a:latin typeface="Arial"/>
-                <a:ea typeface="Arial"/>
-                <a:cs typeface="Arial"/>
-              </a:defRPr>
-            </a:pPr>
-            <a:r>
-              <a:rPr sz="1200" b="0">
-                <a:solidFill>
-                  <a:srgbClr val="66758A"/>
-                </a:solidFill>
-                <a:latin typeface="Arial"/>
-                <a:ea typeface="Arial"/>
-                <a:cs typeface="Arial"/>
-              </a:rPr>
-              <a:t>09</a:t>
-            </a:r>
-          </a:p>
-        </p:txBody>
-      </p:sp>
-      <p:graphicFrame>
-        <p:nvGraphicFramePr>
-          <p:cNvPr id="4" name="">
-            <a:extLst xmlns:a="http://schemas.openxmlformats.org/drawingml/2006/main">
-              <a:ext uri="{FF2B5EF4-FFF2-40B4-BE49-F238E27FC236}">
-                <a16:creationId xmlns:a16="http://schemas.microsoft.com/office/drawing/2014/main" id="{36A543E7-13D8-4126-84D0-9539E1F5455E}"/>
-              </a:ext>
-            </a:extLst>
-          </p:cNvPr>
-          <p:cNvGraphicFramePr/>
-          <p:nvPr/>
-        </p:nvGraphicFramePr>
-        <p:xfrm>
-          <a:off xmlns:a="http://schemas.openxmlformats.org/drawingml/2006/main" x="609600" y="2238375"/>
-          <a:ext xmlns:a="http://schemas.openxmlformats.org/drawingml/2006/main" cx="10972800" cy="2657094"/>
-        </p:xfrm>
-        <a:graphic xmlns:a="http://schemas.openxmlformats.org/drawingml/2006/main">
-          <a:graphicData uri="http://schemas.openxmlformats.org/drawingml/2006/table">
-            <a:tbl>
-              <a:tblPr/>
-              <a:tblGrid>
-                <a:gridCol w="2743200"/>
-                <a:gridCol w="4206240"/>
-                <a:gridCol w="4023360"/>
-              </a:tblGrid>
-              <a:tr h="371094">
-                <a:tc>
-                  <a:txBody>
-                    <a:bodyPr/>
-                    <a:lstStyle/>
-                    <a:p>
-                      <a:pPr/>
-                      <a:r>
-                        <a:rPr sz="1500" b="1">
-                          <a:solidFill>
-                            <a:srgbClr val="FFFFFF"/>
-                          </a:solidFill>
-                          <a:latin typeface="Arial"/>
-                          <a:ea typeface="Arial"/>
-                          <a:cs typeface="Arial"/>
-                        </a:rPr>
-                        <a:t>Selected method</a:t>
-                      </a:r>
-                    </a:p>
-                  </a:txBody>
-                  <a:tcPr marL="91440" marR="91440" marT="45720" marB="45720" anchor="ctr">
-                    <a:lnL w="9525">
-                      <a:solidFill>
-                        <a:srgbClr val="CDD7DF"/>
-                      </a:solidFill>
-                      <a:prstDash val="solid"/>
-                    </a:lnL>
-                    <a:lnR w="9525">
-                      <a:solidFill>
-                        <a:srgbClr val="CDD7DF"/>
-                      </a:solidFill>
-                      <a:prstDash val="solid"/>
-                    </a:lnR>
-                    <a:lnT w="9525">
-                      <a:solidFill>
-                        <a:srgbClr val="CDD7DF"/>
-                      </a:solidFill>
-                      <a:prstDash val="solid"/>
-                    </a:lnT>
-                    <a:lnB w="9525">
-                      <a:solidFill>
-                        <a:srgbClr val="CDD7DF"/>
-                      </a:solidFill>
-                      <a:prstDash val="solid"/>
-                    </a:lnB>
-                    <a:solidFill>
-                      <a:srgbClr val="142D4E"/>
-                    </a:solidFill>
-                  </a:tcPr>
-                </a:tc>
-                <a:tc>
-                  <a:txBody>
-                    <a:bodyPr/>
-                    <a:lstStyle/>
-                    <a:p>
-                      <a:pPr/>
-                      <a:r>
-                        <a:rPr sz="1500" b="1">
-                          <a:solidFill>
-                            <a:srgbClr val="FFFFFF"/>
-                          </a:solidFill>
-                          <a:latin typeface="Arial"/>
-                          <a:ea typeface="Arial"/>
-                          <a:cs typeface="Arial"/>
-                        </a:rPr>
-                        <a:t>Business question</a:t>
-                      </a:r>
-                    </a:p>
-                  </a:txBody>
-                  <a:tcPr marL="91440" marR="91440" marT="45720" marB="45720" anchor="ctr">
-                    <a:lnR w="9525">
-                      <a:solidFill>
-                        <a:srgbClr val="CDD7DF"/>
-                      </a:solidFill>
-                      <a:prstDash val="solid"/>
-                    </a:lnR>
-                    <a:lnT w="9525">
-                      <a:solidFill>
-                        <a:srgbClr val="CDD7DF"/>
-                      </a:solidFill>
-                      <a:prstDash val="solid"/>
-                    </a:lnT>
-                    <a:lnB w="9525">
-                      <a:solidFill>
-                        <a:srgbClr val="CDD7DF"/>
-                      </a:solidFill>
-                      <a:prstDash val="solid"/>
-                    </a:lnB>
-                    <a:solidFill>
-                      <a:srgbClr val="142D4E"/>
-                    </a:solidFill>
-                  </a:tcPr>
-                </a:tc>
-                <a:tc>
-                  <a:txBody>
-                    <a:bodyPr/>
-                    <a:lstStyle/>
-                    <a:p>
-                      <a:pPr/>
-                      <a:r>
-                        <a:rPr sz="1500" b="1">
-                          <a:solidFill>
-                            <a:srgbClr val="FFFFFF"/>
-                          </a:solidFill>
-                          <a:latin typeface="Arial"/>
-                          <a:ea typeface="Arial"/>
-                          <a:cs typeface="Arial"/>
-                        </a:rPr>
-                        <a:t>Data used</a:t>
-                      </a:r>
-                    </a:p>
-                  </a:txBody>
-                  <a:tcPr marL="91440" marR="91440" marT="45720" marB="45720" anchor="ctr">
-                    <a:lnR w="9525">
-                      <a:solidFill>
-                        <a:srgbClr val="CDD7DF"/>
-                      </a:solidFill>
-                      <a:prstDash val="solid"/>
-                    </a:lnR>
-                    <a:lnT w="9525">
-                      <a:solidFill>
-                        <a:srgbClr val="CDD7DF"/>
-                      </a:solidFill>
-                      <a:prstDash val="solid"/>
-                    </a:lnT>
-                    <a:lnB w="9525">
-                      <a:solidFill>
-                        <a:srgbClr val="CDD7DF"/>
-                      </a:solidFill>
-                      <a:prstDash val="solid"/>
-                    </a:lnB>
-                    <a:solidFill>
-                      <a:srgbClr val="142D4E"/>
-                    </a:solidFill>
-                  </a:tcPr>
-                </a:tc>
-              </a:tr>
-              <a:tr h="1143000">
-                <a:tc>
-                  <a:txBody>
-                    <a:bodyPr/>
-                    <a:lstStyle/>
-                    <a:p>
-                      <a:pPr/>
-                      <a:r>
-                        <a:rPr sz="1400" b="1">
-                          <a:solidFill>
-                            <a:srgbClr val="233247"/>
-                          </a:solidFill>
-                          <a:latin typeface="Arial"/>
-                          <a:ea typeface="Arial"/>
-                          <a:cs typeface="Arial"/>
-                        </a:rPr>
-                        <a:t>Method 1: Text Mining</a:t>
-                      </a:r>
-                    </a:p>
-                  </a:txBody>
-                  <a:tcPr marL="91440" marR="91440" marT="45720" marB="45720" anchor="ctr">
-                    <a:lnL w="9525">
-                      <a:solidFill>
-                        <a:srgbClr val="CDD7DF"/>
-                      </a:solidFill>
-                      <a:prstDash val="solid"/>
-                    </a:lnL>
-                    <a:lnR w="9525">
-                      <a:solidFill>
-                        <a:srgbClr val="CDD7DF"/>
-                      </a:solidFill>
-                      <a:prstDash val="solid"/>
-                    </a:lnR>
-                    <a:lnB w="9525">
-                      <a:solidFill>
-                        <a:srgbClr val="CDD7DF"/>
-                      </a:solidFill>
-                      <a:prstDash val="solid"/>
-                    </a:lnB>
-                    <a:solidFill>
-                      <a:srgbClr val="F0F5F7"/>
-                    </a:solidFill>
-                  </a:tcPr>
-                </a:tc>
-                <a:tc>
-                  <a:txBody>
-                    <a:bodyPr/>
-                    <a:lstStyle/>
-                    <a:p>
-                      <a:pPr/>
-                      <a:r>
-                        <a:rPr sz="1400" b="0">
-                          <a:solidFill>
-                            <a:srgbClr val="233247"/>
-                          </a:solidFill>
-                          <a:latin typeface="Arial"/>
-                          <a:ea typeface="Arial"/>
-                          <a:cs typeface="Arial"/>
-                        </a:rPr>
-                        <a:t>What are users complaining about in each domain and app, and which complaints are the angriest?</a:t>
-                      </a:r>
-                    </a:p>
-                  </a:txBody>
-                  <a:tcPr marL="91440" marR="91440" marT="45720" marB="45720" anchor="ctr">
-                    <a:lnR w="9525">
-                      <a:solidFill>
-                        <a:srgbClr val="CDD7DF"/>
-                      </a:solidFill>
-                      <a:prstDash val="solid"/>
-                    </a:lnR>
-                    <a:lnB w="9525">
-                      <a:solidFill>
-                        <a:srgbClr val="CDD7DF"/>
-                      </a:solidFill>
-                      <a:prstDash val="solid"/>
-                    </a:lnB>
-                    <a:solidFill>
-                      <a:srgbClr val="F0F5F7"/>
-                    </a:solidFill>
-                  </a:tcPr>
-                </a:tc>
-                <a:tc>
-                  <a:txBody>
-                    <a:bodyPr/>
-                    <a:lstStyle/>
-                    <a:p>
-                      <a:pPr/>
-                      <a:r>
-                        <a:rPr sz="1400" b="0">
-                          <a:solidFill>
-                            <a:srgbClr val="233247"/>
-                          </a:solidFill>
-                          <a:latin typeface="Arial"/>
-                          <a:ea typeface="Arial"/>
-                          <a:cs typeface="Arial"/>
-                        </a:rPr>
-                        <a:t>content of 1–2★ reviews with ≥ 3 content words (167,357), 4–5★ reviews as a contrast (166,929), VADER scores, the 9 keyword tags for comparison</a:t>
-                      </a:r>
-                    </a:p>
-                  </a:txBody>
-                  <a:tcPr marL="91440" marR="91440" marT="45720" marB="45720" anchor="ctr">
-                    <a:lnR w="9525">
-                      <a:solidFill>
-                        <a:srgbClr val="CDD7DF"/>
-                      </a:solidFill>
-                      <a:prstDash val="solid"/>
-                    </a:lnR>
-                    <a:lnB w="9525">
-                      <a:solidFill>
-                        <a:srgbClr val="CDD7DF"/>
-                      </a:solidFill>
-                      <a:prstDash val="solid"/>
-                    </a:lnB>
-                    <a:solidFill>
-                      <a:srgbClr val="F0F5F7"/>
-                    </a:solidFill>
-                  </a:tcPr>
-                </a:tc>
-              </a:tr>
-              <a:tr h="1143000">
-                <a:tc>
-                  <a:txBody>
-                    <a:bodyPr/>
-                    <a:lstStyle/>
-                    <a:p>
-                      <a:pPr/>
-                      <a:r>
-                        <a:rPr sz="1400" b="1">
-                          <a:solidFill>
-                            <a:srgbClr val="233247"/>
-                          </a:solidFill>
-                          <a:latin typeface="Arial"/>
-                          <a:ea typeface="Arial"/>
-                          <a:cs typeface="Arial"/>
-                        </a:rPr>
-                        <a:t>Method 2: Time-Series Analysis</a:t>
-                      </a:r>
-                    </a:p>
-                  </a:txBody>
-                  <a:tcPr marL="91440" marR="91440" marT="45720" marB="45720" anchor="ctr">
-                    <a:lnL w="9525">
-                      <a:solidFill>
-                        <a:srgbClr val="CDD7DF"/>
-                      </a:solidFill>
-                      <a:prstDash val="solid"/>
-                    </a:lnL>
-                    <a:lnR w="9525">
-                      <a:solidFill>
-                        <a:srgbClr val="CDD7DF"/>
-                      </a:solidFill>
-                      <a:prstDash val="solid"/>
-                    </a:lnR>
-                    <a:lnB w="9525">
-                      <a:solidFill>
-                        <a:srgbClr val="CDD7DF"/>
-                      </a:solidFill>
-                      <a:prstDash val="solid"/>
-                    </a:lnB>
-                    <a:solidFill>
-                      <a:srgbClr val="FFFFFF"/>
-                    </a:solidFill>
-                  </a:tcPr>
-                </a:tc>
-                <a:tc>
-                  <a:txBody>
-                    <a:bodyPr/>
-                    <a:lstStyle/>
-                    <a:p>
-                      <a:pPr/>
-                      <a:r>
-                        <a:rPr sz="1400" b="0">
-                          <a:solidFill>
-                            <a:srgbClr val="233247"/>
-                          </a:solidFill>
-                          <a:latin typeface="Arial"/>
-                          <a:ea typeface="Arial"/>
-                          <a:cs typeface="Arial"/>
-                        </a:rPr>
-                        <a:t>How many 1–2★ reviews will each app get in the next weeks, which days are unusual, and did a new release make things worse?</a:t>
-                      </a:r>
-                    </a:p>
-                  </a:txBody>
-                  <a:tcPr marL="91440" marR="91440" marT="45720" marB="45720" anchor="ctr">
-                    <a:lnR w="9525">
-                      <a:solidFill>
-                        <a:srgbClr val="CDD7DF"/>
-                      </a:solidFill>
-                      <a:prstDash val="solid"/>
-                    </a:lnR>
-                    <a:lnB w="9525">
-                      <a:solidFill>
-                        <a:srgbClr val="CDD7DF"/>
-                      </a:solidFill>
-                      <a:prstDash val="solid"/>
-                    </a:lnB>
-                    <a:solidFill>
-                      <a:srgbClr val="FFFFFF"/>
-                    </a:solidFill>
-                  </a:tcPr>
-                </a:tc>
-                <a:tc>
-                  <a:txBody>
-                    <a:bodyPr/>
-                    <a:lstStyle/>
-                    <a:p>
-                      <a:pPr/>
-                      <a:r>
-                        <a:rPr sz="1400" b="0">
-                          <a:solidFill>
-                            <a:srgbClr val="233247"/>
-                          </a:solidFill>
-                          <a:latin typeface="Arial"/>
-                          <a:ea typeface="Arial"/>
-                          <a:cs typeface="Arial"/>
-                        </a:rPr>
-                        <a:t>review_date + score → daily 1–2★ counts per app (11 × 173 days); app_version → 224 release events</a:t>
-                      </a:r>
-                    </a:p>
-                  </a:txBody>
-                  <a:tcPr marL="91440" marR="91440" marT="45720" marB="45720" anchor="ctr">
-                    <a:lnR w="9525">
-                      <a:solidFill>
-                        <a:srgbClr val="CDD7DF"/>
-                      </a:solidFill>
-                      <a:prstDash val="solid"/>
-                    </a:lnR>
-                    <a:lnB w="9525">
-                      <a:solidFill>
-                        <a:srgbClr val="CDD7DF"/>
-                      </a:solidFill>
-                      <a:prstDash val="solid"/>
-                    </a:lnB>
-                    <a:solidFill>
-                      <a:srgbClr val="FFFFFF"/>
-                    </a:solidFill>
-                  </a:tcPr>
-                </a:tc>
-              </a:tr>
-            </a:tbl>
-          </a:graphicData>
-        </a:graphic>
-      </p:graphicFrame>
-      <p:sp>
-        <p:nvSpPr>
-          <p:cNvPr id="5" name="">
-            <a:extLst xmlns:a="http://schemas.openxmlformats.org/drawingml/2006/main">
-              <a:ext uri="{FF2B5EF4-FFF2-40B4-BE49-F238E27FC236}">
-                <a16:creationId xmlns:a16="http://schemas.microsoft.com/office/drawing/2014/main" id="{036D661E-F7DF-42DC-BD9B-EDE438C1C04A}"/>
-              </a:ext>
-            </a:extLst>
-          </p:cNvPr>
-          <p:cNvSpPr>
-            <a:spLocks xmlns:a="http://schemas.openxmlformats.org/drawingml/2006/main" noGrp="1"/>
-          </p:cNvSpPr>
-          <p:nvPr/>
-        </p:nvSpPr>
-        <p:spPr>
-          <a:xfrm xmlns:a="http://schemas.openxmlformats.org/drawingml/2006/main">
-            <a:off x="685800" y="5169789"/>
-            <a:ext cx="10572750" cy="619125"/>
-          </a:xfrm>
-          <a:prstGeom xmlns:a="http://schemas.openxmlformats.org/drawingml/2006/main" prst="rect">
-            <a:avLst/>
-          </a:prstGeom>
-          <a:noFill xmlns:a="http://schemas.openxmlformats.org/drawingml/2006/main"/>
-          <a:ln xmlns:a="http://schemas.openxmlformats.org/drawingml/2006/main" w="0">
-            <a:noFill/>
-            <a:prstDash val="solid"/>
-          </a:ln>
-        </p:spPr>
-        <p:txBody>
-          <a:bodyPr xmlns:a="http://schemas.openxmlformats.org/drawingml/2006/main" wrap="square" lIns="0" rIns="0"/>
-          <a:lstStyle xmlns:a="http://schemas.openxmlformats.org/drawingml/2006/main">
-            <a:defPPr>
-              <a:defRPr sz="1875" b="1">
-                <a:solidFill>
-                  <a:srgbClr val="157A80"/>
-                </a:solidFill>
-                <a:latin typeface="Arial"/>
-                <a:ea typeface="Arial"/>
-                <a:cs typeface="Arial"/>
-              </a:defRPr>
-            </a:defPPr>
-          </a:lstStyle>
-          <ns0:p xmlns:ns0="http://schemas.openxmlformats.org/drawingml/2006/main">
-            <ns0:pPr>
-              <ns0:defRPr sz="1875" b="1">
-                <ns0:solidFill>
-                  <ns0:srgbClr val="157A80"/>
-                </ns0:solidFill>
-                <ns0:latin typeface="Arial"/>
-                <ns0:ea typeface="Arial"/>
-                <ns0:cs typeface="Arial"/>
-              </ns0:defRPr>
-            </ns0:pPr>
-            <ns0:r>
-              <ns0:rPr sz="1600" b="1">
-                <ns0:solidFill>
-                  <ns0:srgbClr val="157A80"/>
-                </ns0:solidFill>
-                <ns0:latin typeface="Arial"/>
-                <ns0:ea typeface="Arial"/>
-                <ns0:cs typeface="Arial"/>
-              </ns0:rPr>
-              <ns0:t>Selected: </ns0:t>
-            </ns0:r>
-            <ns0:r>
-              <ns0:rPr sz="1600" b="1">
-                <ns0:solidFill>
-                  <ns0:srgbClr val="157A80"/>
-                </ns0:solidFill>
-                <ns0:latin typeface="Arial"/>
-                <ns0:ea typeface="Arial"/>
-                <ns0:cs typeface="Arial"/>
-              </ns0:rPr>
-              <ns0:t>Time-Series Analysis and Text Mining. Association rules not chosen: only 3.4% of reviews carry two or more issue tags.</ns0:t>
-            </ns0:r>
-          </ns0:p>
-        </p:txBody>
-      </p:sp>
-    </p:spTree>
-    <p:extLst>
-      <p:ext uri="{BB962C8B-B14F-4D97-AF65-F5344CB8AC3E}">
-        <p14:creationId xmlns:p14="http://schemas.microsoft.com/office/powerpoint/2010/main" val="1237099396"/>
       </p:ext>
     </p:extLst>
   </p:cSld>
